--- a/S1-CL1-Cloud-Design-Build/delivery/topic_04/Topic_04_Slides.pptx
+++ b/S1-CL1-Cloud-Design-Build/delivery/topic_04/Topic_04_Slides.pptx
@@ -3684,7 +3684,7 @@
           <a:noFill/>
         </p:spPr>
         <p:txBody>
-          <a:bodyPr wrap="square" anchor="t" lIns="0" rIns="0" tIns="0" bIns="0">
+          <a:bodyPr wrap="square" anchor="ctr" lIns="0" rIns="0" tIns="0" bIns="0">
             <a:spAutoFit/>
           </a:bodyPr>
           <a:lstStyle/>
@@ -3701,7 +3701,7 @@
               </a:spcAft>
             </a:pPr>
             <a:r>
-              <a:rPr sz="1800" b="1" i="0">
+              <a:rPr sz="2400" b="1" i="0">
                 <a:solidFill>
                   <a:srgbClr val="EDAB0C"/>
                 </a:solidFill>
@@ -3710,7 +3710,7 @@
               <a:t>■  </a:t>
             </a:r>
             <a:r>
-              <a:rPr sz="1800" b="0" i="0">
+              <a:rPr sz="2400" b="0" i="0">
                 <a:solidFill>
                   <a:srgbClr val="2A2929"/>
                 </a:solidFill>
@@ -3732,7 +3732,7 @@
               </a:spcAft>
             </a:pPr>
             <a:r>
-              <a:rPr sz="1800" b="1" i="0">
+              <a:rPr sz="2400" b="1" i="0">
                 <a:solidFill>
                   <a:srgbClr val="EDAB0C"/>
                 </a:solidFill>
@@ -3741,7 +3741,7 @@
               <a:t>■  </a:t>
             </a:r>
             <a:r>
-              <a:rPr sz="1800" b="0" i="0">
+              <a:rPr sz="2400" b="0" i="0">
                 <a:solidFill>
                   <a:srgbClr val="2A2929"/>
                 </a:solidFill>
@@ -3763,7 +3763,7 @@
               </a:spcAft>
             </a:pPr>
             <a:r>
-              <a:rPr sz="1800" b="1" i="0">
+              <a:rPr sz="2400" b="1" i="0">
                 <a:solidFill>
                   <a:srgbClr val="27B5CE"/>
                 </a:solidFill>
@@ -3772,7 +3772,7 @@
               <a:t>■  </a:t>
             </a:r>
             <a:r>
-              <a:rPr sz="1800" b="1" i="0">
+              <a:rPr sz="2400" b="1" i="0">
                 <a:solidFill>
                   <a:srgbClr val="27B5CE"/>
                 </a:solidFill>
@@ -4042,7 +4042,7 @@
           <a:noFill/>
         </p:spPr>
         <p:txBody>
-          <a:bodyPr wrap="square" anchor="t" lIns="0" rIns="0" tIns="0" bIns="0">
+          <a:bodyPr wrap="square" anchor="ctr" lIns="0" rIns="0" tIns="0" bIns="0">
             <a:spAutoFit/>
           </a:bodyPr>
           <a:lstStyle/>
@@ -4059,7 +4059,7 @@
               </a:spcAft>
             </a:pPr>
             <a:r>
-              <a:rPr sz="1800" b="1" i="0">
+              <a:rPr sz="2400" b="1" i="0">
                 <a:solidFill>
                   <a:srgbClr val="EDAB0C"/>
                 </a:solidFill>
@@ -4068,7 +4068,7 @@
               <a:t>■  </a:t>
             </a:r>
             <a:r>
-              <a:rPr sz="1800" b="0" i="0">
+              <a:rPr sz="2400" b="0" i="0">
                 <a:solidFill>
                   <a:srgbClr val="2A2929"/>
                 </a:solidFill>
@@ -4090,7 +4090,7 @@
               </a:spcAft>
             </a:pPr>
             <a:r>
-              <a:rPr sz="1800" b="1" i="0">
+              <a:rPr sz="2400" b="1" i="0">
                 <a:solidFill>
                   <a:srgbClr val="EDAB0C"/>
                 </a:solidFill>
@@ -4099,7 +4099,7 @@
               <a:t>■  </a:t>
             </a:r>
             <a:r>
-              <a:rPr sz="1800" b="0" i="0">
+              <a:rPr sz="2400" b="0" i="0">
                 <a:solidFill>
                   <a:srgbClr val="2A2929"/>
                 </a:solidFill>
@@ -4121,7 +4121,7 @@
               </a:spcAft>
             </a:pPr>
             <a:r>
-              <a:rPr sz="1800" b="1" i="0">
+              <a:rPr sz="2400" b="1" i="0">
                 <a:solidFill>
                   <a:srgbClr val="EDAB0C"/>
                 </a:solidFill>
@@ -4130,7 +4130,7 @@
               <a:t>■  </a:t>
             </a:r>
             <a:r>
-              <a:rPr sz="1800" b="0" i="0">
+              <a:rPr sz="2400" b="0" i="0">
                 <a:solidFill>
                   <a:srgbClr val="2A2929"/>
                 </a:solidFill>
@@ -4152,7 +4152,7 @@
               </a:spcAft>
             </a:pPr>
             <a:r>
-              <a:rPr sz="1800" b="1" i="0">
+              <a:rPr sz="2400" b="1" i="0">
                 <a:solidFill>
                   <a:srgbClr val="EDAB0C"/>
                 </a:solidFill>
@@ -4161,7 +4161,7 @@
               <a:t>■  </a:t>
             </a:r>
             <a:r>
-              <a:rPr sz="1800" b="0" i="0">
+              <a:rPr sz="2400" b="0" i="0">
                 <a:solidFill>
                   <a:srgbClr val="2A2929"/>
                 </a:solidFill>
@@ -4183,7 +4183,7 @@
               </a:spcAft>
             </a:pPr>
             <a:r>
-              <a:rPr sz="1800" b="1" i="0">
+              <a:rPr sz="2400" b="1" i="0">
                 <a:solidFill>
                   <a:srgbClr val="EDAB0C"/>
                 </a:solidFill>
@@ -4192,7 +4192,7 @@
               <a:t>■  </a:t>
             </a:r>
             <a:r>
-              <a:rPr sz="1800" b="0" i="0">
+              <a:rPr sz="2400" b="0" i="0">
                 <a:solidFill>
                   <a:srgbClr val="2A2929"/>
                 </a:solidFill>
@@ -4446,7 +4446,7 @@
           <a:noFill/>
         </p:spPr>
         <p:txBody>
-          <a:bodyPr wrap="square" anchor="t" lIns="0" rIns="0" tIns="0" bIns="0">
+          <a:bodyPr wrap="square" anchor="ctr" lIns="0" rIns="0" tIns="0" bIns="0">
             <a:spAutoFit/>
           </a:bodyPr>
           <a:lstStyle/>
@@ -4463,7 +4463,7 @@
               </a:spcAft>
             </a:pPr>
             <a:r>
-              <a:rPr sz="1800" b="1" i="0">
+              <a:rPr sz="2400" b="1" i="0">
                 <a:solidFill>
                   <a:srgbClr val="EDAB0C"/>
                 </a:solidFill>
@@ -4472,7 +4472,7 @@
               <a:t>■  </a:t>
             </a:r>
             <a:r>
-              <a:rPr sz="1800" b="0" i="0">
+              <a:rPr sz="2400" b="0" i="0">
                 <a:solidFill>
                   <a:srgbClr val="2A2929"/>
                 </a:solidFill>
@@ -4494,7 +4494,7 @@
               </a:spcAft>
             </a:pPr>
             <a:r>
-              <a:rPr sz="1800" b="1" i="0">
+              <a:rPr sz="2400" b="1" i="0">
                 <a:solidFill>
                   <a:srgbClr val="EDAB0C"/>
                 </a:solidFill>
@@ -4503,7 +4503,7 @@
               <a:t>■  </a:t>
             </a:r>
             <a:r>
-              <a:rPr sz="1800" b="0" i="0">
+              <a:rPr sz="2400" b="0" i="0">
                 <a:solidFill>
                   <a:srgbClr val="2A2929"/>
                 </a:solidFill>
@@ -4525,7 +4525,7 @@
               </a:spcAft>
             </a:pPr>
             <a:r>
-              <a:rPr sz="1800" b="1" i="0">
+              <a:rPr sz="2400" b="1" i="0">
                 <a:solidFill>
                   <a:srgbClr val="27B5CE"/>
                 </a:solidFill>
@@ -4534,7 +4534,7 @@
               <a:t>■  </a:t>
             </a:r>
             <a:r>
-              <a:rPr sz="1800" b="1" i="0">
+              <a:rPr sz="2400" b="1" i="0">
                 <a:solidFill>
                   <a:srgbClr val="27B5CE"/>
                 </a:solidFill>
@@ -4788,7 +4788,7 @@
           <a:noFill/>
         </p:spPr>
         <p:txBody>
-          <a:bodyPr wrap="square" anchor="t" lIns="0" rIns="0" tIns="0" bIns="0">
+          <a:bodyPr wrap="square" anchor="ctr" lIns="0" rIns="0" tIns="0" bIns="0">
             <a:spAutoFit/>
           </a:bodyPr>
           <a:lstStyle/>
@@ -4805,7 +4805,7 @@
               </a:spcAft>
             </a:pPr>
             <a:r>
-              <a:rPr sz="1800" b="1" i="0">
+              <a:rPr sz="2400" b="1" i="0">
                 <a:solidFill>
                   <a:srgbClr val="EDAB0C"/>
                 </a:solidFill>
@@ -4814,7 +4814,7 @@
               <a:t>■  </a:t>
             </a:r>
             <a:r>
-              <a:rPr sz="1800" b="0" i="0">
+              <a:rPr sz="2400" b="0" i="0">
                 <a:solidFill>
                   <a:srgbClr val="2A2929"/>
                 </a:solidFill>
@@ -4836,7 +4836,7 @@
               </a:spcAft>
             </a:pPr>
             <a:r>
-              <a:rPr sz="1800" b="1" i="0">
+              <a:rPr sz="2400" b="1" i="0">
                 <a:solidFill>
                   <a:srgbClr val="EDAB0C"/>
                 </a:solidFill>
@@ -4845,7 +4845,7 @@
               <a:t>■  </a:t>
             </a:r>
             <a:r>
-              <a:rPr sz="1800" b="0" i="0">
+              <a:rPr sz="2400" b="0" i="0">
                 <a:solidFill>
                   <a:srgbClr val="2A2929"/>
                 </a:solidFill>
@@ -4867,7 +4867,7 @@
               </a:spcAft>
             </a:pPr>
             <a:r>
-              <a:rPr sz="1800" b="1" i="0">
+              <a:rPr sz="2400" b="1" i="0">
                 <a:solidFill>
                   <a:srgbClr val="27B5CE"/>
                 </a:solidFill>
@@ -4876,7 +4876,7 @@
               <a:t>■  </a:t>
             </a:r>
             <a:r>
-              <a:rPr sz="1800" b="1" i="0">
+              <a:rPr sz="2400" b="1" i="0">
                 <a:solidFill>
                   <a:srgbClr val="27B5CE"/>
                 </a:solidFill>
@@ -5130,7 +5130,7 @@
           <a:noFill/>
         </p:spPr>
         <p:txBody>
-          <a:bodyPr wrap="square" anchor="t" lIns="0" rIns="0" tIns="0" bIns="0">
+          <a:bodyPr wrap="square" anchor="ctr" lIns="0" rIns="0" tIns="0" bIns="0">
             <a:spAutoFit/>
           </a:bodyPr>
           <a:lstStyle/>
@@ -5147,7 +5147,7 @@
               </a:spcAft>
             </a:pPr>
             <a:r>
-              <a:rPr sz="1800" b="1" i="0">
+              <a:rPr sz="2400" b="1" i="0">
                 <a:solidFill>
                   <a:srgbClr val="EDAB0C"/>
                 </a:solidFill>
@@ -5156,7 +5156,7 @@
               <a:t>■  </a:t>
             </a:r>
             <a:r>
-              <a:rPr sz="1800" b="0" i="0">
+              <a:rPr sz="2400" b="0" i="0">
                 <a:solidFill>
                   <a:srgbClr val="2A2929"/>
                 </a:solidFill>
@@ -5178,7 +5178,7 @@
               </a:spcAft>
             </a:pPr>
             <a:r>
-              <a:rPr sz="1800" b="1" i="0">
+              <a:rPr sz="2400" b="1" i="0">
                 <a:solidFill>
                   <a:srgbClr val="EDAB0C"/>
                 </a:solidFill>
@@ -5187,7 +5187,7 @@
               <a:t>■  </a:t>
             </a:r>
             <a:r>
-              <a:rPr sz="1800" b="0" i="0">
+              <a:rPr sz="2400" b="0" i="0">
                 <a:solidFill>
                   <a:srgbClr val="2A2929"/>
                 </a:solidFill>
@@ -5209,7 +5209,7 @@
               </a:spcAft>
             </a:pPr>
             <a:r>
-              <a:rPr sz="1500" b="0" i="0">
+              <a:rPr sz="2100" b="0" i="0">
                 <a:solidFill>
                   <a:srgbClr val="7A7A7A"/>
                 </a:solidFill>
@@ -5218,7 +5218,7 @@
               <a:t>–  </a:t>
             </a:r>
             <a:r>
-              <a:rPr sz="1500" b="0" i="0">
+              <a:rPr sz="2100" b="0" i="0">
                 <a:solidFill>
                   <a:srgbClr val="2A2929"/>
                 </a:solidFill>
@@ -5240,7 +5240,7 @@
               </a:spcAft>
             </a:pPr>
             <a:r>
-              <a:rPr sz="1800" b="1" i="0">
+              <a:rPr sz="2400" b="1" i="0">
                 <a:solidFill>
                   <a:srgbClr val="27B5CE"/>
                 </a:solidFill>
@@ -5249,7 +5249,7 @@
               <a:t>■  </a:t>
             </a:r>
             <a:r>
-              <a:rPr sz="1800" b="1" i="0">
+              <a:rPr sz="2400" b="1" i="0">
                 <a:solidFill>
                   <a:srgbClr val="27B5CE"/>
                 </a:solidFill>
@@ -7023,7 +7023,7 @@
           <a:noFill/>
         </p:spPr>
         <p:txBody>
-          <a:bodyPr wrap="square" anchor="t" lIns="0" rIns="0" tIns="0" bIns="0">
+          <a:bodyPr wrap="square" anchor="ctr" lIns="0" rIns="0" tIns="0" bIns="0">
             <a:spAutoFit/>
           </a:bodyPr>
           <a:lstStyle/>
@@ -7040,7 +7040,7 @@
               </a:spcAft>
             </a:pPr>
             <a:r>
-              <a:rPr sz="1800" b="1" i="0">
+              <a:rPr sz="2400" b="1" i="0">
                 <a:solidFill>
                   <a:srgbClr val="EDAB0C"/>
                 </a:solidFill>
@@ -7049,7 +7049,7 @@
               <a:t>■  </a:t>
             </a:r>
             <a:r>
-              <a:rPr sz="1800" b="0" i="0">
+              <a:rPr sz="2400" b="0" i="0">
                 <a:solidFill>
                   <a:srgbClr val="2A2929"/>
                 </a:solidFill>
@@ -7071,7 +7071,7 @@
               </a:spcAft>
             </a:pPr>
             <a:r>
-              <a:rPr sz="1800" b="1" i="0">
+              <a:rPr sz="2400" b="1" i="0">
                 <a:solidFill>
                   <a:srgbClr val="205F61"/>
                 </a:solidFill>
@@ -7080,7 +7080,7 @@
               <a:t>■  </a:t>
             </a:r>
             <a:r>
-              <a:rPr sz="1800" b="1" i="0">
+              <a:rPr sz="2400" b="1" i="0">
                 <a:solidFill>
                   <a:srgbClr val="205F61"/>
                 </a:solidFill>
@@ -7350,7 +7350,7 @@
           <a:noFill/>
         </p:spPr>
         <p:txBody>
-          <a:bodyPr wrap="square" anchor="t" lIns="0" rIns="0" tIns="0" bIns="0">
+          <a:bodyPr wrap="square" anchor="ctr" lIns="0" rIns="0" tIns="0" bIns="0">
             <a:spAutoFit/>
           </a:bodyPr>
           <a:lstStyle/>
@@ -7367,7 +7367,7 @@
               </a:spcAft>
             </a:pPr>
             <a:r>
-              <a:rPr sz="1800" b="1" i="0">
+              <a:rPr sz="2400" b="1" i="0">
                 <a:solidFill>
                   <a:srgbClr val="EDAB0C"/>
                 </a:solidFill>
@@ -7376,7 +7376,7 @@
               <a:t>■  </a:t>
             </a:r>
             <a:r>
-              <a:rPr sz="1800" b="0" i="0">
+              <a:rPr sz="2400" b="0" i="0">
                 <a:solidFill>
                   <a:srgbClr val="2A2929"/>
                 </a:solidFill>
@@ -7398,7 +7398,7 @@
               </a:spcAft>
             </a:pPr>
             <a:r>
-              <a:rPr sz="1800" b="1" i="0">
+              <a:rPr sz="2400" b="1" i="0">
                 <a:solidFill>
                   <a:srgbClr val="92268F"/>
                 </a:solidFill>
@@ -7407,7 +7407,7 @@
               <a:t>■  </a:t>
             </a:r>
             <a:r>
-              <a:rPr sz="1800" b="1" i="0">
+              <a:rPr sz="2400" b="1" i="0">
                 <a:solidFill>
                   <a:srgbClr val="92268F"/>
                 </a:solidFill>
@@ -7429,7 +7429,7 @@
               </a:spcAft>
             </a:pPr>
             <a:r>
-              <a:rPr sz="1800" b="1" i="0">
+              <a:rPr sz="2400" b="1" i="0">
                 <a:solidFill>
                   <a:srgbClr val="EDAB0C"/>
                 </a:solidFill>
@@ -7438,7 +7438,7 @@
               <a:t>■  </a:t>
             </a:r>
             <a:r>
-              <a:rPr sz="1800" b="0" i="0">
+              <a:rPr sz="2400" b="0" i="0">
                 <a:solidFill>
                   <a:srgbClr val="2A2929"/>
                 </a:solidFill>
@@ -7460,7 +7460,7 @@
               </a:spcAft>
             </a:pPr>
             <a:r>
-              <a:rPr sz="1800" b="1" i="0">
+              <a:rPr sz="2400" b="1" i="0">
                 <a:solidFill>
                   <a:srgbClr val="EDAB0C"/>
                 </a:solidFill>
@@ -7469,7 +7469,7 @@
               <a:t>■  </a:t>
             </a:r>
             <a:r>
-              <a:rPr sz="1800" b="0" i="0">
+              <a:rPr sz="2400" b="0" i="0">
                 <a:solidFill>
                   <a:srgbClr val="2A2929"/>
                 </a:solidFill>
@@ -7739,7 +7739,7 @@
           <a:noFill/>
         </p:spPr>
         <p:txBody>
-          <a:bodyPr wrap="square" anchor="t" lIns="0" rIns="0" tIns="0" bIns="0">
+          <a:bodyPr wrap="square" anchor="ctr" lIns="0" rIns="0" tIns="0" bIns="0">
             <a:spAutoFit/>
           </a:bodyPr>
           <a:lstStyle/>
@@ -7756,7 +7756,7 @@
               </a:spcAft>
             </a:pPr>
             <a:r>
-              <a:rPr sz="1800" b="1" i="0">
+              <a:rPr sz="2400" b="1" i="0">
                 <a:solidFill>
                   <a:srgbClr val="EDAB0C"/>
                 </a:solidFill>
@@ -7765,7 +7765,7 @@
               <a:t>■  </a:t>
             </a:r>
             <a:r>
-              <a:rPr sz="1800" b="0" i="0">
+              <a:rPr sz="2400" b="0" i="0">
                 <a:solidFill>
                   <a:srgbClr val="2A2929"/>
                 </a:solidFill>
@@ -7787,7 +7787,7 @@
               </a:spcAft>
             </a:pPr>
             <a:r>
-              <a:rPr sz="1800" b="1" i="0">
+              <a:rPr sz="2400" b="1" i="0">
                 <a:solidFill>
                   <a:srgbClr val="EDAB0C"/>
                 </a:solidFill>
@@ -7796,7 +7796,7 @@
               <a:t>■  </a:t>
             </a:r>
             <a:r>
-              <a:rPr sz="1800" b="0" i="0">
+              <a:rPr sz="2400" b="0" i="0">
                 <a:solidFill>
                   <a:srgbClr val="2A2929"/>
                 </a:solidFill>
@@ -7818,7 +7818,7 @@
               </a:spcAft>
             </a:pPr>
             <a:r>
-              <a:rPr sz="1800" b="1" i="0">
+              <a:rPr sz="2400" b="1" i="0">
                 <a:solidFill>
                   <a:srgbClr val="EDAB0C"/>
                 </a:solidFill>
@@ -7827,7 +7827,7 @@
               <a:t>■  </a:t>
             </a:r>
             <a:r>
-              <a:rPr sz="1800" b="0" i="0">
+              <a:rPr sz="2400" b="0" i="0">
                 <a:solidFill>
                   <a:srgbClr val="2A2929"/>
                 </a:solidFill>
@@ -7849,7 +7849,7 @@
               </a:spcAft>
             </a:pPr>
             <a:r>
-              <a:rPr sz="1800" b="1" i="0">
+              <a:rPr sz="2400" b="1" i="0">
                 <a:solidFill>
                   <a:srgbClr val="EDAB0C"/>
                 </a:solidFill>
@@ -7858,7 +7858,7 @@
               <a:t>■  </a:t>
             </a:r>
             <a:r>
-              <a:rPr sz="1800" b="0" i="0">
+              <a:rPr sz="2400" b="0" i="0">
                 <a:solidFill>
                   <a:srgbClr val="2A2929"/>
                 </a:solidFill>
@@ -7880,7 +7880,7 @@
               </a:spcAft>
             </a:pPr>
             <a:r>
-              <a:rPr sz="1800" b="1" i="0">
+              <a:rPr sz="2400" b="1" i="0">
                 <a:solidFill>
                   <a:srgbClr val="205F61"/>
                 </a:solidFill>
@@ -7889,7 +7889,7 @@
               <a:t>■  </a:t>
             </a:r>
             <a:r>
-              <a:rPr sz="1800" b="1" i="0">
+              <a:rPr sz="2400" b="1" i="0">
                 <a:solidFill>
                   <a:srgbClr val="205F61"/>
                 </a:solidFill>
@@ -9843,7 +9843,7 @@
           <a:noFill/>
         </p:spPr>
         <p:txBody>
-          <a:bodyPr wrap="square" anchor="t" lIns="0" rIns="0" tIns="0" bIns="0">
+          <a:bodyPr wrap="square" anchor="ctr" lIns="0" rIns="0" tIns="0" bIns="0">
             <a:spAutoFit/>
           </a:bodyPr>
           <a:lstStyle/>
@@ -9860,7 +9860,7 @@
               </a:spcAft>
             </a:pPr>
             <a:r>
-              <a:rPr sz="1800" b="1" i="0">
+              <a:rPr sz="2400" b="1" i="0">
                 <a:solidFill>
                   <a:srgbClr val="EDAB0C"/>
                 </a:solidFill>
@@ -9869,7 +9869,7 @@
               <a:t>■  </a:t>
             </a:r>
             <a:r>
-              <a:rPr sz="1800" b="0" i="0">
+              <a:rPr sz="2400" b="0" i="0">
                 <a:solidFill>
                   <a:srgbClr val="2A2929"/>
                 </a:solidFill>
@@ -9891,7 +9891,7 @@
               </a:spcAft>
             </a:pPr>
             <a:r>
-              <a:rPr sz="1800" b="1" i="0">
+              <a:rPr sz="2400" b="1" i="0">
                 <a:solidFill>
                   <a:srgbClr val="EDAB0C"/>
                 </a:solidFill>
@@ -9900,7 +9900,7 @@
               <a:t>■  </a:t>
             </a:r>
             <a:r>
-              <a:rPr sz="1800" b="0" i="0">
+              <a:rPr sz="2400" b="0" i="0">
                 <a:solidFill>
                   <a:srgbClr val="2A2929"/>
                 </a:solidFill>
@@ -9922,7 +9922,7 @@
               </a:spcAft>
             </a:pPr>
             <a:r>
-              <a:rPr sz="1800" b="1" i="0">
+              <a:rPr sz="2400" b="1" i="0">
                 <a:solidFill>
                   <a:srgbClr val="92268F"/>
                 </a:solidFill>
@@ -9931,7 +9931,7 @@
               <a:t>■  </a:t>
             </a:r>
             <a:r>
-              <a:rPr sz="1800" b="1" i="0">
+              <a:rPr sz="2400" b="1" i="0">
                 <a:solidFill>
                   <a:srgbClr val="92268F"/>
                 </a:solidFill>
@@ -10185,7 +10185,7 @@
           <a:noFill/>
         </p:spPr>
         <p:txBody>
-          <a:bodyPr wrap="square" anchor="t" lIns="0" rIns="0" tIns="0" bIns="0">
+          <a:bodyPr wrap="square" anchor="ctr" lIns="0" rIns="0" tIns="0" bIns="0">
             <a:spAutoFit/>
           </a:bodyPr>
           <a:lstStyle/>
@@ -10202,7 +10202,7 @@
               </a:spcAft>
             </a:pPr>
             <a:r>
-              <a:rPr sz="1800" b="1" i="0">
+              <a:rPr sz="2400" b="1" i="0">
                 <a:solidFill>
                   <a:srgbClr val="EDAB0C"/>
                 </a:solidFill>
@@ -10211,7 +10211,7 @@
               <a:t>■  </a:t>
             </a:r>
             <a:r>
-              <a:rPr sz="1800" b="0" i="0">
+              <a:rPr sz="2400" b="0" i="0">
                 <a:solidFill>
                   <a:srgbClr val="2A2929"/>
                 </a:solidFill>
@@ -10233,7 +10233,7 @@
               </a:spcAft>
             </a:pPr>
             <a:r>
-              <a:rPr sz="1800" b="1" i="0">
+              <a:rPr sz="2400" b="1" i="0">
                 <a:solidFill>
                   <a:srgbClr val="EDAB0C"/>
                 </a:solidFill>
@@ -10242,7 +10242,7 @@
               <a:t>■  </a:t>
             </a:r>
             <a:r>
-              <a:rPr sz="1800" b="0" i="0">
+              <a:rPr sz="2400" b="0" i="0">
                 <a:solidFill>
                   <a:srgbClr val="2A2929"/>
                 </a:solidFill>
@@ -10264,7 +10264,7 @@
               </a:spcAft>
             </a:pPr>
             <a:r>
-              <a:rPr sz="1800" b="1" i="0">
+              <a:rPr sz="2400" b="1" i="0">
                 <a:solidFill>
                   <a:srgbClr val="92268F"/>
                 </a:solidFill>
@@ -10273,7 +10273,7 @@
               <a:t>■  </a:t>
             </a:r>
             <a:r>
-              <a:rPr sz="1800" b="1" i="0">
+              <a:rPr sz="2400" b="1" i="0">
                 <a:solidFill>
                   <a:srgbClr val="92268F"/>
                 </a:solidFill>
@@ -10527,7 +10527,7 @@
           <a:noFill/>
         </p:spPr>
         <p:txBody>
-          <a:bodyPr wrap="square" anchor="t" lIns="0" rIns="0" tIns="0" bIns="0">
+          <a:bodyPr wrap="square" anchor="ctr" lIns="0" rIns="0" tIns="0" bIns="0">
             <a:spAutoFit/>
           </a:bodyPr>
           <a:lstStyle/>
@@ -10544,7 +10544,7 @@
               </a:spcAft>
             </a:pPr>
             <a:r>
-              <a:rPr sz="1800" b="1" i="0">
+              <a:rPr sz="2400" b="1" i="0">
                 <a:solidFill>
                   <a:srgbClr val="EDAB0C"/>
                 </a:solidFill>
@@ -10553,7 +10553,7 @@
               <a:t>■  </a:t>
             </a:r>
             <a:r>
-              <a:rPr sz="1800" b="0" i="0">
+              <a:rPr sz="2400" b="0" i="0">
                 <a:solidFill>
                   <a:srgbClr val="2A2929"/>
                 </a:solidFill>
@@ -10575,7 +10575,7 @@
               </a:spcAft>
             </a:pPr>
             <a:r>
-              <a:rPr sz="1800" b="1" i="0">
+              <a:rPr sz="2400" b="1" i="0">
                 <a:solidFill>
                   <a:srgbClr val="EDAB0C"/>
                 </a:solidFill>
@@ -10584,7 +10584,7 @@
               <a:t>■  </a:t>
             </a:r>
             <a:r>
-              <a:rPr sz="1800" b="0" i="0">
+              <a:rPr sz="2400" b="0" i="0">
                 <a:solidFill>
                   <a:srgbClr val="2A2929"/>
                 </a:solidFill>
@@ -10606,7 +10606,7 @@
               </a:spcAft>
             </a:pPr>
             <a:r>
-              <a:rPr sz="1500" b="0" i="0">
+              <a:rPr sz="2100" b="0" i="0">
                 <a:solidFill>
                   <a:srgbClr val="7A7A7A"/>
                 </a:solidFill>
@@ -10615,7 +10615,7 @@
               <a:t>–  </a:t>
             </a:r>
             <a:r>
-              <a:rPr sz="1500" b="0" i="0">
+              <a:rPr sz="2100" b="0" i="0">
                 <a:solidFill>
                   <a:srgbClr val="2A2929"/>
                 </a:solidFill>
@@ -10637,7 +10637,7 @@
               </a:spcAft>
             </a:pPr>
             <a:r>
-              <a:rPr sz="1500" b="0" i="0">
+              <a:rPr sz="2100" b="0" i="0">
                 <a:solidFill>
                   <a:srgbClr val="7A7A7A"/>
                 </a:solidFill>
@@ -10646,7 +10646,7 @@
               <a:t>–  </a:t>
             </a:r>
             <a:r>
-              <a:rPr sz="1500" b="0" i="0">
+              <a:rPr sz="2100" b="0" i="0">
                 <a:solidFill>
                   <a:srgbClr val="2A2929"/>
                 </a:solidFill>
@@ -10668,7 +10668,7 @@
               </a:spcAft>
             </a:pPr>
             <a:r>
-              <a:rPr sz="1500" b="0" i="0">
+              <a:rPr sz="2100" b="0" i="0">
                 <a:solidFill>
                   <a:srgbClr val="7A7A7A"/>
                 </a:solidFill>
@@ -10677,7 +10677,7 @@
               <a:t>–  </a:t>
             </a:r>
             <a:r>
-              <a:rPr sz="1500" b="0" i="0">
+              <a:rPr sz="2100" b="0" i="0">
                 <a:solidFill>
                   <a:srgbClr val="2A2929"/>
                 </a:solidFill>
@@ -10699,7 +10699,7 @@
               </a:spcAft>
             </a:pPr>
             <a:r>
-              <a:rPr sz="1800" b="1" i="0">
+              <a:rPr sz="2400" b="1" i="0">
                 <a:solidFill>
                   <a:srgbClr val="92268F"/>
                 </a:solidFill>
@@ -10708,7 +10708,7 @@
               <a:t>■  </a:t>
             </a:r>
             <a:r>
-              <a:rPr sz="1800" b="1" i="0">
+              <a:rPr sz="2400" b="1" i="0">
                 <a:solidFill>
                   <a:srgbClr val="92268F"/>
                 </a:solidFill>
@@ -10962,7 +10962,7 @@
           <a:noFill/>
         </p:spPr>
         <p:txBody>
-          <a:bodyPr wrap="square" anchor="t" lIns="0" rIns="0" tIns="0" bIns="0">
+          <a:bodyPr wrap="square" anchor="ctr" lIns="0" rIns="0" tIns="0" bIns="0">
             <a:spAutoFit/>
           </a:bodyPr>
           <a:lstStyle/>
@@ -10979,7 +10979,7 @@
               </a:spcAft>
             </a:pPr>
             <a:r>
-              <a:rPr sz="1800" b="1" i="0">
+              <a:rPr sz="2400" b="1" i="0">
                 <a:solidFill>
                   <a:srgbClr val="EDAB0C"/>
                 </a:solidFill>
@@ -10988,7 +10988,7 @@
               <a:t>■  </a:t>
             </a:r>
             <a:r>
-              <a:rPr sz="1800" b="0" i="0">
+              <a:rPr sz="2400" b="0" i="0">
                 <a:solidFill>
                   <a:srgbClr val="2A2929"/>
                 </a:solidFill>
@@ -11010,7 +11010,7 @@
               </a:spcAft>
             </a:pPr>
             <a:r>
-              <a:rPr sz="1800" b="1" i="0">
+              <a:rPr sz="2400" b="1" i="0">
                 <a:solidFill>
                   <a:srgbClr val="EDAB0C"/>
                 </a:solidFill>
@@ -11019,7 +11019,7 @@
               <a:t>■  </a:t>
             </a:r>
             <a:r>
-              <a:rPr sz="1800" b="0" i="0">
+              <a:rPr sz="2400" b="0" i="0">
                 <a:solidFill>
                   <a:srgbClr val="2A2929"/>
                 </a:solidFill>
@@ -11041,7 +11041,7 @@
               </a:spcAft>
             </a:pPr>
             <a:r>
-              <a:rPr sz="1800" b="1" i="0">
+              <a:rPr sz="2400" b="1" i="0">
                 <a:solidFill>
                   <a:srgbClr val="EDAB0C"/>
                 </a:solidFill>
@@ -11050,7 +11050,7 @@
               <a:t>■  </a:t>
             </a:r>
             <a:r>
-              <a:rPr sz="1800" b="0" i="0">
+              <a:rPr sz="2400" b="0" i="0">
                 <a:solidFill>
                   <a:srgbClr val="2A2929"/>
                 </a:solidFill>
@@ -11072,7 +11072,7 @@
               </a:spcAft>
             </a:pPr>
             <a:r>
-              <a:rPr sz="1800" b="1" i="0">
+              <a:rPr sz="2400" b="1" i="0">
                 <a:solidFill>
                   <a:srgbClr val="92268F"/>
                 </a:solidFill>
@@ -11081,7 +11081,7 @@
               <a:t>■  </a:t>
             </a:r>
             <a:r>
-              <a:rPr sz="1800" b="1" i="0">
+              <a:rPr sz="2400" b="1" i="0">
                 <a:solidFill>
                   <a:srgbClr val="92268F"/>
                 </a:solidFill>

--- a/S1-CL1-Cloud-Design-Build/delivery/topic_04/Topic_04_Slides.pptx
+++ b/S1-CL1-Cloud-Design-Build/delivery/topic_04/Topic_04_Slides.pptx
@@ -7,27 +7,27 @@
   <p:sldIdLst>
     <p:sldId id="256" r:id="rId7"/>
     <p:sldId id="257" r:id="rId8"/>
-    <p:sldId id="258" r:id="rId9"/>
-    <p:sldId id="259" r:id="rId10"/>
-    <p:sldId id="260" r:id="rId11"/>
-    <p:sldId id="261" r:id="rId12"/>
-    <p:sldId id="262" r:id="rId13"/>
-    <p:sldId id="263" r:id="rId14"/>
-    <p:sldId id="264" r:id="rId15"/>
-    <p:sldId id="265" r:id="rId16"/>
-    <p:sldId id="266" r:id="rId17"/>
-    <p:sldId id="267" r:id="rId18"/>
-    <p:sldId id="268" r:id="rId19"/>
-    <p:sldId id="269" r:id="rId20"/>
-    <p:sldId id="270" r:id="rId21"/>
-    <p:sldId id="271" r:id="rId22"/>
-    <p:sldId id="272" r:id="rId23"/>
-    <p:sldId id="273" r:id="rId24"/>
-    <p:sldId id="274" r:id="rId25"/>
-    <p:sldId id="275" r:id="rId26"/>
-    <p:sldId id="276" r:id="rId27"/>
-    <p:sldId id="277" r:id="rId28"/>
-    <p:sldId id="278" r:id="rId29"/>
+    <p:sldId id="258" r:id="rId10"/>
+    <p:sldId id="259" r:id="rId11"/>
+    <p:sldId id="260" r:id="rId12"/>
+    <p:sldId id="261" r:id="rId13"/>
+    <p:sldId id="262" r:id="rId14"/>
+    <p:sldId id="263" r:id="rId15"/>
+    <p:sldId id="264" r:id="rId16"/>
+    <p:sldId id="265" r:id="rId17"/>
+    <p:sldId id="266" r:id="rId18"/>
+    <p:sldId id="267" r:id="rId19"/>
+    <p:sldId id="268" r:id="rId20"/>
+    <p:sldId id="269" r:id="rId21"/>
+    <p:sldId id="270" r:id="rId22"/>
+    <p:sldId id="271" r:id="rId23"/>
+    <p:sldId id="272" r:id="rId24"/>
+    <p:sldId id="273" r:id="rId25"/>
+    <p:sldId id="274" r:id="rId26"/>
+    <p:sldId id="275" r:id="rId27"/>
+    <p:sldId id="276" r:id="rId28"/>
+    <p:sldId id="277" r:id="rId29"/>
+    <p:sldId id="278" r:id="rId30"/>
   </p:sldIdLst>
   <p:sldSz cx="12191695" cy="6858000" type="screen4x3"/>
   <p:notesSz cx="6858000" cy="9144000"/>
@@ -127,6 +127,2401 @@
     </a:lvl9pPr>
   </p:defaultTextStyle>
 </p:presentation>
+</file>
+
+<file path=ppt/notesMasters/notesMaster1.xml><?xml version="1.0" encoding="utf-8"?>
+<p:notesMaster xmlns:a="http://schemas.openxmlformats.org/drawingml/2006/main" xmlns:p="http://schemas.openxmlformats.org/presentationml/2006/main" xmlns:r="http://schemas.openxmlformats.org/officeDocument/2006/relationships">
+  <p:cSld>
+    <p:bg>
+      <p:bgRef idx="1001">
+        <a:schemeClr val="bg1"/>
+      </p:bgRef>
+    </p:bg>
+    <p:spTree>
+      <p:nvGrpSpPr>
+        <p:cNvPr id="1" name=""/>
+        <p:cNvGrpSpPr/>
+        <p:nvPr/>
+      </p:nvGrpSpPr>
+      <p:grpSpPr>
+        <a:xfrm>
+          <a:off x="0" y="0"/>
+          <a:ext cx="0" cy="0"/>
+          <a:chOff x="0" y="0"/>
+          <a:chExt cx="0" cy="0"/>
+        </a:xfrm>
+      </p:grpSpPr>
+      <p:sp>
+        <p:nvSpPr>
+          <p:cNvPr id="2" name="Header Placeholder 1"/>
+          <p:cNvSpPr>
+            <a:spLocks noGrp="1"/>
+          </p:cNvSpPr>
+          <p:nvPr>
+            <p:ph type="hdr" sz="quarter"/>
+          </p:nvPr>
+        </p:nvSpPr>
+        <p:spPr>
+          <a:xfrm>
+            <a:off x="0" y="0"/>
+            <a:ext cx="2971800" cy="457200"/>
+          </a:xfrm>
+          <a:prstGeom prst="rect">
+            <a:avLst/>
+          </a:prstGeom>
+        </p:spPr>
+        <p:txBody>
+          <a:bodyPr vert="horz" lIns="91440" tIns="45720" rIns="91440" bIns="45720" rtlCol="0"/>
+          <a:lstStyle>
+            <a:lvl1pPr algn="l">
+              <a:defRPr sz="1200"/>
+            </a:lvl1pPr>
+          </a:lstStyle>
+          <a:p>
+            <a:endParaRPr lang="en-US"/>
+          </a:p>
+        </p:txBody>
+      </p:sp>
+      <p:sp>
+        <p:nvSpPr>
+          <p:cNvPr id="3" name="Date Placeholder 2"/>
+          <p:cNvSpPr>
+            <a:spLocks noGrp="1"/>
+          </p:cNvSpPr>
+          <p:nvPr>
+            <p:ph type="dt" idx="1"/>
+          </p:nvPr>
+        </p:nvSpPr>
+        <p:spPr>
+          <a:xfrm>
+            <a:off x="3884613" y="0"/>
+            <a:ext cx="2971800" cy="457200"/>
+          </a:xfrm>
+          <a:prstGeom prst="rect">
+            <a:avLst/>
+          </a:prstGeom>
+        </p:spPr>
+        <p:txBody>
+          <a:bodyPr vert="horz" lIns="91440" tIns="45720" rIns="91440" bIns="45720" rtlCol="0"/>
+          <a:lstStyle>
+            <a:lvl1pPr algn="r">
+              <a:defRPr sz="1200"/>
+            </a:lvl1pPr>
+          </a:lstStyle>
+          <a:p>
+            <a:fld id="{0F89C1C7-3DCD-1040-A9CF-14679D8B5DDD}" type="datetimeFigureOut">
+              <a:rPr lang="en-US" smtClean="0"/>
+              <a:t>10/17/16</a:t>
+            </a:fld>
+            <a:endParaRPr lang="en-US"/>
+          </a:p>
+        </p:txBody>
+      </p:sp>
+      <p:sp>
+        <p:nvSpPr>
+          <p:cNvPr id="4" name="Slide Image Placeholder 3"/>
+          <p:cNvSpPr>
+            <a:spLocks noGrp="1" noRot="1" noChangeAspect="1"/>
+          </p:cNvSpPr>
+          <p:nvPr>
+            <p:ph type="sldImg" idx="2"/>
+          </p:nvPr>
+        </p:nvSpPr>
+        <p:spPr>
+          <a:xfrm>
+            <a:off x="1143000" y="685800"/>
+            <a:ext cx="4572000" cy="3429000"/>
+          </a:xfrm>
+          <a:prstGeom prst="rect">
+            <a:avLst/>
+          </a:prstGeom>
+          <a:noFill/>
+          <a:ln w="12700">
+            <a:solidFill>
+              <a:prstClr val="black"/>
+            </a:solidFill>
+          </a:ln>
+        </p:spPr>
+        <p:txBody>
+          <a:bodyPr vert="horz" lIns="91440" tIns="45720" rIns="91440" bIns="45720" rtlCol="0" anchor="ctr"/>
+          <a:lstStyle/>
+          <a:p>
+            <a:endParaRPr lang="en-US"/>
+          </a:p>
+        </p:txBody>
+      </p:sp>
+      <p:sp>
+        <p:nvSpPr>
+          <p:cNvPr id="5" name="Notes Placeholder 4"/>
+          <p:cNvSpPr>
+            <a:spLocks noGrp="1"/>
+          </p:cNvSpPr>
+          <p:nvPr>
+            <p:ph type="body" sz="quarter" idx="3"/>
+          </p:nvPr>
+        </p:nvSpPr>
+        <p:spPr>
+          <a:xfrm>
+            <a:off x="685800" y="4343400"/>
+            <a:ext cx="5486400" cy="4114800"/>
+          </a:xfrm>
+          <a:prstGeom prst="rect">
+            <a:avLst/>
+          </a:prstGeom>
+        </p:spPr>
+        <p:txBody>
+          <a:bodyPr vert="horz" lIns="91440" tIns="45720" rIns="91440" bIns="45720" rtlCol="0"/>
+          <a:lstStyle/>
+          <a:p>
+            <a:pPr lvl="0"/>
+            <a:r>
+              <a:rPr lang="en-US" smtClean="0"/>
+              <a:t>Click to edit Master text styles</a:t>
+            </a:r>
+          </a:p>
+          <a:p>
+            <a:pPr lvl="1"/>
+            <a:r>
+              <a:rPr lang="en-US" smtClean="0"/>
+              <a:t>Second level</a:t>
+            </a:r>
+          </a:p>
+          <a:p>
+            <a:pPr lvl="2"/>
+            <a:r>
+              <a:rPr lang="en-US" smtClean="0"/>
+              <a:t>Third level</a:t>
+            </a:r>
+          </a:p>
+          <a:p>
+            <a:pPr lvl="3"/>
+            <a:r>
+              <a:rPr lang="en-US" smtClean="0"/>
+              <a:t>Fourth level</a:t>
+            </a:r>
+          </a:p>
+          <a:p>
+            <a:pPr lvl="4"/>
+            <a:r>
+              <a:rPr lang="en-US" smtClean="0"/>
+              <a:t>Fifth level</a:t>
+            </a:r>
+            <a:endParaRPr lang="en-US"/>
+          </a:p>
+        </p:txBody>
+      </p:sp>
+      <p:sp>
+        <p:nvSpPr>
+          <p:cNvPr id="6" name="Footer Placeholder 5"/>
+          <p:cNvSpPr>
+            <a:spLocks noGrp="1"/>
+          </p:cNvSpPr>
+          <p:nvPr>
+            <p:ph type="ftr" sz="quarter" idx="4"/>
+          </p:nvPr>
+        </p:nvSpPr>
+        <p:spPr>
+          <a:xfrm>
+            <a:off x="0" y="8685213"/>
+            <a:ext cx="2971800" cy="457200"/>
+          </a:xfrm>
+          <a:prstGeom prst="rect">
+            <a:avLst/>
+          </a:prstGeom>
+        </p:spPr>
+        <p:txBody>
+          <a:bodyPr vert="horz" lIns="91440" tIns="45720" rIns="91440" bIns="45720" rtlCol="0" anchor="b"/>
+          <a:lstStyle>
+            <a:lvl1pPr algn="l">
+              <a:defRPr sz="1200"/>
+            </a:lvl1pPr>
+          </a:lstStyle>
+          <a:p>
+            <a:endParaRPr lang="en-US"/>
+          </a:p>
+        </p:txBody>
+      </p:sp>
+      <p:sp>
+        <p:nvSpPr>
+          <p:cNvPr id="7" name="Slide Number Placeholder 6"/>
+          <p:cNvSpPr>
+            <a:spLocks noGrp="1"/>
+          </p:cNvSpPr>
+          <p:nvPr>
+            <p:ph type="sldNum" sz="quarter" idx="5"/>
+          </p:nvPr>
+        </p:nvSpPr>
+        <p:spPr>
+          <a:xfrm>
+            <a:off x="3884613" y="8685213"/>
+            <a:ext cx="2971800" cy="457200"/>
+          </a:xfrm>
+          <a:prstGeom prst="rect">
+            <a:avLst/>
+          </a:prstGeom>
+        </p:spPr>
+        <p:txBody>
+          <a:bodyPr vert="horz" lIns="91440" tIns="45720" rIns="91440" bIns="45720" rtlCol="0" anchor="b"/>
+          <a:lstStyle>
+            <a:lvl1pPr algn="r">
+              <a:defRPr sz="1200"/>
+            </a:lvl1pPr>
+          </a:lstStyle>
+          <a:p>
+            <a:fld id="{BB5E49A5-4136-284D-997B-48E1D791AD67}" type="slidenum">
+              <a:rPr lang="en-US" smtClean="0"/>
+              <a:t>‹#›</a:t>
+            </a:fld>
+            <a:endParaRPr lang="en-US"/>
+          </a:p>
+        </p:txBody>
+      </p:sp>
+    </p:spTree>
+    <p:extLst>
+      <p:ext uri="{BB962C8B-B14F-4D97-AF65-F5344CB8AC3E}">
+        <p14:creationId xmlns:p14="http://schemas.microsoft.com/office/powerpoint/2010/main" val="2623252185"/>
+      </p:ext>
+    </p:extLst>
+  </p:cSld>
+  <p:clrMap bg1="lt1" tx1="dk1" bg2="lt2" tx2="dk2" accent1="accent1" accent2="accent2" accent3="accent3" accent4="accent4" accent5="accent5" accent6="accent6" hlink="hlink" folHlink="folHlink"/>
+  <p:notesStyle>
+    <a:lvl1pPr marL="0" algn="l" defTabSz="457200" rtl="0" eaLnBrk="1" latinLnBrk="0" hangingPunct="1">
+      <a:defRPr sz="1200" kern="1200">
+        <a:solidFill>
+          <a:schemeClr val="tx1"/>
+        </a:solidFill>
+        <a:latin typeface="+mn-lt"/>
+        <a:ea typeface="+mn-ea"/>
+        <a:cs typeface="+mn-cs"/>
+      </a:defRPr>
+    </a:lvl1pPr>
+    <a:lvl2pPr marL="457200" algn="l" defTabSz="457200" rtl="0" eaLnBrk="1" latinLnBrk="0" hangingPunct="1">
+      <a:defRPr sz="1200" kern="1200">
+        <a:solidFill>
+          <a:schemeClr val="tx1"/>
+        </a:solidFill>
+        <a:latin typeface="+mn-lt"/>
+        <a:ea typeface="+mn-ea"/>
+        <a:cs typeface="+mn-cs"/>
+      </a:defRPr>
+    </a:lvl2pPr>
+    <a:lvl3pPr marL="914400" algn="l" defTabSz="457200" rtl="0" eaLnBrk="1" latinLnBrk="0" hangingPunct="1">
+      <a:defRPr sz="1200" kern="1200">
+        <a:solidFill>
+          <a:schemeClr val="tx1"/>
+        </a:solidFill>
+        <a:latin typeface="+mn-lt"/>
+        <a:ea typeface="+mn-ea"/>
+        <a:cs typeface="+mn-cs"/>
+      </a:defRPr>
+    </a:lvl3pPr>
+    <a:lvl4pPr marL="1371600" algn="l" defTabSz="457200" rtl="0" eaLnBrk="1" latinLnBrk="0" hangingPunct="1">
+      <a:defRPr sz="1200" kern="1200">
+        <a:solidFill>
+          <a:schemeClr val="tx1"/>
+        </a:solidFill>
+        <a:latin typeface="+mn-lt"/>
+        <a:ea typeface="+mn-ea"/>
+        <a:cs typeface="+mn-cs"/>
+      </a:defRPr>
+    </a:lvl4pPr>
+    <a:lvl5pPr marL="1828800" algn="l" defTabSz="457200" rtl="0" eaLnBrk="1" latinLnBrk="0" hangingPunct="1">
+      <a:defRPr sz="1200" kern="1200">
+        <a:solidFill>
+          <a:schemeClr val="tx1"/>
+        </a:solidFill>
+        <a:latin typeface="+mn-lt"/>
+        <a:ea typeface="+mn-ea"/>
+        <a:cs typeface="+mn-cs"/>
+      </a:defRPr>
+    </a:lvl5pPr>
+    <a:lvl6pPr marL="2286000" algn="l" defTabSz="457200" rtl="0" eaLnBrk="1" latinLnBrk="0" hangingPunct="1">
+      <a:defRPr sz="1200" kern="1200">
+        <a:solidFill>
+          <a:schemeClr val="tx1"/>
+        </a:solidFill>
+        <a:latin typeface="+mn-lt"/>
+        <a:ea typeface="+mn-ea"/>
+        <a:cs typeface="+mn-cs"/>
+      </a:defRPr>
+    </a:lvl6pPr>
+    <a:lvl7pPr marL="2743200" algn="l" defTabSz="457200" rtl="0" eaLnBrk="1" latinLnBrk="0" hangingPunct="1">
+      <a:defRPr sz="1200" kern="1200">
+        <a:solidFill>
+          <a:schemeClr val="tx1"/>
+        </a:solidFill>
+        <a:latin typeface="+mn-lt"/>
+        <a:ea typeface="+mn-ea"/>
+        <a:cs typeface="+mn-cs"/>
+      </a:defRPr>
+    </a:lvl7pPr>
+    <a:lvl8pPr marL="3200400" algn="l" defTabSz="457200" rtl="0" eaLnBrk="1" latinLnBrk="0" hangingPunct="1">
+      <a:defRPr sz="1200" kern="1200">
+        <a:solidFill>
+          <a:schemeClr val="tx1"/>
+        </a:solidFill>
+        <a:latin typeface="+mn-lt"/>
+        <a:ea typeface="+mn-ea"/>
+        <a:cs typeface="+mn-cs"/>
+      </a:defRPr>
+    </a:lvl8pPr>
+    <a:lvl9pPr marL="3657600" algn="l" defTabSz="457200" rtl="0" eaLnBrk="1" latinLnBrk="0" hangingPunct="1">
+      <a:defRPr sz="1200" kern="1200">
+        <a:solidFill>
+          <a:schemeClr val="tx1"/>
+        </a:solidFill>
+        <a:latin typeface="+mn-lt"/>
+        <a:ea typeface="+mn-ea"/>
+        <a:cs typeface="+mn-cs"/>
+      </a:defRPr>
+    </a:lvl9pPr>
+  </p:notesStyle>
+</p:notesMaster>
+</file>
+
+<file path=ppt/notesSlides/notesSlide1.xml><?xml version="1.0" encoding="utf-8"?>
+<p:notes xmlns:a="http://schemas.openxmlformats.org/drawingml/2006/main" xmlns:p="http://schemas.openxmlformats.org/presentationml/2006/main" xmlns:r="http://schemas.openxmlformats.org/officeDocument/2006/relationships">
+  <p:cSld>
+    <p:spTree>
+      <p:nvGrpSpPr>
+        <p:cNvPr id="1" name=""/>
+        <p:cNvGrpSpPr/>
+        <p:nvPr/>
+      </p:nvGrpSpPr>
+      <p:grpSpPr>
+        <a:xfrm>
+          <a:off x="0" y="0"/>
+          <a:ext cx="0" cy="0"/>
+          <a:chOff x="0" y="0"/>
+          <a:chExt cx="0" cy="0"/>
+        </a:xfrm>
+      </p:grpSpPr>
+      <p:sp>
+        <p:nvSpPr>
+          <p:cNvPr id="2" name="Slide Image Placeholder 1"/>
+          <p:cNvSpPr>
+            <a:spLocks noGrp="1"/>
+          </p:cNvSpPr>
+          <p:nvPr>
+            <p:ph type="sldImg" idx="2"/>
+          </p:nvPr>
+        </p:nvSpPr>
+        <p:spPr/>
+      </p:sp>
+      <p:sp>
+        <p:nvSpPr>
+          <p:cNvPr id="3" name="Notes Placeholder 2"/>
+          <p:cNvSpPr>
+            <a:spLocks noGrp="1"/>
+          </p:cNvSpPr>
+          <p:nvPr>
+            <p:ph type="body" idx="3" sz="quarter"/>
+          </p:nvPr>
+        </p:nvSpPr>
+        <p:spPr/>
+        <p:txBody>
+          <a:bodyPr/>
+          <a:lstStyle/>
+          <a:p>
+            <a:r>
+              <a:t>Frame this as the map for the whole Topic — this is where the consultant earns the fee. Set the</a:t>
+            </a:r>
+          </a:p>
+          <a:p>
+            <a:r>
+              <a:t>turn, don't teach detail yet.</a:t>
+            </a:r>
+          </a:p>
+          <a:p>
+            <a:r>
+              <a:t>• Recap the arc: Topic 2 diagnosed, Topic 3 evaluated (options, CBA, risk). Today they DECIDE and</a:t>
+            </a:r>
+          </a:p>
+          <a:p>
+            <a:r>
+              <a:t>  PLAN — the last analytical third of the business case.</a:t>
+            </a:r>
+          </a:p>
+          <a:p>
+            <a:r>
+              <a:t>• Read the three moves (the bolded line): prioritise → recommend → plan it → then ask for the</a:t>
+            </a:r>
+          </a:p>
+          <a:p>
+            <a:r>
+              <a:t>  decision. Each move is one of today's three sections.</a:t>
+            </a:r>
+          </a:p>
+          <a:p>
+            <a:r>
+              <a:t>• Stress the payoff: after this Topic the WRITTEN practice business case is complete (Topics 2→3→4</a:t>
+            </a:r>
+          </a:p>
+          <a:p>
+            <a:r>
+              <a:t>  build §3–§5, §6–§8, §9–§11). Only the pitch (Topic 5) remains.</a:t>
+            </a:r>
+          </a:p>
+          <a:p>
+            <a:r>
+              <a:t>• Anchor the client: still the YAT Accounting System (Ledgerline) — same practice case all term.</a:t>
+            </a:r>
+          </a:p>
+          <a:p>
+            <a:r>
+              <a:t>Misconception to pre-empt: "the recommendation is just my opinion." No — a board approves a call</a:t>
+            </a:r>
+          </a:p>
+          <a:p>
+            <a:r>
+              <a:t>that rests on the evidence they already built, not a hunch.</a:t>
+            </a:r>
+          </a:p>
+          <a:p>
+            <a:r>
+              <a:t>Question to pose: "You've weighed the options in Topic 3 — what does a client actually pay a</a:t>
+            </a:r>
+          </a:p>
+          <a:p>
+            <a:r>
+              <a:t>consultant to do next?" (make the call and plan it, not just present analysis).</a:t>
+            </a:r>
+          </a:p>
+          <a:p>
+            <a:r>
+              <a:t>UoC/AT1 tie: this Topic develops ICTICT517 §3 (PC 2.3/3.1–3.3, PE 4/6, KE 1) — the AT1 Business</a:t>
+            </a:r>
+          </a:p>
+          <a:p>
+            <a:r>
+              <a:t>Case §9–§11 sections.</a:t>
+            </a:r>
+          </a:p>
+        </p:txBody>
+      </p:sp>
+      <p:sp>
+        <p:nvSpPr>
+          <p:cNvPr id="4" name="Slide Number Placeholder 3"/>
+          <p:cNvSpPr>
+            <a:spLocks noGrp="1"/>
+          </p:cNvSpPr>
+          <p:nvPr>
+            <p:ph type="sldNum" idx="5" sz="quarter"/>
+          </p:nvPr>
+        </p:nvSpPr>
+        <p:spPr/>
+      </p:sp>
+    </p:spTree>
+  </p:cSld>
+  <p:clrMapOvr>
+    <a:masterClrMapping/>
+  </p:clrMapOvr>
+</p:notes>
+</file>
+
+<file path=ppt/notesSlides/notesSlide10.xml><?xml version="1.0" encoding="utf-8"?>
+<p:notes xmlns:a="http://schemas.openxmlformats.org/drawingml/2006/main" xmlns:p="http://schemas.openxmlformats.org/presentationml/2006/main" xmlns:r="http://schemas.openxmlformats.org/officeDocument/2006/relationships">
+  <p:cSld>
+    <p:spTree>
+      <p:nvGrpSpPr>
+        <p:cNvPr id="1" name=""/>
+        <p:cNvGrpSpPr/>
+        <p:nvPr/>
+      </p:nvGrpSpPr>
+      <p:grpSpPr>
+        <a:xfrm>
+          <a:off x="0" y="0"/>
+          <a:ext cx="0" cy="0"/>
+          <a:chOff x="0" y="0"/>
+          <a:chExt cx="0" cy="0"/>
+        </a:xfrm>
+      </p:grpSpPr>
+      <p:sp>
+        <p:nvSpPr>
+          <p:cNvPr id="2" name="Slide Image Placeholder 1"/>
+          <p:cNvSpPr>
+            <a:spLocks noGrp="1"/>
+          </p:cNvSpPr>
+          <p:nvPr>
+            <p:ph type="sldImg" idx="2"/>
+          </p:nvPr>
+        </p:nvSpPr>
+        <p:spPr/>
+      </p:sp>
+      <p:sp>
+        <p:nvSpPr>
+          <p:cNvPr id="3" name="Notes Placeholder 2"/>
+          <p:cNvSpPr>
+            <a:spLocks noGrp="1"/>
+          </p:cNvSpPr>
+          <p:nvPr>
+            <p:ph type="body" idx="3" sz="quarter"/>
+          </p:nvPr>
+        </p:nvSpPr>
+        <p:spPr/>
+        <p:txBody>
+          <a:bodyPr/>
+          <a:lstStyle/>
+          <a:p>
+            <a:r>
+              <a:t>Teach the part that makes the plan ACCOUNTABLE — the standards it's held to and the measurable</a:t>
+            </a:r>
+          </a:p>
+          <a:p>
+            <a:r>
+              <a:t>targets that define "done well". Callback to Topic 1's standards here.</a:t>
+            </a:r>
+          </a:p>
+          <a:p>
+            <a:r>
+              <a:t>• Hold the work to industry standards — Well-Architected, ISO 27017, Essential Eight, ITIL (the</a:t>
+            </a:r>
+          </a:p>
+          <a:p>
+            <a:r>
+              <a:t>  same rulebooks they met in Topic 1). The plan doesn't invent quality; it references a standard.</a:t>
+            </a:r>
+          </a:p>
+          <a:p>
+            <a:r>
+              <a:t>• Set MEASURABLE targets: availability, recovery, cutover with no data loss, budget adherence —</a:t>
+            </a:r>
+          </a:p>
+          <a:p>
+            <a:r>
+              <a:t>  numbers, not adjectives.</a:t>
+            </a:r>
+          </a:p>
+          <a:p>
+            <a:r>
+              <a:t>• The point (accent-bold): targets define "done well" — without them, no one can say whether the</a:t>
+            </a:r>
+          </a:p>
+          <a:p>
+            <a:r>
+              <a:t>  implementation succeeded.</a:t>
+            </a:r>
+          </a:p>
+          <a:p>
+            <a:r>
+              <a:t>Misconception to pre-empt: "success metrics = 'the system works'." No — that's not measurable;</a:t>
+            </a:r>
+          </a:p>
+          <a:p>
+            <a:r>
+              <a:t>a target is "99.9% availability" or "cutover with zero data loss", something you can check against.</a:t>
+            </a:r>
+          </a:p>
+          <a:p>
+            <a:r>
+              <a:t>Question to pose: "How would YAT KNOW the Ledgerline migration succeeded — name one number you'd</a:t>
+            </a:r>
+          </a:p>
+          <a:p>
+            <a:r>
+              <a:t>commit to?" (availability %, recovery time, zero-data-loss cutover, on-budget).</a:t>
+            </a:r>
+          </a:p>
+          <a:p>
+            <a:r>
+              <a:t>UoC/AT1 tie: PC 3.2 (standards, targets, implementation methods) → AT1 §10.</a:t>
+            </a:r>
+          </a:p>
+        </p:txBody>
+      </p:sp>
+      <p:sp>
+        <p:nvSpPr>
+          <p:cNvPr id="4" name="Slide Number Placeholder 3"/>
+          <p:cNvSpPr>
+            <a:spLocks noGrp="1"/>
+          </p:cNvSpPr>
+          <p:nvPr>
+            <p:ph type="sldNum" idx="5" sz="quarter"/>
+          </p:nvPr>
+        </p:nvSpPr>
+        <p:spPr/>
+      </p:sp>
+    </p:spTree>
+  </p:cSld>
+  <p:clrMapOvr>
+    <a:masterClrMapping/>
+  </p:clrMapOvr>
+</p:notes>
+</file>
+
+<file path=ppt/notesSlides/notesSlide11.xml><?xml version="1.0" encoding="utf-8"?>
+<p:notes xmlns:a="http://schemas.openxmlformats.org/drawingml/2006/main" xmlns:p="http://schemas.openxmlformats.org/presentationml/2006/main" xmlns:r="http://schemas.openxmlformats.org/officeDocument/2006/relationships">
+  <p:cSld>
+    <p:spTree>
+      <p:nvGrpSpPr>
+        <p:cNvPr id="1" name=""/>
+        <p:cNvGrpSpPr/>
+        <p:nvPr/>
+      </p:nvGrpSpPr>
+      <p:grpSpPr>
+        <a:xfrm>
+          <a:off x="0" y="0"/>
+          <a:ext cx="0" cy="0"/>
+          <a:chOff x="0" y="0"/>
+          <a:chExt cx="0" cy="0"/>
+        </a:xfrm>
+      </p:grpSpPr>
+      <p:sp>
+        <p:nvSpPr>
+          <p:cNvPr id="2" name="Slide Image Placeholder 1"/>
+          <p:cNvSpPr>
+            <a:spLocks noGrp="1"/>
+          </p:cNvSpPr>
+          <p:nvPr>
+            <p:ph type="sldImg" idx="2"/>
+          </p:nvPr>
+        </p:nvSpPr>
+        <p:spPr/>
+      </p:sp>
+      <p:sp>
+        <p:nvSpPr>
+          <p:cNvPr id="3" name="Notes Placeholder 2"/>
+          <p:cNvSpPr>
+            <a:spLocks noGrp="1"/>
+          </p:cNvSpPr>
+          <p:nvPr>
+            <p:ph type="body" idx="3" sz="quarter"/>
+          </p:nvPr>
+        </p:nvSpPr>
+        <p:spPr/>
+        <p:txBody>
+          <a:bodyPr/>
+          <a:lstStyle/>
+          <a:p>
+            <a:r>
+              <a:t>Teach the part that separates a consultant's plan from a wish-list — routing high-risk steps</a:t>
+            </a:r>
+          </a:p>
+          <a:p>
+            <a:r>
+              <a:t>through governance. This is often the missing piece in student plans.</a:t>
+            </a:r>
+          </a:p>
+          <a:p>
+            <a:r>
+              <a:t>• Real change runs through governance; you don't just "do" a cutover — you route it.</a:t>
+            </a:r>
+          </a:p>
+          <a:p>
+            <a:r>
+              <a:t>• Map the high-risk steps (e.g. cutover) to the change-management procedure: change request → risk</a:t>
+            </a:r>
+          </a:p>
+          <a:p>
+            <a:r>
+              <a:t>  assessment → approval → change window. Say those stages aloud.</a:t>
+            </a:r>
+          </a:p>
+          <a:p>
+            <a:r>
+              <a:t>• The line (accent-bold): this alignment is what makes the plan credible to a board that runs on</a:t>
+            </a:r>
+          </a:p>
+          <a:p>
+            <a:r>
+              <a:t>  process — it shows you understand how organisations actually change things.</a:t>
+            </a:r>
+          </a:p>
+          <a:p>
+            <a:r>
+              <a:t>Misconception to pre-empt: "change management is bureaucracy I can skip in a plan." No — for</a:t>
+            </a:r>
+          </a:p>
+          <a:p>
+            <a:r>
+              <a:t>high-risk steps it's exactly what a board expects to see; skipping it reads as naive.</a:t>
+            </a:r>
+          </a:p>
+          <a:p>
+            <a:r>
+              <a:t>Question to pose: "Cutover to the new Ledgerline is high-risk — what governance does it pass</a:t>
+            </a:r>
+          </a:p>
+          <a:p>
+            <a:r>
+              <a:t>through before it happens?" (change request → risk assessment → approval → scheduled window).</a:t>
+            </a:r>
+          </a:p>
+          <a:p>
+            <a:r>
+              <a:t>UoC/AT1 tie: PC 3.1 (consistency with organisational policy and procedures) → AT1 §10.</a:t>
+            </a:r>
+          </a:p>
+        </p:txBody>
+      </p:sp>
+      <p:sp>
+        <p:nvSpPr>
+          <p:cNvPr id="4" name="Slide Number Placeholder 3"/>
+          <p:cNvSpPr>
+            <a:spLocks noGrp="1"/>
+          </p:cNvSpPr>
+          <p:nvPr>
+            <p:ph type="sldNum" idx="5" sz="quarter"/>
+          </p:nvPr>
+        </p:nvSpPr>
+        <p:spPr/>
+      </p:sp>
+    </p:spTree>
+  </p:cSld>
+  <p:clrMapOvr>
+    <a:masterClrMapping/>
+  </p:clrMapOvr>
+</p:notes>
+</file>
+
+<file path=ppt/notesSlides/notesSlide12.xml><?xml version="1.0" encoding="utf-8"?>
+<p:notes xmlns:a="http://schemas.openxmlformats.org/drawingml/2006/main" xmlns:p="http://schemas.openxmlformats.org/presentationml/2006/main" xmlns:r="http://schemas.openxmlformats.org/officeDocument/2006/relationships">
+  <p:cSld>
+    <p:spTree>
+      <p:nvGrpSpPr>
+        <p:cNvPr id="1" name=""/>
+        <p:cNvGrpSpPr/>
+        <p:nvPr/>
+      </p:nvGrpSpPr>
+      <p:grpSpPr>
+        <a:xfrm>
+          <a:off x="0" y="0"/>
+          <a:ext cx="0" cy="0"/>
+          <a:chOff x="0" y="0"/>
+          <a:chExt cx="0" cy="0"/>
+        </a:xfrm>
+      </p:grpSpPr>
+      <p:sp>
+        <p:nvSpPr>
+          <p:cNvPr id="2" name="Slide Image Placeholder 1"/>
+          <p:cNvSpPr>
+            <a:spLocks noGrp="1"/>
+          </p:cNvSpPr>
+          <p:nvPr>
+            <p:ph type="sldImg" idx="2"/>
+          </p:nvPr>
+        </p:nvSpPr>
+        <p:spPr/>
+      </p:sp>
+      <p:sp>
+        <p:nvSpPr>
+          <p:cNvPr id="3" name="Notes Placeholder 2"/>
+          <p:cNvSpPr>
+            <a:spLocks noGrp="1"/>
+          </p:cNvSpPr>
+          <p:nvPr>
+            <p:ph type="body" idx="3" sz="quarter"/>
+          </p:nvPr>
+        </p:nvSpPr>
+        <p:spPr/>
+        <p:txBody>
+          <a:bodyPr/>
+          <a:lstStyle/>
+          <a:p>
+            <a:r>
+              <a:t>Facilitation — the biggest build task of the Topic. They add §10 to their practice BC with all</a:t>
+            </a:r>
+          </a:p>
+          <a:p>
+            <a:r>
+              <a:t>five parts. Circulate and watch the altitude (board-level, not task-level).</a:t>
+            </a:r>
+          </a:p>
+          <a:p>
+            <a:r>
+              <a:t>Tell students: "In your working copy of the Business Case, add the Action Plan for the YAT</a:t>
+            </a:r>
+          </a:p>
+          <a:p>
+            <a:r>
+              <a:t>Accounting System. Board-level — phases, milestones and metrics, not a day-by-day task list."</a:t>
+            </a:r>
+          </a:p>
+          <a:p>
+            <a:r>
+              <a:t>Steps (put on the board) — include all five parts:</a:t>
+            </a:r>
+          </a:p>
+          <a:p>
+            <a:r>
+              <a:t>1. Prioritised changes.</a:t>
+            </a:r>
+          </a:p>
+          <a:p>
+            <a:r>
+              <a:t>2. Implementation schedule (phases, sequence, timeframe).</a:t>
+            </a:r>
+          </a:p>
+          <a:p>
+            <a:r>
+              <a:t>3. Standards, targets &amp; success metrics.</a:t>
+            </a:r>
+          </a:p>
+          <a:p>
+            <a:r>
+              <a:t>4. Implementation methods (how each change is delivered).</a:t>
+            </a:r>
+          </a:p>
+          <a:p>
+            <a:r>
+              <a:t>5. Alignment with the change-management procedure.</a:t>
+            </a:r>
+          </a:p>
+          <a:p>
+            <a:r>
+              <a:t>Must produce: a ~1-page Action Plan section covering all five parts — a phased schedule with</a:t>
+            </a:r>
+          </a:p>
+          <a:p>
+            <a:r>
+              <a:t>measurable targets and high-risk steps routed through governance.</a:t>
+            </a:r>
+          </a:p>
+          <a:p>
+            <a:r>
+              <a:t>Timing: ~30 min then compare. Where they get stuck: they drop into a day-by-day task list (pull</a:t>
+            </a:r>
+          </a:p>
+          <a:p>
+            <a:r>
+              <a:t>them back up to phases/milestones), or they forget targets and change-management — the two parts</a:t>
+            </a:r>
+          </a:p>
+          <a:p>
+            <a:r>
+              <a:t>most often missed. Have the five-part list on the board the whole time.</a:t>
+            </a:r>
+          </a:p>
+          <a:p>
+            <a:r>
+              <a:t>Share-back prompt: compare two schedules — which one handles dependencies and the critical path?</a:t>
+            </a:r>
+          </a:p>
+          <a:p>
+            <a:r>
+              <a:t>No-leakage note: PRACTICE on Ledgerline; AT1 assesses the same §10 plan on the LMS — comparable,</a:t>
+            </a:r>
+          </a:p>
+          <a:p>
+            <a:r>
+              <a:t>not identical.</a:t>
+            </a:r>
+          </a:p>
+          <a:p>
+            <a:r>
+              <a:t>UoC/AT1 tie: PC 3.1 / 3.2, PE 6, KE 1 → AT1 Part A §10.</a:t>
+            </a:r>
+          </a:p>
+        </p:txBody>
+      </p:sp>
+      <p:sp>
+        <p:nvSpPr>
+          <p:cNvPr id="4" name="Slide Number Placeholder 3"/>
+          <p:cNvSpPr>
+            <a:spLocks noGrp="1"/>
+          </p:cNvSpPr>
+          <p:nvPr>
+            <p:ph type="sldNum" idx="5" sz="quarter"/>
+          </p:nvPr>
+        </p:nvSpPr>
+        <p:spPr/>
+      </p:sp>
+    </p:spTree>
+  </p:cSld>
+  <p:clrMapOvr>
+    <a:masterClrMapping/>
+  </p:clrMapOvr>
+</p:notes>
+</file>
+
+<file path=ppt/notesSlides/notesSlide13.xml><?xml version="1.0" encoding="utf-8"?>
+<p:notes xmlns:a="http://schemas.openxmlformats.org/drawingml/2006/main" xmlns:p="http://schemas.openxmlformats.org/presentationml/2006/main" xmlns:r="http://schemas.openxmlformats.org/officeDocument/2006/relationships">
+  <p:cSld>
+    <p:spTree>
+      <p:nvGrpSpPr>
+        <p:cNvPr id="1" name=""/>
+        <p:cNvGrpSpPr/>
+        <p:nvPr/>
+      </p:nvGrpSpPr>
+      <p:grpSpPr>
+        <a:xfrm>
+          <a:off x="0" y="0"/>
+          <a:ext cx="0" cy="0"/>
+          <a:chOff x="0" y="0"/>
+          <a:chExt cx="0" cy="0"/>
+        </a:xfrm>
+      </p:grpSpPr>
+      <p:sp>
+        <p:nvSpPr>
+          <p:cNvPr id="2" name="Slide Image Placeholder 1"/>
+          <p:cNvSpPr>
+            <a:spLocks noGrp="1"/>
+          </p:cNvSpPr>
+          <p:nvPr>
+            <p:ph type="sldImg" idx="2"/>
+          </p:nvPr>
+        </p:nvSpPr>
+        <p:spPr/>
+      </p:sp>
+      <p:sp>
+        <p:nvSpPr>
+          <p:cNvPr id="3" name="Notes Placeholder 2"/>
+          <p:cNvSpPr>
+            <a:spLocks noGrp="1"/>
+          </p:cNvSpPr>
+          <p:nvPr>
+            <p:ph type="body" idx="3" sz="quarter"/>
+          </p:nvPr>
+        </p:nvSpPr>
+        <p:spPr/>
+        <p:txBody>
+          <a:bodyPr/>
+          <a:lstStyle/>
+          <a:p>
+            <a:r>
+              <a:t>Section 3 opener — why the case must end with a specific ask. Short and sharp; it sets up the</a:t>
+            </a:r>
+          </a:p>
+          <a:p>
+            <a:r>
+              <a:t>"what to ask for" slide.</a:t>
+            </a:r>
+          </a:p>
+          <a:p>
+            <a:r>
+              <a:t>• The failure mode: a business case that doesn't ASK for anything gets "noted", not approved — it</a:t>
+            </a:r>
+          </a:p>
+          <a:p>
+            <a:r>
+              <a:t>  dies politely in the minutes.</a:t>
+            </a:r>
+          </a:p>
+          <a:p>
+            <a:r>
+              <a:t>• The fix (accent-bold): the final section makes the decision easy — state exactly what you want</a:t>
+            </a:r>
+          </a:p>
+          <a:p>
+            <a:r>
+              <a:t>  approved, today. Make saying "yes" a single word.</a:t>
+            </a:r>
+          </a:p>
+          <a:p>
+            <a:r>
+              <a:t>Misconception to pre-empt: "the recommendation already IS the ask." Not quite — the recommendation</a:t>
+            </a:r>
+          </a:p>
+          <a:p>
+            <a:r>
+              <a:t>is your advice; the ask is the specific decision(s) you want the board to make now (option + plan +</a:t>
+            </a:r>
+          </a:p>
+          <a:p>
+            <a:r>
+              <a:t>budget). Spell it out separately.</a:t>
+            </a:r>
+          </a:p>
+          <a:p>
+            <a:r>
+              <a:t>Question to pose: "You've recommended and planned — what's the one sentence that gets the board to</a:t>
+            </a:r>
+          </a:p>
+          <a:p>
+            <a:r>
+              <a:t>actually decide today?" (a specific, answerable ask).</a:t>
+            </a:r>
+          </a:p>
+          <a:p>
+            <a:r>
+              <a:t>UoC/AT1 tie: opens PC 3.3 (provide action plan for feedback/approval — the written ask) → AT1 §11.</a:t>
+            </a:r>
+          </a:p>
+        </p:txBody>
+      </p:sp>
+      <p:sp>
+        <p:nvSpPr>
+          <p:cNvPr id="4" name="Slide Number Placeholder 3"/>
+          <p:cNvSpPr>
+            <a:spLocks noGrp="1"/>
+          </p:cNvSpPr>
+          <p:nvPr>
+            <p:ph type="sldNum" idx="5" sz="quarter"/>
+          </p:nvPr>
+        </p:nvSpPr>
+        <p:spPr/>
+      </p:sp>
+    </p:spTree>
+  </p:cSld>
+  <p:clrMapOvr>
+    <a:masterClrMapping/>
+  </p:clrMapOvr>
+</p:notes>
+</file>
+
+<file path=ppt/notesSlides/notesSlide14.xml><?xml version="1.0" encoding="utf-8"?>
+<p:notes xmlns:a="http://schemas.openxmlformats.org/drawingml/2006/main" xmlns:p="http://schemas.openxmlformats.org/presentationml/2006/main" xmlns:r="http://schemas.openxmlformats.org/officeDocument/2006/relationships">
+  <p:cSld>
+    <p:spTree>
+      <p:nvGrpSpPr>
+        <p:cNvPr id="1" name=""/>
+        <p:cNvGrpSpPr/>
+        <p:nvPr/>
+      </p:nvGrpSpPr>
+      <p:grpSpPr>
+        <a:xfrm>
+          <a:off x="0" y="0"/>
+          <a:ext cx="0" cy="0"/>
+          <a:chOff x="0" y="0"/>
+          <a:chExt cx="0" cy="0"/>
+        </a:xfrm>
+      </p:grpSpPr>
+      <p:sp>
+        <p:nvSpPr>
+          <p:cNvPr id="2" name="Slide Image Placeholder 1"/>
+          <p:cNvSpPr>
+            <a:spLocks noGrp="1"/>
+          </p:cNvSpPr>
+          <p:nvPr>
+            <p:ph type="sldImg" idx="2"/>
+          </p:nvPr>
+        </p:nvSpPr>
+        <p:spPr/>
+      </p:sp>
+      <p:sp>
+        <p:nvSpPr>
+          <p:cNvPr id="3" name="Notes Placeholder 2"/>
+          <p:cNvSpPr>
+            <a:spLocks noGrp="1"/>
+          </p:cNvSpPr>
+          <p:nvPr>
+            <p:ph type="body" idx="3" sz="quarter"/>
+          </p:nvPr>
+        </p:nvSpPr>
+        <p:spPr/>
+        <p:txBody>
+          <a:bodyPr/>
+          <a:lstStyle/>
+          <a:p>
+            <a:r>
+              <a:t>Teach the CONTENT of the ask — be specific enough that the board can answer with one word. This is</a:t>
+            </a:r>
+          </a:p>
+          <a:p>
+            <a:r>
+              <a:t>the slide that makes §11 concrete.</a:t>
+            </a:r>
+          </a:p>
+          <a:p>
+            <a:r>
+              <a:t>• Approve the recommended option.</a:t>
+            </a:r>
+          </a:p>
+          <a:p>
+            <a:r>
+              <a:t>• Approve the action plan as the roadmap.</a:t>
+            </a:r>
+          </a:p>
+          <a:p>
+            <a:r>
+              <a:t>• Authorise the budget envelope — the actual figure from their CBA (not "some funding").</a:t>
+            </a:r>
+          </a:p>
+          <a:p>
+            <a:r>
+              <a:t>• List the next steps; defer the high-risk gates to their change-management approval (you're not</a:t>
+            </a:r>
+          </a:p>
+          <a:p>
+            <a:r>
+              <a:t>  asking the board to approve the cutover itself today, just the plan and budget).</a:t>
+            </a:r>
+          </a:p>
+          <a:p>
+            <a:r>
+              <a:t>• The test (accent-bold): the ask should be answerable with a single "approved".</a:t>
+            </a:r>
+          </a:p>
+          <a:p>
+            <a:r>
+              <a:t>Misconception to pre-empt: "asking for the budget means asking approval for every step." No —</a:t>
+            </a:r>
+          </a:p>
+          <a:p>
+            <a:r>
+              <a:t>authorise the envelope and the plan; the high-risk gates get their OWN approval later via change</a:t>
+            </a:r>
+          </a:p>
+          <a:p>
+            <a:r>
+              <a:t>management. Don't over-ask.</a:t>
+            </a:r>
+          </a:p>
+          <a:p>
+            <a:r>
+              <a:t>Question to pose: "Name the three things you're asking YAT's board to approve." (the option, the</a:t>
+            </a:r>
+          </a:p>
+          <a:p>
+            <a:r>
+              <a:t>plan, the budget figure).</a:t>
+            </a:r>
+          </a:p>
+          <a:p>
+            <a:r>
+              <a:t>UoC/AT1 tie: PC 3.3 → AT1 §11 Next Steps and Decision Requested.</a:t>
+            </a:r>
+          </a:p>
+        </p:txBody>
+      </p:sp>
+      <p:sp>
+        <p:nvSpPr>
+          <p:cNvPr id="4" name="Slide Number Placeholder 3"/>
+          <p:cNvSpPr>
+            <a:spLocks noGrp="1"/>
+          </p:cNvSpPr>
+          <p:nvPr>
+            <p:ph type="sldNum" idx="5" sz="quarter"/>
+          </p:nvPr>
+        </p:nvSpPr>
+        <p:spPr/>
+      </p:sp>
+    </p:spTree>
+  </p:cSld>
+  <p:clrMapOvr>
+    <a:masterClrMapping/>
+  </p:clrMapOvr>
+</p:notes>
+</file>
+
+<file path=ppt/notesSlides/notesSlide15.xml><?xml version="1.0" encoding="utf-8"?>
+<p:notes xmlns:a="http://schemas.openxmlformats.org/drawingml/2006/main" xmlns:p="http://schemas.openxmlformats.org/presentationml/2006/main" xmlns:r="http://schemas.openxmlformats.org/officeDocument/2006/relationships">
+  <p:cSld>
+    <p:spTree>
+      <p:nvGrpSpPr>
+        <p:cNvPr id="1" name=""/>
+        <p:cNvGrpSpPr/>
+        <p:nvPr/>
+      </p:nvGrpSpPr>
+      <p:grpSpPr>
+        <a:xfrm>
+          <a:off x="0" y="0"/>
+          <a:ext cx="0" cy="0"/>
+          <a:chOff x="0" y="0"/>
+          <a:chExt cx="0" cy="0"/>
+        </a:xfrm>
+      </p:grpSpPr>
+      <p:sp>
+        <p:nvSpPr>
+          <p:cNvPr id="2" name="Slide Image Placeholder 1"/>
+          <p:cNvSpPr>
+            <a:spLocks noGrp="1"/>
+          </p:cNvSpPr>
+          <p:nvPr>
+            <p:ph type="sldImg" idx="2"/>
+          </p:nvPr>
+        </p:nvSpPr>
+        <p:spPr/>
+      </p:sp>
+      <p:sp>
+        <p:nvSpPr>
+          <p:cNvPr id="3" name="Notes Placeholder 2"/>
+          <p:cNvSpPr>
+            <a:spLocks noGrp="1"/>
+          </p:cNvSpPr>
+          <p:nvPr>
+            <p:ph type="body" idx="3" sz="quarter"/>
+          </p:nvPr>
+        </p:nvSpPr>
+        <p:spPr/>
+        <p:txBody>
+          <a:bodyPr/>
+          <a:lstStyle/>
+          <a:p>
+            <a:r>
+              <a:t>Facilitation — the final build task; it COMPLETES the written practice business case. Short and</a:t>
+            </a:r>
+          </a:p>
+          <a:p>
+            <a:r>
+              <a:t>focused. Circulate for specificity — vague asks are the failure here.</a:t>
+            </a:r>
+          </a:p>
+          <a:p>
+            <a:r>
+              <a:t>Tell students: "In your working copy of the Business Case, add the Next Steps and Decision</a:t>
+            </a:r>
+          </a:p>
+          <a:p>
+            <a:r>
+              <a:t>Requested section for the YAT Accounting System — this completes your written business case. A</a:t>
+            </a:r>
+          </a:p>
+          <a:p>
+            <a:r>
+              <a:t>specific, answerable ask: name the option, the plan, and the budget figure."</a:t>
+            </a:r>
+          </a:p>
+          <a:p>
+            <a:r>
+              <a:t>Steps (put on the board):</a:t>
+            </a:r>
+          </a:p>
+          <a:p>
+            <a:r>
+              <a:t>1. State the specific decisions you're asking the board to make (option, plan, budget).</a:t>
+            </a:r>
+          </a:p>
+          <a:p>
+            <a:r>
+              <a:t>2. List the immediate next steps.</a:t>
+            </a:r>
+          </a:p>
+          <a:p>
+            <a:r>
+              <a:t>3. Note how the high-risk steps route through the change-management procedure.</a:t>
+            </a:r>
+          </a:p>
+          <a:p>
+            <a:r>
+              <a:t>Must produce: a ~½-page Next Steps &amp; Decision Requested section — a specific, answerable ask</a:t>
+            </a:r>
+          </a:p>
+          <a:p>
+            <a:r>
+              <a:t>(option + plan + budget figure) with next steps and governance routing. With this, the written</a:t>
+            </a:r>
+          </a:p>
+          <a:p>
+            <a:r>
+              <a:t>practice BC is COMPLETE (§3–§11).</a:t>
+            </a:r>
+          </a:p>
+          <a:p>
+            <a:r>
+              <a:t>Timing: ~15 min then discuss. Where they get stuck: vague asks ("approve some budget") — push them</a:t>
+            </a:r>
+          </a:p>
+          <a:p>
+            <a:r>
+              <a:t>to name the actual CBA figure; or they ask the board to approve the cutover itself — remind them</a:t>
+            </a:r>
+          </a:p>
+          <a:p>
+            <a:r>
+              <a:t>high-risk gates route through change management, not this ask.</a:t>
+            </a:r>
+          </a:p>
+          <a:p>
+            <a:r>
+              <a:t>Share-back prompt: "Read me your ask in one sentence — could the board answer it with a single</a:t>
+            </a:r>
+          </a:p>
+          <a:p>
+            <a:r>
+              <a:t>'approved'?"</a:t>
+            </a:r>
+          </a:p>
+          <a:p>
+            <a:r>
+              <a:t>No-leakage note: PRACTICE on Ledgerline; AT1 assesses the same §11 on the LMS — comparable, not</a:t>
+            </a:r>
+          </a:p>
+          <a:p>
+            <a:r>
+              <a:t>identical. Mark the milestone: their practice case is now written end to end.</a:t>
+            </a:r>
+          </a:p>
+          <a:p>
+            <a:r>
+              <a:t>UoC/AT1 tie: PC 3.3 → AT1 Part A §11 (Topic 5 then DELIVERS the pitch — PC 3.3's live approval).</a:t>
+            </a:r>
+          </a:p>
+        </p:txBody>
+      </p:sp>
+      <p:sp>
+        <p:nvSpPr>
+          <p:cNvPr id="4" name="Slide Number Placeholder 3"/>
+          <p:cNvSpPr>
+            <a:spLocks noGrp="1"/>
+          </p:cNvSpPr>
+          <p:nvPr>
+            <p:ph type="sldNum" idx="5" sz="quarter"/>
+          </p:nvPr>
+        </p:nvSpPr>
+        <p:spPr/>
+      </p:sp>
+    </p:spTree>
+  </p:cSld>
+  <p:clrMapOvr>
+    <a:masterClrMapping/>
+  </p:clrMapOvr>
+</p:notes>
+</file>
+
+<file path=ppt/notesSlides/notesSlide2.xml><?xml version="1.0" encoding="utf-8"?>
+<p:notes xmlns:a="http://schemas.openxmlformats.org/drawingml/2006/main" xmlns:p="http://schemas.openxmlformats.org/presentationml/2006/main" xmlns:r="http://schemas.openxmlformats.org/officeDocument/2006/relationships">
+  <p:cSld>
+    <p:spTree>
+      <p:nvGrpSpPr>
+        <p:cNvPr id="1" name=""/>
+        <p:cNvGrpSpPr/>
+        <p:nvPr/>
+      </p:nvGrpSpPr>
+      <p:grpSpPr>
+        <a:xfrm>
+          <a:off x="0" y="0"/>
+          <a:ext cx="0" cy="0"/>
+          <a:chOff x="0" y="0"/>
+          <a:chExt cx="0" cy="0"/>
+        </a:xfrm>
+      </p:grpSpPr>
+      <p:sp>
+        <p:nvSpPr>
+          <p:cNvPr id="2" name="Slide Image Placeholder 1"/>
+          <p:cNvSpPr>
+            <a:spLocks noGrp="1"/>
+          </p:cNvSpPr>
+          <p:nvPr>
+            <p:ph type="sldImg" idx="2"/>
+          </p:nvPr>
+        </p:nvSpPr>
+        <p:spPr/>
+      </p:sp>
+      <p:sp>
+        <p:nvSpPr>
+          <p:cNvPr id="3" name="Notes Placeholder 2"/>
+          <p:cNvSpPr>
+            <a:spLocks noGrp="1"/>
+          </p:cNvSpPr>
+          <p:nvPr>
+            <p:ph type="body" idx="3" sz="quarter"/>
+          </p:nvPr>
+        </p:nvSpPr>
+        <p:spPr/>
+        <p:txBody>
+          <a:bodyPr/>
+          <a:lstStyle/>
+          <a:p>
+            <a:r>
+              <a:t>Section 1 opener — the mindset shift from weighing options to advising a decision. Short, but it</a:t>
+            </a:r>
+          </a:p>
+          <a:p>
+            <a:r>
+              <a:t>sets the tone for the whole section.</a:t>
+            </a:r>
+          </a:p>
+          <a:p>
+            <a:r>
+              <a:t>• The turn (accent-bold): evaluation tells you what the options are WORTH; a recommendation says</a:t>
+            </a:r>
+          </a:p>
+          <a:p>
+            <a:r>
+              <a:t>  what to DO. You stop being the analyst and become the advisor.</a:t>
+            </a:r>
+          </a:p>
+          <a:p>
+            <a:r>
+              <a:t>• Reassure the timid student: the board WANTS a clear call — sitting on the fence and listing</a:t>
+            </a:r>
+          </a:p>
+          <a:p>
+            <a:r>
+              <a:t>  options back to them is a non-answer.</a:t>
+            </a:r>
+          </a:p>
+          <a:p>
+            <a:r>
+              <a:t>• The call isn't a leap — it's backed by the CBA and risk work from Topic 3; you're standing on</a:t>
+            </a:r>
+          </a:p>
+          <a:p>
+            <a:r>
+              <a:t>  evidence you've already built.</a:t>
+            </a:r>
+          </a:p>
+          <a:p>
+            <a:r>
+              <a:t>Misconception to pre-empt: "a balanced consultant presents all options equally and lets the board</a:t>
+            </a:r>
+          </a:p>
+          <a:p>
+            <a:r>
+              <a:t>  choose." No — presenting options is Topic 3; the board is paying for your recommendation.</a:t>
+            </a:r>
+          </a:p>
+          <a:p>
+            <a:r>
+              <a:t>Question to pose: "What's the difference between a report that says 'here are three options' and</a:t>
+            </a:r>
+          </a:p>
+          <a:p>
+            <a:r>
+              <a:t>one that says 'do this'?" (the second is advice — and worth more).</a:t>
+            </a:r>
+          </a:p>
+          <a:p>
+            <a:r>
+              <a:t>UoC/AT1 tie: opens PC 2.3 / PE 4 (prioritise + recommend) → AT1 §9 Recommendation.</a:t>
+            </a:r>
+          </a:p>
+        </p:txBody>
+      </p:sp>
+      <p:sp>
+        <p:nvSpPr>
+          <p:cNvPr id="4" name="Slide Number Placeholder 3"/>
+          <p:cNvSpPr>
+            <a:spLocks noGrp="1"/>
+          </p:cNvSpPr>
+          <p:nvPr>
+            <p:ph type="sldNum" idx="5" sz="quarter"/>
+          </p:nvPr>
+        </p:nvSpPr>
+        <p:spPr/>
+      </p:sp>
+    </p:spTree>
+  </p:cSld>
+  <p:clrMapOvr>
+    <a:masterClrMapping/>
+  </p:clrMapOvr>
+</p:notes>
+</file>
+
+<file path=ppt/notesSlides/notesSlide3.xml><?xml version="1.0" encoding="utf-8"?>
+<p:notes xmlns:a="http://schemas.openxmlformats.org/drawingml/2006/main" xmlns:p="http://schemas.openxmlformats.org/presentationml/2006/main" xmlns:r="http://schemas.openxmlformats.org/officeDocument/2006/relationships">
+  <p:cSld>
+    <p:spTree>
+      <p:nvGrpSpPr>
+        <p:cNvPr id="1" name=""/>
+        <p:cNvGrpSpPr/>
+        <p:nvPr/>
+      </p:nvGrpSpPr>
+      <p:grpSpPr>
+        <a:xfrm>
+          <a:off x="0" y="0"/>
+          <a:ext cx="0" cy="0"/>
+          <a:chOff x="0" y="0"/>
+          <a:chExt cx="0" cy="0"/>
+        </a:xfrm>
+      </p:grpSpPr>
+      <p:sp>
+        <p:nvSpPr>
+          <p:cNvPr id="2" name="Slide Image Placeholder 1"/>
+          <p:cNvSpPr>
+            <a:spLocks noGrp="1"/>
+          </p:cNvSpPr>
+          <p:nvPr>
+            <p:ph type="sldImg" idx="2"/>
+          </p:nvPr>
+        </p:nvSpPr>
+        <p:spPr/>
+      </p:sp>
+      <p:sp>
+        <p:nvSpPr>
+          <p:cNvPr id="3" name="Notes Placeholder 2"/>
+          <p:cNvSpPr>
+            <a:spLocks noGrp="1"/>
+          </p:cNvSpPr>
+          <p:nvPr>
+            <p:ph type="body" idx="3" sz="quarter"/>
+          </p:nvPr>
+        </p:nvSpPr>
+        <p:spPr/>
+        <p:txBody>
+          <a:bodyPr/>
+          <a:lstStyle/>
+          <a:p>
+            <a:r>
+              <a:t>Teach prioritisation as the step BEFORE the recommendation — you can't recommend or sequence work</a:t>
+            </a:r>
+          </a:p>
+          <a:p>
+            <a:r>
+              <a:t>you haven't ranked. High-leverage; don't skip past it.</a:t>
+            </a:r>
+          </a:p>
+          <a:p>
+            <a:r>
+              <a:t>• The changes come from their gap analysis (Topic 2/3): rank what matters most, what's urgent,</a:t>
+            </a:r>
+          </a:p>
+          <a:p>
+            <a:r>
+              <a:t>  what can wait.</a:t>
+            </a:r>
+          </a:p>
+          <a:p>
+            <a:r>
+              <a:t>• Give them the lens: impact (against the objectives) versus effort / urgency — a simple 2-axis</a:t>
+            </a:r>
+          </a:p>
+          <a:p>
+            <a:r>
+              <a:t>  sort, not a weighted scoring model.</a:t>
+            </a:r>
+          </a:p>
+          <a:p>
+            <a:r>
+              <a:t>• The payoff (accent-bold): prioritisation makes the plan SEQUENCEABLE later, and it shows the</a:t>
+            </a:r>
+          </a:p>
+          <a:p>
+            <a:r>
+              <a:t>  board you're not "boiling the ocean" — doing everything at once.</a:t>
+            </a:r>
+          </a:p>
+          <a:p>
+            <a:r>
+              <a:t>Misconception to pre-empt: "prioritise = do the cheapest / easiest first." No — high-impact work</a:t>
+            </a:r>
+          </a:p>
+          <a:p>
+            <a:r>
+              <a:t>can be worth doing first even if it's harder; impact leads, effort is the second axis.</a:t>
+            </a:r>
+          </a:p>
+          <a:p>
+            <a:r>
+              <a:t>Question to pose: "If YAT can only fund half of the proposed changes this year, which do you do</a:t>
+            </a:r>
+          </a:p>
+          <a:p>
+            <a:r>
+              <a:t>first — and on what basis?" (impact against the objectives, then urgency).</a:t>
+            </a:r>
+          </a:p>
+          <a:p>
+            <a:r>
+              <a:t>UoC/AT1 tie: PC 2.3 (prioritise proposed changes to assist scheduling) + PE 4 → AT1 §9.</a:t>
+            </a:r>
+          </a:p>
+        </p:txBody>
+      </p:sp>
+      <p:sp>
+        <p:nvSpPr>
+          <p:cNvPr id="4" name="Slide Number Placeholder 3"/>
+          <p:cNvSpPr>
+            <a:spLocks noGrp="1"/>
+          </p:cNvSpPr>
+          <p:nvPr>
+            <p:ph type="sldNum" idx="5" sz="quarter"/>
+          </p:nvPr>
+        </p:nvSpPr>
+        <p:spPr/>
+      </p:sp>
+    </p:spTree>
+  </p:cSld>
+  <p:clrMapOvr>
+    <a:masterClrMapping/>
+  </p:clrMapOvr>
+</p:notes>
+</file>
+
+<file path=ppt/notesSlides/notesSlide4.xml><?xml version="1.0" encoding="utf-8"?>
+<p:notes xmlns:a="http://schemas.openxmlformats.org/drawingml/2006/main" xmlns:p="http://schemas.openxmlformats.org/presentationml/2006/main" xmlns:r="http://schemas.openxmlformats.org/officeDocument/2006/relationships">
+  <p:cSld>
+    <p:spTree>
+      <p:nvGrpSpPr>
+        <p:cNvPr id="1" name=""/>
+        <p:cNvGrpSpPr/>
+        <p:nvPr/>
+      </p:nvGrpSpPr>
+      <p:grpSpPr>
+        <a:xfrm>
+          <a:off x="0" y="0"/>
+          <a:ext cx="0" cy="0"/>
+          <a:chOff x="0" y="0"/>
+          <a:chExt cx="0" cy="0"/>
+        </a:xfrm>
+      </p:grpSpPr>
+      <p:sp>
+        <p:nvSpPr>
+          <p:cNvPr id="2" name="Slide Image Placeholder 1"/>
+          <p:cNvSpPr>
+            <a:spLocks noGrp="1"/>
+          </p:cNvSpPr>
+          <p:nvPr>
+            <p:ph type="sldImg" idx="2"/>
+          </p:nvPr>
+        </p:nvSpPr>
+        <p:spPr/>
+      </p:sp>
+      <p:sp>
+        <p:nvSpPr>
+          <p:cNvPr id="3" name="Notes Placeholder 2"/>
+          <p:cNvSpPr>
+            <a:spLocks noGrp="1"/>
+          </p:cNvSpPr>
+          <p:nvPr>
+            <p:ph type="body" idx="3" sz="quarter"/>
+          </p:nvPr>
+        </p:nvSpPr>
+        <p:spPr/>
+        <p:txBody>
+          <a:bodyPr/>
+          <a:lstStyle/>
+          <a:p>
+            <a:r>
+              <a:t>The heart of the section — teach how to STATE and JUSTIFY the recommendation. Model the "no</a:t>
+            </a:r>
+          </a:p>
+          <a:p>
+            <a:r>
+              <a:t>hedging" tone yourself as you talk.</a:t>
+            </a:r>
+          </a:p>
+          <a:p>
+            <a:r>
+              <a:t>• State the recommended option plainly — one option, no weasel words ("we could possibly consider").</a:t>
+            </a:r>
+          </a:p>
+          <a:p>
+            <a:r>
+              <a:t>• Justify it straight from the evidence they already have: the CBA result (cost over the horizon),</a:t>
+            </a:r>
+          </a:p>
+          <a:p>
+            <a:r>
+              <a:t>  the risk / impact comparison, and alignment with the strategic objectives (§3).</a:t>
+            </a:r>
+          </a:p>
+          <a:p>
+            <a:r>
+              <a:t>• The line that earns trust (accent-bold): NAME the trade-off you're accepting — a recommendation</a:t>
+            </a:r>
+          </a:p>
+          <a:p>
+            <a:r>
+              <a:t>  with no downside reads as naive and the board won't believe it.</a:t>
+            </a:r>
+          </a:p>
+          <a:p>
+            <a:r>
+              <a:t>Misconception to pre-empt: "justifying means re-arguing the whole CBA." No — POINT at the evidence</a:t>
+            </a:r>
+          </a:p>
+          <a:p>
+            <a:r>
+              <a:t>section; the recommendation cites, it doesn't repeat.</a:t>
+            </a:r>
+          </a:p>
+          <a:p>
+            <a:r>
+              <a:t>Question to pose: "You recommend moving Ledgerline to the cloud — what's the honest trade-off</a:t>
+            </a:r>
+          </a:p>
+          <a:p>
+            <a:r>
+              <a:t>you're asking the board to accept?" (e.g. ongoing opex vs owned capex, migration risk).</a:t>
+            </a:r>
+          </a:p>
+          <a:p>
+            <a:r>
+              <a:t>UoC/AT1 tie: PC 2.3 / PE 4 → AT1 §9 — the recommended option with evidence-linked justification.</a:t>
+            </a:r>
+          </a:p>
+        </p:txBody>
+      </p:sp>
+      <p:sp>
+        <p:nvSpPr>
+          <p:cNvPr id="4" name="Slide Number Placeholder 3"/>
+          <p:cNvSpPr>
+            <a:spLocks noGrp="1"/>
+          </p:cNvSpPr>
+          <p:nvPr>
+            <p:ph type="sldNum" idx="5" sz="quarter"/>
+          </p:nvPr>
+        </p:nvSpPr>
+        <p:spPr/>
+      </p:sp>
+    </p:spTree>
+  </p:cSld>
+  <p:clrMapOvr>
+    <a:masterClrMapping/>
+  </p:clrMapOvr>
+</p:notes>
+</file>
+
+<file path=ppt/notesSlides/notesSlide5.xml><?xml version="1.0" encoding="utf-8"?>
+<p:notes xmlns:a="http://schemas.openxmlformats.org/drawingml/2006/main" xmlns:p="http://schemas.openxmlformats.org/presentationml/2006/main" xmlns:r="http://schemas.openxmlformats.org/officeDocument/2006/relationships">
+  <p:cSld>
+    <p:spTree>
+      <p:nvGrpSpPr>
+        <p:cNvPr id="1" name=""/>
+        <p:cNvGrpSpPr/>
+        <p:nvPr/>
+      </p:nvGrpSpPr>
+      <p:grpSpPr>
+        <a:xfrm>
+          <a:off x="0" y="0"/>
+          <a:ext cx="0" cy="0"/>
+          <a:chOff x="0" y="0"/>
+          <a:chExt cx="0" cy="0"/>
+        </a:xfrm>
+      </p:grpSpPr>
+      <p:sp>
+        <p:nvSpPr>
+          <p:cNvPr id="2" name="Slide Image Placeholder 1"/>
+          <p:cNvSpPr>
+            <a:spLocks noGrp="1"/>
+          </p:cNvSpPr>
+          <p:nvPr>
+            <p:ph type="sldImg" idx="2"/>
+          </p:nvPr>
+        </p:nvSpPr>
+        <p:spPr/>
+      </p:sp>
+      <p:sp>
+        <p:nvSpPr>
+          <p:cNvPr id="3" name="Notes Placeholder 2"/>
+          <p:cNvSpPr>
+            <a:spLocks noGrp="1"/>
+          </p:cNvSpPr>
+          <p:nvPr>
+            <p:ph type="body" idx="3" sz="quarter"/>
+          </p:nvPr>
+        </p:nvSpPr>
+        <p:spPr/>
+        <p:txBody>
+          <a:bodyPr/>
+          <a:lstStyle/>
+          <a:p>
+            <a:r>
+              <a:t>A checklist slide — the four marks of a recommendation that lands. Use it as the quality bar they</a:t>
+            </a:r>
+          </a:p>
+          <a:p>
+            <a:r>
+              <a:t>self-check the activity against.</a:t>
+            </a:r>
+          </a:p>
+          <a:p>
+            <a:r>
+              <a:t>• Decisive — one clear recommended option, not a shortlist.</a:t>
+            </a:r>
+          </a:p>
+          <a:p>
+            <a:r>
+              <a:t>• Evidence-linked — every reason traces back to their CBA / risk / strategy work (nothing new</a:t>
+            </a:r>
+          </a:p>
+          <a:p>
+            <a:r>
+              <a:t>  invented here).</a:t>
+            </a:r>
+          </a:p>
+          <a:p>
+            <a:r>
+              <a:t>• Honest — names the trade-off and why it's acceptable.</a:t>
+            </a:r>
+          </a:p>
+          <a:p>
+            <a:r>
+              <a:t>• Actionable (accent-bold) — it leads naturally into the plan; a recommendation you can't act on</a:t>
+            </a:r>
+          </a:p>
+          <a:p>
+            <a:r>
+              <a:t>  isn't finished.</a:t>
+            </a:r>
+          </a:p>
+          <a:p>
+            <a:r>
+              <a:t>Misconception to pre-empt: "more reasons = stronger." No — a few reasons that each trace to real</a:t>
+            </a:r>
+          </a:p>
+          <a:p>
+            <a:r>
+              <a:t>evidence beat a long list of assertions; padding weakens it.</a:t>
+            </a:r>
+          </a:p>
+          <a:p>
+            <a:r>
+              <a:t>Question to pose: "Which of these four is the one students most often miss?" (honest — naming the</a:t>
+            </a:r>
+          </a:p>
+          <a:p>
+            <a:r>
+              <a:t>trade-off; get them to commit to including one).</a:t>
+            </a:r>
+          </a:p>
+          <a:p>
+            <a:r>
+              <a:t>UoC/AT1 tie: this is the quality bar for AT1 §9; a recommendation hitting all four is what the</a:t>
+            </a:r>
+          </a:p>
+          <a:p>
+            <a:r>
+              <a:t>marking grid rewards.</a:t>
+            </a:r>
+          </a:p>
+        </p:txBody>
+      </p:sp>
+      <p:sp>
+        <p:nvSpPr>
+          <p:cNvPr id="4" name="Slide Number Placeholder 3"/>
+          <p:cNvSpPr>
+            <a:spLocks noGrp="1"/>
+          </p:cNvSpPr>
+          <p:nvPr>
+            <p:ph type="sldNum" idx="5" sz="quarter"/>
+          </p:nvPr>
+        </p:nvSpPr>
+        <p:spPr/>
+      </p:sp>
+    </p:spTree>
+  </p:cSld>
+  <p:clrMapOvr>
+    <a:masterClrMapping/>
+  </p:clrMapOvr>
+</p:notes>
+</file>
+
+<file path=ppt/notesSlides/notesSlide6.xml><?xml version="1.0" encoding="utf-8"?>
+<p:notes xmlns:a="http://schemas.openxmlformats.org/drawingml/2006/main" xmlns:p="http://schemas.openxmlformats.org/presentationml/2006/main" xmlns:r="http://schemas.openxmlformats.org/officeDocument/2006/relationships">
+  <p:cSld>
+    <p:spTree>
+      <p:nvGrpSpPr>
+        <p:cNvPr id="1" name=""/>
+        <p:cNvGrpSpPr/>
+        <p:nvPr/>
+      </p:nvGrpSpPr>
+      <p:grpSpPr>
+        <a:xfrm>
+          <a:off x="0" y="0"/>
+          <a:ext cx="0" cy="0"/>
+          <a:chOff x="0" y="0"/>
+          <a:chExt cx="0" cy="0"/>
+        </a:xfrm>
+      </p:grpSpPr>
+      <p:sp>
+        <p:nvSpPr>
+          <p:cNvPr id="2" name="Slide Image Placeholder 1"/>
+          <p:cNvSpPr>
+            <a:spLocks noGrp="1"/>
+          </p:cNvSpPr>
+          <p:nvPr>
+            <p:ph type="sldImg" idx="2"/>
+          </p:nvPr>
+        </p:nvSpPr>
+        <p:spPr/>
+      </p:sp>
+      <p:sp>
+        <p:nvSpPr>
+          <p:cNvPr id="3" name="Notes Placeholder 2"/>
+          <p:cNvSpPr>
+            <a:spLocks noGrp="1"/>
+          </p:cNvSpPr>
+          <p:nvPr>
+            <p:ph type="body" idx="3" sz="quarter"/>
+          </p:nvPr>
+        </p:nvSpPr>
+        <p:spPr/>
+        <p:txBody>
+          <a:bodyPr/>
+          <a:lstStyle/>
+          <a:p>
+            <a:r>
+              <a:t>Facilitation — first build task of the Topic. They add §9 to the SAME practice business case they</a:t>
+            </a:r>
+          </a:p>
+          <a:p>
+            <a:r>
+              <a:t>started in Topic 2. Circulate; this is where analyst-to-advisor becomes real.</a:t>
+            </a:r>
+          </a:p>
+          <a:p>
+            <a:r>
+              <a:t>Tell students: "In your working copy of the Business Case, add the Recommendation section for the</a:t>
+            </a:r>
+          </a:p>
+          <a:p>
+            <a:r>
+              <a:t>YAT Accounting System (Ledgerline). Recommend, don't re-argue — point at the evidence you already</a:t>
+            </a:r>
+          </a:p>
+          <a:p>
+            <a:r>
+              <a:t>built in Topic 3."</a:t>
+            </a:r>
+          </a:p>
+          <a:p>
+            <a:r>
+              <a:t>Steps (put on the board):</a:t>
+            </a:r>
+          </a:p>
+          <a:p>
+            <a:r>
+              <a:t>1. Prioritise your proposed changes (from your gap analysis) — impact vs effort/urgency.</a:t>
+            </a:r>
+          </a:p>
+          <a:p>
+            <a:r>
+              <a:t>2. State the recommended option plainly — one option.</a:t>
+            </a:r>
+          </a:p>
+          <a:p>
+            <a:r>
+              <a:t>3. Justify it from your CBA + risk + strategic alignment — CITE your own earlier sections.</a:t>
+            </a:r>
+          </a:p>
+          <a:p>
+            <a:r>
+              <a:t>4. Name the trade-off you're accepting.</a:t>
+            </a:r>
+          </a:p>
+          <a:p>
+            <a:r>
+              <a:t>Must produce: a ~½-page Recommendation section added to their practice BC — a prioritised call</a:t>
+            </a:r>
+          </a:p>
+          <a:p>
+            <a:r>
+              <a:t>with evidence-linked justification and a named trade-off.</a:t>
+            </a:r>
+          </a:p>
+          <a:p>
+            <a:r>
+              <a:t>Timing: ~20 min then discuss. Where they get stuck: they re-argue the whole CBA instead of citing</a:t>
+            </a:r>
+          </a:p>
+          <a:p>
+            <a:r>
+              <a:t>it, or they hedge with two options — push them to pick ONE and point back at their evidence.</a:t>
+            </a:r>
+          </a:p>
+          <a:p>
+            <a:r>
+              <a:t>Share-back prompt: take two recommendations and ask the room which trade-off is more honest.</a:t>
+            </a:r>
+          </a:p>
+          <a:p>
+            <a:r>
+              <a:t>No-leakage note: this is PRACTICE on Ledgerline; AT1 assesses the same §9 skill on the LMS —</a:t>
+            </a:r>
+          </a:p>
+          <a:p>
+            <a:r>
+              <a:t>comparable, not identical. Keep them on the practice case.</a:t>
+            </a:r>
+          </a:p>
+          <a:p>
+            <a:r>
+              <a:t>UoC/AT1 tie: PC 2.3 / PE 4 → AT1 Part A §9.</a:t>
+            </a:r>
+          </a:p>
+        </p:txBody>
+      </p:sp>
+      <p:sp>
+        <p:nvSpPr>
+          <p:cNvPr id="4" name="Slide Number Placeholder 3"/>
+          <p:cNvSpPr>
+            <a:spLocks noGrp="1"/>
+          </p:cNvSpPr>
+          <p:nvPr>
+            <p:ph type="sldNum" idx="5" sz="quarter"/>
+          </p:nvPr>
+        </p:nvSpPr>
+        <p:spPr/>
+      </p:sp>
+    </p:spTree>
+  </p:cSld>
+  <p:clrMapOvr>
+    <a:masterClrMapping/>
+  </p:clrMapOvr>
+</p:notes>
+</file>
+
+<file path=ppt/notesSlides/notesSlide7.xml><?xml version="1.0" encoding="utf-8"?>
+<p:notes xmlns:a="http://schemas.openxmlformats.org/drawingml/2006/main" xmlns:p="http://schemas.openxmlformats.org/presentationml/2006/main" xmlns:r="http://schemas.openxmlformats.org/officeDocument/2006/relationships">
+  <p:cSld>
+    <p:spTree>
+      <p:nvGrpSpPr>
+        <p:cNvPr id="1" name=""/>
+        <p:cNvGrpSpPr/>
+        <p:nvPr/>
+      </p:nvGrpSpPr>
+      <p:grpSpPr>
+        <a:xfrm>
+          <a:off x="0" y="0"/>
+          <a:ext cx="0" cy="0"/>
+          <a:chOff x="0" y="0"/>
+          <a:chExt cx="0" cy="0"/>
+        </a:xfrm>
+      </p:grpSpPr>
+      <p:sp>
+        <p:nvSpPr>
+          <p:cNvPr id="2" name="Slide Image Placeholder 1"/>
+          <p:cNvSpPr>
+            <a:spLocks noGrp="1"/>
+          </p:cNvSpPr>
+          <p:nvPr>
+            <p:ph type="sldImg" idx="2"/>
+          </p:nvPr>
+        </p:nvSpPr>
+        <p:spPr/>
+      </p:sp>
+      <p:sp>
+        <p:nvSpPr>
+          <p:cNvPr id="3" name="Notes Placeholder 2"/>
+          <p:cNvSpPr>
+            <a:spLocks noGrp="1"/>
+          </p:cNvSpPr>
+          <p:nvPr>
+            <p:ph type="body" idx="3" sz="quarter"/>
+          </p:nvPr>
+        </p:nvSpPr>
+        <p:spPr/>
+        <p:txBody>
+          <a:bodyPr/>
+          <a:lstStyle/>
+          <a:p>
+            <a:r>
+              <a:t>Section 2 opener — the purpose of the action plan before its parts. Keep it to the "why" so the</a:t>
+            </a:r>
+          </a:p>
+          <a:p>
+            <a:r>
+              <a:t>parts slide next has a job to do.</a:t>
+            </a:r>
+          </a:p>
+          <a:p>
+            <a:r>
+              <a:t>• The distinction (walk it slowly): a recommendation says WHAT and WHY; the action plan says HOW</a:t>
+            </a:r>
+          </a:p>
+          <a:p>
+            <a:r>
+              <a:t>  and WHEN. Two different questions.</a:t>
+            </a:r>
+          </a:p>
+          <a:p>
+            <a:r>
+              <a:t>• It turns a board's "yes" into execution the organisation can actually run — a decision no one can</a:t>
+            </a:r>
+          </a:p>
+          <a:p>
+            <a:r>
+              <a:t>  act on is worthless.</a:t>
+            </a:r>
+          </a:p>
+          <a:p>
+            <a:r>
+              <a:t>• And (accent-bold) it PROVES the recommendation is feasible — a plan that holds together is</a:t>
+            </a:r>
+          </a:p>
+          <a:p>
+            <a:r>
+              <a:t>  evidence the call was realistic.</a:t>
+            </a:r>
+          </a:p>
+          <a:p>
+            <a:r>
+              <a:t>Misconception to pre-empt: "the plan is where I design the whole solution." No — at AT1 level it's</a:t>
+            </a:r>
+          </a:p>
+          <a:p>
+            <a:r>
+              <a:t>a board-ready roadmap (phases, milestones, metrics), not a full project plan with a Gantt and</a:t>
+            </a:r>
+          </a:p>
+          <a:p>
+            <a:r>
+              <a:t>resourcing.</a:t>
+            </a:r>
+          </a:p>
+          <a:p>
+            <a:r>
+              <a:t>Question to pose: "The board says yes to moving Ledgerline — what do they now need from you before</a:t>
+            </a:r>
+          </a:p>
+          <a:p>
+            <a:r>
+              <a:t>anyone lifts a finger?" (how it happens and when — the plan).</a:t>
+            </a:r>
+          </a:p>
+          <a:p>
+            <a:r>
+              <a:t>UoC/AT1 tie: opens PC 3.1 / 3.2, PE 6, KE 1 → AT1 §10 Action Plan.</a:t>
+            </a:r>
+          </a:p>
+        </p:txBody>
+      </p:sp>
+      <p:sp>
+        <p:nvSpPr>
+          <p:cNvPr id="4" name="Slide Number Placeholder 3"/>
+          <p:cNvSpPr>
+            <a:spLocks noGrp="1"/>
+          </p:cNvSpPr>
+          <p:nvPr>
+            <p:ph type="sldNum" idx="5" sz="quarter"/>
+          </p:nvPr>
+        </p:nvSpPr>
+        <p:spPr/>
+      </p:sp>
+    </p:spTree>
+  </p:cSld>
+  <p:clrMapOvr>
+    <a:masterClrMapping/>
+  </p:clrMapOvr>
+</p:notes>
+</file>
+
+<file path=ppt/notesSlides/notesSlide8.xml><?xml version="1.0" encoding="utf-8"?>
+<p:notes xmlns:a="http://schemas.openxmlformats.org/drawingml/2006/main" xmlns:p="http://schemas.openxmlformats.org/presentationml/2006/main" xmlns:r="http://schemas.openxmlformats.org/officeDocument/2006/relationships">
+  <p:cSld>
+    <p:spTree>
+      <p:nvGrpSpPr>
+        <p:cNvPr id="1" name=""/>
+        <p:cNvGrpSpPr/>
+        <p:nvPr/>
+      </p:nvGrpSpPr>
+      <p:grpSpPr>
+        <a:xfrm>
+          <a:off x="0" y="0"/>
+          <a:ext cx="0" cy="0"/>
+          <a:chOff x="0" y="0"/>
+          <a:chExt cx="0" cy="0"/>
+        </a:xfrm>
+      </p:grpSpPr>
+      <p:sp>
+        <p:nvSpPr>
+          <p:cNvPr id="2" name="Slide Image Placeholder 1"/>
+          <p:cNvSpPr>
+            <a:spLocks noGrp="1"/>
+          </p:cNvSpPr>
+          <p:nvPr>
+            <p:ph type="sldImg" idx="2"/>
+          </p:nvPr>
+        </p:nvSpPr>
+        <p:spPr/>
+      </p:sp>
+      <p:sp>
+        <p:nvSpPr>
+          <p:cNvPr id="3" name="Notes Placeholder 2"/>
+          <p:cNvSpPr>
+            <a:spLocks noGrp="1"/>
+          </p:cNvSpPr>
+          <p:nvPr>
+            <p:ph type="body" idx="3" sz="quarter"/>
+          </p:nvPr>
+        </p:nvSpPr>
+        <p:spPr/>
+        <p:txBody>
+          <a:bodyPr/>
+          <a:lstStyle/>
+          <a:p>
+            <a:r>
+              <a:t>The structural spine of Section 2 — the five parts that BECOME the AT1 §10 Action Plan section.</a:t>
+            </a:r>
+          </a:p>
+          <a:p>
+            <a:r>
+              <a:t>Walk each briefly; the following slides go deeper on the hard three.</a:t>
+            </a:r>
+          </a:p>
+          <a:p>
+            <a:r>
+              <a:t>• 1. Prioritised changes — what gets done, in priority order (carries straight from Section 1).</a:t>
+            </a:r>
+          </a:p>
+          <a:p>
+            <a:r>
+              <a:t>• 2. Implementation schedule — phases / sequence / timeframe.</a:t>
+            </a:r>
+          </a:p>
+          <a:p>
+            <a:r>
+              <a:t>• 3. Standards, targets &amp; success metrics — how you'll know it worked.</a:t>
+            </a:r>
+          </a:p>
+          <a:p>
+            <a:r>
+              <a:t>• 4. Implementation methods — how each change is actually delivered.</a:t>
+            </a:r>
+          </a:p>
+          <a:p>
+            <a:r>
+              <a:t>• 5. Alignment with the change-management procedure — routing through governance.</a:t>
+            </a:r>
+          </a:p>
+          <a:p>
+            <a:r>
+              <a:t>Tell them this list IS the section skeleton — five headings they'll fill in the activity.</a:t>
+            </a:r>
+          </a:p>
+          <a:p>
+            <a:r>
+              <a:t>Misconception to pre-empt: "a schedule alone is an action plan." No — a plan with dates but no</a:t>
+            </a:r>
+          </a:p>
+          <a:p>
+            <a:r>
+              <a:t>standards, methods or governance is a wish-list; all five parts are needed.</a:t>
+            </a:r>
+          </a:p>
+          <a:p>
+            <a:r>
+              <a:t>Question to pose: "Which of these five do students most often forget?" (standards/targets/metrics,</a:t>
+            </a:r>
+          </a:p>
+          <a:p>
+            <a:r>
+              <a:t>and change-management alignment — the two that make it accountable and real).</a:t>
+            </a:r>
+          </a:p>
+          <a:p>
+            <a:r>
+              <a:t>UoC/AT1 tie: KE 1 (key sections of an action plan) + PC 3.1 / 3.2, PE 6 → AT1 §10.1–§10.5.</a:t>
+            </a:r>
+          </a:p>
+        </p:txBody>
+      </p:sp>
+      <p:sp>
+        <p:nvSpPr>
+          <p:cNvPr id="4" name="Slide Number Placeholder 3"/>
+          <p:cNvSpPr>
+            <a:spLocks noGrp="1"/>
+          </p:cNvSpPr>
+          <p:nvPr>
+            <p:ph type="sldNum" idx="5" sz="quarter"/>
+          </p:nvPr>
+        </p:nvSpPr>
+        <p:spPr/>
+      </p:sp>
+    </p:spTree>
+  </p:cSld>
+  <p:clrMapOvr>
+    <a:masterClrMapping/>
+  </p:clrMapOvr>
+</p:notes>
+</file>
+
+<file path=ppt/notesSlides/notesSlide9.xml><?xml version="1.0" encoding="utf-8"?>
+<p:notes xmlns:a="http://schemas.openxmlformats.org/drawingml/2006/main" xmlns:p="http://schemas.openxmlformats.org/presentationml/2006/main" xmlns:r="http://schemas.openxmlformats.org/officeDocument/2006/relationships">
+  <p:cSld>
+    <p:spTree>
+      <p:nvGrpSpPr>
+        <p:cNvPr id="1" name=""/>
+        <p:cNvGrpSpPr/>
+        <p:nvPr/>
+      </p:nvGrpSpPr>
+      <p:grpSpPr>
+        <a:xfrm>
+          <a:off x="0" y="0"/>
+          <a:ext cx="0" cy="0"/>
+          <a:chOff x="0" y="0"/>
+          <a:chExt cx="0" cy="0"/>
+        </a:xfrm>
+      </p:grpSpPr>
+      <p:sp>
+        <p:nvSpPr>
+          <p:cNvPr id="2" name="Slide Image Placeholder 1"/>
+          <p:cNvSpPr>
+            <a:spLocks noGrp="1"/>
+          </p:cNvSpPr>
+          <p:nvPr>
+            <p:ph type="sldImg" idx="2"/>
+          </p:nvPr>
+        </p:nvSpPr>
+        <p:spPr/>
+      </p:sp>
+      <p:sp>
+        <p:nvSpPr>
+          <p:cNvPr id="3" name="Notes Placeholder 2"/>
+          <p:cNvSpPr>
+            <a:spLocks noGrp="1"/>
+          </p:cNvSpPr>
+          <p:nvPr>
+            <p:ph type="body" idx="3" sz="quarter"/>
+          </p:nvPr>
+        </p:nvSpPr>
+        <p:spPr/>
+        <p:txBody>
+          <a:bodyPr/>
+          <a:lstStyle/>
+          <a:p>
+            <a:r>
+              <a:t>Teach how to turn the prioritised list into a phased schedule — the "when". Lean on a concrete</a:t>
+            </a:r>
+          </a:p>
+          <a:p>
+            <a:r>
+              <a:t>dependency so it lands.</a:t>
+            </a:r>
+          </a:p>
+          <a:p>
+            <a:r>
+              <a:t>• Order the work by priority AND dependency — make it tangible: you can't migrate data before the</a:t>
+            </a:r>
+          </a:p>
+          <a:p>
+            <a:r>
+              <a:t>  target environment exists. Dependencies constrain the order, not just priority.</a:t>
+            </a:r>
+          </a:p>
+          <a:p>
+            <a:r>
+              <a:t>• Group the work into phases with a realistic timeframe — not everything in week one.</a:t>
+            </a:r>
+          </a:p>
+          <a:p>
+            <a:r>
+              <a:t>• The level (accent-bold): BOARD-level — phases and milestones, show the critical path; NOT a</a:t>
+            </a:r>
+          </a:p>
+          <a:p>
+            <a:r>
+              <a:t>  day-by-day Gantt. Right altitude is the skill here.</a:t>
+            </a:r>
+          </a:p>
+          <a:p>
+            <a:r>
+              <a:t>Misconception to pre-empt: "more detail is more professional." At board level the opposite is true</a:t>
+            </a:r>
+          </a:p>
+          <a:p>
+            <a:r>
+              <a:t>— a day-by-day task list buries the decision; phases and milestones communicate.</a:t>
+            </a:r>
+          </a:p>
+          <a:p>
+            <a:r>
+              <a:t>Question to pose: "What in a Ledgerline migration simply CAN'T happen until something else is done</a:t>
+            </a:r>
+          </a:p>
+          <a:p>
+            <a:r>
+              <a:t>first?" (build the target before cutover; test before go-live) — that's a dependency.</a:t>
+            </a:r>
+          </a:p>
+          <a:p>
+            <a:r>
+              <a:t>UoC/AT1 tie: PC 3.1 (prioritised schedule consistent with policy/procedures) → AT1 §10.</a:t>
+            </a:r>
+          </a:p>
+        </p:txBody>
+      </p:sp>
+      <p:sp>
+        <p:nvSpPr>
+          <p:cNvPr id="4" name="Slide Number Placeholder 3"/>
+          <p:cNvSpPr>
+            <a:spLocks noGrp="1"/>
+          </p:cNvSpPr>
+          <p:nvPr>
+            <p:ph type="sldNum" idx="5" sz="quarter"/>
+          </p:nvPr>
+        </p:nvSpPr>
+        <p:spPr/>
+      </p:sp>
+    </p:spTree>
+  </p:cSld>
+  <p:clrMapOvr>
+    <a:masterClrMapping/>
+  </p:clrMapOvr>
+</p:notes>
 </file>
 
 <file path=ppt/slideLayouts/slideLayout1.xml><?xml version="1.0" encoding="utf-8"?>
@@ -12799,4 +15194,324 @@
   </a:objectDefaults>
   <a:extraClrSchemeLst/>
 </a:theme>
+</file>
+
+<file path=ppt/theme/theme2.xml><?xml version="1.0" encoding="utf-8"?>
+<a:theme xmlns:a="http://schemas.openxmlformats.org/drawingml/2006/main" name="Office Theme">
+  <a:themeElements>
+    <a:clrScheme name="Office">
+      <a:dk1>
+        <a:sysClr val="windowText" lastClr="000000"/>
+      </a:dk1>
+      <a:lt1>
+        <a:sysClr val="window" lastClr="FFFFFF"/>
+      </a:lt1>
+      <a:dk2>
+        <a:srgbClr val="1F497D"/>
+      </a:dk2>
+      <a:lt2>
+        <a:srgbClr val="EEECE1"/>
+      </a:lt2>
+      <a:accent1>
+        <a:srgbClr val="4F81BD"/>
+      </a:accent1>
+      <a:accent2>
+        <a:srgbClr val="C0504D"/>
+      </a:accent2>
+      <a:accent3>
+        <a:srgbClr val="9BBB59"/>
+      </a:accent3>
+      <a:accent4>
+        <a:srgbClr val="8064A2"/>
+      </a:accent4>
+      <a:accent5>
+        <a:srgbClr val="4BACC6"/>
+      </a:accent5>
+      <a:accent6>
+        <a:srgbClr val="F79646"/>
+      </a:accent6>
+      <a:hlink>
+        <a:srgbClr val="0000FF"/>
+      </a:hlink>
+      <a:folHlink>
+        <a:srgbClr val="800080"/>
+      </a:folHlink>
+    </a:clrScheme>
+    <a:fontScheme name="Office">
+      <a:majorFont>
+        <a:latin typeface="Calibri"/>
+        <a:ea typeface=""/>
+        <a:cs typeface=""/>
+        <a:font script="Jpan" typeface="ＭＳ Ｐゴシック"/>
+        <a:font script="Hang" typeface="맑은 고딕"/>
+        <a:font script="Hans" typeface="宋体"/>
+        <a:font script="Hant" typeface="新細明體"/>
+        <a:font script="Arab" typeface="Times New Roman"/>
+        <a:font script="Hebr" typeface="Times New Roman"/>
+        <a:font script="Thai" typeface="Angsana New"/>
+        <a:font script="Ethi" typeface="Nyala"/>
+        <a:font script="Beng" typeface="Vrinda"/>
+        <a:font script="Gujr" typeface="Shruti"/>
+        <a:font script="Khmr" typeface="MoolBoran"/>
+        <a:font script="Knda" typeface="Tunga"/>
+        <a:font script="Guru" typeface="Raavi"/>
+        <a:font script="Cans" typeface="Euphemia"/>
+        <a:font script="Cher" typeface="Plantagenet Cherokee"/>
+        <a:font script="Yiii" typeface="Microsoft Yi Baiti"/>
+        <a:font script="Tibt" typeface="Microsoft Himalaya"/>
+        <a:font script="Thaa" typeface="MV Boli"/>
+        <a:font script="Deva" typeface="Mangal"/>
+        <a:font script="Telu" typeface="Gautami"/>
+        <a:font script="Taml" typeface="Latha"/>
+        <a:font script="Syrc" typeface="Estrangelo Edessa"/>
+        <a:font script="Orya" typeface="Kalinga"/>
+        <a:font script="Mlym" typeface="Kartika"/>
+        <a:font script="Laoo" typeface="DokChampa"/>
+        <a:font script="Sinh" typeface="Iskoola Pota"/>
+        <a:font script="Mong" typeface="Mongolian Baiti"/>
+        <a:font script="Viet" typeface="Times New Roman"/>
+        <a:font script="Uigh" typeface="Microsoft Uighur"/>
+        <a:font script="Geor" typeface="Sylfaen"/>
+      </a:majorFont>
+      <a:minorFont>
+        <a:latin typeface="Calibri"/>
+        <a:ea typeface=""/>
+        <a:cs typeface=""/>
+        <a:font script="Jpan" typeface="ＭＳ Ｐゴシック"/>
+        <a:font script="Hang" typeface="맑은 고딕"/>
+        <a:font script="Hans" typeface="宋体"/>
+        <a:font script="Hant" typeface="新細明體"/>
+        <a:font script="Arab" typeface="Arial"/>
+        <a:font script="Hebr" typeface="Arial"/>
+        <a:font script="Thai" typeface="Cordia New"/>
+        <a:font script="Ethi" typeface="Nyala"/>
+        <a:font script="Beng" typeface="Vrinda"/>
+        <a:font script="Gujr" typeface="Shruti"/>
+        <a:font script="Khmr" typeface="DaunPenh"/>
+        <a:font script="Knda" typeface="Tunga"/>
+        <a:font script="Guru" typeface="Raavi"/>
+        <a:font script="Cans" typeface="Euphemia"/>
+        <a:font script="Cher" typeface="Plantagenet Cherokee"/>
+        <a:font script="Yiii" typeface="Microsoft Yi Baiti"/>
+        <a:font script="Tibt" typeface="Microsoft Himalaya"/>
+        <a:font script="Thaa" typeface="MV Boli"/>
+        <a:font script="Deva" typeface="Mangal"/>
+        <a:font script="Telu" typeface="Gautami"/>
+        <a:font script="Taml" typeface="Latha"/>
+        <a:font script="Syrc" typeface="Estrangelo Edessa"/>
+        <a:font script="Orya" typeface="Kalinga"/>
+        <a:font script="Mlym" typeface="Kartika"/>
+        <a:font script="Laoo" typeface="DokChampa"/>
+        <a:font script="Sinh" typeface="Iskoola Pota"/>
+        <a:font script="Mong" typeface="Mongolian Baiti"/>
+        <a:font script="Viet" typeface="Arial"/>
+        <a:font script="Uigh" typeface="Microsoft Uighur"/>
+        <a:font script="Geor" typeface="Sylfaen"/>
+      </a:minorFont>
+    </a:fontScheme>
+    <a:fmtScheme name="Office">
+      <a:fillStyleLst>
+        <a:solidFill>
+          <a:schemeClr val="phClr"/>
+        </a:solidFill>
+        <a:gradFill rotWithShape="1">
+          <a:gsLst>
+            <a:gs pos="0">
+              <a:schemeClr val="phClr">
+                <a:tint val="50000"/>
+                <a:satMod val="300000"/>
+              </a:schemeClr>
+            </a:gs>
+            <a:gs pos="35000">
+              <a:schemeClr val="phClr">
+                <a:tint val="37000"/>
+                <a:satMod val="300000"/>
+              </a:schemeClr>
+            </a:gs>
+            <a:gs pos="100000">
+              <a:schemeClr val="phClr">
+                <a:tint val="15000"/>
+                <a:satMod val="350000"/>
+              </a:schemeClr>
+            </a:gs>
+          </a:gsLst>
+          <a:lin ang="16200000" scaled="1"/>
+        </a:gradFill>
+        <a:gradFill rotWithShape="1">
+          <a:gsLst>
+            <a:gs pos="0">
+              <a:schemeClr val="phClr">
+                <a:tint val="100000"/>
+                <a:shade val="100000"/>
+                <a:satMod val="130000"/>
+              </a:schemeClr>
+            </a:gs>
+            <a:gs pos="100000">
+              <a:schemeClr val="phClr">
+                <a:tint val="50000"/>
+                <a:shade val="100000"/>
+                <a:satMod val="350000"/>
+              </a:schemeClr>
+            </a:gs>
+          </a:gsLst>
+          <a:lin ang="16200000" scaled="0"/>
+        </a:gradFill>
+      </a:fillStyleLst>
+      <a:lnStyleLst>
+        <a:ln w="9525" cap="flat" cmpd="sng" algn="ctr">
+          <a:solidFill>
+            <a:schemeClr val="phClr">
+              <a:shade val="95000"/>
+              <a:satMod val="105000"/>
+            </a:schemeClr>
+          </a:solidFill>
+          <a:prstDash val="solid"/>
+        </a:ln>
+        <a:ln w="25400" cap="flat" cmpd="sng" algn="ctr">
+          <a:solidFill>
+            <a:schemeClr val="phClr"/>
+          </a:solidFill>
+          <a:prstDash val="solid"/>
+        </a:ln>
+        <a:ln w="38100" cap="flat" cmpd="sng" algn="ctr">
+          <a:solidFill>
+            <a:schemeClr val="phClr"/>
+          </a:solidFill>
+          <a:prstDash val="solid"/>
+        </a:ln>
+      </a:lnStyleLst>
+      <a:effectStyleLst>
+        <a:effectStyle>
+          <a:effectLst>
+            <a:outerShdw blurRad="40000" dist="20000" dir="5400000" rotWithShape="0">
+              <a:srgbClr val="000000">
+                <a:alpha val="38000"/>
+              </a:srgbClr>
+            </a:outerShdw>
+          </a:effectLst>
+        </a:effectStyle>
+        <a:effectStyle>
+          <a:effectLst>
+            <a:outerShdw blurRad="40000" dist="23000" dir="5400000" rotWithShape="0">
+              <a:srgbClr val="000000">
+                <a:alpha val="35000"/>
+              </a:srgbClr>
+            </a:outerShdw>
+          </a:effectLst>
+        </a:effectStyle>
+        <a:effectStyle>
+          <a:effectLst>
+            <a:outerShdw blurRad="40000" dist="23000" dir="5400000" rotWithShape="0">
+              <a:srgbClr val="000000">
+                <a:alpha val="35000"/>
+              </a:srgbClr>
+            </a:outerShdw>
+          </a:effectLst>
+          <a:scene3d>
+            <a:camera prst="orthographicFront">
+              <a:rot lat="0" lon="0" rev="0"/>
+            </a:camera>
+            <a:lightRig rig="threePt" dir="t">
+              <a:rot lat="0" lon="0" rev="1200000"/>
+            </a:lightRig>
+          </a:scene3d>
+          <a:sp3d>
+            <a:bevelT w="63500" h="25400"/>
+          </a:sp3d>
+        </a:effectStyle>
+      </a:effectStyleLst>
+      <a:bgFillStyleLst>
+        <a:solidFill>
+          <a:schemeClr val="phClr"/>
+        </a:solidFill>
+        <a:gradFill rotWithShape="1">
+          <a:gsLst>
+            <a:gs pos="0">
+              <a:schemeClr val="phClr">
+                <a:tint val="40000"/>
+                <a:satMod val="350000"/>
+              </a:schemeClr>
+            </a:gs>
+            <a:gs pos="40000">
+              <a:schemeClr val="phClr">
+                <a:tint val="45000"/>
+                <a:shade val="99000"/>
+                <a:satMod val="350000"/>
+              </a:schemeClr>
+            </a:gs>
+            <a:gs pos="100000">
+              <a:schemeClr val="phClr">
+                <a:shade val="20000"/>
+                <a:satMod val="255000"/>
+              </a:schemeClr>
+            </a:gs>
+          </a:gsLst>
+          <a:path path="circle">
+            <a:fillToRect l="50000" t="-80000" r="50000" b="180000"/>
+          </a:path>
+        </a:gradFill>
+        <a:gradFill rotWithShape="1">
+          <a:gsLst>
+            <a:gs pos="0">
+              <a:schemeClr val="phClr">
+                <a:tint val="80000"/>
+                <a:satMod val="300000"/>
+              </a:schemeClr>
+            </a:gs>
+            <a:gs pos="100000">
+              <a:schemeClr val="phClr">
+                <a:shade val="30000"/>
+                <a:satMod val="200000"/>
+              </a:schemeClr>
+            </a:gs>
+          </a:gsLst>
+          <a:path path="circle">
+            <a:fillToRect l="50000" t="50000" r="50000" b="50000"/>
+          </a:path>
+        </a:gradFill>
+      </a:bgFillStyleLst>
+    </a:fmtScheme>
+  </a:themeElements>
+  <a:objectDefaults>
+    <a:spDef>
+      <a:spPr/>
+      <a:bodyPr/>
+      <a:lstStyle/>
+      <a:style>
+        <a:lnRef idx="1">
+          <a:schemeClr val="accent1"/>
+        </a:lnRef>
+        <a:fillRef idx="3">
+          <a:schemeClr val="accent1"/>
+        </a:fillRef>
+        <a:effectRef idx="2">
+          <a:schemeClr val="accent1"/>
+        </a:effectRef>
+        <a:fontRef idx="minor">
+          <a:schemeClr val="lt1"/>
+        </a:fontRef>
+      </a:style>
+    </a:spDef>
+    <a:lnDef>
+      <a:spPr/>
+      <a:bodyPr/>
+      <a:lstStyle/>
+      <a:style>
+        <a:lnRef idx="2">
+          <a:schemeClr val="accent1"/>
+        </a:lnRef>
+        <a:fillRef idx="0">
+          <a:schemeClr val="accent1"/>
+        </a:fillRef>
+        <a:effectRef idx="1">
+          <a:schemeClr val="accent1"/>
+        </a:effectRef>
+        <a:fontRef idx="minor">
+          <a:schemeClr val="tx1"/>
+        </a:fontRef>
+      </a:style>
+    </a:lnDef>
+  </a:objectDefaults>
+  <a:extraClrSchemeLst/>
+</a:theme>
 </file>
--- a/S1-CL1-Cloud-Design-Build/delivery/topic_04/Topic_04_Slides.pptx
+++ b/S1-CL1-Cloud-Design-Build/delivery/topic_04/Topic_04_Slides.pptx
@@ -539,7 +539,7 @@
           </a:p>
           <a:p>
             <a:r>
-              <a:t>  PLAN — the last analytical third of the business case.</a:t>
+              <a:t>PLAN — the last analytical third of the business case.</a:t>
             </a:r>
           </a:p>
           <a:p>
@@ -549,7 +549,7 @@
           </a:p>
           <a:p>
             <a:r>
-              <a:t>  decision. Each move is one of today's three sections.</a:t>
+              <a:t>decision. Each move is one of today's three sections.</a:t>
             </a:r>
           </a:p>
           <a:p>
@@ -559,7 +559,7 @@
           </a:p>
           <a:p>
             <a:r>
-              <a:t>  build §3–§5, §6–§8, §9–§11). Only the pitch (Topic 5) remains.</a:t>
+              <a:t>build §3–§5, §6–§8, §9–§11). Only the pitch (Topic 5) remains.</a:t>
             </a:r>
           </a:p>
           <a:p>
@@ -679,7 +679,7 @@
           </a:p>
           <a:p>
             <a:r>
-              <a:t>  same rulebooks they met in Topic 1). The plan doesn't invent quality; it references a standard.</a:t>
+              <a:t>same rulebooks they met in Topic 1). The plan doesn't invent quality; it references a standard.</a:t>
             </a:r>
           </a:p>
           <a:p>
@@ -689,7 +689,7 @@
           </a:p>
           <a:p>
             <a:r>
-              <a:t>  numbers, not adjectives.</a:t>
+              <a:t>numbers, not adjectives.</a:t>
             </a:r>
           </a:p>
           <a:p>
@@ -699,7 +699,7 @@
           </a:p>
           <a:p>
             <a:r>
-              <a:t>  implementation succeeded.</a:t>
+              <a:t>implementation succeeded.</a:t>
             </a:r>
           </a:p>
           <a:p>
@@ -814,7 +814,7 @@
           </a:p>
           <a:p>
             <a:r>
-              <a:t>  assessment → approval → change window. Say those stages aloud.</a:t>
+              <a:t>assessment → approval → change window. Say those stages aloud.</a:t>
             </a:r>
           </a:p>
           <a:p>
@@ -824,7 +824,7 @@
           </a:p>
           <a:p>
             <a:r>
-              <a:t>  process — it shows you understand how organisations actually change things.</a:t>
+              <a:t>process — it shows you understand how organisations actually change things.</a:t>
             </a:r>
           </a:p>
           <a:p>
@@ -1094,7 +1094,7 @@
           </a:p>
           <a:p>
             <a:r>
-              <a:t>  dies politely in the minutes.</a:t>
+              <a:t>dies politely in the minutes.</a:t>
             </a:r>
           </a:p>
           <a:p>
@@ -1104,7 +1104,7 @@
           </a:p>
           <a:p>
             <a:r>
-              <a:t>  approved, today. Make saying "yes" a single word.</a:t>
+              <a:t>approved, today. Make saying "yes" a single word.</a:t>
             </a:r>
           </a:p>
           <a:p>
@@ -1234,7 +1234,7 @@
           </a:p>
           <a:p>
             <a:r>
-              <a:t>  asking the board to approve the cutover itself today, just the plan and budget).</a:t>
+              <a:t>asking the board to approve the cutover itself today, just the plan and budget).</a:t>
             </a:r>
           </a:p>
           <a:p>
@@ -1519,7 +1519,7 @@
           </a:p>
           <a:p>
             <a:r>
-              <a:t>  what to DO. You stop being the analyst and become the advisor.</a:t>
+              <a:t>what to DO. You stop being the analyst and become the advisor.</a:t>
             </a:r>
           </a:p>
           <a:p>
@@ -1529,7 +1529,7 @@
           </a:p>
           <a:p>
             <a:r>
-              <a:t>  options back to them is a non-answer.</a:t>
+              <a:t>options back to them is a non-answer.</a:t>
             </a:r>
           </a:p>
           <a:p>
@@ -1539,7 +1539,7 @@
           </a:p>
           <a:p>
             <a:r>
-              <a:t>  evidence you've already built.</a:t>
+              <a:t>evidence you've already built.</a:t>
             </a:r>
           </a:p>
           <a:p>
@@ -1549,7 +1549,7 @@
           </a:p>
           <a:p>
             <a:r>
-              <a:t>  choose." No — presenting options is Topic 3; the board is paying for your recommendation.</a:t>
+              <a:t>choose." No — presenting options is Topic 3; the board is paying for your recommendation.</a:t>
             </a:r>
           </a:p>
           <a:p>
@@ -1649,7 +1649,7 @@
           </a:p>
           <a:p>
             <a:r>
-              <a:t>  what can wait.</a:t>
+              <a:t>what can wait.</a:t>
             </a:r>
           </a:p>
           <a:p>
@@ -1659,7 +1659,7 @@
           </a:p>
           <a:p>
             <a:r>
-              <a:t>  sort, not a weighted scoring model.</a:t>
+              <a:t>sort, not a weighted scoring model.</a:t>
             </a:r>
           </a:p>
           <a:p>
@@ -1669,7 +1669,7 @@
           </a:p>
           <a:p>
             <a:r>
-              <a:t>  board you're not "boiling the ocean" — doing everything at once.</a:t>
+              <a:t>board you're not "boiling the ocean" — doing everything at once.</a:t>
             </a:r>
           </a:p>
           <a:p>
@@ -1784,7 +1784,7 @@
           </a:p>
           <a:p>
             <a:r>
-              <a:t>  the risk / impact comparison, and alignment with the strategic objectives (§3).</a:t>
+              <a:t>the risk / impact comparison, and alignment with the strategic objectives (§3).</a:t>
             </a:r>
           </a:p>
           <a:p>
@@ -1794,7 +1794,7 @@
           </a:p>
           <a:p>
             <a:r>
-              <a:t>  with no downside reads as naive and the board won't believe it.</a:t>
+              <a:t>with no downside reads as naive and the board won't believe it.</a:t>
             </a:r>
           </a:p>
           <a:p>
@@ -1909,7 +1909,7 @@
           </a:p>
           <a:p>
             <a:r>
-              <a:t>  invented here).</a:t>
+              <a:t>invented here).</a:t>
             </a:r>
           </a:p>
           <a:p>
@@ -1924,7 +1924,7 @@
           </a:p>
           <a:p>
             <a:r>
-              <a:t>  isn't finished.</a:t>
+              <a:t>isn't finished.</a:t>
             </a:r>
           </a:p>
           <a:p>
@@ -2194,7 +2194,7 @@
           </a:p>
           <a:p>
             <a:r>
-              <a:t>  and WHEN. Two different questions.</a:t>
+              <a:t>and WHEN. Two different questions.</a:t>
             </a:r>
           </a:p>
           <a:p>
@@ -2204,7 +2204,7 @@
           </a:p>
           <a:p>
             <a:r>
-              <a:t>  act on is worthless.</a:t>
+              <a:t>act on is worthless.</a:t>
             </a:r>
           </a:p>
           <a:p>
@@ -2214,7 +2214,7 @@
           </a:p>
           <a:p>
             <a:r>
-              <a:t>  evidence the call was realistic.</a:t>
+              <a:t>evidence the call was realistic.</a:t>
             </a:r>
           </a:p>
           <a:p>
@@ -2459,7 +2459,7 @@
           </a:p>
           <a:p>
             <a:r>
-              <a:t>  target environment exists. Dependencies constrain the order, not just priority.</a:t>
+              <a:t>target environment exists. Dependencies constrain the order, not just priority.</a:t>
             </a:r>
           </a:p>
           <a:p>
@@ -2474,7 +2474,7 @@
           </a:p>
           <a:p>
             <a:r>
-              <a:t>  day-by-day Gantt. Right altitude is the skill here.</a:t>
+              <a:t>day-by-day Gantt. Right altitude is the skill here.</a:t>
             </a:r>
           </a:p>
           <a:p>
@@ -6160,16 +6160,16 @@
             <a:r>
               <a:rPr sz="2400" b="1" i="0">
                 <a:solidFill>
-                  <a:srgbClr val="27B5CE"/>
+                  <a:srgbClr val="EDAB0C"/>
                 </a:solidFill>
                 <a:latin typeface="Roboto"/>
               </a:rPr>
               <a:t>■  </a:t>
             </a:r>
             <a:r>
-              <a:rPr sz="2400" b="1" i="0">
-                <a:solidFill>
-                  <a:srgbClr val="27B5CE"/>
+              <a:rPr sz="2400" b="0" i="0">
+                <a:solidFill>
+                  <a:srgbClr val="2A2929"/>
                 </a:solidFill>
                 <a:latin typeface="Roboto"/>
               </a:rPr>
@@ -6922,16 +6922,16 @@
             <a:r>
               <a:rPr sz="2400" b="1" i="0">
                 <a:solidFill>
-                  <a:srgbClr val="27B5CE"/>
+                  <a:srgbClr val="EDAB0C"/>
                 </a:solidFill>
                 <a:latin typeface="Roboto"/>
               </a:rPr>
               <a:t>■  </a:t>
             </a:r>
             <a:r>
-              <a:rPr sz="2400" b="1" i="0">
-                <a:solidFill>
-                  <a:srgbClr val="27B5CE"/>
+              <a:rPr sz="2400" b="0" i="0">
+                <a:solidFill>
+                  <a:srgbClr val="2A2929"/>
                 </a:solidFill>
                 <a:latin typeface="Roboto"/>
               </a:rPr>
@@ -7264,16 +7264,16 @@
             <a:r>
               <a:rPr sz="2400" b="1" i="0">
                 <a:solidFill>
-                  <a:srgbClr val="27B5CE"/>
+                  <a:srgbClr val="EDAB0C"/>
                 </a:solidFill>
                 <a:latin typeface="Roboto"/>
               </a:rPr>
               <a:t>■  </a:t>
             </a:r>
             <a:r>
-              <a:rPr sz="2400" b="1" i="0">
-                <a:solidFill>
-                  <a:srgbClr val="27B5CE"/>
+              <a:rPr sz="2400" b="0" i="0">
+                <a:solidFill>
+                  <a:srgbClr val="2A2929"/>
                 </a:solidFill>
                 <a:latin typeface="Roboto"/>
               </a:rPr>
@@ -7637,16 +7637,16 @@
             <a:r>
               <a:rPr sz="2400" b="1" i="0">
                 <a:solidFill>
-                  <a:srgbClr val="27B5CE"/>
+                  <a:srgbClr val="EDAB0C"/>
                 </a:solidFill>
                 <a:latin typeface="Roboto"/>
               </a:rPr>
               <a:t>■  </a:t>
             </a:r>
             <a:r>
-              <a:rPr sz="2400" b="1" i="0">
-                <a:solidFill>
-                  <a:srgbClr val="27B5CE"/>
+              <a:rPr sz="2400" b="0" i="0">
+                <a:solidFill>
+                  <a:srgbClr val="2A2929"/>
                 </a:solidFill>
                 <a:latin typeface="Roboto"/>
               </a:rPr>
@@ -7977,7 +7977,7 @@
               <a:t>■  </a:t>
             </a:r>
             <a:r>
-              <a:rPr sz="1700" b="1" i="0">
+              <a:rPr sz="1700" b="0" i="0">
                 <a:solidFill>
                   <a:srgbClr val="2A2929"/>
                 </a:solidFill>
@@ -8156,7 +8156,7 @@
             <a:r>
               <a:rPr sz="1700" b="1" i="0">
                 <a:solidFill>
-                  <a:srgbClr val="27B5CE"/>
+                  <a:srgbClr val="EDAB0C"/>
                 </a:solidFill>
                 <a:latin typeface="Roboto"/>
               </a:rPr>
@@ -8165,7 +8165,7 @@
             <a:r>
               <a:rPr sz="1700" b="0" i="0">
                 <a:solidFill>
-                  <a:srgbClr val="27B5CE"/>
+                  <a:srgbClr val="2A2929"/>
                 </a:solidFill>
                 <a:latin typeface="Roboto"/>
               </a:rPr>
@@ -9468,16 +9468,16 @@
             <a:r>
               <a:rPr sz="2400" b="1" i="0">
                 <a:solidFill>
-                  <a:srgbClr val="205F61"/>
+                  <a:srgbClr val="EDAB0C"/>
                 </a:solidFill>
                 <a:latin typeface="Roboto"/>
               </a:rPr>
               <a:t>■  </a:t>
             </a:r>
             <a:r>
-              <a:rPr sz="2400" b="1" i="0">
-                <a:solidFill>
-                  <a:srgbClr val="205F61"/>
+              <a:rPr sz="2400" b="0" i="0">
+                <a:solidFill>
+                  <a:srgbClr val="2A2929"/>
                 </a:solidFill>
                 <a:latin typeface="Roboto"/>
               </a:rPr>
@@ -9795,16 +9795,16 @@
             <a:r>
               <a:rPr sz="2400" b="1" i="0">
                 <a:solidFill>
-                  <a:srgbClr val="92268F"/>
+                  <a:srgbClr val="EDAB0C"/>
                 </a:solidFill>
                 <a:latin typeface="Roboto"/>
               </a:rPr>
               <a:t>■  </a:t>
             </a:r>
             <a:r>
-              <a:rPr sz="2400" b="1" i="0">
-                <a:solidFill>
-                  <a:srgbClr val="92268F"/>
+              <a:rPr sz="2400" b="0" i="0">
+                <a:solidFill>
+                  <a:srgbClr val="2A2929"/>
                 </a:solidFill>
                 <a:latin typeface="Roboto"/>
               </a:rPr>
@@ -10277,16 +10277,16 @@
             <a:r>
               <a:rPr sz="2400" b="1" i="0">
                 <a:solidFill>
-                  <a:srgbClr val="205F61"/>
+                  <a:srgbClr val="EDAB0C"/>
                 </a:solidFill>
                 <a:latin typeface="Roboto"/>
               </a:rPr>
               <a:t>■  </a:t>
             </a:r>
             <a:r>
-              <a:rPr sz="2400" b="1" i="0">
-                <a:solidFill>
-                  <a:srgbClr val="205F61"/>
+              <a:rPr sz="2400" b="0" i="0">
+                <a:solidFill>
+                  <a:srgbClr val="2A2929"/>
                 </a:solidFill>
                 <a:latin typeface="Roboto"/>
               </a:rPr>
@@ -10617,7 +10617,7 @@
               <a:t>■  </a:t>
             </a:r>
             <a:r>
-              <a:rPr sz="1700" b="1" i="0">
+              <a:rPr sz="1700" b="0" i="0">
                 <a:solidFill>
                   <a:srgbClr val="2A2929"/>
                 </a:solidFill>
@@ -10796,7 +10796,7 @@
             <a:r>
               <a:rPr sz="1700" b="1" i="0">
                 <a:solidFill>
-                  <a:srgbClr val="205F61"/>
+                  <a:srgbClr val="EDAB0C"/>
                 </a:solidFill>
                 <a:latin typeface="Roboto"/>
               </a:rPr>
@@ -10805,7 +10805,7 @@
             <a:r>
               <a:rPr sz="1700" b="0" i="0">
                 <a:solidFill>
-                  <a:srgbClr val="205F61"/>
+                  <a:srgbClr val="2A2929"/>
                 </a:solidFill>
                 <a:latin typeface="Roboto"/>
               </a:rPr>
@@ -12319,16 +12319,16 @@
             <a:r>
               <a:rPr sz="2400" b="1" i="0">
                 <a:solidFill>
-                  <a:srgbClr val="92268F"/>
+                  <a:srgbClr val="EDAB0C"/>
                 </a:solidFill>
                 <a:latin typeface="Roboto"/>
               </a:rPr>
               <a:t>■  </a:t>
             </a:r>
             <a:r>
-              <a:rPr sz="2400" b="1" i="0">
-                <a:solidFill>
-                  <a:srgbClr val="92268F"/>
+              <a:rPr sz="2400" b="0" i="0">
+                <a:solidFill>
+                  <a:srgbClr val="2A2929"/>
                 </a:solidFill>
                 <a:latin typeface="Roboto"/>
               </a:rPr>
@@ -12661,16 +12661,16 @@
             <a:r>
               <a:rPr sz="2400" b="1" i="0">
                 <a:solidFill>
-                  <a:srgbClr val="92268F"/>
+                  <a:srgbClr val="EDAB0C"/>
                 </a:solidFill>
                 <a:latin typeface="Roboto"/>
               </a:rPr>
               <a:t>■  </a:t>
             </a:r>
             <a:r>
-              <a:rPr sz="2400" b="1" i="0">
-                <a:solidFill>
-                  <a:srgbClr val="92268F"/>
+              <a:rPr sz="2400" b="0" i="0">
+                <a:solidFill>
+                  <a:srgbClr val="2A2929"/>
                 </a:solidFill>
                 <a:latin typeface="Roboto"/>
               </a:rPr>
@@ -13096,16 +13096,16 @@
             <a:r>
               <a:rPr sz="2400" b="1" i="0">
                 <a:solidFill>
-                  <a:srgbClr val="92268F"/>
+                  <a:srgbClr val="EDAB0C"/>
                 </a:solidFill>
                 <a:latin typeface="Roboto"/>
               </a:rPr>
               <a:t>■  </a:t>
             </a:r>
             <a:r>
-              <a:rPr sz="2400" b="1" i="0">
-                <a:solidFill>
-                  <a:srgbClr val="92268F"/>
+              <a:rPr sz="2400" b="0" i="0">
+                <a:solidFill>
+                  <a:srgbClr val="2A2929"/>
                 </a:solidFill>
                 <a:latin typeface="Roboto"/>
               </a:rPr>
@@ -13469,16 +13469,16 @@
             <a:r>
               <a:rPr sz="2400" b="1" i="0">
                 <a:solidFill>
-                  <a:srgbClr val="92268F"/>
+                  <a:srgbClr val="EDAB0C"/>
                 </a:solidFill>
                 <a:latin typeface="Roboto"/>
               </a:rPr>
               <a:t>■  </a:t>
             </a:r>
             <a:r>
-              <a:rPr sz="2400" b="1" i="0">
-                <a:solidFill>
-                  <a:srgbClr val="92268F"/>
+              <a:rPr sz="2400" b="0" i="0">
+                <a:solidFill>
+                  <a:srgbClr val="2A2929"/>
                 </a:solidFill>
                 <a:latin typeface="Roboto"/>
               </a:rPr>
@@ -13809,7 +13809,7 @@
               <a:t>■  </a:t>
             </a:r>
             <a:r>
-              <a:rPr sz="1700" b="1" i="0">
+              <a:rPr sz="1700" b="0" i="0">
                 <a:solidFill>
                   <a:srgbClr val="2A2929"/>
                 </a:solidFill>
@@ -14019,7 +14019,7 @@
             <a:r>
               <a:rPr sz="1700" b="1" i="0">
                 <a:solidFill>
-                  <a:srgbClr val="92268F"/>
+                  <a:srgbClr val="EDAB0C"/>
                 </a:solidFill>
                 <a:latin typeface="Roboto"/>
               </a:rPr>
@@ -14028,7 +14028,7 @@
             <a:r>
               <a:rPr sz="1700" b="0" i="0">
                 <a:solidFill>
-                  <a:srgbClr val="92268F"/>
+                  <a:srgbClr val="2A2929"/>
                 </a:solidFill>
                 <a:latin typeface="Roboto"/>
               </a:rPr>

--- a/S1-CL1-Cloud-Design-Build/delivery/topic_04/Topic_04_Slides.pptx
+++ b/S1-CL1-Cloud-Design-Build/delivery/topic_04/Topic_04_Slides.pptx
@@ -4,32 +4,35 @@
   <p:sldMasterIdLst>
     <p:sldMasterId id="2147483648" r:id="rId1"/>
   </p:sldMasterIdLst>
+  <p:notesMasterIdLst>
+    <p:notesMasterId r:id="rId25"/>
+  </p:notesMasterIdLst>
   <p:sldIdLst>
-    <p:sldId id="256" r:id="rId7"/>
-    <p:sldId id="257" r:id="rId8"/>
-    <p:sldId id="258" r:id="rId10"/>
-    <p:sldId id="259" r:id="rId11"/>
-    <p:sldId id="260" r:id="rId12"/>
-    <p:sldId id="261" r:id="rId13"/>
-    <p:sldId id="262" r:id="rId14"/>
-    <p:sldId id="263" r:id="rId15"/>
-    <p:sldId id="264" r:id="rId16"/>
-    <p:sldId id="265" r:id="rId17"/>
-    <p:sldId id="266" r:id="rId18"/>
-    <p:sldId id="267" r:id="rId19"/>
-    <p:sldId id="268" r:id="rId20"/>
-    <p:sldId id="269" r:id="rId21"/>
-    <p:sldId id="270" r:id="rId22"/>
-    <p:sldId id="271" r:id="rId23"/>
-    <p:sldId id="272" r:id="rId24"/>
-    <p:sldId id="273" r:id="rId25"/>
-    <p:sldId id="274" r:id="rId26"/>
-    <p:sldId id="275" r:id="rId27"/>
-    <p:sldId id="276" r:id="rId28"/>
-    <p:sldId id="277" r:id="rId29"/>
-    <p:sldId id="278" r:id="rId30"/>
+    <p:sldId id="256" r:id="rId2"/>
+    <p:sldId id="257" r:id="rId3"/>
+    <p:sldId id="258" r:id="rId4"/>
+    <p:sldId id="259" r:id="rId5"/>
+    <p:sldId id="260" r:id="rId6"/>
+    <p:sldId id="261" r:id="rId7"/>
+    <p:sldId id="262" r:id="rId8"/>
+    <p:sldId id="263" r:id="rId9"/>
+    <p:sldId id="264" r:id="rId10"/>
+    <p:sldId id="265" r:id="rId11"/>
+    <p:sldId id="266" r:id="rId12"/>
+    <p:sldId id="267" r:id="rId13"/>
+    <p:sldId id="268" r:id="rId14"/>
+    <p:sldId id="269" r:id="rId15"/>
+    <p:sldId id="270" r:id="rId16"/>
+    <p:sldId id="271" r:id="rId17"/>
+    <p:sldId id="272" r:id="rId18"/>
+    <p:sldId id="273" r:id="rId19"/>
+    <p:sldId id="274" r:id="rId20"/>
+    <p:sldId id="275" r:id="rId21"/>
+    <p:sldId id="276" r:id="rId22"/>
+    <p:sldId id="277" r:id="rId23"/>
+    <p:sldId id="278" r:id="rId24"/>
   </p:sldIdLst>
-  <p:sldSz cx="12191695" cy="6858000" type="screen4x3"/>
+  <p:sldSz cx="12192000" cy="6858000"/>
   <p:notesSz cx="6858000" cy="9144000"/>
   <p:defaultTextStyle>
     <a:defPPr>
@@ -126,11 +129,27 @@
       </a:defRPr>
     </a:lvl9pPr>
   </p:defaultTextStyle>
+  <p:extLst>
+    <p:ext uri="{EFAFB233-063F-42B5-8137-9DF3F51BA10A}">
+      <p15:sldGuideLst xmlns:p15="http://schemas.microsoft.com/office/powerpoint/2012/main">
+        <p15:guide id="1" orient="horz" pos="2160">
+          <p15:clr>
+            <a:srgbClr val="A4A3A4"/>
+          </p15:clr>
+        </p15:guide>
+        <p15:guide id="2" pos="2880">
+          <p15:clr>
+            <a:srgbClr val="A4A3A4"/>
+          </p15:clr>
+        </p15:guide>
+      </p15:sldGuideLst>
+    </p:ext>
+  </p:extLst>
 </p:presentation>
 </file>
 
 <file path=ppt/notesMasters/notesMaster1.xml><?xml version="1.0" encoding="utf-8"?>
-<p:notesMaster xmlns:a="http://schemas.openxmlformats.org/drawingml/2006/main" xmlns:p="http://schemas.openxmlformats.org/presentationml/2006/main" xmlns:r="http://schemas.openxmlformats.org/officeDocument/2006/relationships">
+<p:notesMaster xmlns:a="http://schemas.openxmlformats.org/drawingml/2006/main" xmlns:r="http://schemas.openxmlformats.org/officeDocument/2006/relationships" xmlns:p="http://schemas.openxmlformats.org/presentationml/2006/main">
   <p:cSld>
     <p:bg>
       <p:bgRef idx="1001">
@@ -164,7 +183,7 @@
         <p:spPr>
           <a:xfrm>
             <a:off x="0" y="0"/>
-            <a:ext cx="2971800" cy="457200"/>
+            <a:ext cx="2971800" cy="458788"/>
           </a:xfrm>
           <a:prstGeom prst="rect">
             <a:avLst/>
@@ -195,7 +214,7 @@
         <p:spPr>
           <a:xfrm>
             <a:off x="3884613" y="0"/>
-            <a:ext cx="2971800" cy="457200"/>
+            <a:ext cx="2971800" cy="458788"/>
           </a:xfrm>
           <a:prstGeom prst="rect">
             <a:avLst/>
@@ -209,9 +228,9 @@
             </a:lvl1pPr>
           </a:lstStyle>
           <a:p>
-            <a:fld id="{0F89C1C7-3DCD-1040-A9CF-14679D8B5DDD}" type="datetimeFigureOut">
+            <a:fld id="{65ECCCC9-759E-4241-83C9-0B1A92B4ECDF}" type="datetimeFigureOut">
               <a:rPr lang="en-US" smtClean="0"/>
-              <a:t>10/17/16</a:t>
+              <a:t>7/16/26</a:t>
             </a:fld>
             <a:endParaRPr lang="en-US"/>
           </a:p>
@@ -229,8 +248,8 @@
         </p:nvSpPr>
         <p:spPr>
           <a:xfrm>
-            <a:off x="1143000" y="685800"/>
-            <a:ext cx="4572000" cy="3429000"/>
+            <a:off x="685800" y="1143000"/>
+            <a:ext cx="5486400" cy="3086100"/>
           </a:xfrm>
           <a:prstGeom prst="rect">
             <a:avLst/>
@@ -262,8 +281,8 @@
         </p:nvSpPr>
         <p:spPr>
           <a:xfrm>
-            <a:off x="685800" y="4343400"/>
-            <a:ext cx="5486400" cy="4114800"/>
+            <a:off x="685800" y="4400550"/>
+            <a:ext cx="5486400" cy="3600450"/>
           </a:xfrm>
           <a:prstGeom prst="rect">
             <a:avLst/>
@@ -275,35 +294,35 @@
           <a:p>
             <a:pPr lvl="0"/>
             <a:r>
-              <a:rPr lang="en-US" smtClean="0"/>
+              <a:rPr lang="en-GB"/>
               <a:t>Click to edit Master text styles</a:t>
             </a:r>
           </a:p>
           <a:p>
             <a:pPr lvl="1"/>
             <a:r>
-              <a:rPr lang="en-US" smtClean="0"/>
+              <a:rPr lang="en-GB"/>
               <a:t>Second level</a:t>
             </a:r>
           </a:p>
           <a:p>
             <a:pPr lvl="2"/>
             <a:r>
-              <a:rPr lang="en-US" smtClean="0"/>
+              <a:rPr lang="en-GB"/>
               <a:t>Third level</a:t>
             </a:r>
           </a:p>
           <a:p>
             <a:pPr lvl="3"/>
             <a:r>
-              <a:rPr lang="en-US" smtClean="0"/>
+              <a:rPr lang="en-GB"/>
               <a:t>Fourth level</a:t>
             </a:r>
           </a:p>
           <a:p>
             <a:pPr lvl="4"/>
             <a:r>
-              <a:rPr lang="en-US" smtClean="0"/>
+              <a:rPr lang="en-GB"/>
               <a:t>Fifth level</a:t>
             </a:r>
             <a:endParaRPr lang="en-US"/>
@@ -323,7 +342,7 @@
         <p:spPr>
           <a:xfrm>
             <a:off x="0" y="8685213"/>
-            <a:ext cx="2971800" cy="457200"/>
+            <a:ext cx="2971800" cy="458787"/>
           </a:xfrm>
           <a:prstGeom prst="rect">
             <a:avLst/>
@@ -354,7 +373,7 @@
         <p:spPr>
           <a:xfrm>
             <a:off x="3884613" y="8685213"/>
-            <a:ext cx="2971800" cy="457200"/>
+            <a:ext cx="2971800" cy="458787"/>
           </a:xfrm>
           <a:prstGeom prst="rect">
             <a:avLst/>
@@ -368,7 +387,7 @@
             </a:lvl1pPr>
           </a:lstStyle>
           <a:p>
-            <a:fld id="{BB5E49A5-4136-284D-997B-48E1D791AD67}" type="slidenum">
+            <a:fld id="{87D6DEE3-A7BC-0D4F-A8A9-8296E02035D5}" type="slidenum">
               <a:rPr lang="en-US" smtClean="0"/>
               <a:t>‹#›</a:t>
             </a:fld>
@@ -379,13 +398,13 @@
     </p:spTree>
     <p:extLst>
       <p:ext uri="{BB962C8B-B14F-4D97-AF65-F5344CB8AC3E}">
-        <p14:creationId xmlns:p14="http://schemas.microsoft.com/office/powerpoint/2010/main" val="2623252185"/>
+        <p14:creationId xmlns:p14="http://schemas.microsoft.com/office/powerpoint/2010/main" val="3485553459"/>
       </p:ext>
     </p:extLst>
   </p:cSld>
   <p:clrMap bg1="lt1" tx1="dk1" bg2="lt2" tx2="dk2" accent1="accent1" accent2="accent2" accent3="accent3" accent4="accent4" accent5="accent5" accent6="accent6" hlink="hlink" folHlink="folHlink"/>
   <p:notesStyle>
-    <a:lvl1pPr marL="0" algn="l" defTabSz="457200" rtl="0" eaLnBrk="1" latinLnBrk="0" hangingPunct="1">
+    <a:lvl1pPr marL="0" algn="l" defTabSz="914400" rtl="0" eaLnBrk="1" latinLnBrk="0" hangingPunct="1">
       <a:defRPr sz="1200" kern="1200">
         <a:solidFill>
           <a:schemeClr val="tx1"/>
@@ -395,7 +414,7 @@
         <a:cs typeface="+mn-cs"/>
       </a:defRPr>
     </a:lvl1pPr>
-    <a:lvl2pPr marL="457200" algn="l" defTabSz="457200" rtl="0" eaLnBrk="1" latinLnBrk="0" hangingPunct="1">
+    <a:lvl2pPr marL="457200" algn="l" defTabSz="914400" rtl="0" eaLnBrk="1" latinLnBrk="0" hangingPunct="1">
       <a:defRPr sz="1200" kern="1200">
         <a:solidFill>
           <a:schemeClr val="tx1"/>
@@ -405,7 +424,7 @@
         <a:cs typeface="+mn-cs"/>
       </a:defRPr>
     </a:lvl2pPr>
-    <a:lvl3pPr marL="914400" algn="l" defTabSz="457200" rtl="0" eaLnBrk="1" latinLnBrk="0" hangingPunct="1">
+    <a:lvl3pPr marL="914400" algn="l" defTabSz="914400" rtl="0" eaLnBrk="1" latinLnBrk="0" hangingPunct="1">
       <a:defRPr sz="1200" kern="1200">
         <a:solidFill>
           <a:schemeClr val="tx1"/>
@@ -415,7 +434,7 @@
         <a:cs typeface="+mn-cs"/>
       </a:defRPr>
     </a:lvl3pPr>
-    <a:lvl4pPr marL="1371600" algn="l" defTabSz="457200" rtl="0" eaLnBrk="1" latinLnBrk="0" hangingPunct="1">
+    <a:lvl4pPr marL="1371600" algn="l" defTabSz="914400" rtl="0" eaLnBrk="1" latinLnBrk="0" hangingPunct="1">
       <a:defRPr sz="1200" kern="1200">
         <a:solidFill>
           <a:schemeClr val="tx1"/>
@@ -425,7 +444,7 @@
         <a:cs typeface="+mn-cs"/>
       </a:defRPr>
     </a:lvl4pPr>
-    <a:lvl5pPr marL="1828800" algn="l" defTabSz="457200" rtl="0" eaLnBrk="1" latinLnBrk="0" hangingPunct="1">
+    <a:lvl5pPr marL="1828800" algn="l" defTabSz="914400" rtl="0" eaLnBrk="1" latinLnBrk="0" hangingPunct="1">
       <a:defRPr sz="1200" kern="1200">
         <a:solidFill>
           <a:schemeClr val="tx1"/>
@@ -435,7 +454,7 @@
         <a:cs typeface="+mn-cs"/>
       </a:defRPr>
     </a:lvl5pPr>
-    <a:lvl6pPr marL="2286000" algn="l" defTabSz="457200" rtl="0" eaLnBrk="1" latinLnBrk="0" hangingPunct="1">
+    <a:lvl6pPr marL="2286000" algn="l" defTabSz="914400" rtl="0" eaLnBrk="1" latinLnBrk="0" hangingPunct="1">
       <a:defRPr sz="1200" kern="1200">
         <a:solidFill>
           <a:schemeClr val="tx1"/>
@@ -445,7 +464,7 @@
         <a:cs typeface="+mn-cs"/>
       </a:defRPr>
     </a:lvl6pPr>
-    <a:lvl7pPr marL="2743200" algn="l" defTabSz="457200" rtl="0" eaLnBrk="1" latinLnBrk="0" hangingPunct="1">
+    <a:lvl7pPr marL="2743200" algn="l" defTabSz="914400" rtl="0" eaLnBrk="1" latinLnBrk="0" hangingPunct="1">
       <a:defRPr sz="1200" kern="1200">
         <a:solidFill>
           <a:schemeClr val="tx1"/>
@@ -455,7 +474,7 @@
         <a:cs typeface="+mn-cs"/>
       </a:defRPr>
     </a:lvl7pPr>
-    <a:lvl8pPr marL="3200400" algn="l" defTabSz="457200" rtl="0" eaLnBrk="1" latinLnBrk="0" hangingPunct="1">
+    <a:lvl8pPr marL="3200400" algn="l" defTabSz="914400" rtl="0" eaLnBrk="1" latinLnBrk="0" hangingPunct="1">
       <a:defRPr sz="1200" kern="1200">
         <a:solidFill>
           <a:schemeClr val="tx1"/>
@@ -465,7 +484,7 @@
         <a:cs typeface="+mn-cs"/>
       </a:defRPr>
     </a:lvl8pPr>
-    <a:lvl9pPr marL="3657600" algn="l" defTabSz="457200" rtl="0" eaLnBrk="1" latinLnBrk="0" hangingPunct="1">
+    <a:lvl9pPr marL="3657600" algn="l" defTabSz="914400" rtl="0" eaLnBrk="1" latinLnBrk="0" hangingPunct="1">
       <a:defRPr sz="1200" kern="1200">
         <a:solidFill>
           <a:schemeClr val="tx1"/>
@@ -480,7 +499,7 @@
 </file>
 
 <file path=ppt/notesSlides/notesSlide1.xml><?xml version="1.0" encoding="utf-8"?>
-<p:notes xmlns:a="http://schemas.openxmlformats.org/drawingml/2006/main" xmlns:p="http://schemas.openxmlformats.org/presentationml/2006/main" xmlns:r="http://schemas.openxmlformats.org/officeDocument/2006/relationships">
+<p:notes xmlns:a="http://schemas.openxmlformats.org/drawingml/2006/main" xmlns:r="http://schemas.openxmlformats.org/officeDocument/2006/relationships" xmlns:p="http://schemas.openxmlformats.org/presentationml/2006/main">
   <p:cSld>
     <p:spTree>
       <p:nvGrpSpPr>
@@ -500,7 +519,7 @@
         <p:nvSpPr>
           <p:cNvPr id="2" name="Slide Image Placeholder 1"/>
           <p:cNvSpPr>
-            <a:spLocks noGrp="1"/>
+            <a:spLocks noGrp="1" noRot="1" noChangeAspect="1"/>
           </p:cNvSpPr>
           <p:nvPr>
             <p:ph type="sldImg" idx="2"/>
@@ -515,7 +534,7 @@
             <a:spLocks noGrp="1"/>
           </p:cNvSpPr>
           <p:nvPr>
-            <p:ph type="body" idx="3" sz="quarter"/>
+            <p:ph type="body" sz="quarter" idx="3"/>
           </p:nvPr>
         </p:nvSpPr>
         <p:spPr/>
@@ -606,7 +625,7 @@
             <a:spLocks noGrp="1"/>
           </p:cNvSpPr>
           <p:nvPr>
-            <p:ph type="sldNum" idx="5" sz="quarter"/>
+            <p:ph type="sldNum" sz="quarter" idx="5"/>
           </p:nvPr>
         </p:nvSpPr>
         <p:spPr/>
@@ -620,7 +639,7 @@
 </file>
 
 <file path=ppt/notesSlides/notesSlide10.xml><?xml version="1.0" encoding="utf-8"?>
-<p:notes xmlns:a="http://schemas.openxmlformats.org/drawingml/2006/main" xmlns:p="http://schemas.openxmlformats.org/presentationml/2006/main" xmlns:r="http://schemas.openxmlformats.org/officeDocument/2006/relationships">
+<p:notes xmlns:a="http://schemas.openxmlformats.org/drawingml/2006/main" xmlns:r="http://schemas.openxmlformats.org/officeDocument/2006/relationships" xmlns:p="http://schemas.openxmlformats.org/presentationml/2006/main">
   <p:cSld>
     <p:spTree>
       <p:nvGrpSpPr>
@@ -640,7 +659,7 @@
         <p:nvSpPr>
           <p:cNvPr id="2" name="Slide Image Placeholder 1"/>
           <p:cNvSpPr>
-            <a:spLocks noGrp="1"/>
+            <a:spLocks noGrp="1" noRot="1" noChangeAspect="1"/>
           </p:cNvSpPr>
           <p:nvPr>
             <p:ph type="sldImg" idx="2"/>
@@ -655,7 +674,7 @@
             <a:spLocks noGrp="1"/>
           </p:cNvSpPr>
           <p:nvPr>
-            <p:ph type="body" idx="3" sz="quarter"/>
+            <p:ph type="body" sz="quarter" idx="3"/>
           </p:nvPr>
         </p:nvSpPr>
         <p:spPr/>
@@ -736,7 +755,7 @@
             <a:spLocks noGrp="1"/>
           </p:cNvSpPr>
           <p:nvPr>
-            <p:ph type="sldNum" idx="5" sz="quarter"/>
+            <p:ph type="sldNum" sz="quarter" idx="5"/>
           </p:nvPr>
         </p:nvSpPr>
         <p:spPr/>
@@ -750,7 +769,7 @@
 </file>
 
 <file path=ppt/notesSlides/notesSlide11.xml><?xml version="1.0" encoding="utf-8"?>
-<p:notes xmlns:a="http://schemas.openxmlformats.org/drawingml/2006/main" xmlns:p="http://schemas.openxmlformats.org/presentationml/2006/main" xmlns:r="http://schemas.openxmlformats.org/officeDocument/2006/relationships">
+<p:notes xmlns:a="http://schemas.openxmlformats.org/drawingml/2006/main" xmlns:r="http://schemas.openxmlformats.org/officeDocument/2006/relationships" xmlns:p="http://schemas.openxmlformats.org/presentationml/2006/main">
   <p:cSld>
     <p:spTree>
       <p:nvGrpSpPr>
@@ -770,7 +789,7 @@
         <p:nvSpPr>
           <p:cNvPr id="2" name="Slide Image Placeholder 1"/>
           <p:cNvSpPr>
-            <a:spLocks noGrp="1"/>
+            <a:spLocks noGrp="1" noRot="1" noChangeAspect="1"/>
           </p:cNvSpPr>
           <p:nvPr>
             <p:ph type="sldImg" idx="2"/>
@@ -785,7 +804,7 @@
             <a:spLocks noGrp="1"/>
           </p:cNvSpPr>
           <p:nvPr>
-            <p:ph type="body" idx="3" sz="quarter"/>
+            <p:ph type="body" sz="quarter" idx="3"/>
           </p:nvPr>
         </p:nvSpPr>
         <p:spPr/>
@@ -861,7 +880,7 @@
             <a:spLocks noGrp="1"/>
           </p:cNvSpPr>
           <p:nvPr>
-            <p:ph type="sldNum" idx="5" sz="quarter"/>
+            <p:ph type="sldNum" sz="quarter" idx="5"/>
           </p:nvPr>
         </p:nvSpPr>
         <p:spPr/>
@@ -875,7 +894,7 @@
 </file>
 
 <file path=ppt/notesSlides/notesSlide12.xml><?xml version="1.0" encoding="utf-8"?>
-<p:notes xmlns:a="http://schemas.openxmlformats.org/drawingml/2006/main" xmlns:p="http://schemas.openxmlformats.org/presentationml/2006/main" xmlns:r="http://schemas.openxmlformats.org/officeDocument/2006/relationships">
+<p:notes xmlns:a="http://schemas.openxmlformats.org/drawingml/2006/main" xmlns:r="http://schemas.openxmlformats.org/officeDocument/2006/relationships" xmlns:p="http://schemas.openxmlformats.org/presentationml/2006/main">
   <p:cSld>
     <p:spTree>
       <p:nvGrpSpPr>
@@ -895,7 +914,7 @@
         <p:nvSpPr>
           <p:cNvPr id="2" name="Slide Image Placeholder 1"/>
           <p:cNvSpPr>
-            <a:spLocks noGrp="1"/>
+            <a:spLocks noGrp="1" noRot="1" noChangeAspect="1"/>
           </p:cNvSpPr>
           <p:nvPr>
             <p:ph type="sldImg" idx="2"/>
@@ -910,7 +929,7 @@
             <a:spLocks noGrp="1"/>
           </p:cNvSpPr>
           <p:nvPr>
-            <p:ph type="body" idx="3" sz="quarter"/>
+            <p:ph type="body" sz="quarter" idx="3"/>
           </p:nvPr>
         </p:nvSpPr>
         <p:spPr/>
@@ -1021,7 +1040,7 @@
             <a:spLocks noGrp="1"/>
           </p:cNvSpPr>
           <p:nvPr>
-            <p:ph type="sldNum" idx="5" sz="quarter"/>
+            <p:ph type="sldNum" sz="quarter" idx="5"/>
           </p:nvPr>
         </p:nvSpPr>
         <p:spPr/>
@@ -1035,7 +1054,7 @@
 </file>
 
 <file path=ppt/notesSlides/notesSlide13.xml><?xml version="1.0" encoding="utf-8"?>
-<p:notes xmlns:a="http://schemas.openxmlformats.org/drawingml/2006/main" xmlns:p="http://schemas.openxmlformats.org/presentationml/2006/main" xmlns:r="http://schemas.openxmlformats.org/officeDocument/2006/relationships">
+<p:notes xmlns:a="http://schemas.openxmlformats.org/drawingml/2006/main" xmlns:r="http://schemas.openxmlformats.org/officeDocument/2006/relationships" xmlns:p="http://schemas.openxmlformats.org/presentationml/2006/main">
   <p:cSld>
     <p:spTree>
       <p:nvGrpSpPr>
@@ -1055,7 +1074,7 @@
         <p:nvSpPr>
           <p:cNvPr id="2" name="Slide Image Placeholder 1"/>
           <p:cNvSpPr>
-            <a:spLocks noGrp="1"/>
+            <a:spLocks noGrp="1" noRot="1" noChangeAspect="1"/>
           </p:cNvSpPr>
           <p:nvPr>
             <p:ph type="sldImg" idx="2"/>
@@ -1070,7 +1089,7 @@
             <a:spLocks noGrp="1"/>
           </p:cNvSpPr>
           <p:nvPr>
-            <p:ph type="body" idx="3" sz="quarter"/>
+            <p:ph type="body" sz="quarter" idx="3"/>
           </p:nvPr>
         </p:nvSpPr>
         <p:spPr/>
@@ -1146,7 +1165,7 @@
             <a:spLocks noGrp="1"/>
           </p:cNvSpPr>
           <p:nvPr>
-            <p:ph type="sldNum" idx="5" sz="quarter"/>
+            <p:ph type="sldNum" sz="quarter" idx="5"/>
           </p:nvPr>
         </p:nvSpPr>
         <p:spPr/>
@@ -1160,7 +1179,7 @@
 </file>
 
 <file path=ppt/notesSlides/notesSlide14.xml><?xml version="1.0" encoding="utf-8"?>
-<p:notes xmlns:a="http://schemas.openxmlformats.org/drawingml/2006/main" xmlns:p="http://schemas.openxmlformats.org/presentationml/2006/main" xmlns:r="http://schemas.openxmlformats.org/officeDocument/2006/relationships">
+<p:notes xmlns:a="http://schemas.openxmlformats.org/drawingml/2006/main" xmlns:r="http://schemas.openxmlformats.org/officeDocument/2006/relationships" xmlns:p="http://schemas.openxmlformats.org/presentationml/2006/main">
   <p:cSld>
     <p:spTree>
       <p:nvGrpSpPr>
@@ -1180,7 +1199,7 @@
         <p:nvSpPr>
           <p:cNvPr id="2" name="Slide Image Placeholder 1"/>
           <p:cNvSpPr>
-            <a:spLocks noGrp="1"/>
+            <a:spLocks noGrp="1" noRot="1" noChangeAspect="1"/>
           </p:cNvSpPr>
           <p:nvPr>
             <p:ph type="sldImg" idx="2"/>
@@ -1195,7 +1214,7 @@
             <a:spLocks noGrp="1"/>
           </p:cNvSpPr>
           <p:nvPr>
-            <p:ph type="body" idx="3" sz="quarter"/>
+            <p:ph type="body" sz="quarter" idx="3"/>
           </p:nvPr>
         </p:nvSpPr>
         <p:spPr/>
@@ -1281,7 +1300,7 @@
             <a:spLocks noGrp="1"/>
           </p:cNvSpPr>
           <p:nvPr>
-            <p:ph type="sldNum" idx="5" sz="quarter"/>
+            <p:ph type="sldNum" sz="quarter" idx="5"/>
           </p:nvPr>
         </p:nvSpPr>
         <p:spPr/>
@@ -1295,7 +1314,7 @@
 </file>
 
 <file path=ppt/notesSlides/notesSlide15.xml><?xml version="1.0" encoding="utf-8"?>
-<p:notes xmlns:a="http://schemas.openxmlformats.org/drawingml/2006/main" xmlns:p="http://schemas.openxmlformats.org/presentationml/2006/main" xmlns:r="http://schemas.openxmlformats.org/officeDocument/2006/relationships">
+<p:notes xmlns:a="http://schemas.openxmlformats.org/drawingml/2006/main" xmlns:r="http://schemas.openxmlformats.org/officeDocument/2006/relationships" xmlns:p="http://schemas.openxmlformats.org/presentationml/2006/main">
   <p:cSld>
     <p:spTree>
       <p:nvGrpSpPr>
@@ -1315,7 +1334,7 @@
         <p:nvSpPr>
           <p:cNvPr id="2" name="Slide Image Placeholder 1"/>
           <p:cNvSpPr>
-            <a:spLocks noGrp="1"/>
+            <a:spLocks noGrp="1" noRot="1" noChangeAspect="1"/>
           </p:cNvSpPr>
           <p:nvPr>
             <p:ph type="sldImg" idx="2"/>
@@ -1330,7 +1349,7 @@
             <a:spLocks noGrp="1"/>
           </p:cNvSpPr>
           <p:nvPr>
-            <p:ph type="body" idx="3" sz="quarter"/>
+            <p:ph type="body" sz="quarter" idx="3"/>
           </p:nvPr>
         </p:nvSpPr>
         <p:spPr/>
@@ -1446,7 +1465,7 @@
             <a:spLocks noGrp="1"/>
           </p:cNvSpPr>
           <p:nvPr>
-            <p:ph type="sldNum" idx="5" sz="quarter"/>
+            <p:ph type="sldNum" sz="quarter" idx="5"/>
           </p:nvPr>
         </p:nvSpPr>
         <p:spPr/>
@@ -1460,7 +1479,7 @@
 </file>
 
 <file path=ppt/notesSlides/notesSlide2.xml><?xml version="1.0" encoding="utf-8"?>
-<p:notes xmlns:a="http://schemas.openxmlformats.org/drawingml/2006/main" xmlns:p="http://schemas.openxmlformats.org/presentationml/2006/main" xmlns:r="http://schemas.openxmlformats.org/officeDocument/2006/relationships">
+<p:notes xmlns:a="http://schemas.openxmlformats.org/drawingml/2006/main" xmlns:r="http://schemas.openxmlformats.org/officeDocument/2006/relationships" xmlns:p="http://schemas.openxmlformats.org/presentationml/2006/main">
   <p:cSld>
     <p:spTree>
       <p:nvGrpSpPr>
@@ -1480,7 +1499,7 @@
         <p:nvSpPr>
           <p:cNvPr id="2" name="Slide Image Placeholder 1"/>
           <p:cNvSpPr>
-            <a:spLocks noGrp="1"/>
+            <a:spLocks noGrp="1" noRot="1" noChangeAspect="1"/>
           </p:cNvSpPr>
           <p:nvPr>
             <p:ph type="sldImg" idx="2"/>
@@ -1495,7 +1514,7 @@
             <a:spLocks noGrp="1"/>
           </p:cNvSpPr>
           <p:nvPr>
-            <p:ph type="body" idx="3" sz="quarter"/>
+            <p:ph type="body" sz="quarter" idx="3"/>
           </p:nvPr>
         </p:nvSpPr>
         <p:spPr/>
@@ -1576,7 +1595,7 @@
             <a:spLocks noGrp="1"/>
           </p:cNvSpPr>
           <p:nvPr>
-            <p:ph type="sldNum" idx="5" sz="quarter"/>
+            <p:ph type="sldNum" sz="quarter" idx="5"/>
           </p:nvPr>
         </p:nvSpPr>
         <p:spPr/>
@@ -1590,7 +1609,7 @@
 </file>
 
 <file path=ppt/notesSlides/notesSlide3.xml><?xml version="1.0" encoding="utf-8"?>
-<p:notes xmlns:a="http://schemas.openxmlformats.org/drawingml/2006/main" xmlns:p="http://schemas.openxmlformats.org/presentationml/2006/main" xmlns:r="http://schemas.openxmlformats.org/officeDocument/2006/relationships">
+<p:notes xmlns:a="http://schemas.openxmlformats.org/drawingml/2006/main" xmlns:r="http://schemas.openxmlformats.org/officeDocument/2006/relationships" xmlns:p="http://schemas.openxmlformats.org/presentationml/2006/main">
   <p:cSld>
     <p:spTree>
       <p:nvGrpSpPr>
@@ -1610,7 +1629,7 @@
         <p:nvSpPr>
           <p:cNvPr id="2" name="Slide Image Placeholder 1"/>
           <p:cNvSpPr>
-            <a:spLocks noGrp="1"/>
+            <a:spLocks noGrp="1" noRot="1" noChangeAspect="1"/>
           </p:cNvSpPr>
           <p:nvPr>
             <p:ph type="sldImg" idx="2"/>
@@ -1625,7 +1644,7 @@
             <a:spLocks noGrp="1"/>
           </p:cNvSpPr>
           <p:nvPr>
-            <p:ph type="body" idx="3" sz="quarter"/>
+            <p:ph type="body" sz="quarter" idx="3"/>
           </p:nvPr>
         </p:nvSpPr>
         <p:spPr/>
@@ -1706,7 +1725,7 @@
             <a:spLocks noGrp="1"/>
           </p:cNvSpPr>
           <p:nvPr>
-            <p:ph type="sldNum" idx="5" sz="quarter"/>
+            <p:ph type="sldNum" sz="quarter" idx="5"/>
           </p:nvPr>
         </p:nvSpPr>
         <p:spPr/>
@@ -1720,7 +1739,7 @@
 </file>
 
 <file path=ppt/notesSlides/notesSlide4.xml><?xml version="1.0" encoding="utf-8"?>
-<p:notes xmlns:a="http://schemas.openxmlformats.org/drawingml/2006/main" xmlns:p="http://schemas.openxmlformats.org/presentationml/2006/main" xmlns:r="http://schemas.openxmlformats.org/officeDocument/2006/relationships">
+<p:notes xmlns:a="http://schemas.openxmlformats.org/drawingml/2006/main" xmlns:r="http://schemas.openxmlformats.org/officeDocument/2006/relationships" xmlns:p="http://schemas.openxmlformats.org/presentationml/2006/main">
   <p:cSld>
     <p:spTree>
       <p:nvGrpSpPr>
@@ -1740,7 +1759,7 @@
         <p:nvSpPr>
           <p:cNvPr id="2" name="Slide Image Placeholder 1"/>
           <p:cNvSpPr>
-            <a:spLocks noGrp="1"/>
+            <a:spLocks noGrp="1" noRot="1" noChangeAspect="1"/>
           </p:cNvSpPr>
           <p:nvPr>
             <p:ph type="sldImg" idx="2"/>
@@ -1755,7 +1774,7 @@
             <a:spLocks noGrp="1"/>
           </p:cNvSpPr>
           <p:nvPr>
-            <p:ph type="body" idx="3" sz="quarter"/>
+            <p:ph type="body" sz="quarter" idx="3"/>
           </p:nvPr>
         </p:nvSpPr>
         <p:spPr/>
@@ -1831,7 +1850,7 @@
             <a:spLocks noGrp="1"/>
           </p:cNvSpPr>
           <p:nvPr>
-            <p:ph type="sldNum" idx="5" sz="quarter"/>
+            <p:ph type="sldNum" sz="quarter" idx="5"/>
           </p:nvPr>
         </p:nvSpPr>
         <p:spPr/>
@@ -1845,7 +1864,7 @@
 </file>
 
 <file path=ppt/notesSlides/notesSlide5.xml><?xml version="1.0" encoding="utf-8"?>
-<p:notes xmlns:a="http://schemas.openxmlformats.org/drawingml/2006/main" xmlns:p="http://schemas.openxmlformats.org/presentationml/2006/main" xmlns:r="http://schemas.openxmlformats.org/officeDocument/2006/relationships">
+<p:notes xmlns:a="http://schemas.openxmlformats.org/drawingml/2006/main" xmlns:r="http://schemas.openxmlformats.org/officeDocument/2006/relationships" xmlns:p="http://schemas.openxmlformats.org/presentationml/2006/main">
   <p:cSld>
     <p:spTree>
       <p:nvGrpSpPr>
@@ -1865,7 +1884,7 @@
         <p:nvSpPr>
           <p:cNvPr id="2" name="Slide Image Placeholder 1"/>
           <p:cNvSpPr>
-            <a:spLocks noGrp="1"/>
+            <a:spLocks noGrp="1" noRot="1" noChangeAspect="1"/>
           </p:cNvSpPr>
           <p:nvPr>
             <p:ph type="sldImg" idx="2"/>
@@ -1880,7 +1899,7 @@
             <a:spLocks noGrp="1"/>
           </p:cNvSpPr>
           <p:nvPr>
-            <p:ph type="body" idx="3" sz="quarter"/>
+            <p:ph type="body" sz="quarter" idx="3"/>
           </p:nvPr>
         </p:nvSpPr>
         <p:spPr/>
@@ -1966,7 +1985,7 @@
             <a:spLocks noGrp="1"/>
           </p:cNvSpPr>
           <p:nvPr>
-            <p:ph type="sldNum" idx="5" sz="quarter"/>
+            <p:ph type="sldNum" sz="quarter" idx="5"/>
           </p:nvPr>
         </p:nvSpPr>
         <p:spPr/>
@@ -1980,7 +1999,7 @@
 </file>
 
 <file path=ppt/notesSlides/notesSlide6.xml><?xml version="1.0" encoding="utf-8"?>
-<p:notes xmlns:a="http://schemas.openxmlformats.org/drawingml/2006/main" xmlns:p="http://schemas.openxmlformats.org/presentationml/2006/main" xmlns:r="http://schemas.openxmlformats.org/officeDocument/2006/relationships">
+<p:notes xmlns:a="http://schemas.openxmlformats.org/drawingml/2006/main" xmlns:r="http://schemas.openxmlformats.org/officeDocument/2006/relationships" xmlns:p="http://schemas.openxmlformats.org/presentationml/2006/main">
   <p:cSld>
     <p:spTree>
       <p:nvGrpSpPr>
@@ -2000,7 +2019,7 @@
         <p:nvSpPr>
           <p:cNvPr id="2" name="Slide Image Placeholder 1"/>
           <p:cNvSpPr>
-            <a:spLocks noGrp="1"/>
+            <a:spLocks noGrp="1" noRot="1" noChangeAspect="1"/>
           </p:cNvSpPr>
           <p:nvPr>
             <p:ph type="sldImg" idx="2"/>
@@ -2015,7 +2034,7 @@
             <a:spLocks noGrp="1"/>
           </p:cNvSpPr>
           <p:nvPr>
-            <p:ph type="body" idx="3" sz="quarter"/>
+            <p:ph type="body" sz="quarter" idx="3"/>
           </p:nvPr>
         </p:nvSpPr>
         <p:spPr/>
@@ -2121,7 +2140,7 @@
             <a:spLocks noGrp="1"/>
           </p:cNvSpPr>
           <p:nvPr>
-            <p:ph type="sldNum" idx="5" sz="quarter"/>
+            <p:ph type="sldNum" sz="quarter" idx="5"/>
           </p:nvPr>
         </p:nvSpPr>
         <p:spPr/>
@@ -2135,7 +2154,7 @@
 </file>
 
 <file path=ppt/notesSlides/notesSlide7.xml><?xml version="1.0" encoding="utf-8"?>
-<p:notes xmlns:a="http://schemas.openxmlformats.org/drawingml/2006/main" xmlns:p="http://schemas.openxmlformats.org/presentationml/2006/main" xmlns:r="http://schemas.openxmlformats.org/officeDocument/2006/relationships">
+<p:notes xmlns:a="http://schemas.openxmlformats.org/drawingml/2006/main" xmlns:r="http://schemas.openxmlformats.org/officeDocument/2006/relationships" xmlns:p="http://schemas.openxmlformats.org/presentationml/2006/main">
   <p:cSld>
     <p:spTree>
       <p:nvGrpSpPr>
@@ -2155,7 +2174,7 @@
         <p:nvSpPr>
           <p:cNvPr id="2" name="Slide Image Placeholder 1"/>
           <p:cNvSpPr>
-            <a:spLocks noGrp="1"/>
+            <a:spLocks noGrp="1" noRot="1" noChangeAspect="1"/>
           </p:cNvSpPr>
           <p:nvPr>
             <p:ph type="sldImg" idx="2"/>
@@ -2170,7 +2189,7 @@
             <a:spLocks noGrp="1"/>
           </p:cNvSpPr>
           <p:nvPr>
-            <p:ph type="body" idx="3" sz="quarter"/>
+            <p:ph type="body" sz="quarter" idx="3"/>
           </p:nvPr>
         </p:nvSpPr>
         <p:spPr/>
@@ -2256,7 +2275,7 @@
             <a:spLocks noGrp="1"/>
           </p:cNvSpPr>
           <p:nvPr>
-            <p:ph type="sldNum" idx="5" sz="quarter"/>
+            <p:ph type="sldNum" sz="quarter" idx="5"/>
           </p:nvPr>
         </p:nvSpPr>
         <p:spPr/>
@@ -2270,7 +2289,7 @@
 </file>
 
 <file path=ppt/notesSlides/notesSlide8.xml><?xml version="1.0" encoding="utf-8"?>
-<p:notes xmlns:a="http://schemas.openxmlformats.org/drawingml/2006/main" xmlns:p="http://schemas.openxmlformats.org/presentationml/2006/main" xmlns:r="http://schemas.openxmlformats.org/officeDocument/2006/relationships">
+<p:notes xmlns:a="http://schemas.openxmlformats.org/drawingml/2006/main" xmlns:r="http://schemas.openxmlformats.org/officeDocument/2006/relationships" xmlns:p="http://schemas.openxmlformats.org/presentationml/2006/main">
   <p:cSld>
     <p:spTree>
       <p:nvGrpSpPr>
@@ -2290,7 +2309,7 @@
         <p:nvSpPr>
           <p:cNvPr id="2" name="Slide Image Placeholder 1"/>
           <p:cNvSpPr>
-            <a:spLocks noGrp="1"/>
+            <a:spLocks noGrp="1" noRot="1" noChangeAspect="1"/>
           </p:cNvSpPr>
           <p:nvPr>
             <p:ph type="sldImg" idx="2"/>
@@ -2305,7 +2324,7 @@
             <a:spLocks noGrp="1"/>
           </p:cNvSpPr>
           <p:nvPr>
-            <p:ph type="body" idx="3" sz="quarter"/>
+            <p:ph type="body" sz="quarter" idx="3"/>
           </p:nvPr>
         </p:nvSpPr>
         <p:spPr/>
@@ -2386,7 +2405,7 @@
             <a:spLocks noGrp="1"/>
           </p:cNvSpPr>
           <p:nvPr>
-            <p:ph type="sldNum" idx="5" sz="quarter"/>
+            <p:ph type="sldNum" sz="quarter" idx="5"/>
           </p:nvPr>
         </p:nvSpPr>
         <p:spPr/>
@@ -2400,7 +2419,7 @@
 </file>
 
 <file path=ppt/notesSlides/notesSlide9.xml><?xml version="1.0" encoding="utf-8"?>
-<p:notes xmlns:a="http://schemas.openxmlformats.org/drawingml/2006/main" xmlns:p="http://schemas.openxmlformats.org/presentationml/2006/main" xmlns:r="http://schemas.openxmlformats.org/officeDocument/2006/relationships">
+<p:notes xmlns:a="http://schemas.openxmlformats.org/drawingml/2006/main" xmlns:r="http://schemas.openxmlformats.org/officeDocument/2006/relationships" xmlns:p="http://schemas.openxmlformats.org/presentationml/2006/main">
   <p:cSld>
     <p:spTree>
       <p:nvGrpSpPr>
@@ -2420,7 +2439,7 @@
         <p:nvSpPr>
           <p:cNvPr id="2" name="Slide Image Placeholder 1"/>
           <p:cNvSpPr>
-            <a:spLocks noGrp="1"/>
+            <a:spLocks noGrp="1" noRot="1" noChangeAspect="1"/>
           </p:cNvSpPr>
           <p:nvPr>
             <p:ph type="sldImg" idx="2"/>
@@ -2435,7 +2454,7 @@
             <a:spLocks noGrp="1"/>
           </p:cNvSpPr>
           <p:nvPr>
-            <p:ph type="body" idx="3" sz="quarter"/>
+            <p:ph type="body" sz="quarter" idx="3"/>
           </p:nvPr>
         </p:nvSpPr>
         <p:spPr/>
@@ -2511,7 +2530,7 @@
             <a:spLocks noGrp="1"/>
           </p:cNvSpPr>
           <p:nvPr>
-            <p:ph type="sldNum" idx="5" sz="quarter"/>
+            <p:ph type="sldNum" sz="quarter" idx="5"/>
           </p:nvPr>
         </p:nvSpPr>
         <p:spPr/>
@@ -2562,10 +2581,9 @@
           <a:lstStyle/>
           <a:p>
             <a:r>
-              <a:rPr lang="en-US" smtClean="0"/>
+              <a:rPr lang="en-US"/>
               <a:t>Click to edit Master title style</a:t>
             </a:r>
-            <a:endParaRPr lang="en-US"/>
           </a:p>
         </p:txBody>
       </p:sp>
@@ -2681,10 +2699,9 @@
           </a:lstStyle>
           <a:p>
             <a:r>
-              <a:rPr lang="en-US" smtClean="0"/>
+              <a:rPr lang="en-US"/>
               <a:t>Click to edit Master subtitle style</a:t>
             </a:r>
-            <a:endParaRPr lang="en-US"/>
           </a:p>
         </p:txBody>
       </p:sp>
@@ -2705,7 +2722,7 @@
           <a:p>
             <a:fld id="{5BCAD085-E8A6-8845-BD4E-CB4CCA059FC4}" type="datetimeFigureOut">
               <a:rPr lang="en-US" smtClean="0"/>
-              <a:t>1/27/13</a:t>
+              <a:t>7/16/26</a:t>
             </a:fld>
             <a:endParaRPr lang="en-US"/>
           </a:p>
@@ -2799,10 +2816,9 @@
           <a:lstStyle/>
           <a:p>
             <a:r>
-              <a:rPr lang="en-US" smtClean="0"/>
+              <a:rPr lang="en-US"/>
               <a:t>Click to edit Master title style</a:t>
             </a:r>
-            <a:endParaRPr lang="en-US"/>
           </a:p>
         </p:txBody>
       </p:sp>
@@ -2823,38 +2839,37 @@
           <a:p>
             <a:pPr lvl="0"/>
             <a:r>
-              <a:rPr lang="en-US" smtClean="0"/>
+              <a:rPr lang="en-US"/>
               <a:t>Click to edit Master text styles</a:t>
             </a:r>
           </a:p>
           <a:p>
             <a:pPr lvl="1"/>
             <a:r>
-              <a:rPr lang="en-US" smtClean="0"/>
+              <a:rPr lang="en-US"/>
               <a:t>Second level</a:t>
             </a:r>
           </a:p>
           <a:p>
             <a:pPr lvl="2"/>
             <a:r>
-              <a:rPr lang="en-US" smtClean="0"/>
+              <a:rPr lang="en-US"/>
               <a:t>Third level</a:t>
             </a:r>
           </a:p>
           <a:p>
             <a:pPr lvl="3"/>
             <a:r>
-              <a:rPr lang="en-US" smtClean="0"/>
+              <a:rPr lang="en-US"/>
               <a:t>Fourth level</a:t>
             </a:r>
           </a:p>
           <a:p>
             <a:pPr lvl="4"/>
             <a:r>
-              <a:rPr lang="en-US" smtClean="0"/>
+              <a:rPr lang="en-US"/>
               <a:t>Fifth level</a:t>
             </a:r>
-            <a:endParaRPr lang="en-US"/>
           </a:p>
         </p:txBody>
       </p:sp>
@@ -2875,7 +2890,7 @@
           <a:p>
             <a:fld id="{5BCAD085-E8A6-8845-BD4E-CB4CCA059FC4}" type="datetimeFigureOut">
               <a:rPr lang="en-US" smtClean="0"/>
-              <a:t>1/27/13</a:t>
+              <a:t>7/16/26</a:t>
             </a:fld>
             <a:endParaRPr lang="en-US"/>
           </a:p>
@@ -2974,10 +2989,9 @@
           <a:lstStyle/>
           <a:p>
             <a:r>
-              <a:rPr lang="en-US" smtClean="0"/>
+              <a:rPr lang="en-US"/>
               <a:t>Click to edit Master title style</a:t>
             </a:r>
-            <a:endParaRPr lang="en-US"/>
           </a:p>
         </p:txBody>
       </p:sp>
@@ -3003,38 +3017,37 @@
           <a:p>
             <a:pPr lvl="0"/>
             <a:r>
-              <a:rPr lang="en-US" smtClean="0"/>
+              <a:rPr lang="en-US"/>
               <a:t>Click to edit Master text styles</a:t>
             </a:r>
           </a:p>
           <a:p>
             <a:pPr lvl="1"/>
             <a:r>
-              <a:rPr lang="en-US" smtClean="0"/>
+              <a:rPr lang="en-US"/>
               <a:t>Second level</a:t>
             </a:r>
           </a:p>
           <a:p>
             <a:pPr lvl="2"/>
             <a:r>
-              <a:rPr lang="en-US" smtClean="0"/>
+              <a:rPr lang="en-US"/>
               <a:t>Third level</a:t>
             </a:r>
           </a:p>
           <a:p>
             <a:pPr lvl="3"/>
             <a:r>
-              <a:rPr lang="en-US" smtClean="0"/>
+              <a:rPr lang="en-US"/>
               <a:t>Fourth level</a:t>
             </a:r>
           </a:p>
           <a:p>
             <a:pPr lvl="4"/>
             <a:r>
-              <a:rPr lang="en-US" smtClean="0"/>
+              <a:rPr lang="en-US"/>
               <a:t>Fifth level</a:t>
             </a:r>
-            <a:endParaRPr lang="en-US"/>
           </a:p>
         </p:txBody>
       </p:sp>
@@ -3055,7 +3068,7 @@
           <a:p>
             <a:fld id="{5BCAD085-E8A6-8845-BD4E-CB4CCA059FC4}" type="datetimeFigureOut">
               <a:rPr lang="en-US" smtClean="0"/>
-              <a:t>1/27/13</a:t>
+              <a:t>7/16/26</a:t>
             </a:fld>
             <a:endParaRPr lang="en-US"/>
           </a:p>
@@ -3149,10 +3162,9 @@
           <a:lstStyle/>
           <a:p>
             <a:r>
-              <a:rPr lang="en-US" smtClean="0"/>
+              <a:rPr lang="en-US"/>
               <a:t>Click to edit Master title style</a:t>
             </a:r>
-            <a:endParaRPr lang="en-US"/>
           </a:p>
         </p:txBody>
       </p:sp>
@@ -3173,38 +3185,37 @@
           <a:p>
             <a:pPr lvl="0"/>
             <a:r>
-              <a:rPr lang="en-US" smtClean="0"/>
+              <a:rPr lang="en-US"/>
               <a:t>Click to edit Master text styles</a:t>
             </a:r>
           </a:p>
           <a:p>
             <a:pPr lvl="1"/>
             <a:r>
-              <a:rPr lang="en-US" smtClean="0"/>
+              <a:rPr lang="en-US"/>
               <a:t>Second level</a:t>
             </a:r>
           </a:p>
           <a:p>
             <a:pPr lvl="2"/>
             <a:r>
-              <a:rPr lang="en-US" smtClean="0"/>
+              <a:rPr lang="en-US"/>
               <a:t>Third level</a:t>
             </a:r>
           </a:p>
           <a:p>
             <a:pPr lvl="3"/>
             <a:r>
-              <a:rPr lang="en-US" smtClean="0"/>
+              <a:rPr lang="en-US"/>
               <a:t>Fourth level</a:t>
             </a:r>
           </a:p>
           <a:p>
             <a:pPr lvl="4"/>
             <a:r>
-              <a:rPr lang="en-US" smtClean="0"/>
+              <a:rPr lang="en-US"/>
               <a:t>Fifth level</a:t>
             </a:r>
-            <a:endParaRPr lang="en-US"/>
           </a:p>
         </p:txBody>
       </p:sp>
@@ -3225,7 +3236,7 @@
           <a:p>
             <a:fld id="{5BCAD085-E8A6-8845-BD4E-CB4CCA059FC4}" type="datetimeFigureOut">
               <a:rPr lang="en-US" smtClean="0"/>
-              <a:t>1/27/13</a:t>
+              <a:t>7/16/26</a:t>
             </a:fld>
             <a:endParaRPr lang="en-US"/>
           </a:p>
@@ -3328,10 +3339,9 @@
           </a:lstStyle>
           <a:p>
             <a:r>
-              <a:rPr lang="en-US" smtClean="0"/>
+              <a:rPr lang="en-US"/>
               <a:t>Click to edit Master title style</a:t>
             </a:r>
-            <a:endParaRPr lang="en-US"/>
           </a:p>
         </p:txBody>
       </p:sp>
@@ -3448,7 +3458,7 @@
           <a:p>
             <a:pPr lvl="0"/>
             <a:r>
-              <a:rPr lang="en-US" smtClean="0"/>
+              <a:rPr lang="en-US"/>
               <a:t>Click to edit Master text styles</a:t>
             </a:r>
           </a:p>
@@ -3471,7 +3481,7 @@
           <a:p>
             <a:fld id="{5BCAD085-E8A6-8845-BD4E-CB4CCA059FC4}" type="datetimeFigureOut">
               <a:rPr lang="en-US" smtClean="0"/>
-              <a:t>1/27/13</a:t>
+              <a:t>7/16/26</a:t>
             </a:fld>
             <a:endParaRPr lang="en-US"/>
           </a:p>
@@ -3565,10 +3575,9 @@
           <a:lstStyle/>
           <a:p>
             <a:r>
-              <a:rPr lang="en-US" smtClean="0"/>
+              <a:rPr lang="en-US"/>
               <a:t>Click to edit Master title style</a:t>
             </a:r>
-            <a:endParaRPr lang="en-US"/>
           </a:p>
         </p:txBody>
       </p:sp>
@@ -3622,38 +3631,37 @@
           <a:p>
             <a:pPr lvl="0"/>
             <a:r>
-              <a:rPr lang="en-US" smtClean="0"/>
+              <a:rPr lang="en-US"/>
               <a:t>Click to edit Master text styles</a:t>
             </a:r>
           </a:p>
           <a:p>
             <a:pPr lvl="1"/>
             <a:r>
-              <a:rPr lang="en-US" smtClean="0"/>
+              <a:rPr lang="en-US"/>
               <a:t>Second level</a:t>
             </a:r>
           </a:p>
           <a:p>
             <a:pPr lvl="2"/>
             <a:r>
-              <a:rPr lang="en-US" smtClean="0"/>
+              <a:rPr lang="en-US"/>
               <a:t>Third level</a:t>
             </a:r>
           </a:p>
           <a:p>
             <a:pPr lvl="3"/>
             <a:r>
-              <a:rPr lang="en-US" smtClean="0"/>
+              <a:rPr lang="en-US"/>
               <a:t>Fourth level</a:t>
             </a:r>
           </a:p>
           <a:p>
             <a:pPr lvl="4"/>
             <a:r>
-              <a:rPr lang="en-US" smtClean="0"/>
+              <a:rPr lang="en-US"/>
               <a:t>Fifth level</a:t>
             </a:r>
-            <a:endParaRPr lang="en-US"/>
           </a:p>
         </p:txBody>
       </p:sp>
@@ -3707,38 +3715,37 @@
           <a:p>
             <a:pPr lvl="0"/>
             <a:r>
-              <a:rPr lang="en-US" smtClean="0"/>
+              <a:rPr lang="en-US"/>
               <a:t>Click to edit Master text styles</a:t>
             </a:r>
           </a:p>
           <a:p>
             <a:pPr lvl="1"/>
             <a:r>
-              <a:rPr lang="en-US" smtClean="0"/>
+              <a:rPr lang="en-US"/>
               <a:t>Second level</a:t>
             </a:r>
           </a:p>
           <a:p>
             <a:pPr lvl="2"/>
             <a:r>
-              <a:rPr lang="en-US" smtClean="0"/>
+              <a:rPr lang="en-US"/>
               <a:t>Third level</a:t>
             </a:r>
           </a:p>
           <a:p>
             <a:pPr lvl="3"/>
             <a:r>
-              <a:rPr lang="en-US" smtClean="0"/>
+              <a:rPr lang="en-US"/>
               <a:t>Fourth level</a:t>
             </a:r>
           </a:p>
           <a:p>
             <a:pPr lvl="4"/>
             <a:r>
-              <a:rPr lang="en-US" smtClean="0"/>
+              <a:rPr lang="en-US"/>
               <a:t>Fifth level</a:t>
             </a:r>
-            <a:endParaRPr lang="en-US"/>
           </a:p>
         </p:txBody>
       </p:sp>
@@ -3759,7 +3766,7 @@
           <a:p>
             <a:fld id="{5BCAD085-E8A6-8845-BD4E-CB4CCA059FC4}" type="datetimeFigureOut">
               <a:rPr lang="en-US" smtClean="0"/>
-              <a:t>1/27/13</a:t>
+              <a:t>7/16/26</a:t>
             </a:fld>
             <a:endParaRPr lang="en-US"/>
           </a:p>
@@ -3857,10 +3864,9 @@
           </a:lstStyle>
           <a:p>
             <a:r>
-              <a:rPr lang="en-US" smtClean="0"/>
+              <a:rPr lang="en-US"/>
               <a:t>Click to edit Master title style</a:t>
             </a:r>
-            <a:endParaRPr lang="en-US"/>
           </a:p>
         </p:txBody>
       </p:sp>
@@ -3923,7 +3929,7 @@
           <a:p>
             <a:pPr lvl="0"/>
             <a:r>
-              <a:rPr lang="en-US" smtClean="0"/>
+              <a:rPr lang="en-US"/>
               <a:t>Click to edit Master text styles</a:t>
             </a:r>
           </a:p>
@@ -3979,38 +3985,37 @@
           <a:p>
             <a:pPr lvl="0"/>
             <a:r>
-              <a:rPr lang="en-US" smtClean="0"/>
+              <a:rPr lang="en-US"/>
               <a:t>Click to edit Master text styles</a:t>
             </a:r>
           </a:p>
           <a:p>
             <a:pPr lvl="1"/>
             <a:r>
-              <a:rPr lang="en-US" smtClean="0"/>
+              <a:rPr lang="en-US"/>
               <a:t>Second level</a:t>
             </a:r>
           </a:p>
           <a:p>
             <a:pPr lvl="2"/>
             <a:r>
-              <a:rPr lang="en-US" smtClean="0"/>
+              <a:rPr lang="en-US"/>
               <a:t>Third level</a:t>
             </a:r>
           </a:p>
           <a:p>
             <a:pPr lvl="3"/>
             <a:r>
-              <a:rPr lang="en-US" smtClean="0"/>
+              <a:rPr lang="en-US"/>
               <a:t>Fourth level</a:t>
             </a:r>
           </a:p>
           <a:p>
             <a:pPr lvl="4"/>
             <a:r>
-              <a:rPr lang="en-US" smtClean="0"/>
+              <a:rPr lang="en-US"/>
               <a:t>Fifth level</a:t>
             </a:r>
-            <a:endParaRPr lang="en-US"/>
           </a:p>
         </p:txBody>
       </p:sp>
@@ -4073,7 +4078,7 @@
           <a:p>
             <a:pPr lvl="0"/>
             <a:r>
-              <a:rPr lang="en-US" smtClean="0"/>
+              <a:rPr lang="en-US"/>
               <a:t>Click to edit Master text styles</a:t>
             </a:r>
           </a:p>
@@ -4129,38 +4134,37 @@
           <a:p>
             <a:pPr lvl="0"/>
             <a:r>
-              <a:rPr lang="en-US" smtClean="0"/>
+              <a:rPr lang="en-US"/>
               <a:t>Click to edit Master text styles</a:t>
             </a:r>
           </a:p>
           <a:p>
             <a:pPr lvl="1"/>
             <a:r>
-              <a:rPr lang="en-US" smtClean="0"/>
+              <a:rPr lang="en-US"/>
               <a:t>Second level</a:t>
             </a:r>
           </a:p>
           <a:p>
             <a:pPr lvl="2"/>
             <a:r>
-              <a:rPr lang="en-US" smtClean="0"/>
+              <a:rPr lang="en-US"/>
               <a:t>Third level</a:t>
             </a:r>
           </a:p>
           <a:p>
             <a:pPr lvl="3"/>
             <a:r>
-              <a:rPr lang="en-US" smtClean="0"/>
+              <a:rPr lang="en-US"/>
               <a:t>Fourth level</a:t>
             </a:r>
           </a:p>
           <a:p>
             <a:pPr lvl="4"/>
             <a:r>
-              <a:rPr lang="en-US" smtClean="0"/>
+              <a:rPr lang="en-US"/>
               <a:t>Fifth level</a:t>
             </a:r>
-            <a:endParaRPr lang="en-US"/>
           </a:p>
         </p:txBody>
       </p:sp>
@@ -4181,7 +4185,7 @@
           <a:p>
             <a:fld id="{5BCAD085-E8A6-8845-BD4E-CB4CCA059FC4}" type="datetimeFigureOut">
               <a:rPr lang="en-US" smtClean="0"/>
-              <a:t>1/27/13</a:t>
+              <a:t>7/16/26</a:t>
             </a:fld>
             <a:endParaRPr lang="en-US"/>
           </a:p>
@@ -4275,10 +4279,9 @@
           <a:lstStyle/>
           <a:p>
             <a:r>
-              <a:rPr lang="en-US" smtClean="0"/>
+              <a:rPr lang="en-US"/>
               <a:t>Click to edit Master title style</a:t>
             </a:r>
-            <a:endParaRPr lang="en-US"/>
           </a:p>
         </p:txBody>
       </p:sp>
@@ -4299,7 +4302,7 @@
           <a:p>
             <a:fld id="{5BCAD085-E8A6-8845-BD4E-CB4CCA059FC4}" type="datetimeFigureOut">
               <a:rPr lang="en-US" smtClean="0"/>
-              <a:t>1/27/13</a:t>
+              <a:t>7/16/26</a:t>
             </a:fld>
             <a:endParaRPr lang="en-US"/>
           </a:p>
@@ -4394,7 +4397,7 @@
           <a:p>
             <a:fld id="{5BCAD085-E8A6-8845-BD4E-CB4CCA059FC4}" type="datetimeFigureOut">
               <a:rPr lang="en-US" smtClean="0"/>
-              <a:t>1/27/13</a:t>
+              <a:t>7/16/26</a:t>
             </a:fld>
             <a:endParaRPr lang="en-US"/>
           </a:p>
@@ -4497,10 +4500,9 @@
           </a:lstStyle>
           <a:p>
             <a:r>
-              <a:rPr lang="en-US" smtClean="0"/>
+              <a:rPr lang="en-US"/>
               <a:t>Click to edit Master title style</a:t>
             </a:r>
-            <a:endParaRPr lang="en-US"/>
           </a:p>
         </p:txBody>
       </p:sp>
@@ -4554,38 +4556,37 @@
           <a:p>
             <a:pPr lvl="0"/>
             <a:r>
-              <a:rPr lang="en-US" smtClean="0"/>
+              <a:rPr lang="en-US"/>
               <a:t>Click to edit Master text styles</a:t>
             </a:r>
           </a:p>
           <a:p>
             <a:pPr lvl="1"/>
             <a:r>
-              <a:rPr lang="en-US" smtClean="0"/>
+              <a:rPr lang="en-US"/>
               <a:t>Second level</a:t>
             </a:r>
           </a:p>
           <a:p>
             <a:pPr lvl="2"/>
             <a:r>
-              <a:rPr lang="en-US" smtClean="0"/>
+              <a:rPr lang="en-US"/>
               <a:t>Third level</a:t>
             </a:r>
           </a:p>
           <a:p>
             <a:pPr lvl="3"/>
             <a:r>
-              <a:rPr lang="en-US" smtClean="0"/>
+              <a:rPr lang="en-US"/>
               <a:t>Fourth level</a:t>
             </a:r>
           </a:p>
           <a:p>
             <a:pPr lvl="4"/>
             <a:r>
-              <a:rPr lang="en-US" smtClean="0"/>
+              <a:rPr lang="en-US"/>
               <a:t>Fifth level</a:t>
             </a:r>
-            <a:endParaRPr lang="en-US"/>
           </a:p>
         </p:txBody>
       </p:sp>
@@ -4648,7 +4649,7 @@
           <a:p>
             <a:pPr lvl="0"/>
             <a:r>
-              <a:rPr lang="en-US" smtClean="0"/>
+              <a:rPr lang="en-US"/>
               <a:t>Click to edit Master text styles</a:t>
             </a:r>
           </a:p>
@@ -4671,7 +4672,7 @@
           <a:p>
             <a:fld id="{5BCAD085-E8A6-8845-BD4E-CB4CCA059FC4}" type="datetimeFigureOut">
               <a:rPr lang="en-US" smtClean="0"/>
-              <a:t>1/27/13</a:t>
+              <a:t>7/16/26</a:t>
             </a:fld>
             <a:endParaRPr lang="en-US"/>
           </a:p>
@@ -4774,10 +4775,9 @@
           </a:lstStyle>
           <a:p>
             <a:r>
-              <a:rPr lang="en-US" smtClean="0"/>
+              <a:rPr lang="en-US"/>
               <a:t>Click to edit Master title style</a:t>
             </a:r>
-            <a:endParaRPr lang="en-US"/>
           </a:p>
         </p:txBody>
       </p:sp>
@@ -4901,7 +4901,7 @@
           <a:p>
             <a:pPr lvl="0"/>
             <a:r>
-              <a:rPr lang="en-US" smtClean="0"/>
+              <a:rPr lang="en-US"/>
               <a:t>Click to edit Master text styles</a:t>
             </a:r>
           </a:p>
@@ -4924,7 +4924,7 @@
           <a:p>
             <a:fld id="{5BCAD085-E8A6-8845-BD4E-CB4CCA059FC4}" type="datetimeFigureOut">
               <a:rPr lang="en-US" smtClean="0"/>
-              <a:t>1/27/13</a:t>
+              <a:t>7/16/26</a:t>
             </a:fld>
             <a:endParaRPr lang="en-US"/>
           </a:p>
@@ -5033,10 +5033,9 @@
           <a:lstStyle/>
           <a:p>
             <a:r>
-              <a:rPr lang="en-US" smtClean="0"/>
+              <a:rPr lang="en-US"/>
               <a:t>Click to edit Master title style</a:t>
             </a:r>
-            <a:endParaRPr lang="en-US"/>
           </a:p>
         </p:txBody>
       </p:sp>
@@ -5067,38 +5066,37 @@
           <a:p>
             <a:pPr lvl="0"/>
             <a:r>
-              <a:rPr lang="en-US" smtClean="0"/>
+              <a:rPr lang="en-US"/>
               <a:t>Click to edit Master text styles</a:t>
             </a:r>
           </a:p>
           <a:p>
             <a:pPr lvl="1"/>
             <a:r>
-              <a:rPr lang="en-US" smtClean="0"/>
+              <a:rPr lang="en-US"/>
               <a:t>Second level</a:t>
             </a:r>
           </a:p>
           <a:p>
             <a:pPr lvl="2"/>
             <a:r>
-              <a:rPr lang="en-US" smtClean="0"/>
+              <a:rPr lang="en-US"/>
               <a:t>Third level</a:t>
             </a:r>
           </a:p>
           <a:p>
             <a:pPr lvl="3"/>
             <a:r>
-              <a:rPr lang="en-US" smtClean="0"/>
+              <a:rPr lang="en-US"/>
               <a:t>Fourth level</a:t>
             </a:r>
           </a:p>
           <a:p>
             <a:pPr lvl="4"/>
             <a:r>
-              <a:rPr lang="en-US" smtClean="0"/>
+              <a:rPr lang="en-US"/>
               <a:t>Fifth level</a:t>
             </a:r>
-            <a:endParaRPr lang="en-US"/>
           </a:p>
         </p:txBody>
       </p:sp>
@@ -5137,7 +5135,7 @@
           <a:p>
             <a:fld id="{5BCAD085-E8A6-8845-BD4E-CB4CCA059FC4}" type="datetimeFigureOut">
               <a:rPr lang="en-US" smtClean="0"/>
-              <a:t>1/27/13</a:t>
+              <a:t>7/16/26</a:t>
             </a:fld>
             <a:endParaRPr lang="en-US"/>
           </a:p>
@@ -5496,7 +5494,7 @@
 </file>
 
 <file path=ppt/slides/slide1.xml><?xml version="1.0" encoding="utf-8"?>
-<p:sld xmlns:a="http://schemas.openxmlformats.org/drawingml/2006/main" xmlns:p="http://schemas.openxmlformats.org/presentationml/2006/main" xmlns:r="http://schemas.openxmlformats.org/officeDocument/2006/relationships">
+<p:sld xmlns:a="http://schemas.openxmlformats.org/drawingml/2006/main" xmlns:r="http://schemas.openxmlformats.org/officeDocument/2006/relationships" xmlns:p="http://schemas.openxmlformats.org/presentationml/2006/main">
   <p:cSld>
     <p:bg>
       <p:bgPr>
@@ -5512,7 +5510,14 @@
         <p:cNvGrpSpPr/>
         <p:nvPr/>
       </p:nvGrpSpPr>
-      <p:grpSpPr/>
+      <p:grpSpPr>
+        <a:xfrm>
+          <a:off x="0" y="0"/>
+          <a:ext cx="0" cy="0"/>
+          <a:chOff x="0" y="0"/>
+          <a:chExt cx="0" cy="0"/>
+        </a:xfrm>
+      </p:grpSpPr>
       <p:sp>
         <p:nvSpPr>
           <p:cNvPr id="2" name="Rectangle 1"/>
@@ -5554,6 +5559,7 @@
           <a:lstStyle/>
           <a:p>
             <a:pPr algn="ctr"/>
+            <a:endParaRPr/>
           </a:p>
         </p:txBody>
       </p:sp>
@@ -5574,7 +5580,7 @@
           <a:noFill/>
         </p:spPr>
         <p:txBody>
-          <a:bodyPr wrap="square" anchor="t" lIns="0" rIns="0" tIns="0" bIns="0">
+          <a:bodyPr wrap="square" lIns="0" tIns="0" rIns="0" bIns="0" anchor="t">
             <a:spAutoFit/>
           </a:bodyPr>
           <a:lstStyle/>
@@ -5640,7 +5646,7 @@
           <a:noFill/>
         </p:spPr>
         <p:txBody>
-          <a:bodyPr wrap="square" anchor="t" lIns="0" rIns="0" tIns="0" bIns="0">
+          <a:bodyPr wrap="square" lIns="0" tIns="0" rIns="0" bIns="0" anchor="t">
             <a:spAutoFit/>
           </a:bodyPr>
           <a:lstStyle/>
@@ -5675,7 +5681,7 @@
 </file>
 
 <file path=ppt/slides/slide10.xml><?xml version="1.0" encoding="utf-8"?>
-<p:sld xmlns:a="http://schemas.openxmlformats.org/drawingml/2006/main" xmlns:p="http://schemas.openxmlformats.org/presentationml/2006/main" xmlns:r="http://schemas.openxmlformats.org/officeDocument/2006/relationships">
+<p:sld xmlns:a="http://schemas.openxmlformats.org/drawingml/2006/main" xmlns:r="http://schemas.openxmlformats.org/officeDocument/2006/relationships" xmlns:p="http://schemas.openxmlformats.org/presentationml/2006/main">
   <p:cSld>
     <p:bg>
       <p:bgPr>
@@ -5691,7 +5697,14 @@
         <p:cNvGrpSpPr/>
         <p:nvPr/>
       </p:nvGrpSpPr>
-      <p:grpSpPr/>
+      <p:grpSpPr>
+        <a:xfrm>
+          <a:off x="0" y="0"/>
+          <a:ext cx="0" cy="0"/>
+          <a:chOff x="0" y="0"/>
+          <a:chExt cx="0" cy="0"/>
+        </a:xfrm>
+      </p:grpSpPr>
       <p:sp>
         <p:nvSpPr>
           <p:cNvPr id="2" name="Rectangle 1"/>
@@ -5733,6 +5746,7 @@
           <a:lstStyle/>
           <a:p>
             <a:pPr algn="ctr"/>
+            <a:endParaRPr/>
           </a:p>
         </p:txBody>
       </p:sp>
@@ -5753,7 +5767,7 @@
           <a:noFill/>
         </p:spPr>
         <p:txBody>
-          <a:bodyPr wrap="square" anchor="t" lIns="0" rIns="0" tIns="0" bIns="0">
+          <a:bodyPr wrap="square" lIns="0" tIns="0" rIns="0" bIns="0" anchor="t">
             <a:spAutoFit/>
           </a:bodyPr>
           <a:lstStyle/>
@@ -5787,7 +5801,7 @@
           <a:noFill/>
         </p:spPr>
         <p:txBody>
-          <a:bodyPr wrap="square" anchor="t" lIns="0" rIns="0" tIns="0" bIns="0">
+          <a:bodyPr wrap="square" lIns="0" tIns="0" rIns="0" bIns="0" anchor="t">
             <a:spAutoFit/>
           </a:bodyPr>
           <a:lstStyle/>
@@ -5877,6 +5891,7 @@
           <a:lstStyle/>
           <a:p>
             <a:pPr algn="ctr"/>
+            <a:endParaRPr/>
           </a:p>
         </p:txBody>
       </p:sp>
@@ -5897,7 +5912,7 @@
           <a:noFill/>
         </p:spPr>
         <p:txBody>
-          <a:bodyPr wrap="square" anchor="t" lIns="0" rIns="0" tIns="0" bIns="0">
+          <a:bodyPr wrap="square" lIns="0" tIns="0" rIns="0" bIns="0" anchor="t">
             <a:spAutoFit/>
           </a:bodyPr>
           <a:lstStyle/>
@@ -5940,21 +5955,13 @@
           <a:noFill/>
         </p:spPr>
         <p:txBody>
-          <a:bodyPr wrap="square" anchor="t" lIns="0" rIns="0" tIns="0" bIns="0">
+          <a:bodyPr wrap="square" lIns="0" tIns="0" rIns="0" bIns="0" anchor="t">
             <a:spAutoFit/>
           </a:bodyPr>
           <a:lstStyle/>
           <a:p>
             <a:pPr algn="r"/>
-            <a:r>
-              <a:rPr sz="1100" b="0" i="0">
-                <a:solidFill>
-                  <a:srgbClr val="7A7A7A"/>
-                </a:solidFill>
-                <a:latin typeface="Roboto"/>
-              </a:rPr>
-              <a:t/>
-            </a:r>
+            <a:endParaRPr/>
           </a:p>
         </p:txBody>
       </p:sp>
@@ -5967,7 +5974,7 @@
 </file>
 
 <file path=ppt/slides/slide11.xml><?xml version="1.0" encoding="utf-8"?>
-<p:sld xmlns:a="http://schemas.openxmlformats.org/drawingml/2006/main" xmlns:p="http://schemas.openxmlformats.org/presentationml/2006/main" xmlns:r="http://schemas.openxmlformats.org/officeDocument/2006/relationships">
+<p:sld xmlns:a="http://schemas.openxmlformats.org/drawingml/2006/main" xmlns:r="http://schemas.openxmlformats.org/officeDocument/2006/relationships" xmlns:p="http://schemas.openxmlformats.org/presentationml/2006/main">
   <p:cSld>
     <p:bg>
       <p:bgPr>
@@ -5983,7 +5990,14 @@
         <p:cNvGrpSpPr/>
         <p:nvPr/>
       </p:nvGrpSpPr>
-      <p:grpSpPr/>
+      <p:grpSpPr>
+        <a:xfrm>
+          <a:off x="0" y="0"/>
+          <a:ext cx="0" cy="0"/>
+          <a:chOff x="0" y="0"/>
+          <a:chExt cx="0" cy="0"/>
+        </a:xfrm>
+      </p:grpSpPr>
       <p:sp>
         <p:nvSpPr>
           <p:cNvPr id="2" name="TextBox 1"/>
@@ -6001,7 +6015,7 @@
           <a:noFill/>
         </p:spPr>
         <p:txBody>
-          <a:bodyPr wrap="square" anchor="t" lIns="0" rIns="0" tIns="0" bIns="0">
+          <a:bodyPr wrap="square" lIns="0" tIns="0" rIns="0" bIns="0" anchor="t">
             <a:spAutoFit/>
           </a:bodyPr>
           <a:lstStyle/>
@@ -6059,6 +6073,7 @@
           <a:lstStyle/>
           <a:p>
             <a:pPr algn="ctr"/>
+            <a:endParaRPr/>
           </a:p>
         </p:txBody>
       </p:sp>
@@ -6079,7 +6094,7 @@
           <a:noFill/>
         </p:spPr>
         <p:txBody>
-          <a:bodyPr wrap="square" anchor="ctr" lIns="0" rIns="0" tIns="0" bIns="0">
+          <a:bodyPr wrap="square" lIns="0" tIns="0" rIns="0" bIns="0" anchor="ctr">
             <a:spAutoFit/>
           </a:bodyPr>
           <a:lstStyle/>
@@ -6219,6 +6234,7 @@
           <a:lstStyle/>
           <a:p>
             <a:pPr algn="ctr"/>
+            <a:endParaRPr/>
           </a:p>
         </p:txBody>
       </p:sp>
@@ -6239,7 +6255,7 @@
           <a:noFill/>
         </p:spPr>
         <p:txBody>
-          <a:bodyPr wrap="square" anchor="t" lIns="0" rIns="0" tIns="0" bIns="0">
+          <a:bodyPr wrap="square" lIns="0" tIns="0" rIns="0" bIns="0" anchor="t">
             <a:spAutoFit/>
           </a:bodyPr>
           <a:lstStyle/>
@@ -6282,7 +6298,7 @@
           <a:noFill/>
         </p:spPr>
         <p:txBody>
-          <a:bodyPr wrap="square" anchor="t" lIns="0" rIns="0" tIns="0" bIns="0">
+          <a:bodyPr wrap="square" lIns="0" tIns="0" rIns="0" bIns="0" anchor="t">
             <a:spAutoFit/>
           </a:bodyPr>
           <a:lstStyle/>
@@ -6309,7 +6325,7 @@
 </file>
 
 <file path=ppt/slides/slide12.xml><?xml version="1.0" encoding="utf-8"?>
-<p:sld xmlns:a="http://schemas.openxmlformats.org/drawingml/2006/main" xmlns:p="http://schemas.openxmlformats.org/presentationml/2006/main" xmlns:r="http://schemas.openxmlformats.org/officeDocument/2006/relationships">
+<p:sld xmlns:a="http://schemas.openxmlformats.org/drawingml/2006/main" xmlns:r="http://schemas.openxmlformats.org/officeDocument/2006/relationships" xmlns:p="http://schemas.openxmlformats.org/presentationml/2006/main">
   <p:cSld>
     <p:bg>
       <p:bgPr>
@@ -6325,7 +6341,14 @@
         <p:cNvGrpSpPr/>
         <p:nvPr/>
       </p:nvGrpSpPr>
-      <p:grpSpPr/>
+      <p:grpSpPr>
+        <a:xfrm>
+          <a:off x="0" y="0"/>
+          <a:ext cx="0" cy="0"/>
+          <a:chOff x="0" y="0"/>
+          <a:chExt cx="0" cy="0"/>
+        </a:xfrm>
+      </p:grpSpPr>
       <p:sp>
         <p:nvSpPr>
           <p:cNvPr id="2" name="TextBox 1"/>
@@ -6343,7 +6366,7 @@
           <a:noFill/>
         </p:spPr>
         <p:txBody>
-          <a:bodyPr wrap="square" anchor="t" lIns="0" rIns="0" tIns="0" bIns="0">
+          <a:bodyPr wrap="square" lIns="0" tIns="0" rIns="0" bIns="0" anchor="t">
             <a:spAutoFit/>
           </a:bodyPr>
           <a:lstStyle/>
@@ -6417,6 +6440,7 @@
           <a:lstStyle/>
           <a:p>
             <a:pPr algn="ctr"/>
+            <a:endParaRPr/>
           </a:p>
         </p:txBody>
       </p:sp>
@@ -6437,7 +6461,7 @@
           <a:noFill/>
         </p:spPr>
         <p:txBody>
-          <a:bodyPr wrap="square" anchor="ctr" lIns="0" rIns="0" tIns="0" bIns="0">
+          <a:bodyPr wrap="square" lIns="0" tIns="0" rIns="0" bIns="0" anchor="ctr">
             <a:spAutoFit/>
           </a:bodyPr>
           <a:lstStyle/>
@@ -6639,6 +6663,7 @@
           <a:lstStyle/>
           <a:p>
             <a:pPr algn="ctr"/>
+            <a:endParaRPr/>
           </a:p>
         </p:txBody>
       </p:sp>
@@ -6659,7 +6684,7 @@
           <a:noFill/>
         </p:spPr>
         <p:txBody>
-          <a:bodyPr wrap="square" anchor="t" lIns="0" rIns="0" tIns="0" bIns="0">
+          <a:bodyPr wrap="square" lIns="0" tIns="0" rIns="0" bIns="0" anchor="t">
             <a:spAutoFit/>
           </a:bodyPr>
           <a:lstStyle/>
@@ -6702,7 +6727,7 @@
           <a:noFill/>
         </p:spPr>
         <p:txBody>
-          <a:bodyPr wrap="square" anchor="t" lIns="0" rIns="0" tIns="0" bIns="0">
+          <a:bodyPr wrap="square" lIns="0" tIns="0" rIns="0" bIns="0" anchor="t">
             <a:spAutoFit/>
           </a:bodyPr>
           <a:lstStyle/>
@@ -6729,7 +6754,7 @@
 </file>
 
 <file path=ppt/slides/slide13.xml><?xml version="1.0" encoding="utf-8"?>
-<p:sld xmlns:a="http://schemas.openxmlformats.org/drawingml/2006/main" xmlns:p="http://schemas.openxmlformats.org/presentationml/2006/main" xmlns:r="http://schemas.openxmlformats.org/officeDocument/2006/relationships">
+<p:sld xmlns:a="http://schemas.openxmlformats.org/drawingml/2006/main" xmlns:r="http://schemas.openxmlformats.org/officeDocument/2006/relationships" xmlns:p="http://schemas.openxmlformats.org/presentationml/2006/main">
   <p:cSld>
     <p:bg>
       <p:bgPr>
@@ -6745,7 +6770,14 @@
         <p:cNvGrpSpPr/>
         <p:nvPr/>
       </p:nvGrpSpPr>
-      <p:grpSpPr/>
+      <p:grpSpPr>
+        <a:xfrm>
+          <a:off x="0" y="0"/>
+          <a:ext cx="0" cy="0"/>
+          <a:chOff x="0" y="0"/>
+          <a:chExt cx="0" cy="0"/>
+        </a:xfrm>
+      </p:grpSpPr>
       <p:sp>
         <p:nvSpPr>
           <p:cNvPr id="2" name="TextBox 1"/>
@@ -6763,7 +6795,7 @@
           <a:noFill/>
         </p:spPr>
         <p:txBody>
-          <a:bodyPr wrap="square" anchor="t" lIns="0" rIns="0" tIns="0" bIns="0">
+          <a:bodyPr wrap="square" lIns="0" tIns="0" rIns="0" bIns="0" anchor="t">
             <a:spAutoFit/>
           </a:bodyPr>
           <a:lstStyle/>
@@ -6821,6 +6853,7 @@
           <a:lstStyle/>
           <a:p>
             <a:pPr algn="ctr"/>
+            <a:endParaRPr/>
           </a:p>
         </p:txBody>
       </p:sp>
@@ -6841,7 +6874,7 @@
           <a:noFill/>
         </p:spPr>
         <p:txBody>
-          <a:bodyPr wrap="square" anchor="ctr" lIns="0" rIns="0" tIns="0" bIns="0">
+          <a:bodyPr wrap="square" lIns="0" tIns="0" rIns="0" bIns="0" anchor="ctr">
             <a:spAutoFit/>
           </a:bodyPr>
           <a:lstStyle/>
@@ -6981,6 +7014,7 @@
           <a:lstStyle/>
           <a:p>
             <a:pPr algn="ctr"/>
+            <a:endParaRPr/>
           </a:p>
         </p:txBody>
       </p:sp>
@@ -7001,7 +7035,7 @@
           <a:noFill/>
         </p:spPr>
         <p:txBody>
-          <a:bodyPr wrap="square" anchor="t" lIns="0" rIns="0" tIns="0" bIns="0">
+          <a:bodyPr wrap="square" lIns="0" tIns="0" rIns="0" bIns="0" anchor="t">
             <a:spAutoFit/>
           </a:bodyPr>
           <a:lstStyle/>
@@ -7044,7 +7078,7 @@
           <a:noFill/>
         </p:spPr>
         <p:txBody>
-          <a:bodyPr wrap="square" anchor="t" lIns="0" rIns="0" tIns="0" bIns="0">
+          <a:bodyPr wrap="square" lIns="0" tIns="0" rIns="0" bIns="0" anchor="t">
             <a:spAutoFit/>
           </a:bodyPr>
           <a:lstStyle/>
@@ -7071,7 +7105,7 @@
 </file>
 
 <file path=ppt/slides/slide14.xml><?xml version="1.0" encoding="utf-8"?>
-<p:sld xmlns:a="http://schemas.openxmlformats.org/drawingml/2006/main" xmlns:p="http://schemas.openxmlformats.org/presentationml/2006/main" xmlns:r="http://schemas.openxmlformats.org/officeDocument/2006/relationships">
+<p:sld xmlns:a="http://schemas.openxmlformats.org/drawingml/2006/main" xmlns:r="http://schemas.openxmlformats.org/officeDocument/2006/relationships" xmlns:p="http://schemas.openxmlformats.org/presentationml/2006/main">
   <p:cSld>
     <p:bg>
       <p:bgPr>
@@ -7087,7 +7121,14 @@
         <p:cNvGrpSpPr/>
         <p:nvPr/>
       </p:nvGrpSpPr>
-      <p:grpSpPr/>
+      <p:grpSpPr>
+        <a:xfrm>
+          <a:off x="0" y="0"/>
+          <a:ext cx="0" cy="0"/>
+          <a:chOff x="0" y="0"/>
+          <a:chExt cx="0" cy="0"/>
+        </a:xfrm>
+      </p:grpSpPr>
       <p:sp>
         <p:nvSpPr>
           <p:cNvPr id="2" name="TextBox 1"/>
@@ -7105,7 +7146,7 @@
           <a:noFill/>
         </p:spPr>
         <p:txBody>
-          <a:bodyPr wrap="square" anchor="t" lIns="0" rIns="0" tIns="0" bIns="0">
+          <a:bodyPr wrap="square" lIns="0" tIns="0" rIns="0" bIns="0" anchor="t">
             <a:spAutoFit/>
           </a:bodyPr>
           <a:lstStyle/>
@@ -7163,6 +7204,7 @@
           <a:lstStyle/>
           <a:p>
             <a:pPr algn="ctr"/>
+            <a:endParaRPr/>
           </a:p>
         </p:txBody>
       </p:sp>
@@ -7183,7 +7225,7 @@
           <a:noFill/>
         </p:spPr>
         <p:txBody>
-          <a:bodyPr wrap="square" anchor="ctr" lIns="0" rIns="0" tIns="0" bIns="0">
+          <a:bodyPr wrap="square" lIns="0" tIns="0" rIns="0" bIns="0" anchor="ctr">
             <a:spAutoFit/>
           </a:bodyPr>
           <a:lstStyle/>
@@ -7323,6 +7365,7 @@
           <a:lstStyle/>
           <a:p>
             <a:pPr algn="ctr"/>
+            <a:endParaRPr/>
           </a:p>
         </p:txBody>
       </p:sp>
@@ -7343,7 +7386,7 @@
           <a:noFill/>
         </p:spPr>
         <p:txBody>
-          <a:bodyPr wrap="square" anchor="t" lIns="0" rIns="0" tIns="0" bIns="0">
+          <a:bodyPr wrap="square" lIns="0" tIns="0" rIns="0" bIns="0" anchor="t">
             <a:spAutoFit/>
           </a:bodyPr>
           <a:lstStyle/>
@@ -7386,7 +7429,7 @@
           <a:noFill/>
         </p:spPr>
         <p:txBody>
-          <a:bodyPr wrap="square" anchor="t" lIns="0" rIns="0" tIns="0" bIns="0">
+          <a:bodyPr wrap="square" lIns="0" tIns="0" rIns="0" bIns="0" anchor="t">
             <a:spAutoFit/>
           </a:bodyPr>
           <a:lstStyle/>
@@ -7413,7 +7456,7 @@
 </file>
 
 <file path=ppt/slides/slide15.xml><?xml version="1.0" encoding="utf-8"?>
-<p:sld xmlns:a="http://schemas.openxmlformats.org/drawingml/2006/main" xmlns:p="http://schemas.openxmlformats.org/presentationml/2006/main" xmlns:r="http://schemas.openxmlformats.org/officeDocument/2006/relationships">
+<p:sld xmlns:a="http://schemas.openxmlformats.org/drawingml/2006/main" xmlns:r="http://schemas.openxmlformats.org/officeDocument/2006/relationships" xmlns:p="http://schemas.openxmlformats.org/presentationml/2006/main">
   <p:cSld>
     <p:bg>
       <p:bgPr>
@@ -7429,7 +7472,14 @@
         <p:cNvGrpSpPr/>
         <p:nvPr/>
       </p:nvGrpSpPr>
-      <p:grpSpPr/>
+      <p:grpSpPr>
+        <a:xfrm>
+          <a:off x="0" y="0"/>
+          <a:ext cx="0" cy="0"/>
+          <a:chOff x="0" y="0"/>
+          <a:chExt cx="0" cy="0"/>
+        </a:xfrm>
+      </p:grpSpPr>
       <p:sp>
         <p:nvSpPr>
           <p:cNvPr id="2" name="TextBox 1"/>
@@ -7447,7 +7497,7 @@
           <a:noFill/>
         </p:spPr>
         <p:txBody>
-          <a:bodyPr wrap="square" anchor="t" lIns="0" rIns="0" tIns="0" bIns="0">
+          <a:bodyPr wrap="square" lIns="0" tIns="0" rIns="0" bIns="0" anchor="t">
             <a:spAutoFit/>
           </a:bodyPr>
           <a:lstStyle/>
@@ -7505,6 +7555,7 @@
           <a:lstStyle/>
           <a:p>
             <a:pPr algn="ctr"/>
+            <a:endParaRPr/>
           </a:p>
         </p:txBody>
       </p:sp>
@@ -7525,7 +7576,7 @@
           <a:noFill/>
         </p:spPr>
         <p:txBody>
-          <a:bodyPr wrap="square" anchor="ctr" lIns="0" rIns="0" tIns="0" bIns="0">
+          <a:bodyPr wrap="square" lIns="0" tIns="0" rIns="0" bIns="0" anchor="ctr">
             <a:spAutoFit/>
           </a:bodyPr>
           <a:lstStyle/>
@@ -7696,6 +7747,7 @@
           <a:lstStyle/>
           <a:p>
             <a:pPr algn="ctr"/>
+            <a:endParaRPr/>
           </a:p>
         </p:txBody>
       </p:sp>
@@ -7716,7 +7768,7 @@
           <a:noFill/>
         </p:spPr>
         <p:txBody>
-          <a:bodyPr wrap="square" anchor="t" lIns="0" rIns="0" tIns="0" bIns="0">
+          <a:bodyPr wrap="square" lIns="0" tIns="0" rIns="0" bIns="0" anchor="t">
             <a:spAutoFit/>
           </a:bodyPr>
           <a:lstStyle/>
@@ -7759,7 +7811,7 @@
           <a:noFill/>
         </p:spPr>
         <p:txBody>
-          <a:bodyPr wrap="square" anchor="t" lIns="0" rIns="0" tIns="0" bIns="0">
+          <a:bodyPr wrap="square" lIns="0" tIns="0" rIns="0" bIns="0" anchor="t">
             <a:spAutoFit/>
           </a:bodyPr>
           <a:lstStyle/>
@@ -7786,7 +7838,7 @@
 </file>
 
 <file path=ppt/slides/slide16.xml><?xml version="1.0" encoding="utf-8"?>
-<p:sld xmlns:a="http://schemas.openxmlformats.org/drawingml/2006/main" xmlns:p="http://schemas.openxmlformats.org/presentationml/2006/main" xmlns:r="http://schemas.openxmlformats.org/officeDocument/2006/relationships">
+<p:sld xmlns:a="http://schemas.openxmlformats.org/drawingml/2006/main" xmlns:r="http://schemas.openxmlformats.org/officeDocument/2006/relationships" xmlns:p="http://schemas.openxmlformats.org/presentationml/2006/main">
   <p:cSld>
     <p:bg>
       <p:bgPr>
@@ -7802,7 +7854,14 @@
         <p:cNvGrpSpPr/>
         <p:nvPr/>
       </p:nvGrpSpPr>
-      <p:grpSpPr/>
+      <p:grpSpPr>
+        <a:xfrm>
+          <a:off x="0" y="0"/>
+          <a:ext cx="0" cy="0"/>
+          <a:chOff x="0" y="0"/>
+          <a:chExt cx="0" cy="0"/>
+        </a:xfrm>
+      </p:grpSpPr>
       <p:sp>
         <p:nvSpPr>
           <p:cNvPr id="2" name="Rectangle 1"/>
@@ -7844,6 +7903,7 @@
           <a:lstStyle/>
           <a:p>
             <a:pPr algn="ctr"/>
+            <a:endParaRPr/>
           </a:p>
         </p:txBody>
       </p:sp>
@@ -7917,7 +7977,7 @@
           <a:noFill/>
         </p:spPr>
         <p:txBody>
-          <a:bodyPr wrap="square" anchor="ctr" lIns="0" rIns="0" tIns="0" bIns="0">
+          <a:bodyPr wrap="square" lIns="0" tIns="0" rIns="0" bIns="0" anchor="ctr">
             <a:spAutoFit/>
           </a:bodyPr>
           <a:lstStyle/>
@@ -7943,7 +8003,7 @@
         <p:spPr>
           <a:xfrm>
             <a:off x="658368" y="1554480"/>
-            <a:ext cx="10881360" cy="4297680"/>
+            <a:ext cx="10881360" cy="3472938"/>
           </a:xfrm>
           <a:prstGeom prst="rect">
             <a:avLst/>
@@ -7951,7 +8011,7 @@
           <a:noFill/>
         </p:spPr>
         <p:txBody>
-          <a:bodyPr wrap="square" anchor="t" lIns="0" rIns="0" tIns="0" bIns="0">
+          <a:bodyPr wrap="square" lIns="0" tIns="0" rIns="0" bIns="0" anchor="t">
             <a:spAutoFit/>
           </a:bodyPr>
           <a:lstStyle/>
@@ -7968,7 +8028,7 @@
               </a:spcAft>
             </a:pPr>
             <a:r>
-              <a:rPr sz="1700" b="1" i="0">
+              <a:rPr sz="2400" b="1" i="0" dirty="0">
                 <a:solidFill>
                   <a:srgbClr val="EDAB0C"/>
                 </a:solidFill>
@@ -7977,7 +8037,7 @@
               <a:t>■  </a:t>
             </a:r>
             <a:r>
-              <a:rPr sz="1700" b="0" i="0">
+              <a:rPr sz="2400" b="0" i="0" dirty="0">
                 <a:solidFill>
                   <a:srgbClr val="2A2929"/>
                 </a:solidFill>
@@ -7999,7 +8059,7 @@
               </a:spcAft>
             </a:pPr>
             <a:r>
-              <a:rPr sz="1700" b="1" i="0">
+              <a:rPr sz="2400" b="1" i="0" dirty="0">
                 <a:solidFill>
                   <a:srgbClr val="EDAB0C"/>
                 </a:solidFill>
@@ -8008,7 +8068,7 @@
               <a:t>■  </a:t>
             </a:r>
             <a:r>
-              <a:rPr sz="1700" b="0" i="0">
+              <a:rPr sz="2400" b="0" i="0" dirty="0">
                 <a:solidFill>
                   <a:srgbClr val="2A2929"/>
                 </a:solidFill>
@@ -8030,7 +8090,7 @@
               </a:spcAft>
             </a:pPr>
             <a:r>
-              <a:rPr sz="1400" b="0" i="0">
+              <a:rPr sz="2000" b="0" i="0" dirty="0">
                 <a:solidFill>
                   <a:srgbClr val="7A7A7A"/>
                 </a:solidFill>
@@ -8039,13 +8099,22 @@
               <a:t>–  </a:t>
             </a:r>
             <a:r>
-              <a:rPr sz="1400" b="0" i="0">
+              <a:rPr sz="2000" b="0" i="0" dirty="0" err="1">
                 <a:solidFill>
                   <a:srgbClr val="2A2929"/>
                 </a:solidFill>
                 <a:latin typeface="Roboto"/>
               </a:rPr>
-              <a:t>prioritised changes · implementation schedule (phases)</a:t>
+              <a:t>prioritised</a:t>
+            </a:r>
+            <a:r>
+              <a:rPr sz="2000" b="0" i="0" dirty="0">
+                <a:solidFill>
+                  <a:srgbClr val="2A2929"/>
+                </a:solidFill>
+                <a:latin typeface="Roboto"/>
+              </a:rPr>
+              <a:t> changes · implementation schedule (phases)</a:t>
             </a:r>
           </a:p>
           <a:p>
@@ -8061,7 +8130,7 @@
               </a:spcAft>
             </a:pPr>
             <a:r>
-              <a:rPr sz="1400" b="0" i="0">
+              <a:rPr sz="2000" b="0" i="0" dirty="0">
                 <a:solidFill>
                   <a:srgbClr val="7A7A7A"/>
                 </a:solidFill>
@@ -8070,7 +8139,7 @@
               <a:t>–  </a:t>
             </a:r>
             <a:r>
-              <a:rPr sz="1400" b="0" i="0">
+              <a:rPr sz="2000" b="0" i="0" dirty="0">
                 <a:solidFill>
                   <a:srgbClr val="2A2929"/>
                 </a:solidFill>
@@ -8092,7 +8161,7 @@
               </a:spcAft>
             </a:pPr>
             <a:r>
-              <a:rPr sz="1400" b="0" i="0">
+              <a:rPr sz="2000" b="0" i="0" dirty="0">
                 <a:solidFill>
                   <a:srgbClr val="7A7A7A"/>
                 </a:solidFill>
@@ -8101,7 +8170,7 @@
               <a:t>–  </a:t>
             </a:r>
             <a:r>
-              <a:rPr sz="1400" b="0" i="0">
+              <a:rPr sz="2000" b="0" i="0" dirty="0">
                 <a:solidFill>
                   <a:srgbClr val="2A2929"/>
                 </a:solidFill>
@@ -8123,7 +8192,7 @@
               </a:spcAft>
             </a:pPr>
             <a:r>
-              <a:rPr sz="1700" b="1" i="0">
+              <a:rPr sz="2400" b="1" i="0" dirty="0">
                 <a:solidFill>
                   <a:srgbClr val="EDAB0C"/>
                 </a:solidFill>
@@ -8132,7 +8201,7 @@
               <a:t>■  </a:t>
             </a:r>
             <a:r>
-              <a:rPr sz="1700" b="0" i="0">
+              <a:rPr sz="2400" b="0" i="0" dirty="0">
                 <a:solidFill>
                   <a:srgbClr val="2A2929"/>
                 </a:solidFill>
@@ -8154,7 +8223,7 @@
               </a:spcAft>
             </a:pPr>
             <a:r>
-              <a:rPr sz="1700" b="1" i="0">
+              <a:rPr sz="2400" b="1" i="0" dirty="0">
                 <a:solidFill>
                   <a:srgbClr val="EDAB0C"/>
                 </a:solidFill>
@@ -8163,7 +8232,7 @@
               <a:t>■  </a:t>
             </a:r>
             <a:r>
-              <a:rPr sz="1700" b="0" i="0">
+              <a:rPr sz="2400" b="0" i="0" dirty="0">
                 <a:solidFill>
                   <a:srgbClr val="2A2929"/>
                 </a:solidFill>
@@ -8217,6 +8286,7 @@
           <a:lstStyle/>
           <a:p>
             <a:pPr algn="ctr"/>
+            <a:endParaRPr/>
           </a:p>
         </p:txBody>
       </p:sp>
@@ -8237,7 +8307,7 @@
           <a:noFill/>
         </p:spPr>
         <p:txBody>
-          <a:bodyPr wrap="square" anchor="ctr" lIns="0" rIns="0" tIns="0" bIns="0">
+          <a:bodyPr wrap="square" lIns="0" tIns="0" rIns="0" bIns="0" anchor="ctr">
             <a:spAutoFit/>
           </a:bodyPr>
           <a:lstStyle/>
@@ -8295,6 +8365,7 @@
           <a:lstStyle/>
           <a:p>
             <a:pPr algn="ctr"/>
+            <a:endParaRPr/>
           </a:p>
         </p:txBody>
       </p:sp>
@@ -8315,7 +8386,7 @@
           <a:noFill/>
         </p:spPr>
         <p:txBody>
-          <a:bodyPr wrap="square" anchor="t" lIns="0" rIns="0" tIns="0" bIns="0">
+          <a:bodyPr wrap="square" lIns="0" tIns="0" rIns="0" bIns="0" anchor="t">
             <a:spAutoFit/>
           </a:bodyPr>
           <a:lstStyle/>
@@ -8358,7 +8429,7 @@
           <a:noFill/>
         </p:spPr>
         <p:txBody>
-          <a:bodyPr wrap="square" anchor="t" lIns="0" rIns="0" tIns="0" bIns="0">
+          <a:bodyPr wrap="square" lIns="0" tIns="0" rIns="0" bIns="0" anchor="t">
             <a:spAutoFit/>
           </a:bodyPr>
           <a:lstStyle/>
@@ -8385,7 +8456,7 @@
 </file>
 
 <file path=ppt/slides/slide17.xml><?xml version="1.0" encoding="utf-8"?>
-<p:sld xmlns:a="http://schemas.openxmlformats.org/drawingml/2006/main" xmlns:p="http://schemas.openxmlformats.org/presentationml/2006/main" xmlns:r="http://schemas.openxmlformats.org/officeDocument/2006/relationships">
+<p:sld xmlns:a="http://schemas.openxmlformats.org/drawingml/2006/main" xmlns:r="http://schemas.openxmlformats.org/officeDocument/2006/relationships" xmlns:p="http://schemas.openxmlformats.org/presentationml/2006/main">
   <p:cSld>
     <p:bg>
       <p:bgPr>
@@ -8401,7 +8472,14 @@
         <p:cNvGrpSpPr/>
         <p:nvPr/>
       </p:nvGrpSpPr>
-      <p:grpSpPr/>
+      <p:grpSpPr>
+        <a:xfrm>
+          <a:off x="0" y="0"/>
+          <a:ext cx="0" cy="0"/>
+          <a:chOff x="0" y="0"/>
+          <a:chExt cx="0" cy="0"/>
+        </a:xfrm>
+      </p:grpSpPr>
       <p:sp>
         <p:nvSpPr>
           <p:cNvPr id="2" name="TextBox 1"/>
@@ -8419,7 +8497,7 @@
           <a:noFill/>
         </p:spPr>
         <p:txBody>
-          <a:bodyPr wrap="square" anchor="t" lIns="0" rIns="0" tIns="0" bIns="0">
+          <a:bodyPr wrap="square" lIns="0" tIns="0" rIns="0" bIns="0" anchor="t">
             <a:spAutoFit/>
           </a:bodyPr>
           <a:lstStyle/>
@@ -8493,6 +8571,7 @@
           <a:lstStyle/>
           <a:p>
             <a:pPr algn="ctr"/>
+            <a:endParaRPr/>
           </a:p>
         </p:txBody>
       </p:sp>
@@ -8539,6 +8618,7 @@
           <a:lstStyle/>
           <a:p>
             <a:pPr algn="ctr"/>
+            <a:endParaRPr/>
           </a:p>
         </p:txBody>
       </p:sp>
@@ -8583,6 +8663,7 @@
           <a:lstStyle/>
           <a:p>
             <a:pPr algn="ctr"/>
+            <a:endParaRPr/>
           </a:p>
         </p:txBody>
       </p:sp>
@@ -8603,7 +8684,7 @@
           <a:noFill/>
         </p:spPr>
         <p:txBody>
-          <a:bodyPr wrap="square" anchor="ctr" lIns="0" rIns="0" tIns="0" bIns="0">
+          <a:bodyPr wrap="square" lIns="0" tIns="0" rIns="0" bIns="0" anchor="ctr">
             <a:spAutoFit/>
           </a:bodyPr>
           <a:lstStyle/>
@@ -8668,6 +8749,7 @@
           <a:lstStyle/>
           <a:p>
             <a:pPr algn="ctr"/>
+            <a:endParaRPr/>
           </a:p>
         </p:txBody>
       </p:sp>
@@ -8712,6 +8794,7 @@
           <a:lstStyle/>
           <a:p>
             <a:pPr algn="ctr"/>
+            <a:endParaRPr/>
           </a:p>
         </p:txBody>
       </p:sp>
@@ -8732,7 +8815,7 @@
           <a:noFill/>
         </p:spPr>
         <p:txBody>
-          <a:bodyPr wrap="square" anchor="ctr" lIns="0" rIns="0" tIns="0" bIns="0">
+          <a:bodyPr wrap="square" lIns="0" tIns="0" rIns="0" bIns="0" anchor="ctr">
             <a:spAutoFit/>
           </a:bodyPr>
           <a:lstStyle/>
@@ -8797,6 +8880,7 @@
           <a:lstStyle/>
           <a:p>
             <a:pPr algn="ctr"/>
+            <a:endParaRPr/>
           </a:p>
         </p:txBody>
       </p:sp>
@@ -8841,6 +8925,7 @@
           <a:lstStyle/>
           <a:p>
             <a:pPr algn="ctr"/>
+            <a:endParaRPr/>
           </a:p>
         </p:txBody>
       </p:sp>
@@ -8861,7 +8946,7 @@
           <a:noFill/>
         </p:spPr>
         <p:txBody>
-          <a:bodyPr wrap="square" anchor="ctr" lIns="0" rIns="0" tIns="0" bIns="0">
+          <a:bodyPr wrap="square" lIns="0" tIns="0" rIns="0" bIns="0" anchor="ctr">
             <a:spAutoFit/>
           </a:bodyPr>
           <a:lstStyle/>
@@ -8924,6 +9009,7 @@
           <a:lstStyle/>
           <a:p>
             <a:pPr algn="ctr"/>
+            <a:endParaRPr/>
           </a:p>
         </p:txBody>
       </p:sp>
@@ -8944,7 +9030,7 @@
           <a:noFill/>
         </p:spPr>
         <p:txBody>
-          <a:bodyPr wrap="square" anchor="t" lIns="0" rIns="0" tIns="0" bIns="0">
+          <a:bodyPr wrap="square" lIns="0" tIns="0" rIns="0" bIns="0" anchor="t">
             <a:spAutoFit/>
           </a:bodyPr>
           <a:lstStyle/>
@@ -8987,7 +9073,7 @@
           <a:noFill/>
         </p:spPr>
         <p:txBody>
-          <a:bodyPr wrap="square" anchor="t" lIns="0" rIns="0" tIns="0" bIns="0">
+          <a:bodyPr wrap="square" lIns="0" tIns="0" rIns="0" bIns="0" anchor="t">
             <a:spAutoFit/>
           </a:bodyPr>
           <a:lstStyle/>
@@ -9014,7 +9100,7 @@
 </file>
 
 <file path=ppt/slides/slide18.xml><?xml version="1.0" encoding="utf-8"?>
-<p:sld xmlns:a="http://schemas.openxmlformats.org/drawingml/2006/main" xmlns:p="http://schemas.openxmlformats.org/presentationml/2006/main" xmlns:r="http://schemas.openxmlformats.org/officeDocument/2006/relationships">
+<p:sld xmlns:a="http://schemas.openxmlformats.org/drawingml/2006/main" xmlns:r="http://schemas.openxmlformats.org/officeDocument/2006/relationships" xmlns:p="http://schemas.openxmlformats.org/presentationml/2006/main">
   <p:cSld>
     <p:bg>
       <p:bgPr>
@@ -9030,7 +9116,14 @@
         <p:cNvGrpSpPr/>
         <p:nvPr/>
       </p:nvGrpSpPr>
-      <p:grpSpPr/>
+      <p:grpSpPr>
+        <a:xfrm>
+          <a:off x="0" y="0"/>
+          <a:ext cx="0" cy="0"/>
+          <a:chOff x="0" y="0"/>
+          <a:chExt cx="0" cy="0"/>
+        </a:xfrm>
+      </p:grpSpPr>
       <p:sp>
         <p:nvSpPr>
           <p:cNvPr id="2" name="Rectangle 1"/>
@@ -9072,6 +9165,7 @@
           <a:lstStyle/>
           <a:p>
             <a:pPr algn="ctr"/>
+            <a:endParaRPr/>
           </a:p>
         </p:txBody>
       </p:sp>
@@ -9092,7 +9186,7 @@
           <a:noFill/>
         </p:spPr>
         <p:txBody>
-          <a:bodyPr wrap="square" anchor="t" lIns="0" rIns="0" tIns="0" bIns="0">
+          <a:bodyPr wrap="square" lIns="0" tIns="0" rIns="0" bIns="0" anchor="t">
             <a:spAutoFit/>
           </a:bodyPr>
           <a:lstStyle/>
@@ -9126,7 +9220,7 @@
           <a:noFill/>
         </p:spPr>
         <p:txBody>
-          <a:bodyPr wrap="square" anchor="t" lIns="0" rIns="0" tIns="0" bIns="0">
+          <a:bodyPr wrap="square" lIns="0" tIns="0" rIns="0" bIns="0" anchor="t">
             <a:spAutoFit/>
           </a:bodyPr>
           <a:lstStyle/>
@@ -9216,6 +9310,7 @@
           <a:lstStyle/>
           <a:p>
             <a:pPr algn="ctr"/>
+            <a:endParaRPr/>
           </a:p>
         </p:txBody>
       </p:sp>
@@ -9236,7 +9331,7 @@
           <a:noFill/>
         </p:spPr>
         <p:txBody>
-          <a:bodyPr wrap="square" anchor="t" lIns="0" rIns="0" tIns="0" bIns="0">
+          <a:bodyPr wrap="square" lIns="0" tIns="0" rIns="0" bIns="0" anchor="t">
             <a:spAutoFit/>
           </a:bodyPr>
           <a:lstStyle/>
@@ -9279,21 +9374,13 @@
           <a:noFill/>
         </p:spPr>
         <p:txBody>
-          <a:bodyPr wrap="square" anchor="t" lIns="0" rIns="0" tIns="0" bIns="0">
+          <a:bodyPr wrap="square" lIns="0" tIns="0" rIns="0" bIns="0" anchor="t">
             <a:spAutoFit/>
           </a:bodyPr>
           <a:lstStyle/>
           <a:p>
             <a:pPr algn="r"/>
-            <a:r>
-              <a:rPr sz="1100" b="0" i="0">
-                <a:solidFill>
-                  <a:srgbClr val="7A7A7A"/>
-                </a:solidFill>
-                <a:latin typeface="Roboto"/>
-              </a:rPr>
-              <a:t/>
-            </a:r>
+            <a:endParaRPr/>
           </a:p>
         </p:txBody>
       </p:sp>
@@ -9306,7 +9393,7 @@
 </file>
 
 <file path=ppt/slides/slide19.xml><?xml version="1.0" encoding="utf-8"?>
-<p:sld xmlns:a="http://schemas.openxmlformats.org/drawingml/2006/main" xmlns:p="http://schemas.openxmlformats.org/presentationml/2006/main" xmlns:r="http://schemas.openxmlformats.org/officeDocument/2006/relationships">
+<p:sld xmlns:a="http://schemas.openxmlformats.org/drawingml/2006/main" xmlns:r="http://schemas.openxmlformats.org/officeDocument/2006/relationships" xmlns:p="http://schemas.openxmlformats.org/presentationml/2006/main">
   <p:cSld>
     <p:bg>
       <p:bgPr>
@@ -9322,7 +9409,14 @@
         <p:cNvGrpSpPr/>
         <p:nvPr/>
       </p:nvGrpSpPr>
-      <p:grpSpPr/>
+      <p:grpSpPr>
+        <a:xfrm>
+          <a:off x="0" y="0"/>
+          <a:ext cx="0" cy="0"/>
+          <a:chOff x="0" y="0"/>
+          <a:chExt cx="0" cy="0"/>
+        </a:xfrm>
+      </p:grpSpPr>
       <p:sp>
         <p:nvSpPr>
           <p:cNvPr id="2" name="TextBox 1"/>
@@ -9340,7 +9434,7 @@
           <a:noFill/>
         </p:spPr>
         <p:txBody>
-          <a:bodyPr wrap="square" anchor="t" lIns="0" rIns="0" tIns="0" bIns="0">
+          <a:bodyPr wrap="square" lIns="0" tIns="0" rIns="0" bIns="0" anchor="t">
             <a:spAutoFit/>
           </a:bodyPr>
           <a:lstStyle/>
@@ -9398,6 +9492,7 @@
           <a:lstStyle/>
           <a:p>
             <a:pPr algn="ctr"/>
+            <a:endParaRPr/>
           </a:p>
         </p:txBody>
       </p:sp>
@@ -9418,7 +9513,7 @@
           <a:noFill/>
         </p:spPr>
         <p:txBody>
-          <a:bodyPr wrap="square" anchor="ctr" lIns="0" rIns="0" tIns="0" bIns="0">
+          <a:bodyPr wrap="square" lIns="0" tIns="0" rIns="0" bIns="0" anchor="ctr">
             <a:spAutoFit/>
           </a:bodyPr>
           <a:lstStyle/>
@@ -9527,6 +9622,7 @@
           <a:lstStyle/>
           <a:p>
             <a:pPr algn="ctr"/>
+            <a:endParaRPr/>
           </a:p>
         </p:txBody>
       </p:sp>
@@ -9547,7 +9643,7 @@
           <a:noFill/>
         </p:spPr>
         <p:txBody>
-          <a:bodyPr wrap="square" anchor="t" lIns="0" rIns="0" tIns="0" bIns="0">
+          <a:bodyPr wrap="square" lIns="0" tIns="0" rIns="0" bIns="0" anchor="t">
             <a:spAutoFit/>
           </a:bodyPr>
           <a:lstStyle/>
@@ -9590,7 +9686,7 @@
           <a:noFill/>
         </p:spPr>
         <p:txBody>
-          <a:bodyPr wrap="square" anchor="t" lIns="0" rIns="0" tIns="0" bIns="0">
+          <a:bodyPr wrap="square" lIns="0" tIns="0" rIns="0" bIns="0" anchor="t">
             <a:spAutoFit/>
           </a:bodyPr>
           <a:lstStyle/>
@@ -9617,7 +9713,7 @@
 </file>
 
 <file path=ppt/slides/slide2.xml><?xml version="1.0" encoding="utf-8"?>
-<p:sld xmlns:a="http://schemas.openxmlformats.org/drawingml/2006/main" xmlns:p="http://schemas.openxmlformats.org/presentationml/2006/main" xmlns:r="http://schemas.openxmlformats.org/officeDocument/2006/relationships">
+<p:sld xmlns:a="http://schemas.openxmlformats.org/drawingml/2006/main" xmlns:r="http://schemas.openxmlformats.org/officeDocument/2006/relationships" xmlns:p="http://schemas.openxmlformats.org/presentationml/2006/main">
   <p:cSld>
     <p:bg>
       <p:bgPr>
@@ -9633,7 +9729,14 @@
         <p:cNvGrpSpPr/>
         <p:nvPr/>
       </p:nvGrpSpPr>
-      <p:grpSpPr/>
+      <p:grpSpPr>
+        <a:xfrm>
+          <a:off x="0" y="0"/>
+          <a:ext cx="0" cy="0"/>
+          <a:chOff x="0" y="0"/>
+          <a:chExt cx="0" cy="0"/>
+        </a:xfrm>
+      </p:grpSpPr>
       <p:sp>
         <p:nvSpPr>
           <p:cNvPr id="2" name="TextBox 1"/>
@@ -9651,7 +9754,7 @@
           <a:noFill/>
         </p:spPr>
         <p:txBody>
-          <a:bodyPr wrap="square" anchor="t" lIns="0" rIns="0" tIns="0" bIns="0">
+          <a:bodyPr wrap="square" lIns="0" tIns="0" rIns="0" bIns="0" anchor="t">
             <a:spAutoFit/>
           </a:bodyPr>
           <a:lstStyle/>
@@ -9725,6 +9828,7 @@
           <a:lstStyle/>
           <a:p>
             <a:pPr algn="ctr"/>
+            <a:endParaRPr/>
           </a:p>
         </p:txBody>
       </p:sp>
@@ -9745,7 +9849,7 @@
           <a:noFill/>
         </p:spPr>
         <p:txBody>
-          <a:bodyPr wrap="square" anchor="ctr" lIns="0" rIns="0" tIns="0" bIns="0">
+          <a:bodyPr wrap="square" lIns="0" tIns="0" rIns="0" bIns="0" anchor="ctr">
             <a:spAutoFit/>
           </a:bodyPr>
           <a:lstStyle/>
@@ -9916,6 +10020,7 @@
           <a:lstStyle/>
           <a:p>
             <a:pPr algn="ctr"/>
+            <a:endParaRPr/>
           </a:p>
         </p:txBody>
       </p:sp>
@@ -9936,7 +10041,7 @@
           <a:noFill/>
         </p:spPr>
         <p:txBody>
-          <a:bodyPr wrap="square" anchor="t" lIns="0" rIns="0" tIns="0" bIns="0">
+          <a:bodyPr wrap="square" lIns="0" tIns="0" rIns="0" bIns="0" anchor="t">
             <a:spAutoFit/>
           </a:bodyPr>
           <a:lstStyle/>
@@ -9979,7 +10084,7 @@
           <a:noFill/>
         </p:spPr>
         <p:txBody>
-          <a:bodyPr wrap="square" anchor="t" lIns="0" rIns="0" tIns="0" bIns="0">
+          <a:bodyPr wrap="square" lIns="0" tIns="0" rIns="0" bIns="0" anchor="t">
             <a:spAutoFit/>
           </a:bodyPr>
           <a:lstStyle/>
@@ -10006,7 +10111,7 @@
 </file>
 
 <file path=ppt/slides/slide20.xml><?xml version="1.0" encoding="utf-8"?>
-<p:sld xmlns:a="http://schemas.openxmlformats.org/drawingml/2006/main" xmlns:p="http://schemas.openxmlformats.org/presentationml/2006/main" xmlns:r="http://schemas.openxmlformats.org/officeDocument/2006/relationships">
+<p:sld xmlns:a="http://schemas.openxmlformats.org/drawingml/2006/main" xmlns:r="http://schemas.openxmlformats.org/officeDocument/2006/relationships" xmlns:p="http://schemas.openxmlformats.org/presentationml/2006/main">
   <p:cSld>
     <p:bg>
       <p:bgPr>
@@ -10022,7 +10127,14 @@
         <p:cNvGrpSpPr/>
         <p:nvPr/>
       </p:nvGrpSpPr>
-      <p:grpSpPr/>
+      <p:grpSpPr>
+        <a:xfrm>
+          <a:off x="0" y="0"/>
+          <a:ext cx="0" cy="0"/>
+          <a:chOff x="0" y="0"/>
+          <a:chExt cx="0" cy="0"/>
+        </a:xfrm>
+      </p:grpSpPr>
       <p:sp>
         <p:nvSpPr>
           <p:cNvPr id="2" name="TextBox 1"/>
@@ -10040,7 +10152,7 @@
           <a:noFill/>
         </p:spPr>
         <p:txBody>
-          <a:bodyPr wrap="square" anchor="t" lIns="0" rIns="0" tIns="0" bIns="0">
+          <a:bodyPr wrap="square" lIns="0" tIns="0" rIns="0" bIns="0" anchor="t">
             <a:spAutoFit/>
           </a:bodyPr>
           <a:lstStyle/>
@@ -10114,6 +10226,7 @@
           <a:lstStyle/>
           <a:p>
             <a:pPr algn="ctr"/>
+            <a:endParaRPr/>
           </a:p>
         </p:txBody>
       </p:sp>
@@ -10134,7 +10247,7 @@
           <a:noFill/>
         </p:spPr>
         <p:txBody>
-          <a:bodyPr wrap="square" anchor="ctr" lIns="0" rIns="0" tIns="0" bIns="0">
+          <a:bodyPr wrap="square" lIns="0" tIns="0" rIns="0" bIns="0" anchor="ctr">
             <a:spAutoFit/>
           </a:bodyPr>
           <a:lstStyle/>
@@ -10336,6 +10449,7 @@
           <a:lstStyle/>
           <a:p>
             <a:pPr algn="ctr"/>
+            <a:endParaRPr/>
           </a:p>
         </p:txBody>
       </p:sp>
@@ -10356,7 +10470,7 @@
           <a:noFill/>
         </p:spPr>
         <p:txBody>
-          <a:bodyPr wrap="square" anchor="t" lIns="0" rIns="0" tIns="0" bIns="0">
+          <a:bodyPr wrap="square" lIns="0" tIns="0" rIns="0" bIns="0" anchor="t">
             <a:spAutoFit/>
           </a:bodyPr>
           <a:lstStyle/>
@@ -10399,7 +10513,7 @@
           <a:noFill/>
         </p:spPr>
         <p:txBody>
-          <a:bodyPr wrap="square" anchor="t" lIns="0" rIns="0" tIns="0" bIns="0">
+          <a:bodyPr wrap="square" lIns="0" tIns="0" rIns="0" bIns="0" anchor="t">
             <a:spAutoFit/>
           </a:bodyPr>
           <a:lstStyle/>
@@ -10426,7 +10540,7 @@
 </file>
 
 <file path=ppt/slides/slide21.xml><?xml version="1.0" encoding="utf-8"?>
-<p:sld xmlns:a="http://schemas.openxmlformats.org/drawingml/2006/main" xmlns:p="http://schemas.openxmlformats.org/presentationml/2006/main" xmlns:r="http://schemas.openxmlformats.org/officeDocument/2006/relationships">
+<p:sld xmlns:a="http://schemas.openxmlformats.org/drawingml/2006/main" xmlns:r="http://schemas.openxmlformats.org/officeDocument/2006/relationships" xmlns:p="http://schemas.openxmlformats.org/presentationml/2006/main">
   <p:cSld>
     <p:bg>
       <p:bgPr>
@@ -10442,7 +10556,14 @@
         <p:cNvGrpSpPr/>
         <p:nvPr/>
       </p:nvGrpSpPr>
-      <p:grpSpPr/>
+      <p:grpSpPr>
+        <a:xfrm>
+          <a:off x="0" y="0"/>
+          <a:ext cx="0" cy="0"/>
+          <a:chOff x="0" y="0"/>
+          <a:chExt cx="0" cy="0"/>
+        </a:xfrm>
+      </p:grpSpPr>
       <p:sp>
         <p:nvSpPr>
           <p:cNvPr id="2" name="Rectangle 1"/>
@@ -10484,6 +10605,7 @@
           <a:lstStyle/>
           <a:p>
             <a:pPr algn="ctr"/>
+            <a:endParaRPr/>
           </a:p>
         </p:txBody>
       </p:sp>
@@ -10557,7 +10679,7 @@
           <a:noFill/>
         </p:spPr>
         <p:txBody>
-          <a:bodyPr wrap="square" anchor="ctr" lIns="0" rIns="0" tIns="0" bIns="0">
+          <a:bodyPr wrap="square" lIns="0" tIns="0" rIns="0" bIns="0" anchor="ctr">
             <a:spAutoFit/>
           </a:bodyPr>
           <a:lstStyle/>
@@ -10583,7 +10705,7 @@
         <p:spPr>
           <a:xfrm>
             <a:off x="658368" y="1554480"/>
-            <a:ext cx="10881360" cy="4297680"/>
+            <a:ext cx="10881360" cy="3054939"/>
           </a:xfrm>
           <a:prstGeom prst="rect">
             <a:avLst/>
@@ -10591,7 +10713,7 @@
           <a:noFill/>
         </p:spPr>
         <p:txBody>
-          <a:bodyPr wrap="square" anchor="t" lIns="0" rIns="0" tIns="0" bIns="0">
+          <a:bodyPr wrap="square" lIns="0" tIns="0" rIns="0" bIns="0" anchor="t">
             <a:spAutoFit/>
           </a:bodyPr>
           <a:lstStyle/>
@@ -10608,7 +10730,7 @@
               </a:spcAft>
             </a:pPr>
             <a:r>
-              <a:rPr sz="1700" b="1" i="0">
+              <a:rPr sz="2000" b="1" i="0" dirty="0">
                 <a:solidFill>
                   <a:srgbClr val="EDAB0C"/>
                 </a:solidFill>
@@ -10617,7 +10739,7 @@
               <a:t>■  </a:t>
             </a:r>
             <a:r>
-              <a:rPr sz="1700" b="0" i="0">
+              <a:rPr sz="2000" b="0" i="0" dirty="0">
                 <a:solidFill>
                   <a:srgbClr val="2A2929"/>
                 </a:solidFill>
@@ -10639,7 +10761,7 @@
               </a:spcAft>
             </a:pPr>
             <a:r>
-              <a:rPr sz="1700" b="1" i="0">
+              <a:rPr sz="2000" b="1" i="0" dirty="0">
                 <a:solidFill>
                   <a:srgbClr val="EDAB0C"/>
                 </a:solidFill>
@@ -10648,7 +10770,7 @@
               <a:t>■  </a:t>
             </a:r>
             <a:r>
-              <a:rPr sz="1700" b="0" i="0">
+              <a:rPr sz="2000" b="0" i="0" dirty="0">
                 <a:solidFill>
                   <a:srgbClr val="2A2929"/>
                 </a:solidFill>
@@ -10670,7 +10792,7 @@
               </a:spcAft>
             </a:pPr>
             <a:r>
-              <a:rPr sz="1400" b="0" i="0">
+              <a:rPr b="0" i="0" dirty="0">
                 <a:solidFill>
                   <a:srgbClr val="7A7A7A"/>
                 </a:solidFill>
@@ -10679,7 +10801,7 @@
               <a:t>–  </a:t>
             </a:r>
             <a:r>
-              <a:rPr sz="1400" b="0" i="0">
+              <a:rPr b="0" i="0" dirty="0">
                 <a:solidFill>
                   <a:srgbClr val="2A2929"/>
                 </a:solidFill>
@@ -10701,7 +10823,7 @@
               </a:spcAft>
             </a:pPr>
             <a:r>
-              <a:rPr sz="1400" b="0" i="0">
+              <a:rPr b="0" i="0" dirty="0">
                 <a:solidFill>
                   <a:srgbClr val="7A7A7A"/>
                 </a:solidFill>
@@ -10710,7 +10832,7 @@
               <a:t>–  </a:t>
             </a:r>
             <a:r>
-              <a:rPr sz="1400" b="0" i="0">
+              <a:rPr b="0" i="0" dirty="0">
                 <a:solidFill>
                   <a:srgbClr val="2A2929"/>
                 </a:solidFill>
@@ -10732,7 +10854,7 @@
               </a:spcAft>
             </a:pPr>
             <a:r>
-              <a:rPr sz="1400" b="0" i="0">
+              <a:rPr b="0" i="0" dirty="0">
                 <a:solidFill>
                   <a:srgbClr val="7A7A7A"/>
                 </a:solidFill>
@@ -10741,7 +10863,7 @@
               <a:t>–  </a:t>
             </a:r>
             <a:r>
-              <a:rPr sz="1400" b="0" i="0">
+              <a:rPr b="0" i="0" dirty="0">
                 <a:solidFill>
                   <a:srgbClr val="2A2929"/>
                 </a:solidFill>
@@ -10763,7 +10885,7 @@
               </a:spcAft>
             </a:pPr>
             <a:r>
-              <a:rPr sz="1700" b="1" i="0">
+              <a:rPr sz="2000" b="1" i="0" dirty="0">
                 <a:solidFill>
                   <a:srgbClr val="EDAB0C"/>
                 </a:solidFill>
@@ -10772,7 +10894,7 @@
               <a:t>■  </a:t>
             </a:r>
             <a:r>
-              <a:rPr sz="1700" b="0" i="0">
+              <a:rPr sz="2000" b="0" i="0" dirty="0">
                 <a:solidFill>
                   <a:srgbClr val="2A2929"/>
                 </a:solidFill>
@@ -10794,7 +10916,7 @@
               </a:spcAft>
             </a:pPr>
             <a:r>
-              <a:rPr sz="1700" b="1" i="0">
+              <a:rPr sz="2000" b="1" i="0" dirty="0">
                 <a:solidFill>
                   <a:srgbClr val="EDAB0C"/>
                 </a:solidFill>
@@ -10803,7 +10925,7 @@
               <a:t>■  </a:t>
             </a:r>
             <a:r>
-              <a:rPr sz="1700" b="0" i="0">
+              <a:rPr sz="2000" b="0" i="0" dirty="0">
                 <a:solidFill>
                   <a:srgbClr val="2A2929"/>
                 </a:solidFill>
@@ -10857,6 +10979,7 @@
           <a:lstStyle/>
           <a:p>
             <a:pPr algn="ctr"/>
+            <a:endParaRPr/>
           </a:p>
         </p:txBody>
       </p:sp>
@@ -10877,7 +11000,7 @@
           <a:noFill/>
         </p:spPr>
         <p:txBody>
-          <a:bodyPr wrap="square" anchor="ctr" lIns="0" rIns="0" tIns="0" bIns="0">
+          <a:bodyPr wrap="square" lIns="0" tIns="0" rIns="0" bIns="0" anchor="ctr">
             <a:spAutoFit/>
           </a:bodyPr>
           <a:lstStyle/>
@@ -10935,6 +11058,7 @@
           <a:lstStyle/>
           <a:p>
             <a:pPr algn="ctr"/>
+            <a:endParaRPr/>
           </a:p>
         </p:txBody>
       </p:sp>
@@ -10955,7 +11079,7 @@
           <a:noFill/>
         </p:spPr>
         <p:txBody>
-          <a:bodyPr wrap="square" anchor="t" lIns="0" rIns="0" tIns="0" bIns="0">
+          <a:bodyPr wrap="square" lIns="0" tIns="0" rIns="0" bIns="0" anchor="t">
             <a:spAutoFit/>
           </a:bodyPr>
           <a:lstStyle/>
@@ -10998,7 +11122,7 @@
           <a:noFill/>
         </p:spPr>
         <p:txBody>
-          <a:bodyPr wrap="square" anchor="t" lIns="0" rIns="0" tIns="0" bIns="0">
+          <a:bodyPr wrap="square" lIns="0" tIns="0" rIns="0" bIns="0" anchor="t">
             <a:spAutoFit/>
           </a:bodyPr>
           <a:lstStyle/>
@@ -11025,7 +11149,7 @@
 </file>
 
 <file path=ppt/slides/slide22.xml><?xml version="1.0" encoding="utf-8"?>
-<p:sld xmlns:a="http://schemas.openxmlformats.org/drawingml/2006/main" xmlns:p="http://schemas.openxmlformats.org/presentationml/2006/main" xmlns:r="http://schemas.openxmlformats.org/officeDocument/2006/relationships">
+<p:sld xmlns:a="http://schemas.openxmlformats.org/drawingml/2006/main" xmlns:r="http://schemas.openxmlformats.org/officeDocument/2006/relationships" xmlns:p="http://schemas.openxmlformats.org/presentationml/2006/main">
   <p:cSld>
     <p:bg>
       <p:bgPr>
@@ -11041,7 +11165,14 @@
         <p:cNvGrpSpPr/>
         <p:nvPr/>
       </p:nvGrpSpPr>
-      <p:grpSpPr/>
+      <p:grpSpPr>
+        <a:xfrm>
+          <a:off x="0" y="0"/>
+          <a:ext cx="0" cy="0"/>
+          <a:chOff x="0" y="0"/>
+          <a:chExt cx="0" cy="0"/>
+        </a:xfrm>
+      </p:grpSpPr>
       <p:sp>
         <p:nvSpPr>
           <p:cNvPr id="2" name="TextBox 1"/>
@@ -11059,7 +11190,7 @@
           <a:noFill/>
         </p:spPr>
         <p:txBody>
-          <a:bodyPr wrap="square" anchor="t" lIns="0" rIns="0" tIns="0" bIns="0">
+          <a:bodyPr wrap="square" lIns="0" tIns="0" rIns="0" bIns="0" anchor="t">
             <a:spAutoFit/>
           </a:bodyPr>
           <a:lstStyle/>
@@ -11133,6 +11264,7 @@
           <a:lstStyle/>
           <a:p>
             <a:pPr algn="ctr"/>
+            <a:endParaRPr/>
           </a:p>
         </p:txBody>
       </p:sp>
@@ -11179,6 +11311,7 @@
           <a:lstStyle/>
           <a:p>
             <a:pPr algn="ctr"/>
+            <a:endParaRPr/>
           </a:p>
         </p:txBody>
       </p:sp>
@@ -11223,6 +11356,7 @@
           <a:lstStyle/>
           <a:p>
             <a:pPr algn="ctr"/>
+            <a:endParaRPr/>
           </a:p>
         </p:txBody>
       </p:sp>
@@ -11243,7 +11377,7 @@
           <a:noFill/>
         </p:spPr>
         <p:txBody>
-          <a:bodyPr wrap="square" anchor="ctr" lIns="0" rIns="0" tIns="0" bIns="0">
+          <a:bodyPr wrap="square" lIns="0" tIns="0" rIns="0" bIns="0" anchor="ctr">
             <a:spAutoFit/>
           </a:bodyPr>
           <a:lstStyle/>
@@ -11308,6 +11442,7 @@
           <a:lstStyle/>
           <a:p>
             <a:pPr algn="ctr"/>
+            <a:endParaRPr/>
           </a:p>
         </p:txBody>
       </p:sp>
@@ -11352,6 +11487,7 @@
           <a:lstStyle/>
           <a:p>
             <a:pPr algn="ctr"/>
+            <a:endParaRPr/>
           </a:p>
         </p:txBody>
       </p:sp>
@@ -11372,7 +11508,7 @@
           <a:noFill/>
         </p:spPr>
         <p:txBody>
-          <a:bodyPr wrap="square" anchor="ctr" lIns="0" rIns="0" tIns="0" bIns="0">
+          <a:bodyPr wrap="square" lIns="0" tIns="0" rIns="0" bIns="0" anchor="ctr">
             <a:spAutoFit/>
           </a:bodyPr>
           <a:lstStyle/>
@@ -11437,6 +11573,7 @@
           <a:lstStyle/>
           <a:p>
             <a:pPr algn="ctr"/>
+            <a:endParaRPr/>
           </a:p>
         </p:txBody>
       </p:sp>
@@ -11481,6 +11618,7 @@
           <a:lstStyle/>
           <a:p>
             <a:pPr algn="ctr"/>
+            <a:endParaRPr/>
           </a:p>
         </p:txBody>
       </p:sp>
@@ -11501,7 +11639,7 @@
           <a:noFill/>
         </p:spPr>
         <p:txBody>
-          <a:bodyPr wrap="square" anchor="ctr" lIns="0" rIns="0" tIns="0" bIns="0">
+          <a:bodyPr wrap="square" lIns="0" tIns="0" rIns="0" bIns="0" anchor="ctr">
             <a:spAutoFit/>
           </a:bodyPr>
           <a:lstStyle/>
@@ -11564,6 +11702,7 @@
           <a:lstStyle/>
           <a:p>
             <a:pPr algn="ctr"/>
+            <a:endParaRPr/>
           </a:p>
         </p:txBody>
       </p:sp>
@@ -11584,7 +11723,7 @@
           <a:noFill/>
         </p:spPr>
         <p:txBody>
-          <a:bodyPr wrap="square" anchor="t" lIns="0" rIns="0" tIns="0" bIns="0">
+          <a:bodyPr wrap="square" lIns="0" tIns="0" rIns="0" bIns="0" anchor="t">
             <a:spAutoFit/>
           </a:bodyPr>
           <a:lstStyle/>
@@ -11627,7 +11766,7 @@
           <a:noFill/>
         </p:spPr>
         <p:txBody>
-          <a:bodyPr wrap="square" anchor="t" lIns="0" rIns="0" tIns="0" bIns="0">
+          <a:bodyPr wrap="square" lIns="0" tIns="0" rIns="0" bIns="0" anchor="t">
             <a:spAutoFit/>
           </a:bodyPr>
           <a:lstStyle/>
@@ -11654,7 +11793,7 @@
 </file>
 
 <file path=ppt/slides/slide23.xml><?xml version="1.0" encoding="utf-8"?>
-<p:sld xmlns:a="http://schemas.openxmlformats.org/drawingml/2006/main" xmlns:p="http://schemas.openxmlformats.org/presentationml/2006/main" xmlns:r="http://schemas.openxmlformats.org/officeDocument/2006/relationships">
+<p:sld xmlns:a="http://schemas.openxmlformats.org/drawingml/2006/main" xmlns:r="http://schemas.openxmlformats.org/officeDocument/2006/relationships" xmlns:p="http://schemas.openxmlformats.org/presentationml/2006/main">
   <p:cSld>
     <p:bg>
       <p:bgPr>
@@ -11670,7 +11809,14 @@
         <p:cNvGrpSpPr/>
         <p:nvPr/>
       </p:nvGrpSpPr>
-      <p:grpSpPr/>
+      <p:grpSpPr>
+        <a:xfrm>
+          <a:off x="0" y="0"/>
+          <a:ext cx="0" cy="0"/>
+          <a:chOff x="0" y="0"/>
+          <a:chExt cx="0" cy="0"/>
+        </a:xfrm>
+      </p:grpSpPr>
       <p:sp>
         <p:nvSpPr>
           <p:cNvPr id="2" name="Rectangle 1"/>
@@ -11712,6 +11858,7 @@
           <a:lstStyle/>
           <a:p>
             <a:pPr algn="ctr"/>
+            <a:endParaRPr/>
           </a:p>
         </p:txBody>
       </p:sp>
@@ -11732,7 +11879,7 @@
           <a:noFill/>
         </p:spPr>
         <p:txBody>
-          <a:bodyPr wrap="square" anchor="t" lIns="0" rIns="0" tIns="0" bIns="0">
+          <a:bodyPr wrap="square" lIns="0" tIns="0" rIns="0" bIns="0" anchor="t">
             <a:spAutoFit/>
           </a:bodyPr>
           <a:lstStyle/>
@@ -11834,7 +11981,7 @@
 </file>
 
 <file path=ppt/slides/slide3.xml><?xml version="1.0" encoding="utf-8"?>
-<p:sld xmlns:a="http://schemas.openxmlformats.org/drawingml/2006/main" xmlns:p="http://schemas.openxmlformats.org/presentationml/2006/main" xmlns:r="http://schemas.openxmlformats.org/officeDocument/2006/relationships">
+<p:sld xmlns:a="http://schemas.openxmlformats.org/drawingml/2006/main" xmlns:r="http://schemas.openxmlformats.org/officeDocument/2006/relationships" xmlns:p="http://schemas.openxmlformats.org/presentationml/2006/main">
   <p:cSld>
     <p:bg>
       <p:bgPr>
@@ -11850,7 +11997,14 @@
         <p:cNvGrpSpPr/>
         <p:nvPr/>
       </p:nvGrpSpPr>
-      <p:grpSpPr/>
+      <p:grpSpPr>
+        <a:xfrm>
+          <a:off x="0" y="0"/>
+          <a:ext cx="0" cy="0"/>
+          <a:chOff x="0" y="0"/>
+          <a:chExt cx="0" cy="0"/>
+        </a:xfrm>
+      </p:grpSpPr>
       <p:sp>
         <p:nvSpPr>
           <p:cNvPr id="2" name="Rectangle 1"/>
@@ -11892,6 +12046,7 @@
           <a:lstStyle/>
           <a:p>
             <a:pPr algn="ctr"/>
+            <a:endParaRPr/>
           </a:p>
         </p:txBody>
       </p:sp>
@@ -11912,7 +12067,7 @@
           <a:noFill/>
         </p:spPr>
         <p:txBody>
-          <a:bodyPr wrap="square" anchor="t" lIns="0" rIns="0" tIns="0" bIns="0">
+          <a:bodyPr wrap="square" lIns="0" tIns="0" rIns="0" bIns="0" anchor="t">
             <a:spAutoFit/>
           </a:bodyPr>
           <a:lstStyle/>
@@ -11946,7 +12101,7 @@
           <a:noFill/>
         </p:spPr>
         <p:txBody>
-          <a:bodyPr wrap="square" anchor="t" lIns="0" rIns="0" tIns="0" bIns="0">
+          <a:bodyPr wrap="square" lIns="0" tIns="0" rIns="0" bIns="0" anchor="t">
             <a:spAutoFit/>
           </a:bodyPr>
           <a:lstStyle/>
@@ -12036,6 +12191,7 @@
           <a:lstStyle/>
           <a:p>
             <a:pPr algn="ctr"/>
+            <a:endParaRPr/>
           </a:p>
         </p:txBody>
       </p:sp>
@@ -12056,7 +12212,7 @@
           <a:noFill/>
         </p:spPr>
         <p:txBody>
-          <a:bodyPr wrap="square" anchor="t" lIns="0" rIns="0" tIns="0" bIns="0">
+          <a:bodyPr wrap="square" lIns="0" tIns="0" rIns="0" bIns="0" anchor="t">
             <a:spAutoFit/>
           </a:bodyPr>
           <a:lstStyle/>
@@ -12099,21 +12255,13 @@
           <a:noFill/>
         </p:spPr>
         <p:txBody>
-          <a:bodyPr wrap="square" anchor="t" lIns="0" rIns="0" tIns="0" bIns="0">
+          <a:bodyPr wrap="square" lIns="0" tIns="0" rIns="0" bIns="0" anchor="t">
             <a:spAutoFit/>
           </a:bodyPr>
           <a:lstStyle/>
           <a:p>
             <a:pPr algn="r"/>
-            <a:r>
-              <a:rPr sz="1100" b="0" i="0">
-                <a:solidFill>
-                  <a:srgbClr val="7A7A7A"/>
-                </a:solidFill>
-                <a:latin typeface="Roboto"/>
-              </a:rPr>
-              <a:t/>
-            </a:r>
+            <a:endParaRPr/>
           </a:p>
         </p:txBody>
       </p:sp>
@@ -12126,7 +12274,7 @@
 </file>
 
 <file path=ppt/slides/slide4.xml><?xml version="1.0" encoding="utf-8"?>
-<p:sld xmlns:a="http://schemas.openxmlformats.org/drawingml/2006/main" xmlns:p="http://schemas.openxmlformats.org/presentationml/2006/main" xmlns:r="http://schemas.openxmlformats.org/officeDocument/2006/relationships">
+<p:sld xmlns:a="http://schemas.openxmlformats.org/drawingml/2006/main" xmlns:r="http://schemas.openxmlformats.org/officeDocument/2006/relationships" xmlns:p="http://schemas.openxmlformats.org/presentationml/2006/main">
   <p:cSld>
     <p:bg>
       <p:bgPr>
@@ -12142,7 +12290,14 @@
         <p:cNvGrpSpPr/>
         <p:nvPr/>
       </p:nvGrpSpPr>
-      <p:grpSpPr/>
+      <p:grpSpPr>
+        <a:xfrm>
+          <a:off x="0" y="0"/>
+          <a:ext cx="0" cy="0"/>
+          <a:chOff x="0" y="0"/>
+          <a:chExt cx="0" cy="0"/>
+        </a:xfrm>
+      </p:grpSpPr>
       <p:sp>
         <p:nvSpPr>
           <p:cNvPr id="2" name="TextBox 1"/>
@@ -12160,7 +12315,7 @@
           <a:noFill/>
         </p:spPr>
         <p:txBody>
-          <a:bodyPr wrap="square" anchor="t" lIns="0" rIns="0" tIns="0" bIns="0">
+          <a:bodyPr wrap="square" lIns="0" tIns="0" rIns="0" bIns="0" anchor="t">
             <a:spAutoFit/>
           </a:bodyPr>
           <a:lstStyle/>
@@ -12218,6 +12373,7 @@
           <a:lstStyle/>
           <a:p>
             <a:pPr algn="ctr"/>
+            <a:endParaRPr/>
           </a:p>
         </p:txBody>
       </p:sp>
@@ -12238,7 +12394,7 @@
           <a:noFill/>
         </p:spPr>
         <p:txBody>
-          <a:bodyPr wrap="square" anchor="ctr" lIns="0" rIns="0" tIns="0" bIns="0">
+          <a:bodyPr wrap="square" lIns="0" tIns="0" rIns="0" bIns="0" anchor="ctr">
             <a:spAutoFit/>
           </a:bodyPr>
           <a:lstStyle/>
@@ -12378,6 +12534,7 @@
           <a:lstStyle/>
           <a:p>
             <a:pPr algn="ctr"/>
+            <a:endParaRPr/>
           </a:p>
         </p:txBody>
       </p:sp>
@@ -12398,7 +12555,7 @@
           <a:noFill/>
         </p:spPr>
         <p:txBody>
-          <a:bodyPr wrap="square" anchor="t" lIns="0" rIns="0" tIns="0" bIns="0">
+          <a:bodyPr wrap="square" lIns="0" tIns="0" rIns="0" bIns="0" anchor="t">
             <a:spAutoFit/>
           </a:bodyPr>
           <a:lstStyle/>
@@ -12441,7 +12598,7 @@
           <a:noFill/>
         </p:spPr>
         <p:txBody>
-          <a:bodyPr wrap="square" anchor="t" lIns="0" rIns="0" tIns="0" bIns="0">
+          <a:bodyPr wrap="square" lIns="0" tIns="0" rIns="0" bIns="0" anchor="t">
             <a:spAutoFit/>
           </a:bodyPr>
           <a:lstStyle/>
@@ -12468,7 +12625,7 @@
 </file>
 
 <file path=ppt/slides/slide5.xml><?xml version="1.0" encoding="utf-8"?>
-<p:sld xmlns:a="http://schemas.openxmlformats.org/drawingml/2006/main" xmlns:p="http://schemas.openxmlformats.org/presentationml/2006/main" xmlns:r="http://schemas.openxmlformats.org/officeDocument/2006/relationships">
+<p:sld xmlns:a="http://schemas.openxmlformats.org/drawingml/2006/main" xmlns:r="http://schemas.openxmlformats.org/officeDocument/2006/relationships" xmlns:p="http://schemas.openxmlformats.org/presentationml/2006/main">
   <p:cSld>
     <p:bg>
       <p:bgPr>
@@ -12484,7 +12641,14 @@
         <p:cNvGrpSpPr/>
         <p:nvPr/>
       </p:nvGrpSpPr>
-      <p:grpSpPr/>
+      <p:grpSpPr>
+        <a:xfrm>
+          <a:off x="0" y="0"/>
+          <a:ext cx="0" cy="0"/>
+          <a:chOff x="0" y="0"/>
+          <a:chExt cx="0" cy="0"/>
+        </a:xfrm>
+      </p:grpSpPr>
       <p:sp>
         <p:nvSpPr>
           <p:cNvPr id="2" name="TextBox 1"/>
@@ -12502,7 +12666,7 @@
           <a:noFill/>
         </p:spPr>
         <p:txBody>
-          <a:bodyPr wrap="square" anchor="t" lIns="0" rIns="0" tIns="0" bIns="0">
+          <a:bodyPr wrap="square" lIns="0" tIns="0" rIns="0" bIns="0" anchor="t">
             <a:spAutoFit/>
           </a:bodyPr>
           <a:lstStyle/>
@@ -12560,6 +12724,7 @@
           <a:lstStyle/>
           <a:p>
             <a:pPr algn="ctr"/>
+            <a:endParaRPr/>
           </a:p>
         </p:txBody>
       </p:sp>
@@ -12580,7 +12745,7 @@
           <a:noFill/>
         </p:spPr>
         <p:txBody>
-          <a:bodyPr wrap="square" anchor="ctr" lIns="0" rIns="0" tIns="0" bIns="0">
+          <a:bodyPr wrap="square" lIns="0" tIns="0" rIns="0" bIns="0" anchor="ctr">
             <a:spAutoFit/>
           </a:bodyPr>
           <a:lstStyle/>
@@ -12720,6 +12885,7 @@
           <a:lstStyle/>
           <a:p>
             <a:pPr algn="ctr"/>
+            <a:endParaRPr/>
           </a:p>
         </p:txBody>
       </p:sp>
@@ -12740,7 +12906,7 @@
           <a:noFill/>
         </p:spPr>
         <p:txBody>
-          <a:bodyPr wrap="square" anchor="t" lIns="0" rIns="0" tIns="0" bIns="0">
+          <a:bodyPr wrap="square" lIns="0" tIns="0" rIns="0" bIns="0" anchor="t">
             <a:spAutoFit/>
           </a:bodyPr>
           <a:lstStyle/>
@@ -12783,7 +12949,7 @@
           <a:noFill/>
         </p:spPr>
         <p:txBody>
-          <a:bodyPr wrap="square" anchor="t" lIns="0" rIns="0" tIns="0" bIns="0">
+          <a:bodyPr wrap="square" lIns="0" tIns="0" rIns="0" bIns="0" anchor="t">
             <a:spAutoFit/>
           </a:bodyPr>
           <a:lstStyle/>
@@ -12810,7 +12976,7 @@
 </file>
 
 <file path=ppt/slides/slide6.xml><?xml version="1.0" encoding="utf-8"?>
-<p:sld xmlns:a="http://schemas.openxmlformats.org/drawingml/2006/main" xmlns:p="http://schemas.openxmlformats.org/presentationml/2006/main" xmlns:r="http://schemas.openxmlformats.org/officeDocument/2006/relationships">
+<p:sld xmlns:a="http://schemas.openxmlformats.org/drawingml/2006/main" xmlns:r="http://schemas.openxmlformats.org/officeDocument/2006/relationships" xmlns:p="http://schemas.openxmlformats.org/presentationml/2006/main">
   <p:cSld>
     <p:bg>
       <p:bgPr>
@@ -12826,7 +12992,14 @@
         <p:cNvGrpSpPr/>
         <p:nvPr/>
       </p:nvGrpSpPr>
-      <p:grpSpPr/>
+      <p:grpSpPr>
+        <a:xfrm>
+          <a:off x="0" y="0"/>
+          <a:ext cx="0" cy="0"/>
+          <a:chOff x="0" y="0"/>
+          <a:chExt cx="0" cy="0"/>
+        </a:xfrm>
+      </p:grpSpPr>
       <p:sp>
         <p:nvSpPr>
           <p:cNvPr id="2" name="TextBox 1"/>
@@ -12844,7 +13017,7 @@
           <a:noFill/>
         </p:spPr>
         <p:txBody>
-          <a:bodyPr wrap="square" anchor="t" lIns="0" rIns="0" tIns="0" bIns="0">
+          <a:bodyPr wrap="square" lIns="0" tIns="0" rIns="0" bIns="0" anchor="t">
             <a:spAutoFit/>
           </a:bodyPr>
           <a:lstStyle/>
@@ -12902,6 +13075,7 @@
           <a:lstStyle/>
           <a:p>
             <a:pPr algn="ctr"/>
+            <a:endParaRPr/>
           </a:p>
         </p:txBody>
       </p:sp>
@@ -12922,7 +13096,7 @@
           <a:noFill/>
         </p:spPr>
         <p:txBody>
-          <a:bodyPr wrap="square" anchor="ctr" lIns="0" rIns="0" tIns="0" bIns="0">
+          <a:bodyPr wrap="square" lIns="0" tIns="0" rIns="0" bIns="0" anchor="ctr">
             <a:spAutoFit/>
           </a:bodyPr>
           <a:lstStyle/>
@@ -13155,6 +13329,7 @@
           <a:lstStyle/>
           <a:p>
             <a:pPr algn="ctr"/>
+            <a:endParaRPr/>
           </a:p>
         </p:txBody>
       </p:sp>
@@ -13175,7 +13350,7 @@
           <a:noFill/>
         </p:spPr>
         <p:txBody>
-          <a:bodyPr wrap="square" anchor="t" lIns="0" rIns="0" tIns="0" bIns="0">
+          <a:bodyPr wrap="square" lIns="0" tIns="0" rIns="0" bIns="0" anchor="t">
             <a:spAutoFit/>
           </a:bodyPr>
           <a:lstStyle/>
@@ -13218,7 +13393,7 @@
           <a:noFill/>
         </p:spPr>
         <p:txBody>
-          <a:bodyPr wrap="square" anchor="t" lIns="0" rIns="0" tIns="0" bIns="0">
+          <a:bodyPr wrap="square" lIns="0" tIns="0" rIns="0" bIns="0" anchor="t">
             <a:spAutoFit/>
           </a:bodyPr>
           <a:lstStyle/>
@@ -13245,7 +13420,7 @@
 </file>
 
 <file path=ppt/slides/slide7.xml><?xml version="1.0" encoding="utf-8"?>
-<p:sld xmlns:a="http://schemas.openxmlformats.org/drawingml/2006/main" xmlns:p="http://schemas.openxmlformats.org/presentationml/2006/main" xmlns:r="http://schemas.openxmlformats.org/officeDocument/2006/relationships">
+<p:sld xmlns:a="http://schemas.openxmlformats.org/drawingml/2006/main" xmlns:r="http://schemas.openxmlformats.org/officeDocument/2006/relationships" xmlns:p="http://schemas.openxmlformats.org/presentationml/2006/main">
   <p:cSld>
     <p:bg>
       <p:bgPr>
@@ -13261,7 +13436,14 @@
         <p:cNvGrpSpPr/>
         <p:nvPr/>
       </p:nvGrpSpPr>
-      <p:grpSpPr/>
+      <p:grpSpPr>
+        <a:xfrm>
+          <a:off x="0" y="0"/>
+          <a:ext cx="0" cy="0"/>
+          <a:chOff x="0" y="0"/>
+          <a:chExt cx="0" cy="0"/>
+        </a:xfrm>
+      </p:grpSpPr>
       <p:sp>
         <p:nvSpPr>
           <p:cNvPr id="2" name="TextBox 1"/>
@@ -13279,7 +13461,7 @@
           <a:noFill/>
         </p:spPr>
         <p:txBody>
-          <a:bodyPr wrap="square" anchor="t" lIns="0" rIns="0" tIns="0" bIns="0">
+          <a:bodyPr wrap="square" lIns="0" tIns="0" rIns="0" bIns="0" anchor="t">
             <a:spAutoFit/>
           </a:bodyPr>
           <a:lstStyle/>
@@ -13337,6 +13519,7 @@
           <a:lstStyle/>
           <a:p>
             <a:pPr algn="ctr"/>
+            <a:endParaRPr/>
           </a:p>
         </p:txBody>
       </p:sp>
@@ -13357,7 +13540,7 @@
           <a:noFill/>
         </p:spPr>
         <p:txBody>
-          <a:bodyPr wrap="square" anchor="ctr" lIns="0" rIns="0" tIns="0" bIns="0">
+          <a:bodyPr wrap="square" lIns="0" tIns="0" rIns="0" bIns="0" anchor="ctr">
             <a:spAutoFit/>
           </a:bodyPr>
           <a:lstStyle/>
@@ -13528,6 +13711,7 @@
           <a:lstStyle/>
           <a:p>
             <a:pPr algn="ctr"/>
+            <a:endParaRPr/>
           </a:p>
         </p:txBody>
       </p:sp>
@@ -13548,7 +13732,7 @@
           <a:noFill/>
         </p:spPr>
         <p:txBody>
-          <a:bodyPr wrap="square" anchor="t" lIns="0" rIns="0" tIns="0" bIns="0">
+          <a:bodyPr wrap="square" lIns="0" tIns="0" rIns="0" bIns="0" anchor="t">
             <a:spAutoFit/>
           </a:bodyPr>
           <a:lstStyle/>
@@ -13591,7 +13775,7 @@
           <a:noFill/>
         </p:spPr>
         <p:txBody>
-          <a:bodyPr wrap="square" anchor="t" lIns="0" rIns="0" tIns="0" bIns="0">
+          <a:bodyPr wrap="square" lIns="0" tIns="0" rIns="0" bIns="0" anchor="t">
             <a:spAutoFit/>
           </a:bodyPr>
           <a:lstStyle/>
@@ -13618,7 +13802,7 @@
 </file>
 
 <file path=ppt/slides/slide8.xml><?xml version="1.0" encoding="utf-8"?>
-<p:sld xmlns:a="http://schemas.openxmlformats.org/drawingml/2006/main" xmlns:p="http://schemas.openxmlformats.org/presentationml/2006/main" xmlns:r="http://schemas.openxmlformats.org/officeDocument/2006/relationships">
+<p:sld xmlns:a="http://schemas.openxmlformats.org/drawingml/2006/main" xmlns:r="http://schemas.openxmlformats.org/officeDocument/2006/relationships" xmlns:p="http://schemas.openxmlformats.org/presentationml/2006/main">
   <p:cSld>
     <p:bg>
       <p:bgPr>
@@ -13634,7 +13818,14 @@
         <p:cNvGrpSpPr/>
         <p:nvPr/>
       </p:nvGrpSpPr>
-      <p:grpSpPr/>
+      <p:grpSpPr>
+        <a:xfrm>
+          <a:off x="0" y="0"/>
+          <a:ext cx="0" cy="0"/>
+          <a:chOff x="0" y="0"/>
+          <a:chExt cx="0" cy="0"/>
+        </a:xfrm>
+      </p:grpSpPr>
       <p:sp>
         <p:nvSpPr>
           <p:cNvPr id="2" name="Rectangle 1"/>
@@ -13676,6 +13867,7 @@
           <a:lstStyle/>
           <a:p>
             <a:pPr algn="ctr"/>
+            <a:endParaRPr/>
           </a:p>
         </p:txBody>
       </p:sp>
@@ -13749,7 +13941,7 @@
           <a:noFill/>
         </p:spPr>
         <p:txBody>
-          <a:bodyPr wrap="square" anchor="ctr" lIns="0" rIns="0" tIns="0" bIns="0">
+          <a:bodyPr wrap="square" lIns="0" tIns="0" rIns="0" bIns="0" anchor="ctr">
             <a:spAutoFit/>
           </a:bodyPr>
           <a:lstStyle/>
@@ -13775,7 +13967,7 @@
         <p:spPr>
           <a:xfrm>
             <a:off x="658368" y="1554480"/>
-            <a:ext cx="10881360" cy="4297680"/>
+            <a:ext cx="10881360" cy="3860224"/>
           </a:xfrm>
           <a:prstGeom prst="rect">
             <a:avLst/>
@@ -13783,7 +13975,7 @@
           <a:noFill/>
         </p:spPr>
         <p:txBody>
-          <a:bodyPr wrap="square" anchor="t" lIns="0" rIns="0" tIns="0" bIns="0">
+          <a:bodyPr wrap="square" lIns="0" tIns="0" rIns="0" bIns="0" anchor="t">
             <a:spAutoFit/>
           </a:bodyPr>
           <a:lstStyle/>
@@ -13800,7 +13992,7 @@
               </a:spcAft>
             </a:pPr>
             <a:r>
-              <a:rPr sz="1700" b="1" i="0">
+              <a:rPr sz="2400" b="1" i="0" dirty="0">
                 <a:solidFill>
                   <a:srgbClr val="EDAB0C"/>
                 </a:solidFill>
@@ -13809,7 +14001,7 @@
               <a:t>■  </a:t>
             </a:r>
             <a:r>
-              <a:rPr sz="1700" b="0" i="0">
+              <a:rPr sz="2400" b="0" i="0" dirty="0">
                 <a:solidFill>
                   <a:srgbClr val="2A2929"/>
                 </a:solidFill>
@@ -13831,7 +14023,7 @@
               </a:spcAft>
             </a:pPr>
             <a:r>
-              <a:rPr sz="1700" b="1" i="0">
+              <a:rPr sz="2400" b="1" i="0" dirty="0">
                 <a:solidFill>
                   <a:srgbClr val="EDAB0C"/>
                 </a:solidFill>
@@ -13840,7 +14032,7 @@
               <a:t>■  </a:t>
             </a:r>
             <a:r>
-              <a:rPr sz="1700" b="0" i="0">
+              <a:rPr sz="2400" b="0" i="0" dirty="0">
                 <a:solidFill>
                   <a:srgbClr val="2A2929"/>
                 </a:solidFill>
@@ -13862,7 +14054,7 @@
               </a:spcAft>
             </a:pPr>
             <a:r>
-              <a:rPr sz="1400" b="0" i="0">
+              <a:rPr sz="2000" b="0" i="0" dirty="0">
                 <a:solidFill>
                   <a:srgbClr val="7A7A7A"/>
                 </a:solidFill>
@@ -13871,13 +14063,22 @@
               <a:t>–  </a:t>
             </a:r>
             <a:r>
-              <a:rPr sz="1400" b="0" i="0">
+              <a:rPr sz="2000" b="0" i="0" dirty="0" err="1">
                 <a:solidFill>
                   <a:srgbClr val="2A2929"/>
                 </a:solidFill>
                 <a:latin typeface="Roboto"/>
               </a:rPr>
-              <a:t>Prioritise your proposed changes (from your gap analysis).</a:t>
+              <a:t>Prioritise</a:t>
+            </a:r>
+            <a:r>
+              <a:rPr sz="2000" b="0" i="0" dirty="0">
+                <a:solidFill>
+                  <a:srgbClr val="2A2929"/>
+                </a:solidFill>
+                <a:latin typeface="Roboto"/>
+              </a:rPr>
+              <a:t> your proposed changes (from your gap analysis).</a:t>
             </a:r>
           </a:p>
           <a:p>
@@ -13893,7 +14094,7 @@
               </a:spcAft>
             </a:pPr>
             <a:r>
-              <a:rPr sz="1400" b="0" i="0">
+              <a:rPr sz="2000" b="0" i="0" dirty="0">
                 <a:solidFill>
                   <a:srgbClr val="7A7A7A"/>
                 </a:solidFill>
@@ -13902,7 +14103,7 @@
               <a:t>–  </a:t>
             </a:r>
             <a:r>
-              <a:rPr sz="1400" b="0" i="0">
+              <a:rPr sz="2000" b="0" i="0" dirty="0">
                 <a:solidFill>
                   <a:srgbClr val="2A2929"/>
                 </a:solidFill>
@@ -13924,7 +14125,7 @@
               </a:spcAft>
             </a:pPr>
             <a:r>
-              <a:rPr sz="1400" b="0" i="0">
+              <a:rPr sz="2000" b="0" i="0" dirty="0">
                 <a:solidFill>
                   <a:srgbClr val="7A7A7A"/>
                 </a:solidFill>
@@ -13933,7 +14134,7 @@
               <a:t>–  </a:t>
             </a:r>
             <a:r>
-              <a:rPr sz="1400" b="0" i="0">
+              <a:rPr sz="2000" b="0" i="0" dirty="0">
                 <a:solidFill>
                   <a:srgbClr val="2A2929"/>
                 </a:solidFill>
@@ -13955,7 +14156,7 @@
               </a:spcAft>
             </a:pPr>
             <a:r>
-              <a:rPr sz="1400" b="0" i="0">
+              <a:rPr sz="2000" b="0" i="0" dirty="0">
                 <a:solidFill>
                   <a:srgbClr val="7A7A7A"/>
                 </a:solidFill>
@@ -13964,7 +14165,7 @@
               <a:t>–  </a:t>
             </a:r>
             <a:r>
-              <a:rPr sz="1400" b="0" i="0">
+              <a:rPr sz="2000" b="0" i="0" dirty="0">
                 <a:solidFill>
                   <a:srgbClr val="2A2929"/>
                 </a:solidFill>
@@ -13986,7 +14187,7 @@
               </a:spcAft>
             </a:pPr>
             <a:r>
-              <a:rPr sz="1700" b="1" i="0">
+              <a:rPr sz="2400" b="1" i="0" dirty="0">
                 <a:solidFill>
                   <a:srgbClr val="EDAB0C"/>
                 </a:solidFill>
@@ -13995,7 +14196,7 @@
               <a:t>■  </a:t>
             </a:r>
             <a:r>
-              <a:rPr sz="1700" b="0" i="0">
+              <a:rPr sz="2400" b="0" i="0" dirty="0">
                 <a:solidFill>
                   <a:srgbClr val="2A2929"/>
                 </a:solidFill>
@@ -14017,7 +14218,7 @@
               </a:spcAft>
             </a:pPr>
             <a:r>
-              <a:rPr sz="1700" b="1" i="0">
+              <a:rPr sz="2400" b="1" i="0" dirty="0">
                 <a:solidFill>
                   <a:srgbClr val="EDAB0C"/>
                 </a:solidFill>
@@ -14026,7 +14227,7 @@
               <a:t>■  </a:t>
             </a:r>
             <a:r>
-              <a:rPr sz="1700" b="0" i="0">
+              <a:rPr sz="2400" b="0" i="0" dirty="0">
                 <a:solidFill>
                   <a:srgbClr val="2A2929"/>
                 </a:solidFill>
@@ -14080,6 +14281,7 @@
           <a:lstStyle/>
           <a:p>
             <a:pPr algn="ctr"/>
+            <a:endParaRPr/>
           </a:p>
         </p:txBody>
       </p:sp>
@@ -14100,7 +14302,7 @@
           <a:noFill/>
         </p:spPr>
         <p:txBody>
-          <a:bodyPr wrap="square" anchor="ctr" lIns="0" rIns="0" tIns="0" bIns="0">
+          <a:bodyPr wrap="square" lIns="0" tIns="0" rIns="0" bIns="0" anchor="ctr">
             <a:spAutoFit/>
           </a:bodyPr>
           <a:lstStyle/>
@@ -14158,6 +14360,7 @@
           <a:lstStyle/>
           <a:p>
             <a:pPr algn="ctr"/>
+            <a:endParaRPr/>
           </a:p>
         </p:txBody>
       </p:sp>
@@ -14178,7 +14381,7 @@
           <a:noFill/>
         </p:spPr>
         <p:txBody>
-          <a:bodyPr wrap="square" anchor="t" lIns="0" rIns="0" tIns="0" bIns="0">
+          <a:bodyPr wrap="square" lIns="0" tIns="0" rIns="0" bIns="0" anchor="t">
             <a:spAutoFit/>
           </a:bodyPr>
           <a:lstStyle/>
@@ -14221,7 +14424,7 @@
           <a:noFill/>
         </p:spPr>
         <p:txBody>
-          <a:bodyPr wrap="square" anchor="t" lIns="0" rIns="0" tIns="0" bIns="0">
+          <a:bodyPr wrap="square" lIns="0" tIns="0" rIns="0" bIns="0" anchor="t">
             <a:spAutoFit/>
           </a:bodyPr>
           <a:lstStyle/>
@@ -14248,7 +14451,7 @@
 </file>
 
 <file path=ppt/slides/slide9.xml><?xml version="1.0" encoding="utf-8"?>
-<p:sld xmlns:a="http://schemas.openxmlformats.org/drawingml/2006/main" xmlns:p="http://schemas.openxmlformats.org/presentationml/2006/main" xmlns:r="http://schemas.openxmlformats.org/officeDocument/2006/relationships">
+<p:sld xmlns:a="http://schemas.openxmlformats.org/drawingml/2006/main" xmlns:r="http://schemas.openxmlformats.org/officeDocument/2006/relationships" xmlns:p="http://schemas.openxmlformats.org/presentationml/2006/main">
   <p:cSld>
     <p:bg>
       <p:bgPr>
@@ -14264,7 +14467,14 @@
         <p:cNvGrpSpPr/>
         <p:nvPr/>
       </p:nvGrpSpPr>
-      <p:grpSpPr/>
+      <p:grpSpPr>
+        <a:xfrm>
+          <a:off x="0" y="0"/>
+          <a:ext cx="0" cy="0"/>
+          <a:chOff x="0" y="0"/>
+          <a:chExt cx="0" cy="0"/>
+        </a:xfrm>
+      </p:grpSpPr>
       <p:sp>
         <p:nvSpPr>
           <p:cNvPr id="2" name="TextBox 1"/>
@@ -14282,7 +14492,7 @@
           <a:noFill/>
         </p:spPr>
         <p:txBody>
-          <a:bodyPr wrap="square" anchor="t" lIns="0" rIns="0" tIns="0" bIns="0">
+          <a:bodyPr wrap="square" lIns="0" tIns="0" rIns="0" bIns="0" anchor="t">
             <a:spAutoFit/>
           </a:bodyPr>
           <a:lstStyle/>
@@ -14356,6 +14566,7 @@
           <a:lstStyle/>
           <a:p>
             <a:pPr algn="ctr"/>
+            <a:endParaRPr/>
           </a:p>
         </p:txBody>
       </p:sp>
@@ -14402,6 +14613,7 @@
           <a:lstStyle/>
           <a:p>
             <a:pPr algn="ctr"/>
+            <a:endParaRPr/>
           </a:p>
         </p:txBody>
       </p:sp>
@@ -14446,6 +14658,7 @@
           <a:lstStyle/>
           <a:p>
             <a:pPr algn="ctr"/>
+            <a:endParaRPr/>
           </a:p>
         </p:txBody>
       </p:sp>
@@ -14466,7 +14679,7 @@
           <a:noFill/>
         </p:spPr>
         <p:txBody>
-          <a:bodyPr wrap="square" anchor="ctr" lIns="0" rIns="0" tIns="0" bIns="0">
+          <a:bodyPr wrap="square" lIns="0" tIns="0" rIns="0" bIns="0" anchor="ctr">
             <a:spAutoFit/>
           </a:bodyPr>
           <a:lstStyle/>
@@ -14531,6 +14744,7 @@
           <a:lstStyle/>
           <a:p>
             <a:pPr algn="ctr"/>
+            <a:endParaRPr/>
           </a:p>
         </p:txBody>
       </p:sp>
@@ -14575,6 +14789,7 @@
           <a:lstStyle/>
           <a:p>
             <a:pPr algn="ctr"/>
+            <a:endParaRPr/>
           </a:p>
         </p:txBody>
       </p:sp>
@@ -14595,7 +14810,7 @@
           <a:noFill/>
         </p:spPr>
         <p:txBody>
-          <a:bodyPr wrap="square" anchor="ctr" lIns="0" rIns="0" tIns="0" bIns="0">
+          <a:bodyPr wrap="square" lIns="0" tIns="0" rIns="0" bIns="0" anchor="ctr">
             <a:spAutoFit/>
           </a:bodyPr>
           <a:lstStyle/>
@@ -14660,6 +14875,7 @@
           <a:lstStyle/>
           <a:p>
             <a:pPr algn="ctr"/>
+            <a:endParaRPr/>
           </a:p>
         </p:txBody>
       </p:sp>
@@ -14704,6 +14920,7 @@
           <a:lstStyle/>
           <a:p>
             <a:pPr algn="ctr"/>
+            <a:endParaRPr/>
           </a:p>
         </p:txBody>
       </p:sp>
@@ -14724,7 +14941,7 @@
           <a:noFill/>
         </p:spPr>
         <p:txBody>
-          <a:bodyPr wrap="square" anchor="ctr" lIns="0" rIns="0" tIns="0" bIns="0">
+          <a:bodyPr wrap="square" lIns="0" tIns="0" rIns="0" bIns="0" anchor="ctr">
             <a:spAutoFit/>
           </a:bodyPr>
           <a:lstStyle/>
@@ -14787,6 +15004,7 @@
           <a:lstStyle/>
           <a:p>
             <a:pPr algn="ctr"/>
+            <a:endParaRPr/>
           </a:p>
         </p:txBody>
       </p:sp>
@@ -14807,7 +15025,7 @@
           <a:noFill/>
         </p:spPr>
         <p:txBody>
-          <a:bodyPr wrap="square" anchor="t" lIns="0" rIns="0" tIns="0" bIns="0">
+          <a:bodyPr wrap="square" lIns="0" tIns="0" rIns="0" bIns="0" anchor="t">
             <a:spAutoFit/>
           </a:bodyPr>
           <a:lstStyle/>
@@ -14850,7 +15068,7 @@
           <a:noFill/>
         </p:spPr>
         <p:txBody>
-          <a:bodyPr wrap="square" anchor="t" lIns="0" rIns="0" tIns="0" bIns="0">
+          <a:bodyPr wrap="square" lIns="0" tIns="0" rIns="0" bIns="0" anchor="t">
             <a:spAutoFit/>
           </a:bodyPr>
           <a:lstStyle/>
@@ -15207,44 +15425,44 @@
         <a:sysClr val="window" lastClr="FFFFFF"/>
       </a:lt1>
       <a:dk2>
-        <a:srgbClr val="1F497D"/>
+        <a:srgbClr val="0E2841"/>
       </a:dk2>
       <a:lt2>
-        <a:srgbClr val="EEECE1"/>
+        <a:srgbClr val="E8E8E8"/>
       </a:lt2>
       <a:accent1>
-        <a:srgbClr val="4F81BD"/>
+        <a:srgbClr val="156082"/>
       </a:accent1>
       <a:accent2>
-        <a:srgbClr val="C0504D"/>
+        <a:srgbClr val="E97132"/>
       </a:accent2>
       <a:accent3>
-        <a:srgbClr val="9BBB59"/>
+        <a:srgbClr val="196B24"/>
       </a:accent3>
       <a:accent4>
-        <a:srgbClr val="8064A2"/>
+        <a:srgbClr val="0F9ED5"/>
       </a:accent4>
       <a:accent5>
-        <a:srgbClr val="4BACC6"/>
+        <a:srgbClr val="A02B93"/>
       </a:accent5>
       <a:accent6>
-        <a:srgbClr val="F79646"/>
+        <a:srgbClr val="4EA72E"/>
       </a:accent6>
       <a:hlink>
-        <a:srgbClr val="0000FF"/>
+        <a:srgbClr val="467886"/>
       </a:hlink>
       <a:folHlink>
-        <a:srgbClr val="800080"/>
+        <a:srgbClr val="96607D"/>
       </a:folHlink>
     </a:clrScheme>
     <a:fontScheme name="Office">
       <a:majorFont>
-        <a:latin typeface="Calibri"/>
+        <a:latin typeface="Aptos Display" panose="02110004020202020204"/>
         <a:ea typeface=""/>
         <a:cs typeface=""/>
-        <a:font script="Jpan" typeface="ＭＳ Ｐゴシック"/>
+        <a:font script="Jpan" typeface="游ゴシック Light"/>
         <a:font script="Hang" typeface="맑은 고딕"/>
-        <a:font script="Hans" typeface="宋体"/>
+        <a:font script="Hans" typeface="等线 Light"/>
         <a:font script="Hant" typeface="新細明體"/>
         <a:font script="Arab" typeface="Times New Roman"/>
         <a:font script="Hebr" typeface="Times New Roman"/>
@@ -15272,14 +15490,31 @@
         <a:font script="Viet" typeface="Times New Roman"/>
         <a:font script="Uigh" typeface="Microsoft Uighur"/>
         <a:font script="Geor" typeface="Sylfaen"/>
+        <a:font script="Armn" typeface="Arial"/>
+        <a:font script="Bugi" typeface="Leelawadee UI"/>
+        <a:font script="Bopo" typeface="Microsoft JhengHei"/>
+        <a:font script="Java" typeface="Javanese Text"/>
+        <a:font script="Lisu" typeface="Segoe UI"/>
+        <a:font script="Mymr" typeface="Myanmar Text"/>
+        <a:font script="Nkoo" typeface="Ebrima"/>
+        <a:font script="Olck" typeface="Nirmala UI"/>
+        <a:font script="Osma" typeface="Ebrima"/>
+        <a:font script="Phag" typeface="Phagspa"/>
+        <a:font script="Syrn" typeface="Estrangelo Edessa"/>
+        <a:font script="Syrj" typeface="Estrangelo Edessa"/>
+        <a:font script="Syre" typeface="Estrangelo Edessa"/>
+        <a:font script="Sora" typeface="Nirmala UI"/>
+        <a:font script="Tale" typeface="Microsoft Tai Le"/>
+        <a:font script="Talu" typeface="Microsoft New Tai Lue"/>
+        <a:font script="Tfng" typeface="Ebrima"/>
       </a:majorFont>
       <a:minorFont>
-        <a:latin typeface="Calibri"/>
+        <a:latin typeface="Aptos" panose="02110004020202020204"/>
         <a:ea typeface=""/>
         <a:cs typeface=""/>
-        <a:font script="Jpan" typeface="ＭＳ Ｐゴシック"/>
+        <a:font script="Jpan" typeface="游ゴシック"/>
         <a:font script="Hang" typeface="맑은 고딕"/>
-        <a:font script="Hans" typeface="宋体"/>
+        <a:font script="Hans" typeface="等线"/>
         <a:font script="Hant" typeface="新細明體"/>
         <a:font script="Arab" typeface="Arial"/>
         <a:font script="Hebr" typeface="Arial"/>
@@ -15307,6 +15542,23 @@
         <a:font script="Viet" typeface="Arial"/>
         <a:font script="Uigh" typeface="Microsoft Uighur"/>
         <a:font script="Geor" typeface="Sylfaen"/>
+        <a:font script="Armn" typeface="Arial"/>
+        <a:font script="Bugi" typeface="Leelawadee UI"/>
+        <a:font script="Bopo" typeface="Microsoft JhengHei"/>
+        <a:font script="Java" typeface="Javanese Text"/>
+        <a:font script="Lisu" typeface="Segoe UI"/>
+        <a:font script="Mymr" typeface="Myanmar Text"/>
+        <a:font script="Nkoo" typeface="Ebrima"/>
+        <a:font script="Olck" typeface="Nirmala UI"/>
+        <a:font script="Osma" typeface="Ebrima"/>
+        <a:font script="Phag" typeface="Phagspa"/>
+        <a:font script="Syrn" typeface="Estrangelo Edessa"/>
+        <a:font script="Syrj" typeface="Estrangelo Edessa"/>
+        <a:font script="Syre" typeface="Estrangelo Edessa"/>
+        <a:font script="Sora" typeface="Nirmala UI"/>
+        <a:font script="Tale" typeface="Microsoft Tai Le"/>
+        <a:font script="Talu" typeface="Microsoft New Tai Lue"/>
+        <a:font script="Tfng" typeface="Ebrima"/>
       </a:minorFont>
     </a:fontScheme>
     <a:fmtScheme name="Office">
@@ -15318,180 +15570,136 @@
           <a:gsLst>
             <a:gs pos="0">
               <a:schemeClr val="phClr">
-                <a:tint val="50000"/>
-                <a:satMod val="300000"/>
+                <a:lumMod val="110000"/>
+                <a:satMod val="105000"/>
+                <a:tint val="67000"/>
               </a:schemeClr>
             </a:gs>
-            <a:gs pos="35000">
+            <a:gs pos="50000">
               <a:schemeClr val="phClr">
-                <a:tint val="37000"/>
-                <a:satMod val="300000"/>
+                <a:lumMod val="105000"/>
+                <a:satMod val="103000"/>
+                <a:tint val="73000"/>
               </a:schemeClr>
             </a:gs>
             <a:gs pos="100000">
               <a:schemeClr val="phClr">
-                <a:tint val="15000"/>
-                <a:satMod val="350000"/>
+                <a:lumMod val="105000"/>
+                <a:satMod val="109000"/>
+                <a:tint val="81000"/>
               </a:schemeClr>
             </a:gs>
           </a:gsLst>
-          <a:lin ang="16200000" scaled="1"/>
+          <a:lin ang="5400000" scaled="0"/>
         </a:gradFill>
         <a:gradFill rotWithShape="1">
           <a:gsLst>
             <a:gs pos="0">
               <a:schemeClr val="phClr">
-                <a:tint val="100000"/>
+                <a:satMod val="103000"/>
+                <a:lumMod val="102000"/>
+                <a:tint val="94000"/>
+              </a:schemeClr>
+            </a:gs>
+            <a:gs pos="50000">
+              <a:schemeClr val="phClr">
+                <a:satMod val="110000"/>
+                <a:lumMod val="100000"/>
                 <a:shade val="100000"/>
-                <a:satMod val="130000"/>
               </a:schemeClr>
             </a:gs>
             <a:gs pos="100000">
               <a:schemeClr val="phClr">
-                <a:tint val="50000"/>
-                <a:shade val="100000"/>
-                <a:satMod val="350000"/>
+                <a:lumMod val="99000"/>
+                <a:satMod val="120000"/>
+                <a:shade val="78000"/>
               </a:schemeClr>
             </a:gs>
           </a:gsLst>
-          <a:lin ang="16200000" scaled="0"/>
+          <a:lin ang="5400000" scaled="0"/>
         </a:gradFill>
       </a:fillStyleLst>
       <a:lnStyleLst>
-        <a:ln w="9525" cap="flat" cmpd="sng" algn="ctr">
+        <a:ln w="12700" cap="flat" cmpd="sng" algn="ctr">
           <a:solidFill>
-            <a:schemeClr val="phClr">
-              <a:shade val="95000"/>
-              <a:satMod val="105000"/>
-            </a:schemeClr>
+            <a:schemeClr val="phClr"/>
           </a:solidFill>
           <a:prstDash val="solid"/>
+          <a:miter lim="800000"/>
+        </a:ln>
+        <a:ln w="19050" cap="flat" cmpd="sng" algn="ctr">
+          <a:solidFill>
+            <a:schemeClr val="phClr"/>
+          </a:solidFill>
+          <a:prstDash val="solid"/>
+          <a:miter lim="800000"/>
         </a:ln>
         <a:ln w="25400" cap="flat" cmpd="sng" algn="ctr">
           <a:solidFill>
             <a:schemeClr val="phClr"/>
           </a:solidFill>
           <a:prstDash val="solid"/>
-        </a:ln>
-        <a:ln w="38100" cap="flat" cmpd="sng" algn="ctr">
-          <a:solidFill>
-            <a:schemeClr val="phClr"/>
-          </a:solidFill>
-          <a:prstDash val="solid"/>
+          <a:miter lim="800000"/>
         </a:ln>
       </a:lnStyleLst>
       <a:effectStyleLst>
         <a:effectStyle>
+          <a:effectLst/>
+        </a:effectStyle>
+        <a:effectStyle>
+          <a:effectLst/>
+        </a:effectStyle>
+        <a:effectStyle>
           <a:effectLst>
-            <a:outerShdw blurRad="40000" dist="20000" dir="5400000" rotWithShape="0">
+            <a:outerShdw blurRad="57150" dist="19050" dir="5400000" algn="ctr" rotWithShape="0">
               <a:srgbClr val="000000">
-                <a:alpha val="38000"/>
+                <a:alpha val="63000"/>
               </a:srgbClr>
             </a:outerShdw>
           </a:effectLst>
-        </a:effectStyle>
-        <a:effectStyle>
-          <a:effectLst>
-            <a:outerShdw blurRad="40000" dist="23000" dir="5400000" rotWithShape="0">
-              <a:srgbClr val="000000">
-                <a:alpha val="35000"/>
-              </a:srgbClr>
-            </a:outerShdw>
-          </a:effectLst>
-        </a:effectStyle>
-        <a:effectStyle>
-          <a:effectLst>
-            <a:outerShdw blurRad="40000" dist="23000" dir="5400000" rotWithShape="0">
-              <a:srgbClr val="000000">
-                <a:alpha val="35000"/>
-              </a:srgbClr>
-            </a:outerShdw>
-          </a:effectLst>
-          <a:scene3d>
-            <a:camera prst="orthographicFront">
-              <a:rot lat="0" lon="0" rev="0"/>
-            </a:camera>
-            <a:lightRig rig="threePt" dir="t">
-              <a:rot lat="0" lon="0" rev="1200000"/>
-            </a:lightRig>
-          </a:scene3d>
-          <a:sp3d>
-            <a:bevelT w="63500" h="25400"/>
-          </a:sp3d>
         </a:effectStyle>
       </a:effectStyleLst>
       <a:bgFillStyleLst>
         <a:solidFill>
           <a:schemeClr val="phClr"/>
         </a:solidFill>
+        <a:solidFill>
+          <a:schemeClr val="phClr">
+            <a:tint val="95000"/>
+            <a:satMod val="170000"/>
+          </a:schemeClr>
+        </a:solidFill>
         <a:gradFill rotWithShape="1">
           <a:gsLst>
             <a:gs pos="0">
               <a:schemeClr val="phClr">
-                <a:tint val="40000"/>
-                <a:satMod val="350000"/>
+                <a:tint val="93000"/>
+                <a:satMod val="150000"/>
+                <a:shade val="98000"/>
+                <a:lumMod val="102000"/>
               </a:schemeClr>
             </a:gs>
-            <a:gs pos="40000">
+            <a:gs pos="50000">
               <a:schemeClr val="phClr">
-                <a:tint val="45000"/>
-                <a:shade val="99000"/>
-                <a:satMod val="350000"/>
+                <a:tint val="98000"/>
+                <a:satMod val="130000"/>
+                <a:shade val="90000"/>
+                <a:lumMod val="103000"/>
               </a:schemeClr>
             </a:gs>
             <a:gs pos="100000">
               <a:schemeClr val="phClr">
-                <a:shade val="20000"/>
-                <a:satMod val="255000"/>
+                <a:shade val="63000"/>
+                <a:satMod val="120000"/>
               </a:schemeClr>
             </a:gs>
           </a:gsLst>
-          <a:path path="circle">
-            <a:fillToRect l="50000" t="-80000" r="50000" b="180000"/>
-          </a:path>
-        </a:gradFill>
-        <a:gradFill rotWithShape="1">
-          <a:gsLst>
-            <a:gs pos="0">
-              <a:schemeClr val="phClr">
-                <a:tint val="80000"/>
-                <a:satMod val="300000"/>
-              </a:schemeClr>
-            </a:gs>
-            <a:gs pos="100000">
-              <a:schemeClr val="phClr">
-                <a:shade val="30000"/>
-                <a:satMod val="200000"/>
-              </a:schemeClr>
-            </a:gs>
-          </a:gsLst>
-          <a:path path="circle">
-            <a:fillToRect l="50000" t="50000" r="50000" b="50000"/>
-          </a:path>
+          <a:lin ang="5400000" scaled="0"/>
         </a:gradFill>
       </a:bgFillStyleLst>
     </a:fmtScheme>
   </a:themeElements>
   <a:objectDefaults>
-    <a:spDef>
-      <a:spPr/>
-      <a:bodyPr/>
-      <a:lstStyle/>
-      <a:style>
-        <a:lnRef idx="1">
-          <a:schemeClr val="accent1"/>
-        </a:lnRef>
-        <a:fillRef idx="3">
-          <a:schemeClr val="accent1"/>
-        </a:fillRef>
-        <a:effectRef idx="2">
-          <a:schemeClr val="accent1"/>
-        </a:effectRef>
-        <a:fontRef idx="minor">
-          <a:schemeClr val="lt1"/>
-        </a:fontRef>
-      </a:style>
-    </a:spDef>
     <a:lnDef>
       <a:spPr/>
       <a:bodyPr/>
@@ -15513,5 +15721,10 @@
     </a:lnDef>
   </a:objectDefaults>
   <a:extraClrSchemeLst/>
+  <a:extLst>
+    <a:ext uri="{05A4C25C-085E-4340-85A3-A5531E510DB2}">
+      <thm15:themeFamily xmlns:thm15="http://schemas.microsoft.com/office/thememl/2012/main" name="Office Theme" id="{2E142A2C-CD16-42D6-873A-C26D2A0506FA}" vid="{1BDDFF52-6CD6-40A5-AB3C-68EB2F1E4D0A}"/>
+    </a:ext>
+  </a:extLst>
 </a:theme>
 </file>
--- a/S1-CL1-Cloud-Design-Build/delivery/topic_04/Topic_04_Slides.pptx
+++ b/S1-CL1-Cloud-Design-Build/delivery/topic_04/Topic_04_Slides.pptx
@@ -28,6 +28,8 @@
     <p:sldId id="276" r:id="rId28"/>
     <p:sldId id="277" r:id="rId29"/>
     <p:sldId id="278" r:id="rId30"/>
+    <p:sldId id="279" r:id="rId31"/>
+    <p:sldId id="280" r:id="rId32"/>
   </p:sldIdLst>
   <p:sldSz cx="12191695" cy="6858000" type="screen4x3"/>
   <p:notesSz cx="6858000" cy="9144000"/>
@@ -5680,7 +5682,7 @@
     <p:bg>
       <p:bgPr>
         <a:solidFill>
-          <a:srgbClr val="FFFFFF"/>
+          <a:srgbClr val="F9F9F9"/>
         </a:solidFill>
         <a:effectLst/>
       </p:bgPr>
@@ -5694,20 +5696,70 @@
       <p:grpSpPr/>
       <p:sp>
         <p:nvSpPr>
-          <p:cNvPr id="2" name="Rectangle 1"/>
+          <p:cNvPr id="2" name="TextBox 1"/>
+          <p:cNvSpPr txBox="1"/>
+          <p:nvPr/>
+        </p:nvSpPr>
+        <p:spPr>
+          <a:xfrm>
+            <a:off x="640080" y="548640"/>
+            <a:ext cx="10881360" cy="1097280"/>
+          </a:xfrm>
+          <a:prstGeom prst="rect">
+            <a:avLst/>
+          </a:prstGeom>
+          <a:noFill/>
+        </p:spPr>
+        <p:txBody>
+          <a:bodyPr wrap="square" anchor="t" lIns="0" rIns="0" tIns="0" bIns="0">
+            <a:spAutoFit/>
+          </a:bodyPr>
+          <a:lstStyle/>
+          <a:p>
+            <a:r>
+              <a:rPr sz="3200" b="1" i="0">
+                <a:solidFill>
+                  <a:srgbClr val="2A2929"/>
+                </a:solidFill>
+                <a:latin typeface="Roboto"/>
+              </a:rPr>
+              <a:t>Key takeaways</a:t>
+            </a:r>
+          </a:p>
+          <a:p>
+            <a:pPr>
+              <a:spcBef>
+                <a:spcPts val="200"/>
+              </a:spcBef>
+            </a:pPr>
+            <a:r>
+              <a:rPr sz="1800" b="1" i="0">
+                <a:solidFill>
+                  <a:srgbClr val="92268F"/>
+                </a:solidFill>
+                <a:latin typeface="Roboto"/>
+              </a:rPr>
+              <a:t>Section 1 · Recommendation</a:t>
+            </a:r>
+          </a:p>
+        </p:txBody>
+      </p:sp>
+      <p:sp>
+        <p:nvSpPr>
+          <p:cNvPr id="3" name="Rectangle 2"/>
           <p:cNvSpPr/>
           <p:nvPr/>
         </p:nvSpPr>
         <p:spPr>
           <a:xfrm>
-            <a:off x="0" y="0"/>
-            <a:ext cx="3931920" cy="6858000"/>
+            <a:off x="658368" y="1600200"/>
+            <a:ext cx="1463040" cy="50800"/>
           </a:xfrm>
           <a:prstGeom prst="rect">
             <a:avLst/>
           </a:prstGeom>
           <a:solidFill>
-            <a:srgbClr val="27B5CE"/>
+            <a:srgbClr val="92268F"/>
           </a:solidFill>
           <a:ln>
             <a:noFill/>
@@ -5738,101 +5790,47 @@
       </p:sp>
       <p:sp>
         <p:nvSpPr>
-          <p:cNvPr id="3" name="TextBox 2"/>
-          <p:cNvSpPr txBox="1"/>
-          <p:nvPr/>
-        </p:nvSpPr>
-        <p:spPr>
-          <a:xfrm>
-            <a:off x="365760" y="2103120"/>
-            <a:ext cx="3291840" cy="2194560"/>
-          </a:xfrm>
-          <a:prstGeom prst="rect">
-            <a:avLst/>
-          </a:prstGeom>
-          <a:noFill/>
-        </p:spPr>
-        <p:txBody>
-          <a:bodyPr wrap="square" anchor="t" lIns="0" rIns="0" tIns="0" bIns="0">
-            <a:spAutoFit/>
-          </a:bodyPr>
-          <a:lstStyle/>
-          <a:p>
-            <a:r>
-              <a:rPr sz="13000" b="1" i="0">
-                <a:solidFill>
-                  <a:srgbClr val="FFFFFF"/>
-                </a:solidFill>
-                <a:latin typeface="Roboto"/>
-              </a:rPr>
-              <a:t>02</a:t>
-            </a:r>
-          </a:p>
-        </p:txBody>
-      </p:sp>
-      <p:sp>
-        <p:nvSpPr>
-          <p:cNvPr id="4" name="TextBox 3"/>
-          <p:cNvSpPr txBox="1"/>
-          <p:nvPr/>
-        </p:nvSpPr>
-        <p:spPr>
-          <a:xfrm>
-            <a:off x="4480560" y="2468880"/>
-            <a:ext cx="7132320" cy="2194560"/>
-          </a:xfrm>
-          <a:prstGeom prst="rect">
-            <a:avLst/>
-          </a:prstGeom>
-          <a:noFill/>
-        </p:spPr>
-        <p:txBody>
-          <a:bodyPr wrap="square" anchor="t" lIns="0" rIns="0" tIns="0" bIns="0">
-            <a:spAutoFit/>
-          </a:bodyPr>
-          <a:lstStyle/>
-          <a:p>
-            <a:r>
-              <a:rPr sz="1600" b="1" i="0">
-                <a:solidFill>
-                  <a:srgbClr val="27B5CE"/>
-                </a:solidFill>
-                <a:latin typeface="Roboto"/>
-              </a:rPr>
-              <a:t>SECTION</a:t>
-            </a:r>
-          </a:p>
-          <a:p>
-            <a:pPr>
-              <a:spcBef>
-                <a:spcPts val="600"/>
-              </a:spcBef>
-            </a:pPr>
-            <a:r>
-              <a:rPr sz="3800" b="1" i="0">
-                <a:solidFill>
-                  <a:srgbClr val="2A2929"/>
-                </a:solidFill>
-                <a:latin typeface="Roboto"/>
-              </a:rPr>
-              <a:t>Action plan</a:t>
-            </a:r>
-          </a:p>
-          <a:p>
-            <a:pPr>
-              <a:spcBef>
-                <a:spcPts val="1000"/>
-              </a:spcBef>
-            </a:pPr>
-            <a:r>
-              <a:rPr sz="2000" b="0" i="1">
-                <a:solidFill>
-                  <a:srgbClr val="484848"/>
-                </a:solidFill>
-                <a:latin typeface="Roboto Light"/>
-              </a:rPr>
-              <a:t>how and when</a:t>
-            </a:r>
+          <p:cNvPr id="4" name="Rectangle 3"/>
+          <p:cNvSpPr/>
+          <p:nvPr/>
+        </p:nvSpPr>
+        <p:spPr>
+          <a:xfrm>
+            <a:off x="640080" y="1965960"/>
+            <a:ext cx="10927080" cy="841248"/>
+          </a:xfrm>
+          <a:prstGeom prst="rect">
+            <a:avLst/>
+          </a:prstGeom>
+          <a:solidFill>
+            <a:srgbClr val="FFFFFF"/>
+          </a:solidFill>
+          <a:ln w="12700">
+            <a:solidFill>
+              <a:srgbClr val="CCCCCC"/>
+            </a:solidFill>
+          </a:ln>
+          <a:effectLst/>
+        </p:spPr>
+        <p:style>
+          <a:lnRef idx="1">
+            <a:schemeClr val="accent1"/>
+          </a:lnRef>
+          <a:fillRef idx="3">
+            <a:schemeClr val="accent1"/>
+          </a:fillRef>
+          <a:effectRef idx="2">
+            <a:schemeClr val="accent1"/>
+          </a:effectRef>
+          <a:fontRef idx="minor">
+            <a:schemeClr val="lt1"/>
+          </a:fontRef>
+        </p:style>
+        <p:txBody>
+          <a:bodyPr rtlCol="0" anchor="ctr"/>
+          <a:lstStyle/>
+          <a:p>
+            <a:pPr algn="ctr"/>
           </a:p>
         </p:txBody>
       </p:sp>
@@ -5844,14 +5842,14 @@
         </p:nvSpPr>
         <p:spPr>
           <a:xfrm>
-            <a:off x="0" y="6565392"/>
-            <a:ext cx="12191695" cy="38100"/>
+            <a:off x="640080" y="1965960"/>
+            <a:ext cx="109728" cy="841248"/>
           </a:xfrm>
           <a:prstGeom prst="rect">
             <a:avLst/>
           </a:prstGeom>
           <a:solidFill>
-            <a:srgbClr val="27B5CE"/>
+            <a:srgbClr val="92268F"/>
           </a:solidFill>
           <a:ln>
             <a:noFill/>
@@ -5888,6 +5886,347 @@
         </p:nvSpPr>
         <p:spPr>
           <a:xfrm>
+            <a:off x="960120" y="1965960"/>
+            <a:ext cx="10424160" cy="841248"/>
+          </a:xfrm>
+          <a:prstGeom prst="rect">
+            <a:avLst/>
+          </a:prstGeom>
+          <a:noFill/>
+        </p:spPr>
+        <p:txBody>
+          <a:bodyPr wrap="square" anchor="ctr" lIns="0" rIns="0" tIns="0" bIns="0">
+            <a:spAutoFit/>
+          </a:bodyPr>
+          <a:lstStyle/>
+          <a:p>
+            <a:pPr>
+              <a:lnSpc>
+                <a:spcPct val="100000"/>
+              </a:lnSpc>
+            </a:pPr>
+            <a:r>
+              <a:rPr sz="1700" b="0" i="0">
+                <a:solidFill>
+                  <a:srgbClr val="2A2929"/>
+                </a:solidFill>
+                <a:latin typeface="Roboto"/>
+              </a:rPr>
+              <a:t>Prioritise the changes, then recommend — impact vs effort/urgency.</a:t>
+            </a:r>
+          </a:p>
+        </p:txBody>
+      </p:sp>
+      <p:sp>
+        <p:nvSpPr>
+          <p:cNvPr id="7" name="Rectangle 6"/>
+          <p:cNvSpPr/>
+          <p:nvPr/>
+        </p:nvSpPr>
+        <p:spPr>
+          <a:xfrm>
+            <a:off x="640080" y="2916936"/>
+            <a:ext cx="10927080" cy="841248"/>
+          </a:xfrm>
+          <a:prstGeom prst="rect">
+            <a:avLst/>
+          </a:prstGeom>
+          <a:solidFill>
+            <a:srgbClr val="FFFFFF"/>
+          </a:solidFill>
+          <a:ln w="12700">
+            <a:solidFill>
+              <a:srgbClr val="CCCCCC"/>
+            </a:solidFill>
+          </a:ln>
+          <a:effectLst/>
+        </p:spPr>
+        <p:style>
+          <a:lnRef idx="1">
+            <a:schemeClr val="accent1"/>
+          </a:lnRef>
+          <a:fillRef idx="3">
+            <a:schemeClr val="accent1"/>
+          </a:fillRef>
+          <a:effectRef idx="2">
+            <a:schemeClr val="accent1"/>
+          </a:effectRef>
+          <a:fontRef idx="minor">
+            <a:schemeClr val="lt1"/>
+          </a:fontRef>
+        </p:style>
+        <p:txBody>
+          <a:bodyPr rtlCol="0" anchor="ctr"/>
+          <a:lstStyle/>
+          <a:p>
+            <a:pPr algn="ctr"/>
+          </a:p>
+        </p:txBody>
+      </p:sp>
+      <p:sp>
+        <p:nvSpPr>
+          <p:cNvPr id="8" name="Rectangle 7"/>
+          <p:cNvSpPr/>
+          <p:nvPr/>
+        </p:nvSpPr>
+        <p:spPr>
+          <a:xfrm>
+            <a:off x="640080" y="2916936"/>
+            <a:ext cx="109728" cy="841248"/>
+          </a:xfrm>
+          <a:prstGeom prst="rect">
+            <a:avLst/>
+          </a:prstGeom>
+          <a:solidFill>
+            <a:srgbClr val="92268F"/>
+          </a:solidFill>
+          <a:ln>
+            <a:noFill/>
+          </a:ln>
+          <a:effectLst/>
+        </p:spPr>
+        <p:style>
+          <a:lnRef idx="1">
+            <a:schemeClr val="accent1"/>
+          </a:lnRef>
+          <a:fillRef idx="3">
+            <a:schemeClr val="accent1"/>
+          </a:fillRef>
+          <a:effectRef idx="2">
+            <a:schemeClr val="accent1"/>
+          </a:effectRef>
+          <a:fontRef idx="minor">
+            <a:schemeClr val="lt1"/>
+          </a:fontRef>
+        </p:style>
+        <p:txBody>
+          <a:bodyPr rtlCol="0" anchor="ctr"/>
+          <a:lstStyle/>
+          <a:p>
+            <a:pPr algn="ctr"/>
+          </a:p>
+        </p:txBody>
+      </p:sp>
+      <p:sp>
+        <p:nvSpPr>
+          <p:cNvPr id="9" name="TextBox 8"/>
+          <p:cNvSpPr txBox="1"/>
+          <p:nvPr/>
+        </p:nvSpPr>
+        <p:spPr>
+          <a:xfrm>
+            <a:off x="960120" y="2916936"/>
+            <a:ext cx="10424160" cy="841248"/>
+          </a:xfrm>
+          <a:prstGeom prst="rect">
+            <a:avLst/>
+          </a:prstGeom>
+          <a:noFill/>
+        </p:spPr>
+        <p:txBody>
+          <a:bodyPr wrap="square" anchor="ctr" lIns="0" rIns="0" tIns="0" bIns="0">
+            <a:spAutoFit/>
+          </a:bodyPr>
+          <a:lstStyle/>
+          <a:p>
+            <a:pPr>
+              <a:lnSpc>
+                <a:spcPct val="100000"/>
+              </a:lnSpc>
+            </a:pPr>
+            <a:r>
+              <a:rPr sz="1700" b="0" i="0">
+                <a:solidFill>
+                  <a:srgbClr val="2A2929"/>
+                </a:solidFill>
+                <a:latin typeface="Roboto"/>
+              </a:rPr>
+              <a:t>One clear option; justify it straight from the evidence; name the trade-off.</a:t>
+            </a:r>
+          </a:p>
+        </p:txBody>
+      </p:sp>
+      <p:sp>
+        <p:nvSpPr>
+          <p:cNvPr id="10" name="Rectangle 9"/>
+          <p:cNvSpPr/>
+          <p:nvPr/>
+        </p:nvSpPr>
+        <p:spPr>
+          <a:xfrm>
+            <a:off x="640080" y="3867912"/>
+            <a:ext cx="10927080" cy="841248"/>
+          </a:xfrm>
+          <a:prstGeom prst="rect">
+            <a:avLst/>
+          </a:prstGeom>
+          <a:solidFill>
+            <a:srgbClr val="FFFFFF"/>
+          </a:solidFill>
+          <a:ln w="12700">
+            <a:solidFill>
+              <a:srgbClr val="CCCCCC"/>
+            </a:solidFill>
+          </a:ln>
+          <a:effectLst/>
+        </p:spPr>
+        <p:style>
+          <a:lnRef idx="1">
+            <a:schemeClr val="accent1"/>
+          </a:lnRef>
+          <a:fillRef idx="3">
+            <a:schemeClr val="accent1"/>
+          </a:fillRef>
+          <a:effectRef idx="2">
+            <a:schemeClr val="accent1"/>
+          </a:effectRef>
+          <a:fontRef idx="minor">
+            <a:schemeClr val="lt1"/>
+          </a:fontRef>
+        </p:style>
+        <p:txBody>
+          <a:bodyPr rtlCol="0" anchor="ctr"/>
+          <a:lstStyle/>
+          <a:p>
+            <a:pPr algn="ctr"/>
+          </a:p>
+        </p:txBody>
+      </p:sp>
+      <p:sp>
+        <p:nvSpPr>
+          <p:cNvPr id="11" name="Rectangle 10"/>
+          <p:cNvSpPr/>
+          <p:nvPr/>
+        </p:nvSpPr>
+        <p:spPr>
+          <a:xfrm>
+            <a:off x="640080" y="3867912"/>
+            <a:ext cx="109728" cy="841248"/>
+          </a:xfrm>
+          <a:prstGeom prst="rect">
+            <a:avLst/>
+          </a:prstGeom>
+          <a:solidFill>
+            <a:srgbClr val="92268F"/>
+          </a:solidFill>
+          <a:ln>
+            <a:noFill/>
+          </a:ln>
+          <a:effectLst/>
+        </p:spPr>
+        <p:style>
+          <a:lnRef idx="1">
+            <a:schemeClr val="accent1"/>
+          </a:lnRef>
+          <a:fillRef idx="3">
+            <a:schemeClr val="accent1"/>
+          </a:fillRef>
+          <a:effectRef idx="2">
+            <a:schemeClr val="accent1"/>
+          </a:effectRef>
+          <a:fontRef idx="minor">
+            <a:schemeClr val="lt1"/>
+          </a:fontRef>
+        </p:style>
+        <p:txBody>
+          <a:bodyPr rtlCol="0" anchor="ctr"/>
+          <a:lstStyle/>
+          <a:p>
+            <a:pPr algn="ctr"/>
+          </a:p>
+        </p:txBody>
+      </p:sp>
+      <p:sp>
+        <p:nvSpPr>
+          <p:cNvPr id="12" name="TextBox 11"/>
+          <p:cNvSpPr txBox="1"/>
+          <p:nvPr/>
+        </p:nvSpPr>
+        <p:spPr>
+          <a:xfrm>
+            <a:off x="960120" y="3867912"/>
+            <a:ext cx="10424160" cy="841248"/>
+          </a:xfrm>
+          <a:prstGeom prst="rect">
+            <a:avLst/>
+          </a:prstGeom>
+          <a:noFill/>
+        </p:spPr>
+        <p:txBody>
+          <a:bodyPr wrap="square" anchor="ctr" lIns="0" rIns="0" tIns="0" bIns="0">
+            <a:spAutoFit/>
+          </a:bodyPr>
+          <a:lstStyle/>
+          <a:p>
+            <a:pPr>
+              <a:lnSpc>
+                <a:spcPct val="100000"/>
+              </a:lnSpc>
+            </a:pPr>
+            <a:r>
+              <a:rPr sz="1700" b="0" i="0">
+                <a:solidFill>
+                  <a:srgbClr val="2A2929"/>
+                </a:solidFill>
+                <a:latin typeface="Roboto"/>
+              </a:rPr>
+              <a:t>The recommendation is the hinge between the evidence and the plan.</a:t>
+            </a:r>
+          </a:p>
+        </p:txBody>
+      </p:sp>
+      <p:sp>
+        <p:nvSpPr>
+          <p:cNvPr id="13" name="Rectangle 12"/>
+          <p:cNvSpPr/>
+          <p:nvPr/>
+        </p:nvSpPr>
+        <p:spPr>
+          <a:xfrm>
+            <a:off x="0" y="6565392"/>
+            <a:ext cx="12191695" cy="38100"/>
+          </a:xfrm>
+          <a:prstGeom prst="rect">
+            <a:avLst/>
+          </a:prstGeom>
+          <a:solidFill>
+            <a:srgbClr val="92268F"/>
+          </a:solidFill>
+          <a:ln>
+            <a:noFill/>
+          </a:ln>
+          <a:effectLst/>
+        </p:spPr>
+        <p:style>
+          <a:lnRef idx="1">
+            <a:schemeClr val="accent1"/>
+          </a:lnRef>
+          <a:fillRef idx="3">
+            <a:schemeClr val="accent1"/>
+          </a:fillRef>
+          <a:effectRef idx="2">
+            <a:schemeClr val="accent1"/>
+          </a:effectRef>
+          <a:fontRef idx="minor">
+            <a:schemeClr val="lt1"/>
+          </a:fontRef>
+        </p:style>
+        <p:txBody>
+          <a:bodyPr rtlCol="0" anchor="ctr"/>
+          <a:lstStyle/>
+          <a:p>
+            <a:pPr algn="ctr"/>
+          </a:p>
+        </p:txBody>
+      </p:sp>
+      <p:sp>
+        <p:nvSpPr>
+          <p:cNvPr id="14" name="TextBox 13"/>
+          <p:cNvSpPr txBox="1"/>
+          <p:nvPr/>
+        </p:nvSpPr>
+        <p:spPr>
+          <a:xfrm>
             <a:off x="502920" y="6400800"/>
             <a:ext cx="5486400" cy="320040"/>
           </a:xfrm>
@@ -5925,7 +6264,7 @@
       </p:sp>
       <p:sp>
         <p:nvSpPr>
-          <p:cNvPr id="7" name="TextBox 6"/>
+          <p:cNvPr id="15" name="TextBox 14"/>
           <p:cNvSpPr txBox="1"/>
           <p:nvPr/>
         </p:nvSpPr>
@@ -5953,7 +6292,7 @@
                 </a:solidFill>
                 <a:latin typeface="Roboto"/>
               </a:rPr>
-              <a:t/>
+              <a:t>8</a:t>
             </a:r>
           </a:p>
         </p:txBody>
@@ -5986,48 +6325,14 @@
       <p:grpSpPr/>
       <p:sp>
         <p:nvSpPr>
-          <p:cNvPr id="2" name="TextBox 1"/>
-          <p:cNvSpPr txBox="1"/>
-          <p:nvPr/>
-        </p:nvSpPr>
-        <p:spPr>
-          <a:xfrm>
-            <a:off x="640080" y="457200"/>
-            <a:ext cx="10881360" cy="960120"/>
-          </a:xfrm>
-          <a:prstGeom prst="rect">
-            <a:avLst/>
-          </a:prstGeom>
-          <a:noFill/>
-        </p:spPr>
-        <p:txBody>
-          <a:bodyPr wrap="square" anchor="t" lIns="0" rIns="0" tIns="0" bIns="0">
-            <a:spAutoFit/>
-          </a:bodyPr>
-          <a:lstStyle/>
-          <a:p>
-            <a:r>
-              <a:rPr sz="2800" b="1" i="0">
-                <a:solidFill>
-                  <a:srgbClr val="2A2929"/>
-                </a:solidFill>
-                <a:latin typeface="Roboto"/>
-              </a:rPr>
-              <a:t>What the action plan is for</a:t>
-            </a:r>
-          </a:p>
-        </p:txBody>
-      </p:sp>
-      <p:sp>
-        <p:nvSpPr>
-          <p:cNvPr id="3" name="Rectangle 2"/>
+          <p:cNvPr id="2" name="Rectangle 1"/>
           <p:cNvSpPr/>
           <p:nvPr/>
         </p:nvSpPr>
         <p:spPr>
           <a:xfrm>
-            <a:off x="658368" y="1371600"/>
-            <a:ext cx="1463040" cy="50800"/>
+            <a:off x="0" y="0"/>
+            <a:ext cx="3931920" cy="6858000"/>
           </a:xfrm>
           <a:prstGeom prst="rect">
             <a:avLst/>
@@ -6064,14 +6369,48 @@
       </p:sp>
       <p:sp>
         <p:nvSpPr>
+          <p:cNvPr id="3" name="TextBox 2"/>
+          <p:cNvSpPr txBox="1"/>
+          <p:nvPr/>
+        </p:nvSpPr>
+        <p:spPr>
+          <a:xfrm>
+            <a:off x="365760" y="2103120"/>
+            <a:ext cx="3291840" cy="2194560"/>
+          </a:xfrm>
+          <a:prstGeom prst="rect">
+            <a:avLst/>
+          </a:prstGeom>
+          <a:noFill/>
+        </p:spPr>
+        <p:txBody>
+          <a:bodyPr wrap="square" anchor="t" lIns="0" rIns="0" tIns="0" bIns="0">
+            <a:spAutoFit/>
+          </a:bodyPr>
+          <a:lstStyle/>
+          <a:p>
+            <a:r>
+              <a:rPr sz="13000" b="1" i="0">
+                <a:solidFill>
+                  <a:srgbClr val="FFFFFF"/>
+                </a:solidFill>
+                <a:latin typeface="Roboto"/>
+              </a:rPr>
+              <a:t>02</a:t>
+            </a:r>
+          </a:p>
+        </p:txBody>
+      </p:sp>
+      <p:sp>
+        <p:nvSpPr>
           <p:cNvPr id="4" name="TextBox 3"/>
           <p:cNvSpPr txBox="1"/>
           <p:nvPr/>
         </p:nvSpPr>
         <p:spPr>
           <a:xfrm>
-            <a:off x="658368" y="1691640"/>
-            <a:ext cx="10881360" cy="4480560"/>
+            <a:off x="4480560" y="2468880"/>
+            <a:ext cx="7132320" cy="2194560"/>
           </a:xfrm>
           <a:prstGeom prst="rect">
             <a:avLst/>
@@ -6079,101 +6418,51 @@
           <a:noFill/>
         </p:spPr>
         <p:txBody>
-          <a:bodyPr wrap="square" anchor="ctr" lIns="0" rIns="0" tIns="0" bIns="0">
+          <a:bodyPr wrap="square" anchor="t" lIns="0" rIns="0" tIns="0" bIns="0">
             <a:spAutoFit/>
           </a:bodyPr>
           <a:lstStyle/>
           <a:p>
-            <a:pPr marL="0" indent="0">
-              <a:lnSpc>
-                <a:spcPct val="105000"/>
-              </a:lnSpc>
+            <a:r>
+              <a:rPr sz="1600" b="1" i="0">
+                <a:solidFill>
+                  <a:srgbClr val="27B5CE"/>
+                </a:solidFill>
+                <a:latin typeface="Roboto"/>
+              </a:rPr>
+              <a:t>SECTION</a:t>
+            </a:r>
+          </a:p>
+          <a:p>
+            <a:pPr>
               <a:spcBef>
-                <a:spcPts val="0"/>
+                <a:spcPts val="600"/>
               </a:spcBef>
-              <a:spcAft>
+            </a:pPr>
+            <a:r>
+              <a:rPr sz="3800" b="1" i="0">
+                <a:solidFill>
+                  <a:srgbClr val="2A2929"/>
+                </a:solidFill>
+                <a:latin typeface="Roboto"/>
+              </a:rPr>
+              <a:t>Action plan</a:t>
+            </a:r>
+          </a:p>
+          <a:p>
+            <a:pPr>
+              <a:spcBef>
                 <a:spcPts val="1000"/>
-              </a:spcAft>
+              </a:spcBef>
             </a:pPr>
             <a:r>
-              <a:rPr sz="2400" b="1" i="0">
-                <a:solidFill>
-                  <a:srgbClr val="EDAB0C"/>
-                </a:solidFill>
-                <a:latin typeface="Roboto"/>
-              </a:rPr>
-              <a:t>■  </a:t>
-            </a:r>
-            <a:r>
-              <a:rPr sz="2400" b="0" i="0">
-                <a:solidFill>
-                  <a:srgbClr val="2A2929"/>
-                </a:solidFill>
-                <a:latin typeface="Roboto"/>
-              </a:rPr>
-              <a:t>A recommendation says what and why; the action plan says how and when.</a:t>
-            </a:r>
-          </a:p>
-          <a:p>
-            <a:pPr marL="0" indent="0">
-              <a:lnSpc>
-                <a:spcPct val="105000"/>
-              </a:lnSpc>
-              <a:spcBef>
-                <a:spcPts val="0"/>
-              </a:spcBef>
-              <a:spcAft>
-                <a:spcPts val="1000"/>
-              </a:spcAft>
-            </a:pPr>
-            <a:r>
-              <a:rPr sz="2400" b="1" i="0">
-                <a:solidFill>
-                  <a:srgbClr val="EDAB0C"/>
-                </a:solidFill>
-                <a:latin typeface="Roboto"/>
-              </a:rPr>
-              <a:t>■  </a:t>
-            </a:r>
-            <a:r>
-              <a:rPr sz="2400" b="0" i="0">
-                <a:solidFill>
-                  <a:srgbClr val="2A2929"/>
-                </a:solidFill>
-                <a:latin typeface="Roboto"/>
-              </a:rPr>
-              <a:t>It turns a “yes” into execution the organisation can actually run.</a:t>
-            </a:r>
-          </a:p>
-          <a:p>
-            <a:pPr marL="0" indent="0">
-              <a:lnSpc>
-                <a:spcPct val="105000"/>
-              </a:lnSpc>
-              <a:spcBef>
-                <a:spcPts val="0"/>
-              </a:spcBef>
-              <a:spcAft>
-                <a:spcPts val="1000"/>
-              </a:spcAft>
-            </a:pPr>
-            <a:r>
-              <a:rPr sz="2400" b="1" i="0">
-                <a:solidFill>
-                  <a:srgbClr val="EDAB0C"/>
-                </a:solidFill>
-                <a:latin typeface="Roboto"/>
-              </a:rPr>
-              <a:t>■  </a:t>
-            </a:r>
-            <a:r>
-              <a:rPr sz="2400" b="0" i="0">
-                <a:solidFill>
-                  <a:srgbClr val="2A2929"/>
-                </a:solidFill>
-                <a:latin typeface="Roboto"/>
-              </a:rPr>
-              <a:t>And it proves the recommendation is feasible.</a:t>
+              <a:rPr sz="2000" b="0" i="1">
+                <a:solidFill>
+                  <a:srgbClr val="484848"/>
+                </a:solidFill>
+                <a:latin typeface="Roboto Light"/>
+              </a:rPr>
+              <a:t>how and when</a:t>
             </a:r>
           </a:p>
         </p:txBody>
@@ -6295,7 +6584,7 @@
                 </a:solidFill>
                 <a:latin typeface="Roboto"/>
               </a:rPr>
-              <a:t>8</a:t>
+              <a:t/>
             </a:r>
           </a:p>
         </p:txBody>
@@ -6355,23 +6644,7 @@
                 </a:solidFill>
                 <a:latin typeface="Roboto"/>
               </a:rPr>
-              <a:t>The parts of an action plan</a:t>
-            </a:r>
-          </a:p>
-          <a:p>
-            <a:pPr>
-              <a:spcBef>
-                <a:spcPts val="200"/>
-              </a:spcBef>
-            </a:pPr>
-            <a:r>
-              <a:rPr sz="1800" b="0" i="1">
-                <a:solidFill>
-                  <a:srgbClr val="D68E10"/>
-                </a:solidFill>
-                <a:latin typeface="Roboto Light"/>
-              </a:rPr>
-              <a:t>five parts (becomes the Action Plan section)</a:t>
+              <a:t>What the action plan is for</a:t>
             </a:r>
           </a:p>
         </p:txBody>
@@ -6469,7 +6742,7 @@
                 </a:solidFill>
                 <a:latin typeface="Roboto"/>
               </a:rPr>
-              <a:t>Prioritised changes — what gets done, in priority order</a:t>
+              <a:t>A recommendation says what and why; the action plan says how and when.</a:t>
             </a:r>
           </a:p>
           <a:p>
@@ -6500,7 +6773,7 @@
                 </a:solidFill>
                 <a:latin typeface="Roboto"/>
               </a:rPr>
-              <a:t>Implementation schedule — phases / sequence / timeframe</a:t>
+              <a:t>It turns a “yes” into execution the organisation can actually run.</a:t>
             </a:r>
           </a:p>
           <a:p>
@@ -6531,69 +6804,7 @@
                 </a:solidFill>
                 <a:latin typeface="Roboto"/>
               </a:rPr>
-              <a:t>Standards, targets &amp; success metrics — how you'll know it worked</a:t>
-            </a:r>
-          </a:p>
-          <a:p>
-            <a:pPr marL="0" indent="0">
-              <a:lnSpc>
-                <a:spcPct val="105000"/>
-              </a:lnSpc>
-              <a:spcBef>
-                <a:spcPts val="0"/>
-              </a:spcBef>
-              <a:spcAft>
-                <a:spcPts val="1000"/>
-              </a:spcAft>
-            </a:pPr>
-            <a:r>
-              <a:rPr sz="2400" b="1" i="0">
-                <a:solidFill>
-                  <a:srgbClr val="EDAB0C"/>
-                </a:solidFill>
-                <a:latin typeface="Roboto"/>
-              </a:rPr>
-              <a:t>■  </a:t>
-            </a:r>
-            <a:r>
-              <a:rPr sz="2400" b="0" i="0">
-                <a:solidFill>
-                  <a:srgbClr val="2A2929"/>
-                </a:solidFill>
-                <a:latin typeface="Roboto"/>
-              </a:rPr>
-              <a:t>Implementation methods — how each change is delivered</a:t>
-            </a:r>
-          </a:p>
-          <a:p>
-            <a:pPr marL="0" indent="0">
-              <a:lnSpc>
-                <a:spcPct val="105000"/>
-              </a:lnSpc>
-              <a:spcBef>
-                <a:spcPts val="0"/>
-              </a:spcBef>
-              <a:spcAft>
-                <a:spcPts val="1000"/>
-              </a:spcAft>
-            </a:pPr>
-            <a:r>
-              <a:rPr sz="2400" b="1" i="0">
-                <a:solidFill>
-                  <a:srgbClr val="EDAB0C"/>
-                </a:solidFill>
-                <a:latin typeface="Roboto"/>
-              </a:rPr>
-              <a:t>■  </a:t>
-            </a:r>
-            <a:r>
-              <a:rPr sz="2400" b="0" i="0">
-                <a:solidFill>
-                  <a:srgbClr val="2A2929"/>
-                </a:solidFill>
-                <a:latin typeface="Roboto"/>
-              </a:rPr>
-              <a:t>Alignment with the change-management procedure — routing through governance</a:t>
+              <a:t>And it proves the recommendation is feasible.</a:t>
             </a:r>
           </a:p>
         </p:txBody>
@@ -6775,7 +6986,23 @@
                 </a:solidFill>
                 <a:latin typeface="Roboto"/>
               </a:rPr>
-              <a:t>Sequencing &amp; the schedule</a:t>
+              <a:t>The parts of an action plan</a:t>
+            </a:r>
+          </a:p>
+          <a:p>
+            <a:pPr>
+              <a:spcBef>
+                <a:spcPts val="200"/>
+              </a:spcBef>
+            </a:pPr>
+            <a:r>
+              <a:rPr sz="1800" b="0" i="1">
+                <a:solidFill>
+                  <a:srgbClr val="D68E10"/>
+                </a:solidFill>
+                <a:latin typeface="Roboto Light"/>
+              </a:rPr>
+              <a:t>five parts (becomes the Action Plan section)</a:t>
             </a:r>
           </a:p>
         </p:txBody>
@@ -6873,7 +7100,7 @@
                 </a:solidFill>
                 <a:latin typeface="Roboto"/>
               </a:rPr>
-              <a:t>Order the work by priority and dependency (you can't migrate data before the target exists).</a:t>
+              <a:t>Prioritised changes — what gets done, in priority order</a:t>
             </a:r>
           </a:p>
           <a:p>
@@ -6904,7 +7131,7 @@
                 </a:solidFill>
                 <a:latin typeface="Roboto"/>
               </a:rPr>
-              <a:t>Group into phases with a realistic timeframe.</a:t>
+              <a:t>Implementation schedule — phases / sequence / timeframe</a:t>
             </a:r>
           </a:p>
           <a:p>
@@ -6935,7 +7162,69 @@
                 </a:solidFill>
                 <a:latin typeface="Roboto"/>
               </a:rPr>
-              <a:t>Board-level — phases and milestones, not a day-by-day Gantt. Show the critical path.</a:t>
+              <a:t>Standards, targets &amp; success metrics — how you'll know it worked</a:t>
+            </a:r>
+          </a:p>
+          <a:p>
+            <a:pPr marL="0" indent="0">
+              <a:lnSpc>
+                <a:spcPct val="105000"/>
+              </a:lnSpc>
+              <a:spcBef>
+                <a:spcPts val="0"/>
+              </a:spcBef>
+              <a:spcAft>
+                <a:spcPts val="1000"/>
+              </a:spcAft>
+            </a:pPr>
+            <a:r>
+              <a:rPr sz="2400" b="1" i="0">
+                <a:solidFill>
+                  <a:srgbClr val="EDAB0C"/>
+                </a:solidFill>
+                <a:latin typeface="Roboto"/>
+              </a:rPr>
+              <a:t>■  </a:t>
+            </a:r>
+            <a:r>
+              <a:rPr sz="2400" b="0" i="0">
+                <a:solidFill>
+                  <a:srgbClr val="2A2929"/>
+                </a:solidFill>
+                <a:latin typeface="Roboto"/>
+              </a:rPr>
+              <a:t>Implementation methods — how each change is delivered</a:t>
+            </a:r>
+          </a:p>
+          <a:p>
+            <a:pPr marL="0" indent="0">
+              <a:lnSpc>
+                <a:spcPct val="105000"/>
+              </a:lnSpc>
+              <a:spcBef>
+                <a:spcPts val="0"/>
+              </a:spcBef>
+              <a:spcAft>
+                <a:spcPts val="1000"/>
+              </a:spcAft>
+            </a:pPr>
+            <a:r>
+              <a:rPr sz="2400" b="1" i="0">
+                <a:solidFill>
+                  <a:srgbClr val="EDAB0C"/>
+                </a:solidFill>
+                <a:latin typeface="Roboto"/>
+              </a:rPr>
+              <a:t>■  </a:t>
+            </a:r>
+            <a:r>
+              <a:rPr sz="2400" b="0" i="0">
+                <a:solidFill>
+                  <a:srgbClr val="2A2929"/>
+                </a:solidFill>
+                <a:latin typeface="Roboto"/>
+              </a:rPr>
+              <a:t>Alignment with the change-management procedure — routing through governance</a:t>
             </a:r>
           </a:p>
         </p:txBody>
@@ -7117,7 +7406,7 @@
                 </a:solidFill>
                 <a:latin typeface="Roboto"/>
               </a:rPr>
-              <a:t>Standards, targets &amp; success metrics</a:t>
+              <a:t>Sequencing &amp; the schedule</a:t>
             </a:r>
           </a:p>
         </p:txBody>
@@ -7215,7 +7504,7 @@
                 </a:solidFill>
                 <a:latin typeface="Roboto"/>
               </a:rPr>
-              <a:t>Hold the work to the industry standards (Well-Architected, ISO 27017, Essential Eight, ITIL).</a:t>
+              <a:t>Order the work by priority and dependency (you can't migrate data before the target exists).</a:t>
             </a:r>
           </a:p>
           <a:p>
@@ -7246,7 +7535,7 @@
                 </a:solidFill>
                 <a:latin typeface="Roboto"/>
               </a:rPr>
-              <a:t>Set measurable targets: availability, recovery, cutover with no data loss, budget adherence.</a:t>
+              <a:t>Group into phases with a realistic timeframe.</a:t>
             </a:r>
           </a:p>
           <a:p>
@@ -7277,7 +7566,7 @@
                 </a:solidFill>
                 <a:latin typeface="Roboto"/>
               </a:rPr>
-              <a:t>Targets make the plan accountable — they define “done well”.</a:t>
+              <a:t>Board-level — phases and milestones, not a day-by-day Gantt. Show the critical path.</a:t>
             </a:r>
           </a:p>
         </p:txBody>
@@ -7459,7 +7748,7 @@
                 </a:solidFill>
                 <a:latin typeface="Roboto"/>
               </a:rPr>
-              <a:t>Align to the change-management procedure</a:t>
+              <a:t>Standards, targets &amp; success metrics</a:t>
             </a:r>
           </a:p>
         </p:txBody>
@@ -7557,7 +7846,7 @@
                 </a:solidFill>
                 <a:latin typeface="Roboto"/>
               </a:rPr>
-              <a:t>Real change runs through governance.</a:t>
+              <a:t>Hold the work to the industry standards (Well-Architected, ISO 27017, Essential Eight, ITIL).</a:t>
             </a:r>
           </a:p>
           <a:p>
@@ -7588,38 +7877,7 @@
                 </a:solidFill>
                 <a:latin typeface="Roboto"/>
               </a:rPr>
-              <a:t>Map the high-risk steps (e.g. cutover) to the change-management procedure:</a:t>
-            </a:r>
-          </a:p>
-          <a:p>
-            <a:pPr marL="365760" indent="0">
-              <a:lnSpc>
-                <a:spcPct val="105000"/>
-              </a:lnSpc>
-              <a:spcBef>
-                <a:spcPts val="0"/>
-              </a:spcBef>
-              <a:spcAft>
-                <a:spcPts val="500"/>
-              </a:spcAft>
-            </a:pPr>
-            <a:r>
-              <a:rPr sz="2100" b="0" i="0">
-                <a:solidFill>
-                  <a:srgbClr val="7A7A7A"/>
-                </a:solidFill>
-                <a:latin typeface="Roboto"/>
-              </a:rPr>
-              <a:t>–  </a:t>
-            </a:r>
-            <a:r>
-              <a:rPr sz="2100" b="0" i="0">
-                <a:solidFill>
-                  <a:srgbClr val="2A2929"/>
-                </a:solidFill>
-                <a:latin typeface="Roboto"/>
-              </a:rPr>
-              <a:t>change request → risk assessment → approval → change window</a:t>
+              <a:t>Set measurable targets: availability, recovery, cutover with no data loss, budget adherence.</a:t>
             </a:r>
           </a:p>
           <a:p>
@@ -7650,7 +7908,7 @@
                 </a:solidFill>
                 <a:latin typeface="Roboto"/>
               </a:rPr>
-              <a:t>This is what separates a consultant's plan from a wish-list.</a:t>
+              <a:t>Targets make the plan accountable — they define “done well”.</a:t>
             </a:r>
           </a:p>
         </p:txBody>
@@ -7805,14 +8063,48 @@
       <p:grpSpPr/>
       <p:sp>
         <p:nvSpPr>
-          <p:cNvPr id="2" name="Rectangle 1"/>
+          <p:cNvPr id="2" name="TextBox 1"/>
+          <p:cNvSpPr txBox="1"/>
+          <p:nvPr/>
+        </p:nvSpPr>
+        <p:spPr>
+          <a:xfrm>
+            <a:off x="640080" y="457200"/>
+            <a:ext cx="10881360" cy="960120"/>
+          </a:xfrm>
+          <a:prstGeom prst="rect">
+            <a:avLst/>
+          </a:prstGeom>
+          <a:noFill/>
+        </p:spPr>
+        <p:txBody>
+          <a:bodyPr wrap="square" anchor="t" lIns="0" rIns="0" tIns="0" bIns="0">
+            <a:spAutoFit/>
+          </a:bodyPr>
+          <a:lstStyle/>
+          <a:p>
+            <a:r>
+              <a:rPr sz="2800" b="1" i="0">
+                <a:solidFill>
+                  <a:srgbClr val="2A2929"/>
+                </a:solidFill>
+                <a:latin typeface="Roboto"/>
+              </a:rPr>
+              <a:t>Align to the change-management procedure</a:t>
+            </a:r>
+          </a:p>
+        </p:txBody>
+      </p:sp>
+      <p:sp>
+        <p:nvSpPr>
+          <p:cNvPr id="3" name="Rectangle 2"/>
           <p:cNvSpPr/>
           <p:nvPr/>
         </p:nvSpPr>
         <p:spPr>
           <a:xfrm>
-            <a:off x="0" y="0"/>
-            <a:ext cx="12191695" cy="1234440"/>
+            <a:off x="658368" y="1371600"/>
+            <a:ext cx="1463040" cy="50800"/>
           </a:xfrm>
           <a:prstGeom prst="rect">
             <a:avLst/>
@@ -7849,67 +8141,14 @@
       </p:sp>
       <p:sp>
         <p:nvSpPr>
-          <p:cNvPr id="3" name="Rounded Rectangle 2"/>
-          <p:cNvSpPr/>
-          <p:nvPr/>
-        </p:nvSpPr>
-        <p:spPr>
-          <a:xfrm>
-            <a:off x="640080" y="384048"/>
-            <a:ext cx="1691640" cy="457200"/>
-          </a:xfrm>
-          <a:prstGeom prst="roundRect">
-            <a:avLst/>
-          </a:prstGeom>
-          <a:solidFill>
-            <a:srgbClr val="2A2929"/>
-          </a:solidFill>
-          <a:ln>
-            <a:noFill/>
-          </a:ln>
-          <a:effectLst/>
-        </p:spPr>
-        <p:style>
-          <a:lnRef idx="1">
-            <a:schemeClr val="accent1"/>
-          </a:lnRef>
-          <a:fillRef idx="3">
-            <a:schemeClr val="accent1"/>
-          </a:fillRef>
-          <a:effectRef idx="2">
-            <a:schemeClr val="accent1"/>
-          </a:effectRef>
-          <a:fontRef idx="minor">
-            <a:schemeClr val="lt1"/>
-          </a:fontRef>
-        </p:style>
-        <p:txBody>
-          <a:bodyPr rtlCol="0" anchor="ctr"/>
-          <a:lstStyle/>
-          <a:p>
-            <a:pPr algn="ctr"/>
-            <a:r>
-              <a:rPr sz="1400" b="1" i="0">
-                <a:solidFill>
-                  <a:srgbClr val="FBB900"/>
-                </a:solidFill>
-                <a:latin typeface="Roboto"/>
-              </a:rPr>
-              <a:t>ACTIVITY</a:t>
-            </a:r>
-          </a:p>
-        </p:txBody>
-      </p:sp>
-      <p:sp>
-        <p:nvSpPr>
           <p:cNvPr id="4" name="TextBox 3"/>
           <p:cNvSpPr txBox="1"/>
           <p:nvPr/>
         </p:nvSpPr>
         <p:spPr>
           <a:xfrm>
-            <a:off x="2560320" y="310896"/>
-            <a:ext cx="8961120" cy="685800"/>
+            <a:off x="658368" y="1691640"/>
+            <a:ext cx="10881360" cy="4480560"/>
           </a:xfrm>
           <a:prstGeom prst="rect">
             <a:avLst/>
@@ -7918,40 +8157,6 @@
         </p:spPr>
         <p:txBody>
           <a:bodyPr wrap="square" anchor="ctr" lIns="0" rIns="0" tIns="0" bIns="0">
-            <a:spAutoFit/>
-          </a:bodyPr>
-          <a:lstStyle/>
-          <a:p>
-            <a:r>
-              <a:rPr sz="2600" b="1" i="0">
-                <a:solidFill>
-                  <a:srgbClr val="FFFFFF"/>
-                </a:solidFill>
-                <a:latin typeface="Roboto"/>
-              </a:rPr>
-              <a:t>Build the Action Plan</a:t>
-            </a:r>
-          </a:p>
-        </p:txBody>
-      </p:sp>
-      <p:sp>
-        <p:nvSpPr>
-          <p:cNvPr id="5" name="TextBox 4"/>
-          <p:cNvSpPr txBox="1"/>
-          <p:nvPr/>
-        </p:nvSpPr>
-        <p:spPr>
-          <a:xfrm>
-            <a:off x="658368" y="1554480"/>
-            <a:ext cx="10881360" cy="4297680"/>
-          </a:xfrm>
-          <a:prstGeom prst="rect">
-            <a:avLst/>
-          </a:prstGeom>
-          <a:noFill/>
-        </p:spPr>
-        <p:txBody>
-          <a:bodyPr wrap="square" anchor="t" lIns="0" rIns="0" tIns="0" bIns="0">
             <a:spAutoFit/>
           </a:bodyPr>
           <a:lstStyle/>
@@ -7968,7 +8173,7 @@
               </a:spcAft>
             </a:pPr>
             <a:r>
-              <a:rPr sz="1700" b="1" i="0">
+              <a:rPr sz="2400" b="1" i="0">
                 <a:solidFill>
                   <a:srgbClr val="EDAB0C"/>
                 </a:solidFill>
@@ -7977,13 +8182,13 @@
               <a:t>■  </a:t>
             </a:r>
             <a:r>
-              <a:rPr sz="1700" b="0" i="0">
+              <a:rPr sz="2400" b="0" i="0">
                 <a:solidFill>
                   <a:srgbClr val="2A2929"/>
                 </a:solidFill>
                 <a:latin typeface="Roboto"/>
               </a:rPr>
-              <a:t>In your working copy of the Business Case, add the Action Plan for the Accounting System.</a:t>
+              <a:t>Real change runs through governance.</a:t>
             </a:r>
           </a:p>
           <a:p>
@@ -7999,7 +8204,7 @@
               </a:spcAft>
             </a:pPr>
             <a:r>
-              <a:rPr sz="1700" b="1" i="0">
+              <a:rPr sz="2400" b="1" i="0">
                 <a:solidFill>
                   <a:srgbClr val="EDAB0C"/>
                 </a:solidFill>
@@ -8008,13 +8213,13 @@
               <a:t>■  </a:t>
             </a:r>
             <a:r>
-              <a:rPr sz="1700" b="0" i="0">
+              <a:rPr sz="2400" b="0" i="0">
                 <a:solidFill>
                   <a:srgbClr val="2A2929"/>
                 </a:solidFill>
                 <a:latin typeface="Roboto"/>
               </a:rPr>
-              <a:t>Include all five parts:</a:t>
+              <a:t>Map the high-risk steps (e.g. cutover) to the change-management procedure:</a:t>
             </a:r>
           </a:p>
           <a:p>
@@ -8030,7 +8235,7 @@
               </a:spcAft>
             </a:pPr>
             <a:r>
-              <a:rPr sz="1400" b="0" i="0">
+              <a:rPr sz="2100" b="0" i="0">
                 <a:solidFill>
                   <a:srgbClr val="7A7A7A"/>
                 </a:solidFill>
@@ -8039,13 +8244,408 @@
               <a:t>–  </a:t>
             </a:r>
             <a:r>
-              <a:rPr sz="1400" b="0" i="0">
+              <a:rPr sz="2100" b="0" i="0">
                 <a:solidFill>
                   <a:srgbClr val="2A2929"/>
                 </a:solidFill>
                 <a:latin typeface="Roboto"/>
               </a:rPr>
-              <a:t>prioritised changes · implementation schedule (phases)</a:t>
+              <a:t>change request → risk assessment → approval → change window</a:t>
+            </a:r>
+          </a:p>
+          <a:p>
+            <a:pPr marL="0" indent="0">
+              <a:lnSpc>
+                <a:spcPct val="105000"/>
+              </a:lnSpc>
+              <a:spcBef>
+                <a:spcPts val="0"/>
+              </a:spcBef>
+              <a:spcAft>
+                <a:spcPts val="1000"/>
+              </a:spcAft>
+            </a:pPr>
+            <a:r>
+              <a:rPr sz="2400" b="1" i="0">
+                <a:solidFill>
+                  <a:srgbClr val="EDAB0C"/>
+                </a:solidFill>
+                <a:latin typeface="Roboto"/>
+              </a:rPr>
+              <a:t>■  </a:t>
+            </a:r>
+            <a:r>
+              <a:rPr sz="2400" b="0" i="0">
+                <a:solidFill>
+                  <a:srgbClr val="2A2929"/>
+                </a:solidFill>
+                <a:latin typeface="Roboto"/>
+              </a:rPr>
+              <a:t>This is what separates a consultant's plan from a wish-list.</a:t>
+            </a:r>
+          </a:p>
+        </p:txBody>
+      </p:sp>
+      <p:sp>
+        <p:nvSpPr>
+          <p:cNvPr id="5" name="Rectangle 4"/>
+          <p:cNvSpPr/>
+          <p:nvPr/>
+        </p:nvSpPr>
+        <p:spPr>
+          <a:xfrm>
+            <a:off x="0" y="6565392"/>
+            <a:ext cx="12191695" cy="38100"/>
+          </a:xfrm>
+          <a:prstGeom prst="rect">
+            <a:avLst/>
+          </a:prstGeom>
+          <a:solidFill>
+            <a:srgbClr val="27B5CE"/>
+          </a:solidFill>
+          <a:ln>
+            <a:noFill/>
+          </a:ln>
+          <a:effectLst/>
+        </p:spPr>
+        <p:style>
+          <a:lnRef idx="1">
+            <a:schemeClr val="accent1"/>
+          </a:lnRef>
+          <a:fillRef idx="3">
+            <a:schemeClr val="accent1"/>
+          </a:fillRef>
+          <a:effectRef idx="2">
+            <a:schemeClr val="accent1"/>
+          </a:effectRef>
+          <a:fontRef idx="minor">
+            <a:schemeClr val="lt1"/>
+          </a:fontRef>
+        </p:style>
+        <p:txBody>
+          <a:bodyPr rtlCol="0" anchor="ctr"/>
+          <a:lstStyle/>
+          <a:p>
+            <a:pPr algn="ctr"/>
+          </a:p>
+        </p:txBody>
+      </p:sp>
+      <p:sp>
+        <p:nvSpPr>
+          <p:cNvPr id="6" name="TextBox 5"/>
+          <p:cNvSpPr txBox="1"/>
+          <p:nvPr/>
+        </p:nvSpPr>
+        <p:spPr>
+          <a:xfrm>
+            <a:off x="502920" y="6400800"/>
+            <a:ext cx="5486400" cy="320040"/>
+          </a:xfrm>
+          <a:prstGeom prst="rect">
+            <a:avLst/>
+          </a:prstGeom>
+          <a:noFill/>
+        </p:spPr>
+        <p:txBody>
+          <a:bodyPr wrap="square" anchor="t" lIns="0" rIns="0" tIns="0" bIns="0">
+            <a:spAutoFit/>
+          </a:bodyPr>
+          <a:lstStyle/>
+          <a:p>
+            <a:r>
+              <a:rPr sz="1100" b="1" i="0">
+                <a:solidFill>
+                  <a:srgbClr val="2A2929"/>
+                </a:solidFill>
+                <a:latin typeface="Roboto"/>
+              </a:rPr>
+              <a:t>Kangan </a:t>
+            </a:r>
+            <a:r>
+              <a:rPr sz="1100" b="1" i="0">
+                <a:solidFill>
+                  <a:srgbClr val="D68E10"/>
+                </a:solidFill>
+                <a:latin typeface="Roboto"/>
+              </a:rPr>
+              <a:t>Institute</a:t>
+            </a:r>
+          </a:p>
+        </p:txBody>
+      </p:sp>
+      <p:sp>
+        <p:nvSpPr>
+          <p:cNvPr id="7" name="TextBox 6"/>
+          <p:cNvSpPr txBox="1"/>
+          <p:nvPr/>
+        </p:nvSpPr>
+        <p:spPr>
+          <a:xfrm>
+            <a:off x="10515600" y="6400800"/>
+            <a:ext cx="1188720" cy="320040"/>
+          </a:xfrm>
+          <a:prstGeom prst="rect">
+            <a:avLst/>
+          </a:prstGeom>
+          <a:noFill/>
+        </p:spPr>
+        <p:txBody>
+          <a:bodyPr wrap="square" anchor="t" lIns="0" rIns="0" tIns="0" bIns="0">
+            <a:spAutoFit/>
+          </a:bodyPr>
+          <a:lstStyle/>
+          <a:p>
+            <a:pPr algn="r"/>
+            <a:r>
+              <a:rPr sz="1100" b="0" i="0">
+                <a:solidFill>
+                  <a:srgbClr val="7A7A7A"/>
+                </a:solidFill>
+                <a:latin typeface="Roboto"/>
+              </a:rPr>
+              <a:t>13</a:t>
+            </a:r>
+          </a:p>
+        </p:txBody>
+      </p:sp>
+    </p:spTree>
+  </p:cSld>
+  <p:clrMapOvr>
+    <a:masterClrMapping/>
+  </p:clrMapOvr>
+</p:sld>
+</file>
+
+<file path=ppt/slides/slide17.xml><?xml version="1.0" encoding="utf-8"?>
+<p:sld xmlns:a="http://schemas.openxmlformats.org/drawingml/2006/main" xmlns:p="http://schemas.openxmlformats.org/presentationml/2006/main" xmlns:r="http://schemas.openxmlformats.org/officeDocument/2006/relationships">
+  <p:cSld>
+    <p:bg>
+      <p:bgPr>
+        <a:solidFill>
+          <a:srgbClr val="FFFFFF"/>
+        </a:solidFill>
+        <a:effectLst/>
+      </p:bgPr>
+    </p:bg>
+    <p:spTree>
+      <p:nvGrpSpPr>
+        <p:cNvPr id="1" name=""/>
+        <p:cNvGrpSpPr/>
+        <p:nvPr/>
+      </p:nvGrpSpPr>
+      <p:grpSpPr/>
+      <p:sp>
+        <p:nvSpPr>
+          <p:cNvPr id="2" name="Rectangle 1"/>
+          <p:cNvSpPr/>
+          <p:nvPr/>
+        </p:nvSpPr>
+        <p:spPr>
+          <a:xfrm>
+            <a:off x="0" y="0"/>
+            <a:ext cx="12191695" cy="1234440"/>
+          </a:xfrm>
+          <a:prstGeom prst="rect">
+            <a:avLst/>
+          </a:prstGeom>
+          <a:solidFill>
+            <a:srgbClr val="27B5CE"/>
+          </a:solidFill>
+          <a:ln>
+            <a:noFill/>
+          </a:ln>
+          <a:effectLst/>
+        </p:spPr>
+        <p:style>
+          <a:lnRef idx="1">
+            <a:schemeClr val="accent1"/>
+          </a:lnRef>
+          <a:fillRef idx="3">
+            <a:schemeClr val="accent1"/>
+          </a:fillRef>
+          <a:effectRef idx="2">
+            <a:schemeClr val="accent1"/>
+          </a:effectRef>
+          <a:fontRef idx="minor">
+            <a:schemeClr val="lt1"/>
+          </a:fontRef>
+        </p:style>
+        <p:txBody>
+          <a:bodyPr rtlCol="0" anchor="ctr"/>
+          <a:lstStyle/>
+          <a:p>
+            <a:pPr algn="ctr"/>
+          </a:p>
+        </p:txBody>
+      </p:sp>
+      <p:sp>
+        <p:nvSpPr>
+          <p:cNvPr id="3" name="Rounded Rectangle 2"/>
+          <p:cNvSpPr/>
+          <p:nvPr/>
+        </p:nvSpPr>
+        <p:spPr>
+          <a:xfrm>
+            <a:off x="640080" y="384048"/>
+            <a:ext cx="1691640" cy="457200"/>
+          </a:xfrm>
+          <a:prstGeom prst="roundRect">
+            <a:avLst/>
+          </a:prstGeom>
+          <a:solidFill>
+            <a:srgbClr val="2A2929"/>
+          </a:solidFill>
+          <a:ln>
+            <a:noFill/>
+          </a:ln>
+          <a:effectLst/>
+        </p:spPr>
+        <p:style>
+          <a:lnRef idx="1">
+            <a:schemeClr val="accent1"/>
+          </a:lnRef>
+          <a:fillRef idx="3">
+            <a:schemeClr val="accent1"/>
+          </a:fillRef>
+          <a:effectRef idx="2">
+            <a:schemeClr val="accent1"/>
+          </a:effectRef>
+          <a:fontRef idx="minor">
+            <a:schemeClr val="lt1"/>
+          </a:fontRef>
+        </p:style>
+        <p:txBody>
+          <a:bodyPr rtlCol="0" anchor="ctr"/>
+          <a:lstStyle/>
+          <a:p>
+            <a:pPr algn="ctr"/>
+            <a:r>
+              <a:rPr sz="1400" b="1" i="0">
+                <a:solidFill>
+                  <a:srgbClr val="FBB900"/>
+                </a:solidFill>
+                <a:latin typeface="Roboto"/>
+              </a:rPr>
+              <a:t>ACTIVITY</a:t>
+            </a:r>
+          </a:p>
+        </p:txBody>
+      </p:sp>
+      <p:sp>
+        <p:nvSpPr>
+          <p:cNvPr id="4" name="TextBox 3"/>
+          <p:cNvSpPr txBox="1"/>
+          <p:nvPr/>
+        </p:nvSpPr>
+        <p:spPr>
+          <a:xfrm>
+            <a:off x="2560320" y="310896"/>
+            <a:ext cx="8961120" cy="685800"/>
+          </a:xfrm>
+          <a:prstGeom prst="rect">
+            <a:avLst/>
+          </a:prstGeom>
+          <a:noFill/>
+        </p:spPr>
+        <p:txBody>
+          <a:bodyPr wrap="square" anchor="ctr" lIns="0" rIns="0" tIns="0" bIns="0">
+            <a:spAutoFit/>
+          </a:bodyPr>
+          <a:lstStyle/>
+          <a:p>
+            <a:r>
+              <a:rPr sz="2600" b="1" i="0">
+                <a:solidFill>
+                  <a:srgbClr val="FFFFFF"/>
+                </a:solidFill>
+                <a:latin typeface="Roboto"/>
+              </a:rPr>
+              <a:t>Build the Action Plan</a:t>
+            </a:r>
+          </a:p>
+        </p:txBody>
+      </p:sp>
+      <p:sp>
+        <p:nvSpPr>
+          <p:cNvPr id="5" name="TextBox 4"/>
+          <p:cNvSpPr txBox="1"/>
+          <p:nvPr/>
+        </p:nvSpPr>
+        <p:spPr>
+          <a:xfrm>
+            <a:off x="658368" y="1554480"/>
+            <a:ext cx="10881360" cy="4297680"/>
+          </a:xfrm>
+          <a:prstGeom prst="rect">
+            <a:avLst/>
+          </a:prstGeom>
+          <a:noFill/>
+        </p:spPr>
+        <p:txBody>
+          <a:bodyPr wrap="square" anchor="t" lIns="0" rIns="0" tIns="0" bIns="0">
+            <a:spAutoFit/>
+          </a:bodyPr>
+          <a:lstStyle/>
+          <a:p>
+            <a:pPr marL="0" indent="0">
+              <a:lnSpc>
+                <a:spcPct val="105000"/>
+              </a:lnSpc>
+              <a:spcBef>
+                <a:spcPts val="0"/>
+              </a:spcBef>
+              <a:spcAft>
+                <a:spcPts val="1000"/>
+              </a:spcAft>
+            </a:pPr>
+            <a:r>
+              <a:rPr sz="1700" b="1" i="0">
+                <a:solidFill>
+                  <a:srgbClr val="EDAB0C"/>
+                </a:solidFill>
+                <a:latin typeface="Roboto"/>
+              </a:rPr>
+              <a:t>■  </a:t>
+            </a:r>
+            <a:r>
+              <a:rPr sz="1700" b="0" i="0">
+                <a:solidFill>
+                  <a:srgbClr val="2A2929"/>
+                </a:solidFill>
+                <a:latin typeface="Roboto"/>
+              </a:rPr>
+              <a:t>In your working copy of the Business Case, add the Action Plan for the Accounting System.</a:t>
+            </a:r>
+          </a:p>
+          <a:p>
+            <a:pPr marL="0" indent="0">
+              <a:lnSpc>
+                <a:spcPct val="105000"/>
+              </a:lnSpc>
+              <a:spcBef>
+                <a:spcPts val="0"/>
+              </a:spcBef>
+              <a:spcAft>
+                <a:spcPts val="1000"/>
+              </a:spcAft>
+            </a:pPr>
+            <a:r>
+              <a:rPr sz="1700" b="1" i="0">
+                <a:solidFill>
+                  <a:srgbClr val="EDAB0C"/>
+                </a:solidFill>
+                <a:latin typeface="Roboto"/>
+              </a:rPr>
+              <a:t>■  </a:t>
+            </a:r>
+            <a:r>
+              <a:rPr sz="1700" b="0" i="0">
+                <a:solidFill>
+                  <a:srgbClr val="2A2929"/>
+                </a:solidFill>
+                <a:latin typeface="Roboto"/>
+              </a:rPr>
+              <a:t>Include all five parts:</a:t>
             </a:r>
           </a:p>
           <a:p>
@@ -8076,7 +8676,7 @@
                 </a:solidFill>
                 <a:latin typeface="Roboto"/>
               </a:rPr>
-              <a:t>standards, targets &amp; success metrics · implementation methods</a:t>
+              <a:t>prioritised changes · implementation schedule (phases)</a:t>
             </a:r>
           </a:p>
           <a:p>
@@ -8107,6 +8707,37 @@
                 </a:solidFill>
                 <a:latin typeface="Roboto"/>
               </a:rPr>
+              <a:t>standards, targets &amp; success metrics · implementation methods</a:t>
+            </a:r>
+          </a:p>
+          <a:p>
+            <a:pPr marL="365760" indent="0">
+              <a:lnSpc>
+                <a:spcPct val="105000"/>
+              </a:lnSpc>
+              <a:spcBef>
+                <a:spcPts val="0"/>
+              </a:spcBef>
+              <a:spcAft>
+                <a:spcPts val="500"/>
+              </a:spcAft>
+            </a:pPr>
+            <a:r>
+              <a:rPr sz="1400" b="0" i="0">
+                <a:solidFill>
+                  <a:srgbClr val="7A7A7A"/>
+                </a:solidFill>
+                <a:latin typeface="Roboto"/>
+              </a:rPr>
+              <a:t>–  </a:t>
+            </a:r>
+            <a:r>
+              <a:rPr sz="1400" b="0" i="0">
+                <a:solidFill>
+                  <a:srgbClr val="2A2929"/>
+                </a:solidFill>
+                <a:latin typeface="Roboto"/>
+              </a:rPr>
               <a:t>alignment with the change-management procedure</a:t>
             </a:r>
           </a:p>
@@ -8371,7 +9002,7 @@
                 </a:solidFill>
                 <a:latin typeface="Roboto"/>
               </a:rPr>
-              <a:t>13</a:t>
+              <a:t>14</a:t>
             </a:r>
           </a:p>
         </p:txBody>
@@ -8384,7 +9015,7 @@
 </p:sld>
 </file>
 
-<file path=ppt/slides/slide17.xml><?xml version="1.0" encoding="utf-8"?>
+<file path=ppt/slides/slide18.xml><?xml version="1.0" encoding="utf-8"?>
 <p:sld xmlns:a="http://schemas.openxmlformats.org/drawingml/2006/main" xmlns:p="http://schemas.openxmlformats.org/presentationml/2006/main" xmlns:r="http://schemas.openxmlformats.org/officeDocument/2006/relationships">
   <p:cSld>
     <p:bg>
@@ -9000,299 +9631,7 @@
                 </a:solidFill>
                 <a:latin typeface="Roboto"/>
               </a:rPr>
-              <a:t>14</a:t>
-            </a:r>
-          </a:p>
-        </p:txBody>
-      </p:sp>
-    </p:spTree>
-  </p:cSld>
-  <p:clrMapOvr>
-    <a:masterClrMapping/>
-  </p:clrMapOvr>
-</p:sld>
-</file>
-
-<file path=ppt/slides/slide18.xml><?xml version="1.0" encoding="utf-8"?>
-<p:sld xmlns:a="http://schemas.openxmlformats.org/drawingml/2006/main" xmlns:p="http://schemas.openxmlformats.org/presentationml/2006/main" xmlns:r="http://schemas.openxmlformats.org/officeDocument/2006/relationships">
-  <p:cSld>
-    <p:bg>
-      <p:bgPr>
-        <a:solidFill>
-          <a:srgbClr val="FFFFFF"/>
-        </a:solidFill>
-        <a:effectLst/>
-      </p:bgPr>
-    </p:bg>
-    <p:spTree>
-      <p:nvGrpSpPr>
-        <p:cNvPr id="1" name=""/>
-        <p:cNvGrpSpPr/>
-        <p:nvPr/>
-      </p:nvGrpSpPr>
-      <p:grpSpPr/>
-      <p:sp>
-        <p:nvSpPr>
-          <p:cNvPr id="2" name="Rectangle 1"/>
-          <p:cNvSpPr/>
-          <p:nvPr/>
-        </p:nvSpPr>
-        <p:spPr>
-          <a:xfrm>
-            <a:off x="0" y="0"/>
-            <a:ext cx="3931920" cy="6858000"/>
-          </a:xfrm>
-          <a:prstGeom prst="rect">
-            <a:avLst/>
-          </a:prstGeom>
-          <a:solidFill>
-            <a:srgbClr val="205F61"/>
-          </a:solidFill>
-          <a:ln>
-            <a:noFill/>
-          </a:ln>
-          <a:effectLst/>
-        </p:spPr>
-        <p:style>
-          <a:lnRef idx="1">
-            <a:schemeClr val="accent1"/>
-          </a:lnRef>
-          <a:fillRef idx="3">
-            <a:schemeClr val="accent1"/>
-          </a:fillRef>
-          <a:effectRef idx="2">
-            <a:schemeClr val="accent1"/>
-          </a:effectRef>
-          <a:fontRef idx="minor">
-            <a:schemeClr val="lt1"/>
-          </a:fontRef>
-        </p:style>
-        <p:txBody>
-          <a:bodyPr rtlCol="0" anchor="ctr"/>
-          <a:lstStyle/>
-          <a:p>
-            <a:pPr algn="ctr"/>
-          </a:p>
-        </p:txBody>
-      </p:sp>
-      <p:sp>
-        <p:nvSpPr>
-          <p:cNvPr id="3" name="TextBox 2"/>
-          <p:cNvSpPr txBox="1"/>
-          <p:nvPr/>
-        </p:nvSpPr>
-        <p:spPr>
-          <a:xfrm>
-            <a:off x="365760" y="2103120"/>
-            <a:ext cx="3291840" cy="2194560"/>
-          </a:xfrm>
-          <a:prstGeom prst="rect">
-            <a:avLst/>
-          </a:prstGeom>
-          <a:noFill/>
-        </p:spPr>
-        <p:txBody>
-          <a:bodyPr wrap="square" anchor="t" lIns="0" rIns="0" tIns="0" bIns="0">
-            <a:spAutoFit/>
-          </a:bodyPr>
-          <a:lstStyle/>
-          <a:p>
-            <a:r>
-              <a:rPr sz="13000" b="1" i="0">
-                <a:solidFill>
-                  <a:srgbClr val="FFFFFF"/>
-                </a:solidFill>
-                <a:latin typeface="Roboto"/>
-              </a:rPr>
-              <a:t>03</a:t>
-            </a:r>
-          </a:p>
-        </p:txBody>
-      </p:sp>
-      <p:sp>
-        <p:nvSpPr>
-          <p:cNvPr id="4" name="TextBox 3"/>
-          <p:cNvSpPr txBox="1"/>
-          <p:nvPr/>
-        </p:nvSpPr>
-        <p:spPr>
-          <a:xfrm>
-            <a:off x="4480560" y="2468880"/>
-            <a:ext cx="7132320" cy="2194560"/>
-          </a:xfrm>
-          <a:prstGeom prst="rect">
-            <a:avLst/>
-          </a:prstGeom>
-          <a:noFill/>
-        </p:spPr>
-        <p:txBody>
-          <a:bodyPr wrap="square" anchor="t" lIns="0" rIns="0" tIns="0" bIns="0">
-            <a:spAutoFit/>
-          </a:bodyPr>
-          <a:lstStyle/>
-          <a:p>
-            <a:r>
-              <a:rPr sz="1600" b="1" i="0">
-                <a:solidFill>
-                  <a:srgbClr val="205F61"/>
-                </a:solidFill>
-                <a:latin typeface="Roboto"/>
-              </a:rPr>
-              <a:t>SECTION</a:t>
-            </a:r>
-          </a:p>
-          <a:p>
-            <a:pPr>
-              <a:spcBef>
-                <a:spcPts val="600"/>
-              </a:spcBef>
-            </a:pPr>
-            <a:r>
-              <a:rPr sz="3800" b="1" i="0">
-                <a:solidFill>
-                  <a:srgbClr val="2A2929"/>
-                </a:solidFill>
-                <a:latin typeface="Roboto"/>
-              </a:rPr>
-              <a:t>The decision requested</a:t>
-            </a:r>
-          </a:p>
-          <a:p>
-            <a:pPr>
-              <a:spcBef>
-                <a:spcPts val="1000"/>
-              </a:spcBef>
-            </a:pPr>
-            <a:r>
-              <a:rPr sz="2000" b="0" i="1">
-                <a:solidFill>
-                  <a:srgbClr val="484848"/>
-                </a:solidFill>
-                <a:latin typeface="Roboto Light"/>
-              </a:rPr>
-              <a:t>make the “yes” easy</a:t>
-            </a:r>
-          </a:p>
-        </p:txBody>
-      </p:sp>
-      <p:sp>
-        <p:nvSpPr>
-          <p:cNvPr id="5" name="Rectangle 4"/>
-          <p:cNvSpPr/>
-          <p:nvPr/>
-        </p:nvSpPr>
-        <p:spPr>
-          <a:xfrm>
-            <a:off x="0" y="6565392"/>
-            <a:ext cx="12191695" cy="38100"/>
-          </a:xfrm>
-          <a:prstGeom prst="rect">
-            <a:avLst/>
-          </a:prstGeom>
-          <a:solidFill>
-            <a:srgbClr val="205F61"/>
-          </a:solidFill>
-          <a:ln>
-            <a:noFill/>
-          </a:ln>
-          <a:effectLst/>
-        </p:spPr>
-        <p:style>
-          <a:lnRef idx="1">
-            <a:schemeClr val="accent1"/>
-          </a:lnRef>
-          <a:fillRef idx="3">
-            <a:schemeClr val="accent1"/>
-          </a:fillRef>
-          <a:effectRef idx="2">
-            <a:schemeClr val="accent1"/>
-          </a:effectRef>
-          <a:fontRef idx="minor">
-            <a:schemeClr val="lt1"/>
-          </a:fontRef>
-        </p:style>
-        <p:txBody>
-          <a:bodyPr rtlCol="0" anchor="ctr"/>
-          <a:lstStyle/>
-          <a:p>
-            <a:pPr algn="ctr"/>
-          </a:p>
-        </p:txBody>
-      </p:sp>
-      <p:sp>
-        <p:nvSpPr>
-          <p:cNvPr id="6" name="TextBox 5"/>
-          <p:cNvSpPr txBox="1"/>
-          <p:nvPr/>
-        </p:nvSpPr>
-        <p:spPr>
-          <a:xfrm>
-            <a:off x="502920" y="6400800"/>
-            <a:ext cx="5486400" cy="320040"/>
-          </a:xfrm>
-          <a:prstGeom prst="rect">
-            <a:avLst/>
-          </a:prstGeom>
-          <a:noFill/>
-        </p:spPr>
-        <p:txBody>
-          <a:bodyPr wrap="square" anchor="t" lIns="0" rIns="0" tIns="0" bIns="0">
-            <a:spAutoFit/>
-          </a:bodyPr>
-          <a:lstStyle/>
-          <a:p>
-            <a:r>
-              <a:rPr sz="1100" b="1" i="0">
-                <a:solidFill>
-                  <a:srgbClr val="2A2929"/>
-                </a:solidFill>
-                <a:latin typeface="Roboto"/>
-              </a:rPr>
-              <a:t>Kangan </a:t>
-            </a:r>
-            <a:r>
-              <a:rPr sz="1100" b="1" i="0">
-                <a:solidFill>
-                  <a:srgbClr val="D68E10"/>
-                </a:solidFill>
-                <a:latin typeface="Roboto"/>
-              </a:rPr>
-              <a:t>Institute</a:t>
-            </a:r>
-          </a:p>
-        </p:txBody>
-      </p:sp>
-      <p:sp>
-        <p:nvSpPr>
-          <p:cNvPr id="7" name="TextBox 6"/>
-          <p:cNvSpPr txBox="1"/>
-          <p:nvPr/>
-        </p:nvSpPr>
-        <p:spPr>
-          <a:xfrm>
-            <a:off x="10515600" y="6400800"/>
-            <a:ext cx="1188720" cy="320040"/>
-          </a:xfrm>
-          <a:prstGeom prst="rect">
-            <a:avLst/>
-          </a:prstGeom>
-          <a:noFill/>
-        </p:spPr>
-        <p:txBody>
-          <a:bodyPr wrap="square" anchor="t" lIns="0" rIns="0" tIns="0" bIns="0">
-            <a:spAutoFit/>
-          </a:bodyPr>
-          <a:lstStyle/>
-          <a:p>
-            <a:pPr algn="r"/>
-            <a:r>
-              <a:rPr sz="1100" b="0" i="0">
-                <a:solidFill>
-                  <a:srgbClr val="7A7A7A"/>
-                </a:solidFill>
-                <a:latin typeface="Roboto"/>
-              </a:rPr>
-              <a:t/>
+              <a:t>15</a:t>
             </a:r>
           </a:p>
         </p:txBody>
@@ -9325,48 +9664,14 @@
       <p:grpSpPr/>
       <p:sp>
         <p:nvSpPr>
-          <p:cNvPr id="2" name="TextBox 1"/>
-          <p:cNvSpPr txBox="1"/>
-          <p:nvPr/>
-        </p:nvSpPr>
-        <p:spPr>
-          <a:xfrm>
-            <a:off x="640080" y="457200"/>
-            <a:ext cx="10881360" cy="960120"/>
-          </a:xfrm>
-          <a:prstGeom prst="rect">
-            <a:avLst/>
-          </a:prstGeom>
-          <a:noFill/>
-        </p:spPr>
-        <p:txBody>
-          <a:bodyPr wrap="square" anchor="t" lIns="0" rIns="0" tIns="0" bIns="0">
-            <a:spAutoFit/>
-          </a:bodyPr>
-          <a:lstStyle/>
-          <a:p>
-            <a:r>
-              <a:rPr sz="2800" b="1" i="0">
-                <a:solidFill>
-                  <a:srgbClr val="2A2929"/>
-                </a:solidFill>
-                <a:latin typeface="Roboto"/>
-              </a:rPr>
-              <a:t>Close with a clear ask</a:t>
-            </a:r>
-          </a:p>
-        </p:txBody>
-      </p:sp>
-      <p:sp>
-        <p:nvSpPr>
-          <p:cNvPr id="3" name="Rectangle 2"/>
+          <p:cNvPr id="2" name="Rectangle 1"/>
           <p:cNvSpPr/>
           <p:nvPr/>
         </p:nvSpPr>
         <p:spPr>
           <a:xfrm>
-            <a:off x="658368" y="1371600"/>
-            <a:ext cx="1463040" cy="50800"/>
+            <a:off x="0" y="0"/>
+            <a:ext cx="3931920" cy="6858000"/>
           </a:xfrm>
           <a:prstGeom prst="rect">
             <a:avLst/>
@@ -9403,14 +9708,48 @@
       </p:sp>
       <p:sp>
         <p:nvSpPr>
+          <p:cNvPr id="3" name="TextBox 2"/>
+          <p:cNvSpPr txBox="1"/>
+          <p:nvPr/>
+        </p:nvSpPr>
+        <p:spPr>
+          <a:xfrm>
+            <a:off x="365760" y="2103120"/>
+            <a:ext cx="3291840" cy="2194560"/>
+          </a:xfrm>
+          <a:prstGeom prst="rect">
+            <a:avLst/>
+          </a:prstGeom>
+          <a:noFill/>
+        </p:spPr>
+        <p:txBody>
+          <a:bodyPr wrap="square" anchor="t" lIns="0" rIns="0" tIns="0" bIns="0">
+            <a:spAutoFit/>
+          </a:bodyPr>
+          <a:lstStyle/>
+          <a:p>
+            <a:r>
+              <a:rPr sz="13000" b="1" i="0">
+                <a:solidFill>
+                  <a:srgbClr val="FFFFFF"/>
+                </a:solidFill>
+                <a:latin typeface="Roboto"/>
+              </a:rPr>
+              <a:t>03</a:t>
+            </a:r>
+          </a:p>
+        </p:txBody>
+      </p:sp>
+      <p:sp>
+        <p:nvSpPr>
           <p:cNvPr id="4" name="TextBox 3"/>
           <p:cNvSpPr txBox="1"/>
           <p:nvPr/>
         </p:nvSpPr>
         <p:spPr>
           <a:xfrm>
-            <a:off x="658368" y="1691640"/>
-            <a:ext cx="10881360" cy="4480560"/>
+            <a:off x="4480560" y="2468880"/>
+            <a:ext cx="7132320" cy="2194560"/>
           </a:xfrm>
           <a:prstGeom prst="rect">
             <a:avLst/>
@@ -9418,70 +9757,51 @@
           <a:noFill/>
         </p:spPr>
         <p:txBody>
-          <a:bodyPr wrap="square" anchor="ctr" lIns="0" rIns="0" tIns="0" bIns="0">
+          <a:bodyPr wrap="square" anchor="t" lIns="0" rIns="0" tIns="0" bIns="0">
             <a:spAutoFit/>
           </a:bodyPr>
           <a:lstStyle/>
           <a:p>
-            <a:pPr marL="0" indent="0">
-              <a:lnSpc>
-                <a:spcPct val="105000"/>
-              </a:lnSpc>
+            <a:r>
+              <a:rPr sz="1600" b="1" i="0">
+                <a:solidFill>
+                  <a:srgbClr val="205F61"/>
+                </a:solidFill>
+                <a:latin typeface="Roboto"/>
+              </a:rPr>
+              <a:t>SECTION</a:t>
+            </a:r>
+          </a:p>
+          <a:p>
+            <a:pPr>
               <a:spcBef>
-                <a:spcPts val="0"/>
+                <a:spcPts val="600"/>
               </a:spcBef>
-              <a:spcAft>
+            </a:pPr>
+            <a:r>
+              <a:rPr sz="3800" b="1" i="0">
+                <a:solidFill>
+                  <a:srgbClr val="2A2929"/>
+                </a:solidFill>
+                <a:latin typeface="Roboto"/>
+              </a:rPr>
+              <a:t>The decision requested</a:t>
+            </a:r>
+          </a:p>
+          <a:p>
+            <a:pPr>
+              <a:spcBef>
                 <a:spcPts val="1000"/>
-              </a:spcAft>
+              </a:spcBef>
             </a:pPr>
             <a:r>
-              <a:rPr sz="2400" b="1" i="0">
-                <a:solidFill>
-                  <a:srgbClr val="EDAB0C"/>
-                </a:solidFill>
-                <a:latin typeface="Roboto"/>
-              </a:rPr>
-              <a:t>■  </a:t>
-            </a:r>
-            <a:r>
-              <a:rPr sz="2400" b="0" i="0">
-                <a:solidFill>
-                  <a:srgbClr val="2A2929"/>
-                </a:solidFill>
-                <a:latin typeface="Roboto"/>
-              </a:rPr>
-              <a:t>A business case that doesn't ask for anything gets “noted”, not approved.</a:t>
-            </a:r>
-          </a:p>
-          <a:p>
-            <a:pPr marL="0" indent="0">
-              <a:lnSpc>
-                <a:spcPct val="105000"/>
-              </a:lnSpc>
-              <a:spcBef>
-                <a:spcPts val="0"/>
-              </a:spcBef>
-              <a:spcAft>
-                <a:spcPts val="1000"/>
-              </a:spcAft>
-            </a:pPr>
-            <a:r>
-              <a:rPr sz="2400" b="1" i="0">
-                <a:solidFill>
-                  <a:srgbClr val="EDAB0C"/>
-                </a:solidFill>
-                <a:latin typeface="Roboto"/>
-              </a:rPr>
-              <a:t>■  </a:t>
-            </a:r>
-            <a:r>
-              <a:rPr sz="2400" b="0" i="0">
-                <a:solidFill>
-                  <a:srgbClr val="2A2929"/>
-                </a:solidFill>
-                <a:latin typeface="Roboto"/>
-              </a:rPr>
-              <a:t>The final section makes the decision easy: state exactly what you want approved, today.</a:t>
+              <a:rPr sz="2000" b="0" i="1">
+                <a:solidFill>
+                  <a:srgbClr val="484848"/>
+                </a:solidFill>
+                <a:latin typeface="Roboto Light"/>
+              </a:rPr>
+              <a:t>make the “yes” easy</a:t>
             </a:r>
           </a:p>
         </p:txBody>
@@ -9603,7 +9923,7 @@
                 </a:solidFill>
                 <a:latin typeface="Roboto"/>
               </a:rPr>
-              <a:t>15</a:t>
+              <a:t/>
             </a:r>
           </a:p>
         </p:txBody>
@@ -10052,23 +10372,7 @@
                 </a:solidFill>
                 <a:latin typeface="Roboto"/>
               </a:rPr>
-              <a:t>What to ask for</a:t>
-            </a:r>
-          </a:p>
-          <a:p>
-            <a:pPr>
-              <a:spcBef>
-                <a:spcPts val="200"/>
-              </a:spcBef>
-            </a:pPr>
-            <a:r>
-              <a:rPr sz="1800" b="0" i="1">
-                <a:solidFill>
-                  <a:srgbClr val="D68E10"/>
-                </a:solidFill>
-                <a:latin typeface="Roboto Light"/>
-              </a:rPr>
-              <a:t>be specific</a:t>
+              <a:t>Close with a clear ask</a:t>
             </a:r>
           </a:p>
         </p:txBody>
@@ -10166,7 +10470,7 @@
                 </a:solidFill>
                 <a:latin typeface="Roboto"/>
               </a:rPr>
-              <a:t>Approve the recommended option.</a:t>
+              <a:t>A business case that doesn't ask for anything gets “noted”, not approved.</a:t>
             </a:r>
           </a:p>
           <a:p>
@@ -10197,100 +10501,7 @@
                 </a:solidFill>
                 <a:latin typeface="Roboto"/>
               </a:rPr>
-              <a:t>Approve the action plan as the roadmap.</a:t>
-            </a:r>
-          </a:p>
-          <a:p>
-            <a:pPr marL="0" indent="0">
-              <a:lnSpc>
-                <a:spcPct val="105000"/>
-              </a:lnSpc>
-              <a:spcBef>
-                <a:spcPts val="0"/>
-              </a:spcBef>
-              <a:spcAft>
-                <a:spcPts val="1000"/>
-              </a:spcAft>
-            </a:pPr>
-            <a:r>
-              <a:rPr sz="2400" b="1" i="0">
-                <a:solidFill>
-                  <a:srgbClr val="EDAB0C"/>
-                </a:solidFill>
-                <a:latin typeface="Roboto"/>
-              </a:rPr>
-              <a:t>■  </a:t>
-            </a:r>
-            <a:r>
-              <a:rPr sz="2400" b="0" i="0">
-                <a:solidFill>
-                  <a:srgbClr val="2A2929"/>
-                </a:solidFill>
-                <a:latin typeface="Roboto"/>
-              </a:rPr>
-              <a:t>Authorise the budget envelope (the figure from your CBA).</a:t>
-            </a:r>
-          </a:p>
-          <a:p>
-            <a:pPr marL="0" indent="0">
-              <a:lnSpc>
-                <a:spcPct val="105000"/>
-              </a:lnSpc>
-              <a:spcBef>
-                <a:spcPts val="0"/>
-              </a:spcBef>
-              <a:spcAft>
-                <a:spcPts val="1000"/>
-              </a:spcAft>
-            </a:pPr>
-            <a:r>
-              <a:rPr sz="2400" b="1" i="0">
-                <a:solidFill>
-                  <a:srgbClr val="EDAB0C"/>
-                </a:solidFill>
-                <a:latin typeface="Roboto"/>
-              </a:rPr>
-              <a:t>■  </a:t>
-            </a:r>
-            <a:r>
-              <a:rPr sz="2400" b="0" i="0">
-                <a:solidFill>
-                  <a:srgbClr val="2A2929"/>
-                </a:solidFill>
-                <a:latin typeface="Roboto"/>
-              </a:rPr>
-              <a:t>List the next steps; defer the high-risk gates to their change-management approval.</a:t>
-            </a:r>
-          </a:p>
-          <a:p>
-            <a:pPr marL="0" indent="0">
-              <a:lnSpc>
-                <a:spcPct val="105000"/>
-              </a:lnSpc>
-              <a:spcBef>
-                <a:spcPts val="0"/>
-              </a:spcBef>
-              <a:spcAft>
-                <a:spcPts val="1000"/>
-              </a:spcAft>
-            </a:pPr>
-            <a:r>
-              <a:rPr sz="2400" b="1" i="0">
-                <a:solidFill>
-                  <a:srgbClr val="EDAB0C"/>
-                </a:solidFill>
-                <a:latin typeface="Roboto"/>
-              </a:rPr>
-              <a:t>■  </a:t>
-            </a:r>
-            <a:r>
-              <a:rPr sz="2400" b="0" i="0">
-                <a:solidFill>
-                  <a:srgbClr val="2A2929"/>
-                </a:solidFill>
-                <a:latin typeface="Roboto"/>
-              </a:rPr>
-              <a:t>The ask should be answerable with a single “approved”.</a:t>
+              <a:t>The final section makes the decision easy: state exactly what you want approved, today.</a:t>
             </a:r>
           </a:p>
         </p:txBody>
@@ -10445,14 +10656,64 @@
       <p:grpSpPr/>
       <p:sp>
         <p:nvSpPr>
-          <p:cNvPr id="2" name="Rectangle 1"/>
+          <p:cNvPr id="2" name="TextBox 1"/>
+          <p:cNvSpPr txBox="1"/>
+          <p:nvPr/>
+        </p:nvSpPr>
+        <p:spPr>
+          <a:xfrm>
+            <a:off x="640080" y="457200"/>
+            <a:ext cx="10881360" cy="960120"/>
+          </a:xfrm>
+          <a:prstGeom prst="rect">
+            <a:avLst/>
+          </a:prstGeom>
+          <a:noFill/>
+        </p:spPr>
+        <p:txBody>
+          <a:bodyPr wrap="square" anchor="t" lIns="0" rIns="0" tIns="0" bIns="0">
+            <a:spAutoFit/>
+          </a:bodyPr>
+          <a:lstStyle/>
+          <a:p>
+            <a:r>
+              <a:rPr sz="2800" b="1" i="0">
+                <a:solidFill>
+                  <a:srgbClr val="2A2929"/>
+                </a:solidFill>
+                <a:latin typeface="Roboto"/>
+              </a:rPr>
+              <a:t>What to ask for</a:t>
+            </a:r>
+          </a:p>
+          <a:p>
+            <a:pPr>
+              <a:spcBef>
+                <a:spcPts val="200"/>
+              </a:spcBef>
+            </a:pPr>
+            <a:r>
+              <a:rPr sz="1800" b="0" i="1">
+                <a:solidFill>
+                  <a:srgbClr val="D68E10"/>
+                </a:solidFill>
+                <a:latin typeface="Roboto Light"/>
+              </a:rPr>
+              <a:t>be specific</a:t>
+            </a:r>
+          </a:p>
+        </p:txBody>
+      </p:sp>
+      <p:sp>
+        <p:nvSpPr>
+          <p:cNvPr id="3" name="Rectangle 2"/>
           <p:cNvSpPr/>
           <p:nvPr/>
         </p:nvSpPr>
         <p:spPr>
           <a:xfrm>
-            <a:off x="0" y="0"/>
-            <a:ext cx="12191695" cy="1234440"/>
+            <a:off x="658368" y="1371600"/>
+            <a:ext cx="1463040" cy="50800"/>
           </a:xfrm>
           <a:prstGeom prst="rect">
             <a:avLst/>
@@ -10489,67 +10750,14 @@
       </p:sp>
       <p:sp>
         <p:nvSpPr>
-          <p:cNvPr id="3" name="Rounded Rectangle 2"/>
-          <p:cNvSpPr/>
-          <p:nvPr/>
-        </p:nvSpPr>
-        <p:spPr>
-          <a:xfrm>
-            <a:off x="640080" y="384048"/>
-            <a:ext cx="1691640" cy="457200"/>
-          </a:xfrm>
-          <a:prstGeom prst="roundRect">
-            <a:avLst/>
-          </a:prstGeom>
-          <a:solidFill>
-            <a:srgbClr val="2A2929"/>
-          </a:solidFill>
-          <a:ln>
-            <a:noFill/>
-          </a:ln>
-          <a:effectLst/>
-        </p:spPr>
-        <p:style>
-          <a:lnRef idx="1">
-            <a:schemeClr val="accent1"/>
-          </a:lnRef>
-          <a:fillRef idx="3">
-            <a:schemeClr val="accent1"/>
-          </a:fillRef>
-          <a:effectRef idx="2">
-            <a:schemeClr val="accent1"/>
-          </a:effectRef>
-          <a:fontRef idx="minor">
-            <a:schemeClr val="lt1"/>
-          </a:fontRef>
-        </p:style>
-        <p:txBody>
-          <a:bodyPr rtlCol="0" anchor="ctr"/>
-          <a:lstStyle/>
-          <a:p>
-            <a:pPr algn="ctr"/>
-            <a:r>
-              <a:rPr sz="1400" b="1" i="0">
-                <a:solidFill>
-                  <a:srgbClr val="FBB900"/>
-                </a:solidFill>
-                <a:latin typeface="Roboto"/>
-              </a:rPr>
-              <a:t>ACTIVITY</a:t>
-            </a:r>
-          </a:p>
-        </p:txBody>
-      </p:sp>
-      <p:sp>
-        <p:nvSpPr>
           <p:cNvPr id="4" name="TextBox 3"/>
           <p:cNvSpPr txBox="1"/>
           <p:nvPr/>
         </p:nvSpPr>
         <p:spPr>
           <a:xfrm>
-            <a:off x="2560320" y="310896"/>
-            <a:ext cx="8961120" cy="685800"/>
+            <a:off x="658368" y="1691640"/>
+            <a:ext cx="10881360" cy="4480560"/>
           </a:xfrm>
           <a:prstGeom prst="rect">
             <a:avLst/>
@@ -10558,40 +10766,6 @@
         </p:spPr>
         <p:txBody>
           <a:bodyPr wrap="square" anchor="ctr" lIns="0" rIns="0" tIns="0" bIns="0">
-            <a:spAutoFit/>
-          </a:bodyPr>
-          <a:lstStyle/>
-          <a:p>
-            <a:r>
-              <a:rPr sz="2600" b="1" i="0">
-                <a:solidFill>
-                  <a:srgbClr val="FFFFFF"/>
-                </a:solidFill>
-                <a:latin typeface="Roboto"/>
-              </a:rPr>
-              <a:t>Write Next Steps &amp; the Decision Requested</a:t>
-            </a:r>
-          </a:p>
-        </p:txBody>
-      </p:sp>
-      <p:sp>
-        <p:nvSpPr>
-          <p:cNvPr id="5" name="TextBox 4"/>
-          <p:cNvSpPr txBox="1"/>
-          <p:nvPr/>
-        </p:nvSpPr>
-        <p:spPr>
-          <a:xfrm>
-            <a:off x="658368" y="1554480"/>
-            <a:ext cx="10881360" cy="4297680"/>
-          </a:xfrm>
-          <a:prstGeom prst="rect">
-            <a:avLst/>
-          </a:prstGeom>
-          <a:noFill/>
-        </p:spPr>
-        <p:txBody>
-          <a:bodyPr wrap="square" anchor="t" lIns="0" rIns="0" tIns="0" bIns="0">
             <a:spAutoFit/>
           </a:bodyPr>
           <a:lstStyle/>
@@ -10608,7 +10782,7 @@
               </a:spcAft>
             </a:pPr>
             <a:r>
-              <a:rPr sz="1700" b="1" i="0">
+              <a:rPr sz="2400" b="1" i="0">
                 <a:solidFill>
                   <a:srgbClr val="EDAB0C"/>
                 </a:solidFill>
@@ -10617,13 +10791,13 @@
               <a:t>■  </a:t>
             </a:r>
             <a:r>
-              <a:rPr sz="1700" b="0" i="0">
+              <a:rPr sz="2400" b="0" i="0">
                 <a:solidFill>
                   <a:srgbClr val="2A2929"/>
                 </a:solidFill>
                 <a:latin typeface="Roboto"/>
               </a:rPr>
-              <a:t>In your working copy of the Business Case, add the Next Steps and Decision Requested section for the Accounting System — completing the written business case.</a:t>
+              <a:t>Approve the recommended option.</a:t>
             </a:r>
           </a:p>
           <a:p>
@@ -10639,6 +10813,883 @@
               </a:spcAft>
             </a:pPr>
             <a:r>
+              <a:rPr sz="2400" b="1" i="0">
+                <a:solidFill>
+                  <a:srgbClr val="EDAB0C"/>
+                </a:solidFill>
+                <a:latin typeface="Roboto"/>
+              </a:rPr>
+              <a:t>■  </a:t>
+            </a:r>
+            <a:r>
+              <a:rPr sz="2400" b="0" i="0">
+                <a:solidFill>
+                  <a:srgbClr val="2A2929"/>
+                </a:solidFill>
+                <a:latin typeface="Roboto"/>
+              </a:rPr>
+              <a:t>Approve the action plan as the roadmap.</a:t>
+            </a:r>
+          </a:p>
+          <a:p>
+            <a:pPr marL="0" indent="0">
+              <a:lnSpc>
+                <a:spcPct val="105000"/>
+              </a:lnSpc>
+              <a:spcBef>
+                <a:spcPts val="0"/>
+              </a:spcBef>
+              <a:spcAft>
+                <a:spcPts val="1000"/>
+              </a:spcAft>
+            </a:pPr>
+            <a:r>
+              <a:rPr sz="2400" b="1" i="0">
+                <a:solidFill>
+                  <a:srgbClr val="EDAB0C"/>
+                </a:solidFill>
+                <a:latin typeface="Roboto"/>
+              </a:rPr>
+              <a:t>■  </a:t>
+            </a:r>
+            <a:r>
+              <a:rPr sz="2400" b="0" i="0">
+                <a:solidFill>
+                  <a:srgbClr val="2A2929"/>
+                </a:solidFill>
+                <a:latin typeface="Roboto"/>
+              </a:rPr>
+              <a:t>Authorise the budget envelope (the figure from your CBA).</a:t>
+            </a:r>
+          </a:p>
+          <a:p>
+            <a:pPr marL="0" indent="0">
+              <a:lnSpc>
+                <a:spcPct val="105000"/>
+              </a:lnSpc>
+              <a:spcBef>
+                <a:spcPts val="0"/>
+              </a:spcBef>
+              <a:spcAft>
+                <a:spcPts val="1000"/>
+              </a:spcAft>
+            </a:pPr>
+            <a:r>
+              <a:rPr sz="2400" b="1" i="0">
+                <a:solidFill>
+                  <a:srgbClr val="EDAB0C"/>
+                </a:solidFill>
+                <a:latin typeface="Roboto"/>
+              </a:rPr>
+              <a:t>■  </a:t>
+            </a:r>
+            <a:r>
+              <a:rPr sz="2400" b="0" i="0">
+                <a:solidFill>
+                  <a:srgbClr val="2A2929"/>
+                </a:solidFill>
+                <a:latin typeface="Roboto"/>
+              </a:rPr>
+              <a:t>List the next steps; defer the high-risk gates to their change-management approval.</a:t>
+            </a:r>
+          </a:p>
+          <a:p>
+            <a:pPr marL="0" indent="0">
+              <a:lnSpc>
+                <a:spcPct val="105000"/>
+              </a:lnSpc>
+              <a:spcBef>
+                <a:spcPts val="0"/>
+              </a:spcBef>
+              <a:spcAft>
+                <a:spcPts val="1000"/>
+              </a:spcAft>
+            </a:pPr>
+            <a:r>
+              <a:rPr sz="2400" b="1" i="0">
+                <a:solidFill>
+                  <a:srgbClr val="EDAB0C"/>
+                </a:solidFill>
+                <a:latin typeface="Roboto"/>
+              </a:rPr>
+              <a:t>■  </a:t>
+            </a:r>
+            <a:r>
+              <a:rPr sz="2400" b="0" i="0">
+                <a:solidFill>
+                  <a:srgbClr val="2A2929"/>
+                </a:solidFill>
+                <a:latin typeface="Roboto"/>
+              </a:rPr>
+              <a:t>The ask should be answerable with a single “approved”.</a:t>
+            </a:r>
+          </a:p>
+        </p:txBody>
+      </p:sp>
+      <p:sp>
+        <p:nvSpPr>
+          <p:cNvPr id="5" name="Rectangle 4"/>
+          <p:cNvSpPr/>
+          <p:nvPr/>
+        </p:nvSpPr>
+        <p:spPr>
+          <a:xfrm>
+            <a:off x="0" y="6565392"/>
+            <a:ext cx="12191695" cy="38100"/>
+          </a:xfrm>
+          <a:prstGeom prst="rect">
+            <a:avLst/>
+          </a:prstGeom>
+          <a:solidFill>
+            <a:srgbClr val="205F61"/>
+          </a:solidFill>
+          <a:ln>
+            <a:noFill/>
+          </a:ln>
+          <a:effectLst/>
+        </p:spPr>
+        <p:style>
+          <a:lnRef idx="1">
+            <a:schemeClr val="accent1"/>
+          </a:lnRef>
+          <a:fillRef idx="3">
+            <a:schemeClr val="accent1"/>
+          </a:fillRef>
+          <a:effectRef idx="2">
+            <a:schemeClr val="accent1"/>
+          </a:effectRef>
+          <a:fontRef idx="minor">
+            <a:schemeClr val="lt1"/>
+          </a:fontRef>
+        </p:style>
+        <p:txBody>
+          <a:bodyPr rtlCol="0" anchor="ctr"/>
+          <a:lstStyle/>
+          <a:p>
+            <a:pPr algn="ctr"/>
+          </a:p>
+        </p:txBody>
+      </p:sp>
+      <p:sp>
+        <p:nvSpPr>
+          <p:cNvPr id="6" name="TextBox 5"/>
+          <p:cNvSpPr txBox="1"/>
+          <p:nvPr/>
+        </p:nvSpPr>
+        <p:spPr>
+          <a:xfrm>
+            <a:off x="502920" y="6400800"/>
+            <a:ext cx="5486400" cy="320040"/>
+          </a:xfrm>
+          <a:prstGeom prst="rect">
+            <a:avLst/>
+          </a:prstGeom>
+          <a:noFill/>
+        </p:spPr>
+        <p:txBody>
+          <a:bodyPr wrap="square" anchor="t" lIns="0" rIns="0" tIns="0" bIns="0">
+            <a:spAutoFit/>
+          </a:bodyPr>
+          <a:lstStyle/>
+          <a:p>
+            <a:r>
+              <a:rPr sz="1100" b="1" i="0">
+                <a:solidFill>
+                  <a:srgbClr val="2A2929"/>
+                </a:solidFill>
+                <a:latin typeface="Roboto"/>
+              </a:rPr>
+              <a:t>Kangan </a:t>
+            </a:r>
+            <a:r>
+              <a:rPr sz="1100" b="1" i="0">
+                <a:solidFill>
+                  <a:srgbClr val="D68E10"/>
+                </a:solidFill>
+                <a:latin typeface="Roboto"/>
+              </a:rPr>
+              <a:t>Institute</a:t>
+            </a:r>
+          </a:p>
+        </p:txBody>
+      </p:sp>
+      <p:sp>
+        <p:nvSpPr>
+          <p:cNvPr id="7" name="TextBox 6"/>
+          <p:cNvSpPr txBox="1"/>
+          <p:nvPr/>
+        </p:nvSpPr>
+        <p:spPr>
+          <a:xfrm>
+            <a:off x="10515600" y="6400800"/>
+            <a:ext cx="1188720" cy="320040"/>
+          </a:xfrm>
+          <a:prstGeom prst="rect">
+            <a:avLst/>
+          </a:prstGeom>
+          <a:noFill/>
+        </p:spPr>
+        <p:txBody>
+          <a:bodyPr wrap="square" anchor="t" lIns="0" rIns="0" tIns="0" bIns="0">
+            <a:spAutoFit/>
+          </a:bodyPr>
+          <a:lstStyle/>
+          <a:p>
+            <a:pPr algn="r"/>
+            <a:r>
+              <a:rPr sz="1100" b="0" i="0">
+                <a:solidFill>
+                  <a:srgbClr val="7A7A7A"/>
+                </a:solidFill>
+                <a:latin typeface="Roboto"/>
+              </a:rPr>
+              <a:t>17</a:t>
+            </a:r>
+          </a:p>
+        </p:txBody>
+      </p:sp>
+    </p:spTree>
+  </p:cSld>
+  <p:clrMapOvr>
+    <a:masterClrMapping/>
+  </p:clrMapOvr>
+</p:sld>
+</file>
+
+<file path=ppt/slides/slide22.xml><?xml version="1.0" encoding="utf-8"?>
+<p:sld xmlns:a="http://schemas.openxmlformats.org/drawingml/2006/main" xmlns:p="http://schemas.openxmlformats.org/presentationml/2006/main" xmlns:r="http://schemas.openxmlformats.org/officeDocument/2006/relationships">
+  <p:cSld>
+    <p:bg>
+      <p:bgPr>
+        <a:solidFill>
+          <a:srgbClr val="FFFFFF"/>
+        </a:solidFill>
+        <a:effectLst/>
+      </p:bgPr>
+    </p:bg>
+    <p:spTree>
+      <p:nvGrpSpPr>
+        <p:cNvPr id="1" name=""/>
+        <p:cNvGrpSpPr/>
+        <p:nvPr/>
+      </p:nvGrpSpPr>
+      <p:grpSpPr/>
+      <p:sp>
+        <p:nvSpPr>
+          <p:cNvPr id="2" name="TextBox 1"/>
+          <p:cNvSpPr txBox="1"/>
+          <p:nvPr/>
+        </p:nvSpPr>
+        <p:spPr>
+          <a:xfrm>
+            <a:off x="640080" y="457200"/>
+            <a:ext cx="10881360" cy="960120"/>
+          </a:xfrm>
+          <a:prstGeom prst="rect">
+            <a:avLst/>
+          </a:prstGeom>
+          <a:noFill/>
+        </p:spPr>
+        <p:txBody>
+          <a:bodyPr wrap="square" anchor="t" lIns="0" rIns="0" tIns="0" bIns="0">
+            <a:spAutoFit/>
+          </a:bodyPr>
+          <a:lstStyle/>
+          <a:p>
+            <a:r>
+              <a:rPr sz="2800" b="1" i="0">
+                <a:solidFill>
+                  <a:srgbClr val="2A2929"/>
+                </a:solidFill>
+                <a:latin typeface="Roboto"/>
+              </a:rPr>
+              <a:t>Getting the sign-off, and recording it</a:t>
+            </a:r>
+          </a:p>
+          <a:p>
+            <a:pPr>
+              <a:spcBef>
+                <a:spcPts val="200"/>
+              </a:spcBef>
+            </a:pPr>
+            <a:r>
+              <a:rPr sz="1800" b="0" i="1">
+                <a:solidFill>
+                  <a:srgbClr val="D68E10"/>
+                </a:solidFill>
+                <a:latin typeface="Roboto Light"/>
+              </a:rPr>
+              <a:t>who, what, when, and any condition</a:t>
+            </a:r>
+          </a:p>
+        </p:txBody>
+      </p:sp>
+      <p:sp>
+        <p:nvSpPr>
+          <p:cNvPr id="3" name="Rectangle 2"/>
+          <p:cNvSpPr/>
+          <p:nvPr/>
+        </p:nvSpPr>
+        <p:spPr>
+          <a:xfrm>
+            <a:off x="658368" y="1371600"/>
+            <a:ext cx="1463040" cy="50800"/>
+          </a:xfrm>
+          <a:prstGeom prst="rect">
+            <a:avLst/>
+          </a:prstGeom>
+          <a:solidFill>
+            <a:srgbClr val="205F61"/>
+          </a:solidFill>
+          <a:ln>
+            <a:noFill/>
+          </a:ln>
+          <a:effectLst/>
+        </p:spPr>
+        <p:style>
+          <a:lnRef idx="1">
+            <a:schemeClr val="accent1"/>
+          </a:lnRef>
+          <a:fillRef idx="3">
+            <a:schemeClr val="accent1"/>
+          </a:fillRef>
+          <a:effectRef idx="2">
+            <a:schemeClr val="accent1"/>
+          </a:effectRef>
+          <a:fontRef idx="minor">
+            <a:schemeClr val="lt1"/>
+          </a:fontRef>
+        </p:style>
+        <p:txBody>
+          <a:bodyPr rtlCol="0" anchor="ctr"/>
+          <a:lstStyle/>
+          <a:p>
+            <a:pPr algn="ctr"/>
+          </a:p>
+        </p:txBody>
+      </p:sp>
+      <p:sp>
+        <p:nvSpPr>
+          <p:cNvPr id="4" name="TextBox 3"/>
+          <p:cNvSpPr txBox="1"/>
+          <p:nvPr/>
+        </p:nvSpPr>
+        <p:spPr>
+          <a:xfrm>
+            <a:off x="658368" y="1691640"/>
+            <a:ext cx="10881360" cy="4480560"/>
+          </a:xfrm>
+          <a:prstGeom prst="rect">
+            <a:avLst/>
+          </a:prstGeom>
+          <a:noFill/>
+        </p:spPr>
+        <p:txBody>
+          <a:bodyPr wrap="square" anchor="ctr" lIns="0" rIns="0" tIns="0" bIns="0">
+            <a:spAutoFit/>
+          </a:bodyPr>
+          <a:lstStyle/>
+          <a:p>
+            <a:pPr marL="0" indent="0">
+              <a:lnSpc>
+                <a:spcPct val="105000"/>
+              </a:lnSpc>
+              <a:spcBef>
+                <a:spcPts val="0"/>
+              </a:spcBef>
+              <a:spcAft>
+                <a:spcPts val="1000"/>
+              </a:spcAft>
+            </a:pPr>
+            <a:r>
+              <a:rPr sz="2200" b="1" i="0">
+                <a:solidFill>
+                  <a:srgbClr val="EDAB0C"/>
+                </a:solidFill>
+                <a:latin typeface="Roboto"/>
+              </a:rPr>
+              <a:t>■  </a:t>
+            </a:r>
+            <a:r>
+              <a:rPr sz="2200" b="0" i="0">
+                <a:solidFill>
+                  <a:srgbClr val="2A2929"/>
+                </a:solidFill>
+                <a:latin typeface="Roboto"/>
+              </a:rPr>
+              <a:t>An approval that nobody wrote down did not happen. The engagement turns on this.</a:t>
+            </a:r>
+          </a:p>
+          <a:p>
+            <a:pPr marL="0" indent="0">
+              <a:lnSpc>
+                <a:spcPct val="105000"/>
+              </a:lnSpc>
+              <a:spcBef>
+                <a:spcPts val="0"/>
+              </a:spcBef>
+              <a:spcAft>
+                <a:spcPts val="1000"/>
+              </a:spcAft>
+            </a:pPr>
+            <a:r>
+              <a:rPr sz="2200" b="1" i="0">
+                <a:solidFill>
+                  <a:srgbClr val="EDAB0C"/>
+                </a:solidFill>
+                <a:latin typeface="Roboto"/>
+              </a:rPr>
+              <a:t>■  </a:t>
+            </a:r>
+            <a:r>
+              <a:rPr sz="2200" b="0" i="0">
+                <a:solidFill>
+                  <a:srgbClr val="2A2929"/>
+                </a:solidFill>
+                <a:latin typeface="Roboto"/>
+              </a:rPr>
+              <a:t>Ask the people who can actually authorise it — the sponsor or whoever they have delegated it to.</a:t>
+            </a:r>
+          </a:p>
+          <a:p>
+            <a:pPr marL="0" indent="0">
+              <a:lnSpc>
+                <a:spcPct val="105000"/>
+              </a:lnSpc>
+              <a:spcBef>
+                <a:spcPts val="0"/>
+              </a:spcBef>
+              <a:spcAft>
+                <a:spcPts val="1000"/>
+              </a:spcAft>
+            </a:pPr>
+            <a:r>
+              <a:rPr sz="2200" b="1" i="0">
+                <a:solidFill>
+                  <a:srgbClr val="EDAB0C"/>
+                </a:solidFill>
+                <a:latin typeface="Roboto"/>
+              </a:rPr>
+              <a:t>■  </a:t>
+            </a:r>
+            <a:r>
+              <a:rPr sz="2200" b="0" i="0">
+                <a:solidFill>
+                  <a:srgbClr val="2A2929"/>
+                </a:solidFill>
+                <a:latin typeface="Roboto"/>
+              </a:rPr>
+              <a:t>Record four things: who approved, what exactly they approved, when, and any condition they attached.</a:t>
+            </a:r>
+          </a:p>
+          <a:p>
+            <a:pPr marL="0" indent="0">
+              <a:lnSpc>
+                <a:spcPct val="105000"/>
+              </a:lnSpc>
+              <a:spcBef>
+                <a:spcPts val="0"/>
+              </a:spcBef>
+              <a:spcAft>
+                <a:spcPts val="1000"/>
+              </a:spcAft>
+            </a:pPr>
+            <a:r>
+              <a:rPr sz="2200" b="1" i="0">
+                <a:solidFill>
+                  <a:srgbClr val="EDAB0C"/>
+                </a:solidFill>
+                <a:latin typeface="Roboto"/>
+              </a:rPr>
+              <a:t>■  </a:t>
+            </a:r>
+            <a:r>
+              <a:rPr sz="2200" b="0" i="0">
+                <a:solidFill>
+                  <a:srgbClr val="2A2929"/>
+                </a:solidFill>
+                <a:latin typeface="Roboto"/>
+              </a:rPr>
+              <a:t>A conditional approval is still an approval, but the condition has to travel with it.</a:t>
+            </a:r>
+          </a:p>
+          <a:p>
+            <a:pPr marL="0" indent="0">
+              <a:lnSpc>
+                <a:spcPct val="105000"/>
+              </a:lnSpc>
+              <a:spcBef>
+                <a:spcPts val="0"/>
+              </a:spcBef>
+              <a:spcAft>
+                <a:spcPts val="1000"/>
+              </a:spcAft>
+            </a:pPr>
+            <a:r>
+              <a:rPr sz="2200" b="1" i="0">
+                <a:solidFill>
+                  <a:srgbClr val="EDAB0C"/>
+                </a:solidFill>
+                <a:latin typeface="Roboto"/>
+              </a:rPr>
+              <a:t>■  </a:t>
+            </a:r>
+            <a:r>
+              <a:rPr sz="2200" b="0" i="0">
+                <a:solidFill>
+                  <a:srgbClr val="2A2929"/>
+                </a:solidFill>
+                <a:latin typeface="Roboto"/>
+              </a:rPr>
+              <a:t>Without this you have a recommendation nobody has agreed to, and no mandate to start.</a:t>
+            </a:r>
+          </a:p>
+        </p:txBody>
+      </p:sp>
+      <p:sp>
+        <p:nvSpPr>
+          <p:cNvPr id="5" name="Rectangle 4"/>
+          <p:cNvSpPr/>
+          <p:nvPr/>
+        </p:nvSpPr>
+        <p:spPr>
+          <a:xfrm>
+            <a:off x="0" y="6565392"/>
+            <a:ext cx="12191695" cy="38100"/>
+          </a:xfrm>
+          <a:prstGeom prst="rect">
+            <a:avLst/>
+          </a:prstGeom>
+          <a:solidFill>
+            <a:srgbClr val="205F61"/>
+          </a:solidFill>
+          <a:ln>
+            <a:noFill/>
+          </a:ln>
+          <a:effectLst/>
+        </p:spPr>
+        <p:style>
+          <a:lnRef idx="1">
+            <a:schemeClr val="accent1"/>
+          </a:lnRef>
+          <a:fillRef idx="3">
+            <a:schemeClr val="accent1"/>
+          </a:fillRef>
+          <a:effectRef idx="2">
+            <a:schemeClr val="accent1"/>
+          </a:effectRef>
+          <a:fontRef idx="minor">
+            <a:schemeClr val="lt1"/>
+          </a:fontRef>
+        </p:style>
+        <p:txBody>
+          <a:bodyPr rtlCol="0" anchor="ctr"/>
+          <a:lstStyle/>
+          <a:p>
+            <a:pPr algn="ctr"/>
+          </a:p>
+        </p:txBody>
+      </p:sp>
+      <p:sp>
+        <p:nvSpPr>
+          <p:cNvPr id="6" name="TextBox 5"/>
+          <p:cNvSpPr txBox="1"/>
+          <p:nvPr/>
+        </p:nvSpPr>
+        <p:spPr>
+          <a:xfrm>
+            <a:off x="502920" y="6400800"/>
+            <a:ext cx="5486400" cy="320040"/>
+          </a:xfrm>
+          <a:prstGeom prst="rect">
+            <a:avLst/>
+          </a:prstGeom>
+          <a:noFill/>
+        </p:spPr>
+        <p:txBody>
+          <a:bodyPr wrap="square" anchor="t" lIns="0" rIns="0" tIns="0" bIns="0">
+            <a:spAutoFit/>
+          </a:bodyPr>
+          <a:lstStyle/>
+          <a:p>
+            <a:r>
+              <a:rPr sz="1100" b="1" i="0">
+                <a:solidFill>
+                  <a:srgbClr val="2A2929"/>
+                </a:solidFill>
+                <a:latin typeface="Roboto"/>
+              </a:rPr>
+              <a:t>Kangan </a:t>
+            </a:r>
+            <a:r>
+              <a:rPr sz="1100" b="1" i="0">
+                <a:solidFill>
+                  <a:srgbClr val="D68E10"/>
+                </a:solidFill>
+                <a:latin typeface="Roboto"/>
+              </a:rPr>
+              <a:t>Institute</a:t>
+            </a:r>
+          </a:p>
+        </p:txBody>
+      </p:sp>
+      <p:sp>
+        <p:nvSpPr>
+          <p:cNvPr id="7" name="TextBox 6"/>
+          <p:cNvSpPr txBox="1"/>
+          <p:nvPr/>
+        </p:nvSpPr>
+        <p:spPr>
+          <a:xfrm>
+            <a:off x="10515600" y="6400800"/>
+            <a:ext cx="1188720" cy="320040"/>
+          </a:xfrm>
+          <a:prstGeom prst="rect">
+            <a:avLst/>
+          </a:prstGeom>
+          <a:noFill/>
+        </p:spPr>
+        <p:txBody>
+          <a:bodyPr wrap="square" anchor="t" lIns="0" rIns="0" tIns="0" bIns="0">
+            <a:spAutoFit/>
+          </a:bodyPr>
+          <a:lstStyle/>
+          <a:p>
+            <a:pPr algn="r"/>
+            <a:r>
+              <a:rPr sz="1100" b="0" i="0">
+                <a:solidFill>
+                  <a:srgbClr val="7A7A7A"/>
+                </a:solidFill>
+                <a:latin typeface="Roboto"/>
+              </a:rPr>
+              <a:t>18</a:t>
+            </a:r>
+          </a:p>
+        </p:txBody>
+      </p:sp>
+    </p:spTree>
+  </p:cSld>
+  <p:clrMapOvr>
+    <a:masterClrMapping/>
+  </p:clrMapOvr>
+</p:sld>
+</file>
+
+<file path=ppt/slides/slide23.xml><?xml version="1.0" encoding="utf-8"?>
+<p:sld xmlns:a="http://schemas.openxmlformats.org/drawingml/2006/main" xmlns:p="http://schemas.openxmlformats.org/presentationml/2006/main" xmlns:r="http://schemas.openxmlformats.org/officeDocument/2006/relationships">
+  <p:cSld>
+    <p:bg>
+      <p:bgPr>
+        <a:solidFill>
+          <a:srgbClr val="FFFFFF"/>
+        </a:solidFill>
+        <a:effectLst/>
+      </p:bgPr>
+    </p:bg>
+    <p:spTree>
+      <p:nvGrpSpPr>
+        <p:cNvPr id="1" name=""/>
+        <p:cNvGrpSpPr/>
+        <p:nvPr/>
+      </p:nvGrpSpPr>
+      <p:grpSpPr/>
+      <p:sp>
+        <p:nvSpPr>
+          <p:cNvPr id="2" name="Rectangle 1"/>
+          <p:cNvSpPr/>
+          <p:nvPr/>
+        </p:nvSpPr>
+        <p:spPr>
+          <a:xfrm>
+            <a:off x="0" y="0"/>
+            <a:ext cx="12191695" cy="1234440"/>
+          </a:xfrm>
+          <a:prstGeom prst="rect">
+            <a:avLst/>
+          </a:prstGeom>
+          <a:solidFill>
+            <a:srgbClr val="205F61"/>
+          </a:solidFill>
+          <a:ln>
+            <a:noFill/>
+          </a:ln>
+          <a:effectLst/>
+        </p:spPr>
+        <p:style>
+          <a:lnRef idx="1">
+            <a:schemeClr val="accent1"/>
+          </a:lnRef>
+          <a:fillRef idx="3">
+            <a:schemeClr val="accent1"/>
+          </a:fillRef>
+          <a:effectRef idx="2">
+            <a:schemeClr val="accent1"/>
+          </a:effectRef>
+          <a:fontRef idx="minor">
+            <a:schemeClr val="lt1"/>
+          </a:fontRef>
+        </p:style>
+        <p:txBody>
+          <a:bodyPr rtlCol="0" anchor="ctr"/>
+          <a:lstStyle/>
+          <a:p>
+            <a:pPr algn="ctr"/>
+          </a:p>
+        </p:txBody>
+      </p:sp>
+      <p:sp>
+        <p:nvSpPr>
+          <p:cNvPr id="3" name="Rounded Rectangle 2"/>
+          <p:cNvSpPr/>
+          <p:nvPr/>
+        </p:nvSpPr>
+        <p:spPr>
+          <a:xfrm>
+            <a:off x="640080" y="384048"/>
+            <a:ext cx="1691640" cy="457200"/>
+          </a:xfrm>
+          <a:prstGeom prst="roundRect">
+            <a:avLst/>
+          </a:prstGeom>
+          <a:solidFill>
+            <a:srgbClr val="2A2929"/>
+          </a:solidFill>
+          <a:ln>
+            <a:noFill/>
+          </a:ln>
+          <a:effectLst/>
+        </p:spPr>
+        <p:style>
+          <a:lnRef idx="1">
+            <a:schemeClr val="accent1"/>
+          </a:lnRef>
+          <a:fillRef idx="3">
+            <a:schemeClr val="accent1"/>
+          </a:fillRef>
+          <a:effectRef idx="2">
+            <a:schemeClr val="accent1"/>
+          </a:effectRef>
+          <a:fontRef idx="minor">
+            <a:schemeClr val="lt1"/>
+          </a:fontRef>
+        </p:style>
+        <p:txBody>
+          <a:bodyPr rtlCol="0" anchor="ctr"/>
+          <a:lstStyle/>
+          <a:p>
+            <a:pPr algn="ctr"/>
+            <a:r>
+              <a:rPr sz="1400" b="1" i="0">
+                <a:solidFill>
+                  <a:srgbClr val="FBB900"/>
+                </a:solidFill>
+                <a:latin typeface="Roboto"/>
+              </a:rPr>
+              <a:t>ACTIVITY</a:t>
+            </a:r>
+          </a:p>
+        </p:txBody>
+      </p:sp>
+      <p:sp>
+        <p:nvSpPr>
+          <p:cNvPr id="4" name="TextBox 3"/>
+          <p:cNvSpPr txBox="1"/>
+          <p:nvPr/>
+        </p:nvSpPr>
+        <p:spPr>
+          <a:xfrm>
+            <a:off x="2560320" y="310896"/>
+            <a:ext cx="8961120" cy="685800"/>
+          </a:xfrm>
+          <a:prstGeom prst="rect">
+            <a:avLst/>
+          </a:prstGeom>
+          <a:noFill/>
+        </p:spPr>
+        <p:txBody>
+          <a:bodyPr wrap="square" anchor="ctr" lIns="0" rIns="0" tIns="0" bIns="0">
+            <a:spAutoFit/>
+          </a:bodyPr>
+          <a:lstStyle/>
+          <a:p>
+            <a:r>
+              <a:rPr sz="2600" b="1" i="0">
+                <a:solidFill>
+                  <a:srgbClr val="FFFFFF"/>
+                </a:solidFill>
+                <a:latin typeface="Roboto"/>
+              </a:rPr>
+              <a:t>Write Next Steps &amp; the Decision Requested</a:t>
+            </a:r>
+          </a:p>
+        </p:txBody>
+      </p:sp>
+      <p:sp>
+        <p:nvSpPr>
+          <p:cNvPr id="5" name="TextBox 4"/>
+          <p:cNvSpPr txBox="1"/>
+          <p:nvPr/>
+        </p:nvSpPr>
+        <p:spPr>
+          <a:xfrm>
+            <a:off x="658368" y="1554480"/>
+            <a:ext cx="10881360" cy="4297680"/>
+          </a:xfrm>
+          <a:prstGeom prst="rect">
+            <a:avLst/>
+          </a:prstGeom>
+          <a:noFill/>
+        </p:spPr>
+        <p:txBody>
+          <a:bodyPr wrap="square" anchor="t" lIns="0" rIns="0" tIns="0" bIns="0">
+            <a:spAutoFit/>
+          </a:bodyPr>
+          <a:lstStyle/>
+          <a:p>
+            <a:pPr marL="0" indent="0">
+              <a:lnSpc>
+                <a:spcPct val="105000"/>
+              </a:lnSpc>
+              <a:spcBef>
+                <a:spcPts val="0"/>
+              </a:spcBef>
+              <a:spcAft>
+                <a:spcPts val="1000"/>
+              </a:spcAft>
+            </a:pPr>
+            <a:r>
+              <a:rPr sz="1700" b="1" i="0">
+                <a:solidFill>
+                  <a:srgbClr val="EDAB0C"/>
+                </a:solidFill>
+                <a:latin typeface="Roboto"/>
+              </a:rPr>
+              <a:t>■  </a:t>
+            </a:r>
+            <a:r>
+              <a:rPr sz="1700" b="0" i="0">
+                <a:solidFill>
+                  <a:srgbClr val="2A2929"/>
+                </a:solidFill>
+                <a:latin typeface="Roboto"/>
+              </a:rPr>
+              <a:t>In your working copy of the Business Case, add the Next Steps and Decision Requested section for the Accounting System — completing the written business case.</a:t>
+            </a:r>
+          </a:p>
+          <a:p>
+            <a:pPr marL="0" indent="0">
+              <a:lnSpc>
+                <a:spcPct val="105000"/>
+              </a:lnSpc>
+              <a:spcBef>
+                <a:spcPts val="0"/>
+              </a:spcBef>
+              <a:spcAft>
+                <a:spcPts val="1000"/>
+              </a:spcAft>
+            </a:pPr>
+            <a:r>
               <a:rPr sz="1700" b="1" i="0">
                 <a:solidFill>
                   <a:srgbClr val="EDAB0C"/>
@@ -11011,7 +12062,7 @@
                 </a:solidFill>
                 <a:latin typeface="Roboto"/>
               </a:rPr>
-              <a:t>17</a:t>
+              <a:t>19</a:t>
             </a:r>
           </a:p>
         </p:txBody>
@@ -11024,7 +12075,7 @@
 </p:sld>
 </file>
 
-<file path=ppt/slides/slide22.xml><?xml version="1.0" encoding="utf-8"?>
+<file path=ppt/slides/slide24.xml><?xml version="1.0" encoding="utf-8"?>
 <p:sld xmlns:a="http://schemas.openxmlformats.org/drawingml/2006/main" xmlns:p="http://schemas.openxmlformats.org/presentationml/2006/main" xmlns:r="http://schemas.openxmlformats.org/officeDocument/2006/relationships">
   <p:cSld>
     <p:bg>
@@ -11640,7 +12691,7 @@
                 </a:solidFill>
                 <a:latin typeface="Roboto"/>
               </a:rPr>
-              <a:t>18</a:t>
+              <a:t>20</a:t>
             </a:r>
           </a:p>
         </p:txBody>
@@ -11653,7 +12704,7 @@
 </p:sld>
 </file>
 
-<file path=ppt/slides/slide23.xml><?xml version="1.0" encoding="utf-8"?>
+<file path=ppt/slides/slide25.xml><?xml version="1.0" encoding="utf-8"?>
 <p:sld xmlns:a="http://schemas.openxmlformats.org/drawingml/2006/main" xmlns:p="http://schemas.openxmlformats.org/presentationml/2006/main" xmlns:r="http://schemas.openxmlformats.org/officeDocument/2006/relationships">
   <p:cSld>
     <p:bg>
@@ -13637,14 +14688,64 @@
       <p:grpSpPr/>
       <p:sp>
         <p:nvSpPr>
-          <p:cNvPr id="2" name="Rectangle 1"/>
+          <p:cNvPr id="2" name="TextBox 1"/>
+          <p:cNvSpPr txBox="1"/>
+          <p:nvPr/>
+        </p:nvSpPr>
+        <p:spPr>
+          <a:xfrm>
+            <a:off x="640080" y="457200"/>
+            <a:ext cx="10881360" cy="960120"/>
+          </a:xfrm>
+          <a:prstGeom prst="rect">
+            <a:avLst/>
+          </a:prstGeom>
+          <a:noFill/>
+        </p:spPr>
+        <p:txBody>
+          <a:bodyPr wrap="square" anchor="t" lIns="0" rIns="0" tIns="0" bIns="0">
+            <a:spAutoFit/>
+          </a:bodyPr>
+          <a:lstStyle/>
+          <a:p>
+            <a:r>
+              <a:rPr sz="2800" b="1" i="0">
+                <a:solidFill>
+                  <a:srgbClr val="2A2929"/>
+                </a:solidFill>
+                <a:latin typeface="Roboto"/>
+              </a:rPr>
+              <a:t>Name the infrastructure, not just the direction</a:t>
+            </a:r>
+          </a:p>
+          <a:p>
+            <a:pPr>
+              <a:spcBef>
+                <a:spcPts val="200"/>
+              </a:spcBef>
+            </a:pPr>
+            <a:r>
+              <a:rPr sz="1800" b="0" i="1">
+                <a:solidFill>
+                  <a:srgbClr val="D68E10"/>
+                </a:solidFill>
+                <a:latin typeface="Roboto Light"/>
+              </a:rPr>
+              <a:t>a thing the board can approve</a:t>
+            </a:r>
+          </a:p>
+        </p:txBody>
+      </p:sp>
+      <p:sp>
+        <p:nvSpPr>
+          <p:cNvPr id="3" name="Rectangle 2"/>
           <p:cNvSpPr/>
           <p:nvPr/>
         </p:nvSpPr>
         <p:spPr>
           <a:xfrm>
-            <a:off x="0" y="0"/>
-            <a:ext cx="12191695" cy="1234440"/>
+            <a:off x="658368" y="1371600"/>
+            <a:ext cx="1463040" cy="50800"/>
           </a:xfrm>
           <a:prstGeom prst="rect">
             <a:avLst/>
@@ -13681,67 +14782,14 @@
       </p:sp>
       <p:sp>
         <p:nvSpPr>
-          <p:cNvPr id="3" name="Rounded Rectangle 2"/>
-          <p:cNvSpPr/>
-          <p:nvPr/>
-        </p:nvSpPr>
-        <p:spPr>
-          <a:xfrm>
-            <a:off x="640080" y="384048"/>
-            <a:ext cx="1691640" cy="457200"/>
-          </a:xfrm>
-          <a:prstGeom prst="roundRect">
-            <a:avLst/>
-          </a:prstGeom>
-          <a:solidFill>
-            <a:srgbClr val="2A2929"/>
-          </a:solidFill>
-          <a:ln>
-            <a:noFill/>
-          </a:ln>
-          <a:effectLst/>
-        </p:spPr>
-        <p:style>
-          <a:lnRef idx="1">
-            <a:schemeClr val="accent1"/>
-          </a:lnRef>
-          <a:fillRef idx="3">
-            <a:schemeClr val="accent1"/>
-          </a:fillRef>
-          <a:effectRef idx="2">
-            <a:schemeClr val="accent1"/>
-          </a:effectRef>
-          <a:fontRef idx="minor">
-            <a:schemeClr val="lt1"/>
-          </a:fontRef>
-        </p:style>
-        <p:txBody>
-          <a:bodyPr rtlCol="0" anchor="ctr"/>
-          <a:lstStyle/>
-          <a:p>
-            <a:pPr algn="ctr"/>
-            <a:r>
-              <a:rPr sz="1400" b="1" i="0">
-                <a:solidFill>
-                  <a:srgbClr val="FBB900"/>
-                </a:solidFill>
-                <a:latin typeface="Roboto"/>
-              </a:rPr>
-              <a:t>ACTIVITY</a:t>
-            </a:r>
-          </a:p>
-        </p:txBody>
-      </p:sp>
-      <p:sp>
-        <p:nvSpPr>
           <p:cNvPr id="4" name="TextBox 3"/>
           <p:cNvSpPr txBox="1"/>
           <p:nvPr/>
         </p:nvSpPr>
         <p:spPr>
           <a:xfrm>
-            <a:off x="2560320" y="310896"/>
-            <a:ext cx="8961120" cy="685800"/>
+            <a:off x="658368" y="1691640"/>
+            <a:ext cx="10881360" cy="4480560"/>
           </a:xfrm>
           <a:prstGeom prst="rect">
             <a:avLst/>
@@ -13750,40 +14798,6 @@
         </p:spPr>
         <p:txBody>
           <a:bodyPr wrap="square" anchor="ctr" lIns="0" rIns="0" tIns="0" bIns="0">
-            <a:spAutoFit/>
-          </a:bodyPr>
-          <a:lstStyle/>
-          <a:p>
-            <a:r>
-              <a:rPr sz="2600" b="1" i="0">
-                <a:solidFill>
-                  <a:srgbClr val="FFFFFF"/>
-                </a:solidFill>
-                <a:latin typeface="Roboto"/>
-              </a:rPr>
-              <a:t>Write the Recommendation</a:t>
-            </a:r>
-          </a:p>
-        </p:txBody>
-      </p:sp>
-      <p:sp>
-        <p:nvSpPr>
-          <p:cNvPr id="5" name="TextBox 4"/>
-          <p:cNvSpPr txBox="1"/>
-          <p:nvPr/>
-        </p:nvSpPr>
-        <p:spPr>
-          <a:xfrm>
-            <a:off x="658368" y="1554480"/>
-            <a:ext cx="10881360" cy="4297680"/>
-          </a:xfrm>
-          <a:prstGeom prst="rect">
-            <a:avLst/>
-          </a:prstGeom>
-          <a:noFill/>
-        </p:spPr>
-        <p:txBody>
-          <a:bodyPr wrap="square" anchor="t" lIns="0" rIns="0" tIns="0" bIns="0">
             <a:spAutoFit/>
           </a:bodyPr>
           <a:lstStyle/>
@@ -13800,7 +14814,7 @@
               </a:spcAft>
             </a:pPr>
             <a:r>
-              <a:rPr sz="1700" b="1" i="0">
+              <a:rPr sz="2200" b="1" i="0">
                 <a:solidFill>
                   <a:srgbClr val="EDAB0C"/>
                 </a:solidFill>
@@ -13809,13 +14823,13 @@
               <a:t>■  </a:t>
             </a:r>
             <a:r>
-              <a:rPr sz="1700" b="0" i="0">
+              <a:rPr sz="2200" b="0" i="0">
                 <a:solidFill>
                   <a:srgbClr val="2A2929"/>
                 </a:solidFill>
                 <a:latin typeface="Roboto"/>
               </a:rPr>
-              <a:t>In your working copy of the Business Case, add the Recommendation section for the Accounting System (Ledgerline).</a:t>
+              <a:t>"Move to the cloud" is a direction. A board cannot approve a direction — it approves a thing.</a:t>
             </a:r>
           </a:p>
           <a:p>
@@ -13831,7 +14845,7 @@
               </a:spcAft>
             </a:pPr>
             <a:r>
-              <a:rPr sz="1700" b="1" i="0">
+              <a:rPr sz="2200" b="1" i="0">
                 <a:solidFill>
                   <a:srgbClr val="EDAB0C"/>
                 </a:solidFill>
@@ -13840,13 +14854,13 @@
               <a:t>■  </a:t>
             </a:r>
             <a:r>
-              <a:rPr sz="1700" b="0" i="0">
+              <a:rPr sz="2200" b="0" i="0">
                 <a:solidFill>
                   <a:srgbClr val="2A2929"/>
                 </a:solidFill>
                 <a:latin typeface="Roboto"/>
               </a:rPr>
-              <a:t>Remember to:</a:t>
+              <a:t>Say what the business actually needs, in terms it can price and staff:</a:t>
             </a:r>
           </a:p>
           <a:p>
@@ -13862,7 +14876,7 @@
               </a:spcAft>
             </a:pPr>
             <a:r>
-              <a:rPr sz="1400" b="0" i="0">
+              <a:rPr sz="1900" b="0" i="0">
                 <a:solidFill>
                   <a:srgbClr val="7A7A7A"/>
                 </a:solidFill>
@@ -13871,13 +14885,13 @@
               <a:t>–  </a:t>
             </a:r>
             <a:r>
-              <a:rPr sz="1400" b="0" i="0">
+              <a:rPr sz="1900" b="0" i="0">
                 <a:solidFill>
                   <a:srgbClr val="2A2929"/>
                 </a:solidFill>
                 <a:latin typeface="Roboto"/>
               </a:rPr>
-              <a:t>Prioritise your proposed changes (from your gap analysis).</a:t>
+              <a:t>the tiers the workload needs · roughly how much of each · what is managed for you and what you run</a:t>
             </a:r>
           </a:p>
           <a:p>
@@ -13893,7 +14907,7 @@
               </a:spcAft>
             </a:pPr>
             <a:r>
-              <a:rPr sz="1400" b="0" i="0">
+              <a:rPr sz="1900" b="0" i="0">
                 <a:solidFill>
                   <a:srgbClr val="7A7A7A"/>
                 </a:solidFill>
@@ -13902,75 +14916,13 @@
               <a:t>–  </a:t>
             </a:r>
             <a:r>
-              <a:rPr sz="1400" b="0" i="0">
+              <a:rPr sz="1900" b="0" i="0">
                 <a:solidFill>
                   <a:srgbClr val="2A2929"/>
                 </a:solidFill>
                 <a:latin typeface="Roboto"/>
               </a:rPr>
-              <a:t>State the recommended option plainly.</a:t>
-            </a:r>
-          </a:p>
-          <a:p>
-            <a:pPr marL="365760" indent="0">
-              <a:lnSpc>
-                <a:spcPct val="105000"/>
-              </a:lnSpc>
-              <a:spcBef>
-                <a:spcPts val="0"/>
-              </a:spcBef>
-              <a:spcAft>
-                <a:spcPts val="500"/>
-              </a:spcAft>
-            </a:pPr>
-            <a:r>
-              <a:rPr sz="1400" b="0" i="0">
-                <a:solidFill>
-                  <a:srgbClr val="7A7A7A"/>
-                </a:solidFill>
-                <a:latin typeface="Roboto"/>
-              </a:rPr>
-              <a:t>–  </a:t>
-            </a:r>
-            <a:r>
-              <a:rPr sz="1400" b="0" i="0">
-                <a:solidFill>
-                  <a:srgbClr val="2A2929"/>
-                </a:solidFill>
-                <a:latin typeface="Roboto"/>
-              </a:rPr>
-              <a:t>Justify it from your CBA + risk + strategic alignment — cite your own earlier sections.</a:t>
-            </a:r>
-          </a:p>
-          <a:p>
-            <a:pPr marL="365760" indent="0">
-              <a:lnSpc>
-                <a:spcPct val="105000"/>
-              </a:lnSpc>
-              <a:spcBef>
-                <a:spcPts val="0"/>
-              </a:spcBef>
-              <a:spcAft>
-                <a:spcPts val="500"/>
-              </a:spcAft>
-            </a:pPr>
-            <a:r>
-              <a:rPr sz="1400" b="0" i="0">
-                <a:solidFill>
-                  <a:srgbClr val="7A7A7A"/>
-                </a:solidFill>
-                <a:latin typeface="Roboto"/>
-              </a:rPr>
-              <a:t>–  </a:t>
-            </a:r>
-            <a:r>
-              <a:rPr sz="1400" b="0" i="0">
-                <a:solidFill>
-                  <a:srgbClr val="2A2929"/>
-                </a:solidFill>
-                <a:latin typeface="Roboto"/>
-              </a:rPr>
-              <a:t>Name the trade-off you're accepting.</a:t>
+              <a:t>where the data lives · what it is backed up to · what it is monitored by</a:t>
             </a:r>
           </a:p>
           <a:p>
@@ -13986,7 +14938,7 @@
               </a:spcAft>
             </a:pPr>
             <a:r>
-              <a:rPr sz="1700" b="1" i="0">
+              <a:rPr sz="2200" b="1" i="0">
                 <a:solidFill>
                   <a:srgbClr val="EDAB0C"/>
                 </a:solidFill>
@@ -13995,13 +14947,13 @@
               <a:t>■  </a:t>
             </a:r>
             <a:r>
-              <a:rPr sz="1700" b="0" i="0">
+              <a:rPr sz="2200" b="0" i="0">
                 <a:solidFill>
                   <a:srgbClr val="2A2929"/>
                 </a:solidFill>
                 <a:latin typeface="Roboto"/>
               </a:rPr>
-              <a:t>~½ page.</a:t>
+              <a:t>Tie each one back to the workload you defined — capacity, peaks, recovery, residency. If a component answers nothing on that list, it does not belong in the recommendation.</a:t>
             </a:r>
           </a:p>
           <a:p>
@@ -14017,7 +14969,7 @@
               </a:spcAft>
             </a:pPr>
             <a:r>
-              <a:rPr sz="1700" b="1" i="0">
+              <a:rPr sz="2200" b="1" i="0">
                 <a:solidFill>
                   <a:srgbClr val="EDAB0C"/>
                 </a:solidFill>
@@ -14026,100 +14978,20 @@
               <a:t>■  </a:t>
             </a:r>
             <a:r>
-              <a:rPr sz="1700" b="0" i="0">
+              <a:rPr sz="2200" b="0" i="0">
                 <a:solidFill>
                   <a:srgbClr val="2A2929"/>
                 </a:solidFill>
                 <a:latin typeface="Roboto"/>
               </a:rPr>
-              <a:t>⚠  Recommend, don't re-argue — point at the evidence you already built.</a:t>
-            </a:r>
-          </a:p>
-        </p:txBody>
-      </p:sp>
-      <p:sp>
-        <p:nvSpPr>
-          <p:cNvPr id="6" name="Rounded Rectangle 5"/>
-          <p:cNvSpPr/>
-          <p:nvPr/>
-        </p:nvSpPr>
-        <p:spPr>
-          <a:xfrm>
-            <a:off x="640080" y="5897880"/>
-            <a:ext cx="4023360" cy="457200"/>
-          </a:xfrm>
-          <a:prstGeom prst="roundRect">
-            <a:avLst/>
-          </a:prstGeom>
-          <a:solidFill>
-            <a:srgbClr val="F9F9F9"/>
-          </a:solidFill>
-          <a:ln w="12700">
-            <a:solidFill>
-              <a:srgbClr val="CCCCCC"/>
-            </a:solidFill>
-          </a:ln>
-          <a:effectLst/>
-        </p:spPr>
-        <p:style>
-          <a:lnRef idx="1">
-            <a:schemeClr val="accent1"/>
-          </a:lnRef>
-          <a:fillRef idx="3">
-            <a:schemeClr val="accent1"/>
-          </a:fillRef>
-          <a:effectRef idx="2">
-            <a:schemeClr val="accent1"/>
-          </a:effectRef>
-          <a:fontRef idx="minor">
-            <a:schemeClr val="lt1"/>
-          </a:fontRef>
-        </p:style>
-        <p:txBody>
-          <a:bodyPr rtlCol="0" anchor="ctr"/>
-          <a:lstStyle/>
-          <a:p>
-            <a:pPr algn="ctr"/>
-          </a:p>
-        </p:txBody>
-      </p:sp>
-      <p:sp>
-        <p:nvSpPr>
-          <p:cNvPr id="7" name="TextBox 6"/>
-          <p:cNvSpPr txBox="1"/>
-          <p:nvPr/>
-        </p:nvSpPr>
-        <p:spPr>
-          <a:xfrm>
-            <a:off x="822960" y="5943600"/>
-            <a:ext cx="3657600" cy="365760"/>
-          </a:xfrm>
-          <a:prstGeom prst="rect">
-            <a:avLst/>
-          </a:prstGeom>
-          <a:noFill/>
-        </p:spPr>
-        <p:txBody>
-          <a:bodyPr wrap="square" anchor="ctr" lIns="0" rIns="0" tIns="0" bIns="0">
-            <a:spAutoFit/>
-          </a:bodyPr>
-          <a:lstStyle/>
-          <a:p>
-            <a:r>
-              <a:rPr sz="1500" b="1" i="0">
-                <a:solidFill>
-                  <a:srgbClr val="2A2929"/>
-                </a:solidFill>
-                <a:latin typeface="Roboto"/>
-              </a:rPr>
-              <a:t>⏱  ~20 min, then we discuss</a:t>
-            </a:r>
-          </a:p>
-        </p:txBody>
-      </p:sp>
-      <p:sp>
-        <p:nvSpPr>
-          <p:cNvPr id="8" name="Rectangle 7"/>
+              <a:t>You are not designing it here. You are determining what shape it has to be.</a:t>
+            </a:r>
+          </a:p>
+        </p:txBody>
+      </p:sp>
+      <p:sp>
+        <p:nvSpPr>
+          <p:cNvPr id="5" name="Rectangle 4"/>
           <p:cNvSpPr/>
           <p:nvPr/>
         </p:nvSpPr>
@@ -14163,7 +15035,7 @@
       </p:sp>
       <p:sp>
         <p:nvSpPr>
-          <p:cNvPr id="9" name="TextBox 8"/>
+          <p:cNvPr id="6" name="TextBox 5"/>
           <p:cNvSpPr txBox="1"/>
           <p:nvPr/>
         </p:nvSpPr>
@@ -14206,7 +15078,7 @@
       </p:sp>
       <p:sp>
         <p:nvSpPr>
-          <p:cNvPr id="10" name="TextBox 9"/>
+          <p:cNvPr id="7" name="TextBox 6"/>
           <p:cNvSpPr txBox="1"/>
           <p:nvPr/>
         </p:nvSpPr>
@@ -14253,7 +15125,7 @@
     <p:bg>
       <p:bgPr>
         <a:solidFill>
-          <a:srgbClr val="F9F9F9"/>
+          <a:srgbClr val="FFFFFF"/>
         </a:solidFill>
         <a:effectLst/>
       </p:bgPr>
@@ -14267,64 +15139,14 @@
       <p:grpSpPr/>
       <p:sp>
         <p:nvSpPr>
-          <p:cNvPr id="2" name="TextBox 1"/>
-          <p:cNvSpPr txBox="1"/>
-          <p:nvPr/>
-        </p:nvSpPr>
-        <p:spPr>
-          <a:xfrm>
-            <a:off x="640080" y="548640"/>
-            <a:ext cx="10881360" cy="1097280"/>
-          </a:xfrm>
-          <a:prstGeom prst="rect">
-            <a:avLst/>
-          </a:prstGeom>
-          <a:noFill/>
-        </p:spPr>
-        <p:txBody>
-          <a:bodyPr wrap="square" anchor="t" lIns="0" rIns="0" tIns="0" bIns="0">
-            <a:spAutoFit/>
-          </a:bodyPr>
-          <a:lstStyle/>
-          <a:p>
-            <a:r>
-              <a:rPr sz="3200" b="1" i="0">
-                <a:solidFill>
-                  <a:srgbClr val="2A2929"/>
-                </a:solidFill>
-                <a:latin typeface="Roboto"/>
-              </a:rPr>
-              <a:t>Key takeaways</a:t>
-            </a:r>
-          </a:p>
-          <a:p>
-            <a:pPr>
-              <a:spcBef>
-                <a:spcPts val="200"/>
-              </a:spcBef>
-            </a:pPr>
-            <a:r>
-              <a:rPr sz="1800" b="1" i="0">
-                <a:solidFill>
-                  <a:srgbClr val="92268F"/>
-                </a:solidFill>
-                <a:latin typeface="Roboto"/>
-              </a:rPr>
-              <a:t>Section 1 · Recommendation</a:t>
-            </a:r>
-          </a:p>
-        </p:txBody>
-      </p:sp>
-      <p:sp>
-        <p:nvSpPr>
-          <p:cNvPr id="3" name="Rectangle 2"/>
+          <p:cNvPr id="2" name="Rectangle 1"/>
           <p:cNvSpPr/>
           <p:nvPr/>
         </p:nvSpPr>
         <p:spPr>
           <a:xfrm>
-            <a:off x="658368" y="1600200"/>
-            <a:ext cx="1463040" cy="50800"/>
+            <a:off x="0" y="0"/>
+            <a:ext cx="12191695" cy="1234440"/>
           </a:xfrm>
           <a:prstGeom prst="rect">
             <a:avLst/>
@@ -14361,20 +15183,378 @@
       </p:sp>
       <p:sp>
         <p:nvSpPr>
-          <p:cNvPr id="4" name="Rectangle 3"/>
+          <p:cNvPr id="3" name="Rounded Rectangle 2"/>
           <p:cNvSpPr/>
           <p:nvPr/>
         </p:nvSpPr>
         <p:spPr>
           <a:xfrm>
-            <a:off x="640080" y="1965960"/>
-            <a:ext cx="10927080" cy="841248"/>
-          </a:xfrm>
-          <a:prstGeom prst="rect">
+            <a:off x="640080" y="384048"/>
+            <a:ext cx="1691640" cy="457200"/>
+          </a:xfrm>
+          <a:prstGeom prst="roundRect">
             <a:avLst/>
           </a:prstGeom>
           <a:solidFill>
-            <a:srgbClr val="FFFFFF"/>
+            <a:srgbClr val="2A2929"/>
+          </a:solidFill>
+          <a:ln>
+            <a:noFill/>
+          </a:ln>
+          <a:effectLst/>
+        </p:spPr>
+        <p:style>
+          <a:lnRef idx="1">
+            <a:schemeClr val="accent1"/>
+          </a:lnRef>
+          <a:fillRef idx="3">
+            <a:schemeClr val="accent1"/>
+          </a:fillRef>
+          <a:effectRef idx="2">
+            <a:schemeClr val="accent1"/>
+          </a:effectRef>
+          <a:fontRef idx="minor">
+            <a:schemeClr val="lt1"/>
+          </a:fontRef>
+        </p:style>
+        <p:txBody>
+          <a:bodyPr rtlCol="0" anchor="ctr"/>
+          <a:lstStyle/>
+          <a:p>
+            <a:pPr algn="ctr"/>
+            <a:r>
+              <a:rPr sz="1400" b="1" i="0">
+                <a:solidFill>
+                  <a:srgbClr val="FBB900"/>
+                </a:solidFill>
+                <a:latin typeface="Roboto"/>
+              </a:rPr>
+              <a:t>ACTIVITY</a:t>
+            </a:r>
+          </a:p>
+        </p:txBody>
+      </p:sp>
+      <p:sp>
+        <p:nvSpPr>
+          <p:cNvPr id="4" name="TextBox 3"/>
+          <p:cNvSpPr txBox="1"/>
+          <p:nvPr/>
+        </p:nvSpPr>
+        <p:spPr>
+          <a:xfrm>
+            <a:off x="2560320" y="310896"/>
+            <a:ext cx="8961120" cy="685800"/>
+          </a:xfrm>
+          <a:prstGeom prst="rect">
+            <a:avLst/>
+          </a:prstGeom>
+          <a:noFill/>
+        </p:spPr>
+        <p:txBody>
+          <a:bodyPr wrap="square" anchor="ctr" lIns="0" rIns="0" tIns="0" bIns="0">
+            <a:spAutoFit/>
+          </a:bodyPr>
+          <a:lstStyle/>
+          <a:p>
+            <a:r>
+              <a:rPr sz="2600" b="1" i="0">
+                <a:solidFill>
+                  <a:srgbClr val="FFFFFF"/>
+                </a:solidFill>
+                <a:latin typeface="Roboto"/>
+              </a:rPr>
+              <a:t>Write the Recommendation</a:t>
+            </a:r>
+          </a:p>
+        </p:txBody>
+      </p:sp>
+      <p:sp>
+        <p:nvSpPr>
+          <p:cNvPr id="5" name="TextBox 4"/>
+          <p:cNvSpPr txBox="1"/>
+          <p:nvPr/>
+        </p:nvSpPr>
+        <p:spPr>
+          <a:xfrm>
+            <a:off x="658368" y="1554480"/>
+            <a:ext cx="10881360" cy="4297680"/>
+          </a:xfrm>
+          <a:prstGeom prst="rect">
+            <a:avLst/>
+          </a:prstGeom>
+          <a:noFill/>
+        </p:spPr>
+        <p:txBody>
+          <a:bodyPr wrap="square" anchor="t" lIns="0" rIns="0" tIns="0" bIns="0">
+            <a:spAutoFit/>
+          </a:bodyPr>
+          <a:lstStyle/>
+          <a:p>
+            <a:pPr marL="0" indent="0">
+              <a:lnSpc>
+                <a:spcPct val="105000"/>
+              </a:lnSpc>
+              <a:spcBef>
+                <a:spcPts val="0"/>
+              </a:spcBef>
+              <a:spcAft>
+                <a:spcPts val="1000"/>
+              </a:spcAft>
+            </a:pPr>
+            <a:r>
+              <a:rPr sz="1700" b="1" i="0">
+                <a:solidFill>
+                  <a:srgbClr val="EDAB0C"/>
+                </a:solidFill>
+                <a:latin typeface="Roboto"/>
+              </a:rPr>
+              <a:t>■  </a:t>
+            </a:r>
+            <a:r>
+              <a:rPr sz="1700" b="0" i="0">
+                <a:solidFill>
+                  <a:srgbClr val="2A2929"/>
+                </a:solidFill>
+                <a:latin typeface="Roboto"/>
+              </a:rPr>
+              <a:t>In your working copy of the Business Case, add the Recommendation section for the Accounting System (Ledgerline).</a:t>
+            </a:r>
+          </a:p>
+          <a:p>
+            <a:pPr marL="0" indent="0">
+              <a:lnSpc>
+                <a:spcPct val="105000"/>
+              </a:lnSpc>
+              <a:spcBef>
+                <a:spcPts val="0"/>
+              </a:spcBef>
+              <a:spcAft>
+                <a:spcPts val="1000"/>
+              </a:spcAft>
+            </a:pPr>
+            <a:r>
+              <a:rPr sz="1700" b="1" i="0">
+                <a:solidFill>
+                  <a:srgbClr val="EDAB0C"/>
+                </a:solidFill>
+                <a:latin typeface="Roboto"/>
+              </a:rPr>
+              <a:t>■  </a:t>
+            </a:r>
+            <a:r>
+              <a:rPr sz="1700" b="0" i="0">
+                <a:solidFill>
+                  <a:srgbClr val="2A2929"/>
+                </a:solidFill>
+                <a:latin typeface="Roboto"/>
+              </a:rPr>
+              <a:t>Remember to:</a:t>
+            </a:r>
+          </a:p>
+          <a:p>
+            <a:pPr marL="365760" indent="0">
+              <a:lnSpc>
+                <a:spcPct val="105000"/>
+              </a:lnSpc>
+              <a:spcBef>
+                <a:spcPts val="0"/>
+              </a:spcBef>
+              <a:spcAft>
+                <a:spcPts val="500"/>
+              </a:spcAft>
+            </a:pPr>
+            <a:r>
+              <a:rPr sz="1400" b="0" i="0">
+                <a:solidFill>
+                  <a:srgbClr val="7A7A7A"/>
+                </a:solidFill>
+                <a:latin typeface="Roboto"/>
+              </a:rPr>
+              <a:t>–  </a:t>
+            </a:r>
+            <a:r>
+              <a:rPr sz="1400" b="0" i="0">
+                <a:solidFill>
+                  <a:srgbClr val="2A2929"/>
+                </a:solidFill>
+                <a:latin typeface="Roboto"/>
+              </a:rPr>
+              <a:t>Prioritise your proposed changes (from your gap analysis).</a:t>
+            </a:r>
+          </a:p>
+          <a:p>
+            <a:pPr marL="365760" indent="0">
+              <a:lnSpc>
+                <a:spcPct val="105000"/>
+              </a:lnSpc>
+              <a:spcBef>
+                <a:spcPts val="0"/>
+              </a:spcBef>
+              <a:spcAft>
+                <a:spcPts val="500"/>
+              </a:spcAft>
+            </a:pPr>
+            <a:r>
+              <a:rPr sz="1400" b="0" i="0">
+                <a:solidFill>
+                  <a:srgbClr val="7A7A7A"/>
+                </a:solidFill>
+                <a:latin typeface="Roboto"/>
+              </a:rPr>
+              <a:t>–  </a:t>
+            </a:r>
+            <a:r>
+              <a:rPr sz="1400" b="0" i="0">
+                <a:solidFill>
+                  <a:srgbClr val="2A2929"/>
+                </a:solidFill>
+                <a:latin typeface="Roboto"/>
+              </a:rPr>
+              <a:t>State the recommended option plainly.</a:t>
+            </a:r>
+          </a:p>
+          <a:p>
+            <a:pPr marL="365760" indent="0">
+              <a:lnSpc>
+                <a:spcPct val="105000"/>
+              </a:lnSpc>
+              <a:spcBef>
+                <a:spcPts val="0"/>
+              </a:spcBef>
+              <a:spcAft>
+                <a:spcPts val="500"/>
+              </a:spcAft>
+            </a:pPr>
+            <a:r>
+              <a:rPr sz="1400" b="0" i="0">
+                <a:solidFill>
+                  <a:srgbClr val="7A7A7A"/>
+                </a:solidFill>
+                <a:latin typeface="Roboto"/>
+              </a:rPr>
+              <a:t>–  </a:t>
+            </a:r>
+            <a:r>
+              <a:rPr sz="1400" b="0" i="0">
+                <a:solidFill>
+                  <a:srgbClr val="2A2929"/>
+                </a:solidFill>
+                <a:latin typeface="Roboto"/>
+              </a:rPr>
+              <a:t>Justify it from your CBA + risk + strategic alignment — cite your own earlier sections.</a:t>
+            </a:r>
+          </a:p>
+          <a:p>
+            <a:pPr marL="365760" indent="0">
+              <a:lnSpc>
+                <a:spcPct val="105000"/>
+              </a:lnSpc>
+              <a:spcBef>
+                <a:spcPts val="0"/>
+              </a:spcBef>
+              <a:spcAft>
+                <a:spcPts val="500"/>
+              </a:spcAft>
+            </a:pPr>
+            <a:r>
+              <a:rPr sz="1400" b="0" i="0">
+                <a:solidFill>
+                  <a:srgbClr val="7A7A7A"/>
+                </a:solidFill>
+                <a:latin typeface="Roboto"/>
+              </a:rPr>
+              <a:t>–  </a:t>
+            </a:r>
+            <a:r>
+              <a:rPr sz="1400" b="0" i="0">
+                <a:solidFill>
+                  <a:srgbClr val="2A2929"/>
+                </a:solidFill>
+                <a:latin typeface="Roboto"/>
+              </a:rPr>
+              <a:t>Name the trade-off you're accepting.</a:t>
+            </a:r>
+          </a:p>
+          <a:p>
+            <a:pPr marL="0" indent="0">
+              <a:lnSpc>
+                <a:spcPct val="105000"/>
+              </a:lnSpc>
+              <a:spcBef>
+                <a:spcPts val="0"/>
+              </a:spcBef>
+              <a:spcAft>
+                <a:spcPts val="1000"/>
+              </a:spcAft>
+            </a:pPr>
+            <a:r>
+              <a:rPr sz="1700" b="1" i="0">
+                <a:solidFill>
+                  <a:srgbClr val="EDAB0C"/>
+                </a:solidFill>
+                <a:latin typeface="Roboto"/>
+              </a:rPr>
+              <a:t>■  </a:t>
+            </a:r>
+            <a:r>
+              <a:rPr sz="1700" b="0" i="0">
+                <a:solidFill>
+                  <a:srgbClr val="2A2929"/>
+                </a:solidFill>
+                <a:latin typeface="Roboto"/>
+              </a:rPr>
+              <a:t>~½ page.</a:t>
+            </a:r>
+          </a:p>
+          <a:p>
+            <a:pPr marL="0" indent="0">
+              <a:lnSpc>
+                <a:spcPct val="105000"/>
+              </a:lnSpc>
+              <a:spcBef>
+                <a:spcPts val="0"/>
+              </a:spcBef>
+              <a:spcAft>
+                <a:spcPts val="1000"/>
+              </a:spcAft>
+            </a:pPr>
+            <a:r>
+              <a:rPr sz="1700" b="1" i="0">
+                <a:solidFill>
+                  <a:srgbClr val="EDAB0C"/>
+                </a:solidFill>
+                <a:latin typeface="Roboto"/>
+              </a:rPr>
+              <a:t>■  </a:t>
+            </a:r>
+            <a:r>
+              <a:rPr sz="1700" b="0" i="0">
+                <a:solidFill>
+                  <a:srgbClr val="2A2929"/>
+                </a:solidFill>
+                <a:latin typeface="Roboto"/>
+              </a:rPr>
+              <a:t>⚠  Recommend, don't re-argue — point at the evidence you already built.</a:t>
+            </a:r>
+          </a:p>
+        </p:txBody>
+      </p:sp>
+      <p:sp>
+        <p:nvSpPr>
+          <p:cNvPr id="6" name="Rounded Rectangle 5"/>
+          <p:cNvSpPr/>
+          <p:nvPr/>
+        </p:nvSpPr>
+        <p:spPr>
+          <a:xfrm>
+            <a:off x="640080" y="5897880"/>
+            <a:ext cx="4023360" cy="457200"/>
+          </a:xfrm>
+          <a:prstGeom prst="roundRect">
+            <a:avLst/>
+          </a:prstGeom>
+          <a:solidFill>
+            <a:srgbClr val="F9F9F9"/>
           </a:solidFill>
           <a:ln w="12700">
             <a:solidFill>
@@ -14407,14 +15587,48 @@
       </p:sp>
       <p:sp>
         <p:nvSpPr>
-          <p:cNvPr id="5" name="Rectangle 4"/>
+          <p:cNvPr id="7" name="TextBox 6"/>
+          <p:cNvSpPr txBox="1"/>
+          <p:nvPr/>
+        </p:nvSpPr>
+        <p:spPr>
+          <a:xfrm>
+            <a:off x="822960" y="5943600"/>
+            <a:ext cx="3657600" cy="365760"/>
+          </a:xfrm>
+          <a:prstGeom prst="rect">
+            <a:avLst/>
+          </a:prstGeom>
+          <a:noFill/>
+        </p:spPr>
+        <p:txBody>
+          <a:bodyPr wrap="square" anchor="ctr" lIns="0" rIns="0" tIns="0" bIns="0">
+            <a:spAutoFit/>
+          </a:bodyPr>
+          <a:lstStyle/>
+          <a:p>
+            <a:r>
+              <a:rPr sz="1500" b="1" i="0">
+                <a:solidFill>
+                  <a:srgbClr val="2A2929"/>
+                </a:solidFill>
+                <a:latin typeface="Roboto"/>
+              </a:rPr>
+              <a:t>⏱  ~20 min, then we discuss</a:t>
+            </a:r>
+          </a:p>
+        </p:txBody>
+      </p:sp>
+      <p:sp>
+        <p:nvSpPr>
+          <p:cNvPr id="8" name="Rectangle 7"/>
           <p:cNvSpPr/>
           <p:nvPr/>
         </p:nvSpPr>
         <p:spPr>
           <a:xfrm>
-            <a:off x="640080" y="1965960"/>
-            <a:ext cx="109728" cy="841248"/>
+            <a:off x="0" y="6565392"/>
+            <a:ext cx="12191695" cy="38100"/>
           </a:xfrm>
           <a:prstGeom prst="rect">
             <a:avLst/>
@@ -14451,348 +15665,7 @@
       </p:sp>
       <p:sp>
         <p:nvSpPr>
-          <p:cNvPr id="6" name="TextBox 5"/>
-          <p:cNvSpPr txBox="1"/>
-          <p:nvPr/>
-        </p:nvSpPr>
-        <p:spPr>
-          <a:xfrm>
-            <a:off x="960120" y="1965960"/>
-            <a:ext cx="10424160" cy="841248"/>
-          </a:xfrm>
-          <a:prstGeom prst="rect">
-            <a:avLst/>
-          </a:prstGeom>
-          <a:noFill/>
-        </p:spPr>
-        <p:txBody>
-          <a:bodyPr wrap="square" anchor="ctr" lIns="0" rIns="0" tIns="0" bIns="0">
-            <a:spAutoFit/>
-          </a:bodyPr>
-          <a:lstStyle/>
-          <a:p>
-            <a:pPr>
-              <a:lnSpc>
-                <a:spcPct val="100000"/>
-              </a:lnSpc>
-            </a:pPr>
-            <a:r>
-              <a:rPr sz="1700" b="0" i="0">
-                <a:solidFill>
-                  <a:srgbClr val="2A2929"/>
-                </a:solidFill>
-                <a:latin typeface="Roboto"/>
-              </a:rPr>
-              <a:t>Prioritise the changes, then recommend — impact vs effort/urgency.</a:t>
-            </a:r>
-          </a:p>
-        </p:txBody>
-      </p:sp>
-      <p:sp>
-        <p:nvSpPr>
-          <p:cNvPr id="7" name="Rectangle 6"/>
-          <p:cNvSpPr/>
-          <p:nvPr/>
-        </p:nvSpPr>
-        <p:spPr>
-          <a:xfrm>
-            <a:off x="640080" y="2916936"/>
-            <a:ext cx="10927080" cy="841248"/>
-          </a:xfrm>
-          <a:prstGeom prst="rect">
-            <a:avLst/>
-          </a:prstGeom>
-          <a:solidFill>
-            <a:srgbClr val="FFFFFF"/>
-          </a:solidFill>
-          <a:ln w="12700">
-            <a:solidFill>
-              <a:srgbClr val="CCCCCC"/>
-            </a:solidFill>
-          </a:ln>
-          <a:effectLst/>
-        </p:spPr>
-        <p:style>
-          <a:lnRef idx="1">
-            <a:schemeClr val="accent1"/>
-          </a:lnRef>
-          <a:fillRef idx="3">
-            <a:schemeClr val="accent1"/>
-          </a:fillRef>
-          <a:effectRef idx="2">
-            <a:schemeClr val="accent1"/>
-          </a:effectRef>
-          <a:fontRef idx="minor">
-            <a:schemeClr val="lt1"/>
-          </a:fontRef>
-        </p:style>
-        <p:txBody>
-          <a:bodyPr rtlCol="0" anchor="ctr"/>
-          <a:lstStyle/>
-          <a:p>
-            <a:pPr algn="ctr"/>
-          </a:p>
-        </p:txBody>
-      </p:sp>
-      <p:sp>
-        <p:nvSpPr>
-          <p:cNvPr id="8" name="Rectangle 7"/>
-          <p:cNvSpPr/>
-          <p:nvPr/>
-        </p:nvSpPr>
-        <p:spPr>
-          <a:xfrm>
-            <a:off x="640080" y="2916936"/>
-            <a:ext cx="109728" cy="841248"/>
-          </a:xfrm>
-          <a:prstGeom prst="rect">
-            <a:avLst/>
-          </a:prstGeom>
-          <a:solidFill>
-            <a:srgbClr val="92268F"/>
-          </a:solidFill>
-          <a:ln>
-            <a:noFill/>
-          </a:ln>
-          <a:effectLst/>
-        </p:spPr>
-        <p:style>
-          <a:lnRef idx="1">
-            <a:schemeClr val="accent1"/>
-          </a:lnRef>
-          <a:fillRef idx="3">
-            <a:schemeClr val="accent1"/>
-          </a:fillRef>
-          <a:effectRef idx="2">
-            <a:schemeClr val="accent1"/>
-          </a:effectRef>
-          <a:fontRef idx="minor">
-            <a:schemeClr val="lt1"/>
-          </a:fontRef>
-        </p:style>
-        <p:txBody>
-          <a:bodyPr rtlCol="0" anchor="ctr"/>
-          <a:lstStyle/>
-          <a:p>
-            <a:pPr algn="ctr"/>
-          </a:p>
-        </p:txBody>
-      </p:sp>
-      <p:sp>
-        <p:nvSpPr>
           <p:cNvPr id="9" name="TextBox 8"/>
-          <p:cNvSpPr txBox="1"/>
-          <p:nvPr/>
-        </p:nvSpPr>
-        <p:spPr>
-          <a:xfrm>
-            <a:off x="960120" y="2916936"/>
-            <a:ext cx="10424160" cy="841248"/>
-          </a:xfrm>
-          <a:prstGeom prst="rect">
-            <a:avLst/>
-          </a:prstGeom>
-          <a:noFill/>
-        </p:spPr>
-        <p:txBody>
-          <a:bodyPr wrap="square" anchor="ctr" lIns="0" rIns="0" tIns="0" bIns="0">
-            <a:spAutoFit/>
-          </a:bodyPr>
-          <a:lstStyle/>
-          <a:p>
-            <a:pPr>
-              <a:lnSpc>
-                <a:spcPct val="100000"/>
-              </a:lnSpc>
-            </a:pPr>
-            <a:r>
-              <a:rPr sz="1700" b="0" i="0">
-                <a:solidFill>
-                  <a:srgbClr val="2A2929"/>
-                </a:solidFill>
-                <a:latin typeface="Roboto"/>
-              </a:rPr>
-              <a:t>One clear option; justify it straight from the evidence; name the trade-off.</a:t>
-            </a:r>
-          </a:p>
-        </p:txBody>
-      </p:sp>
-      <p:sp>
-        <p:nvSpPr>
-          <p:cNvPr id="10" name="Rectangle 9"/>
-          <p:cNvSpPr/>
-          <p:nvPr/>
-        </p:nvSpPr>
-        <p:spPr>
-          <a:xfrm>
-            <a:off x="640080" y="3867912"/>
-            <a:ext cx="10927080" cy="841248"/>
-          </a:xfrm>
-          <a:prstGeom prst="rect">
-            <a:avLst/>
-          </a:prstGeom>
-          <a:solidFill>
-            <a:srgbClr val="FFFFFF"/>
-          </a:solidFill>
-          <a:ln w="12700">
-            <a:solidFill>
-              <a:srgbClr val="CCCCCC"/>
-            </a:solidFill>
-          </a:ln>
-          <a:effectLst/>
-        </p:spPr>
-        <p:style>
-          <a:lnRef idx="1">
-            <a:schemeClr val="accent1"/>
-          </a:lnRef>
-          <a:fillRef idx="3">
-            <a:schemeClr val="accent1"/>
-          </a:fillRef>
-          <a:effectRef idx="2">
-            <a:schemeClr val="accent1"/>
-          </a:effectRef>
-          <a:fontRef idx="minor">
-            <a:schemeClr val="lt1"/>
-          </a:fontRef>
-        </p:style>
-        <p:txBody>
-          <a:bodyPr rtlCol="0" anchor="ctr"/>
-          <a:lstStyle/>
-          <a:p>
-            <a:pPr algn="ctr"/>
-          </a:p>
-        </p:txBody>
-      </p:sp>
-      <p:sp>
-        <p:nvSpPr>
-          <p:cNvPr id="11" name="Rectangle 10"/>
-          <p:cNvSpPr/>
-          <p:nvPr/>
-        </p:nvSpPr>
-        <p:spPr>
-          <a:xfrm>
-            <a:off x="640080" y="3867912"/>
-            <a:ext cx="109728" cy="841248"/>
-          </a:xfrm>
-          <a:prstGeom prst="rect">
-            <a:avLst/>
-          </a:prstGeom>
-          <a:solidFill>
-            <a:srgbClr val="92268F"/>
-          </a:solidFill>
-          <a:ln>
-            <a:noFill/>
-          </a:ln>
-          <a:effectLst/>
-        </p:spPr>
-        <p:style>
-          <a:lnRef idx="1">
-            <a:schemeClr val="accent1"/>
-          </a:lnRef>
-          <a:fillRef idx="3">
-            <a:schemeClr val="accent1"/>
-          </a:fillRef>
-          <a:effectRef idx="2">
-            <a:schemeClr val="accent1"/>
-          </a:effectRef>
-          <a:fontRef idx="minor">
-            <a:schemeClr val="lt1"/>
-          </a:fontRef>
-        </p:style>
-        <p:txBody>
-          <a:bodyPr rtlCol="0" anchor="ctr"/>
-          <a:lstStyle/>
-          <a:p>
-            <a:pPr algn="ctr"/>
-          </a:p>
-        </p:txBody>
-      </p:sp>
-      <p:sp>
-        <p:nvSpPr>
-          <p:cNvPr id="12" name="TextBox 11"/>
-          <p:cNvSpPr txBox="1"/>
-          <p:nvPr/>
-        </p:nvSpPr>
-        <p:spPr>
-          <a:xfrm>
-            <a:off x="960120" y="3867912"/>
-            <a:ext cx="10424160" cy="841248"/>
-          </a:xfrm>
-          <a:prstGeom prst="rect">
-            <a:avLst/>
-          </a:prstGeom>
-          <a:noFill/>
-        </p:spPr>
-        <p:txBody>
-          <a:bodyPr wrap="square" anchor="ctr" lIns="0" rIns="0" tIns="0" bIns="0">
-            <a:spAutoFit/>
-          </a:bodyPr>
-          <a:lstStyle/>
-          <a:p>
-            <a:pPr>
-              <a:lnSpc>
-                <a:spcPct val="100000"/>
-              </a:lnSpc>
-            </a:pPr>
-            <a:r>
-              <a:rPr sz="1700" b="0" i="0">
-                <a:solidFill>
-                  <a:srgbClr val="2A2929"/>
-                </a:solidFill>
-                <a:latin typeface="Roboto"/>
-              </a:rPr>
-              <a:t>The recommendation is the hinge between the evidence and the plan.</a:t>
-            </a:r>
-          </a:p>
-        </p:txBody>
-      </p:sp>
-      <p:sp>
-        <p:nvSpPr>
-          <p:cNvPr id="13" name="Rectangle 12"/>
-          <p:cNvSpPr/>
-          <p:nvPr/>
-        </p:nvSpPr>
-        <p:spPr>
-          <a:xfrm>
-            <a:off x="0" y="6565392"/>
-            <a:ext cx="12191695" cy="38100"/>
-          </a:xfrm>
-          <a:prstGeom prst="rect">
-            <a:avLst/>
-          </a:prstGeom>
-          <a:solidFill>
-            <a:srgbClr val="92268F"/>
-          </a:solidFill>
-          <a:ln>
-            <a:noFill/>
-          </a:ln>
-          <a:effectLst/>
-        </p:spPr>
-        <p:style>
-          <a:lnRef idx="1">
-            <a:schemeClr val="accent1"/>
-          </a:lnRef>
-          <a:fillRef idx="3">
-            <a:schemeClr val="accent1"/>
-          </a:fillRef>
-          <a:effectRef idx="2">
-            <a:schemeClr val="accent1"/>
-          </a:effectRef>
-          <a:fontRef idx="minor">
-            <a:schemeClr val="lt1"/>
-          </a:fontRef>
-        </p:style>
-        <p:txBody>
-          <a:bodyPr rtlCol="0" anchor="ctr"/>
-          <a:lstStyle/>
-          <a:p>
-            <a:pPr algn="ctr"/>
-          </a:p>
-        </p:txBody>
-      </p:sp>
-      <p:sp>
-        <p:nvSpPr>
-          <p:cNvPr id="14" name="TextBox 13"/>
           <p:cNvSpPr txBox="1"/>
           <p:nvPr/>
         </p:nvSpPr>
@@ -14835,7 +15708,7 @@
       </p:sp>
       <p:sp>
         <p:nvSpPr>
-          <p:cNvPr id="15" name="TextBox 14"/>
+          <p:cNvPr id="10" name="TextBox 9"/>
           <p:cNvSpPr txBox="1"/>
           <p:nvPr/>
         </p:nvSpPr>
